--- a/deck/custody-deck.pptx
+++ b/deck/custody-deck.pptx
@@ -690,7 +690,7 @@
           <a:p>
             <a:r>
               <a:rPr lang="en-US" dirty="0"/>
-              <a:t>Fill this in with the real result. Do not invent it.</a:t>
+              <a:t>Complete this with the real result before presenting. An accurate account of what a reader did not understand is the only version worth reporting.</a:t>
             </a:r>
             <a:endParaRPr lang="en-US" dirty="0"/>
           </a:p>
@@ -954,7 +954,7 @@
           <a:p>
             <a:r>
               <a:rPr lang="en-US" dirty="0"/>
-              <a:t>Tell it as a story. Evidence goes onto a flash drive, gets emailed, sits on a shared machine, and arrives at a hearing a year later.</a:t>
+              <a:t>Tell it as a story. Evidence goes onto a flash drive, gets emailed between officers, sits on a shared machine, and arrives at a hearing a year later. Maybe nobody touched it. Nobody can prove that either.</a:t>
             </a:r>
             <a:endParaRPr lang="en-US" dirty="0"/>
           </a:p>
@@ -1130,7 +1130,7 @@
           <a:p>
             <a:r>
               <a:rPr lang="en-US" dirty="0"/>
-              <a:t>No hashes on this slide. Words only.</a:t>
+              <a:t>No hashes on this slide. Words only. The code is taken at the scene, on the collecting officer's own phone, before the file goes anywhere else.</a:t>
             </a:r>
             <a:endParaRPr lang="en-US" dirty="0"/>
           </a:p>
@@ -1394,7 +1394,7 @@
           <a:p>
             <a:r>
               <a:rPr lang="en-US" dirty="0"/>
-              <a:t>The requirement to work through power and network cuts is answered by the architecture, not by a policy.</a:t>
+              <a:t>The requirement to work through power and network cuts is answered by the architecture rather than by a policy.</a:t>
             </a:r>
             <a:endParaRPr lang="en-US" dirty="0"/>
           </a:p>
@@ -1482,7 +1482,7 @@
           <a:p>
             <a:r>
               <a:rPr lang="en-US" dirty="0"/>
-              <a:t>Do not overclaim. The honesty is worth more than the number.</a:t>
+              <a:t>Tested at 30MB and extrapolated. Memory use stays flat as the file grows. Do not overclaim; the honesty is the point.</a:t>
             </a:r>
             <a:endParaRPr lang="en-US" dirty="0"/>
           </a:p>
@@ -1925,7 +1925,7 @@
     <p:bg>
       <p:bgPr>
         <a:solidFill>
-          <a:srgbClr val="FBFBF8"/>
+          <a:srgbClr val="FCFCF9"/>
         </a:solidFill>
       </p:bgPr>
     </p:bg>
@@ -1945,32 +1945,32 @@
       </p:grpSpPr>
       <p:sp>
         <p:nvSpPr>
-          <p:cNvPr id="2" name="Text 0"/>
-          <p:cNvSpPr txBox="1"/>
-          <p:nvPr/>
-        </p:nvSpPr>
-        <p:spPr>
-          <a:xfrm>
-            <a:off x="8138160" y="4576572"/>
-            <a:ext cx="365760" cy="256032"/>
-          </a:xfrm>
-          <a:prstGeom prst="rect">
-            <a:avLst/>
-          </a:prstGeom>
-          <a:noFill/>
-          <a:ln/>
-        </p:spPr>
-        <p:txBody>
-          <a:bodyPr wrap="square" lIns="0" tIns="0" rIns="0" bIns="0" rtlCol="0" anchor="ctr"/>
+          <p:cNvPr id="3" name="Text 0"/>
+          <p:cNvSpPr txBox="1"/>
+          <p:nvPr/>
+        </p:nvSpPr>
+        <p:spPr>
+          <a:xfrm>
+            <a:off x="7962900" y="4648200"/>
+            <a:ext cx="381000" cy="171450"/>
+          </a:xfrm>
+          <a:prstGeom prst="rect">
+            <a:avLst/>
+          </a:prstGeom>
+          <a:noFill/>
+          <a:ln/>
+        </p:spPr>
+        <p:txBody>
+          <a:bodyPr wrap="square" lIns="0" tIns="0" rIns="0" bIns="0" rtlCol="0" anchor="t"/>
           <a:lstStyle/>
           <a:p>
             <a:pPr algn="r" indent="0" marL="0">
               <a:buNone/>
             </a:pPr>
             <a:r>
-              <a:rPr lang="en-US" sz="1000" dirty="0">
-                <a:solidFill>
-                  <a:srgbClr val="C9C9BF"/>
+              <a:rPr lang="en-US" sz="1050" dirty="0">
+                <a:solidFill>
+                  <a:srgbClr val="9A9A90"/>
                 </a:solidFill>
                 <a:latin typeface="Times New Roman" pitchFamily="34" charset="0"/>
                 <a:ea typeface="Times New Roman" pitchFamily="34" charset="-122"/>
@@ -1978,7 +1978,7 @@
               </a:rPr>
               <a:t>1</a:t>
             </a:r>
-            <a:endParaRPr lang="en-US" sz="1000" dirty="0"/>
+            <a:endParaRPr lang="en-US" sz="1050" dirty="0"/>
           </a:p>
         </p:txBody>
       </p:sp>
@@ -1990,26 +1990,26 @@
         </p:nvSpPr>
         <p:spPr>
           <a:xfrm>
-            <a:off x="640080" y="1417320"/>
-            <a:ext cx="7863840" cy="914400"/>
-          </a:xfrm>
-          <a:prstGeom prst="rect">
-            <a:avLst/>
-          </a:prstGeom>
-          <a:noFill/>
-          <a:ln/>
-        </p:spPr>
-        <p:txBody>
-          <a:bodyPr wrap="square" lIns="0" tIns="0" rIns="0" bIns="0" rtlCol="0" anchor="ctr"/>
-          <a:lstStyle/>
-          <a:p>
-            <a:pPr indent="0" marL="0">
-              <a:buNone/>
-            </a:pPr>
-            <a:r>
-              <a:rPr lang="en-US" sz="5400" b="1" dirty="0">
-                <a:solidFill>
-                  <a:srgbClr val="16160F"/>
+            <a:off x="800100" y="1600200"/>
+            <a:ext cx="7543800" cy="694373"/>
+          </a:xfrm>
+          <a:prstGeom prst="rect">
+            <a:avLst/>
+          </a:prstGeom>
+          <a:noFill/>
+          <a:ln/>
+        </p:spPr>
+        <p:txBody>
+          <a:bodyPr wrap="square" lIns="0" tIns="0" rIns="0" bIns="0" rtlCol="0" anchor="t"/>
+          <a:lstStyle/>
+          <a:p>
+            <a:pPr algn="l" indent="0" marL="0">
+              <a:buNone/>
+            </a:pPr>
+            <a:r>
+              <a:rPr lang="en-US" sz="6200" b="1" dirty="0">
+                <a:solidFill>
+                  <a:srgbClr val="14140E"/>
                 </a:solidFill>
                 <a:latin typeface="Times New Roman" pitchFamily="34" charset="0"/>
                 <a:ea typeface="Times New Roman" pitchFamily="34" charset="-122"/>
@@ -2017,7 +2017,7 @@
               </a:rPr>
               <a:t>Custody</a:t>
             </a:r>
-            <a:endParaRPr lang="en-US" sz="5400" dirty="0"/>
+            <a:endParaRPr lang="en-US" sz="6200" dirty="0"/>
           </a:p>
         </p:txBody>
       </p:sp>
@@ -2029,26 +2029,26 @@
         </p:nvSpPr>
         <p:spPr>
           <a:xfrm>
-            <a:off x="640080" y="2377440"/>
-            <a:ext cx="7863840" cy="457200"/>
-          </a:xfrm>
-          <a:prstGeom prst="rect">
-            <a:avLst/>
-          </a:prstGeom>
-          <a:noFill/>
-          <a:ln/>
-        </p:spPr>
-        <p:txBody>
-          <a:bodyPr wrap="square" lIns="0" tIns="0" rIns="0" bIns="0" rtlCol="0" anchor="ctr"/>
-          <a:lstStyle/>
-          <a:p>
-            <a:pPr indent="0" marL="0">
-              <a:buNone/>
-            </a:pPr>
-            <a:r>
-              <a:rPr lang="en-US" sz="2000" dirty="0">
-                <a:solidFill>
-                  <a:srgbClr val="16160F"/>
+            <a:off x="800100" y="2438400"/>
+            <a:ext cx="7543800" cy="372904"/>
+          </a:xfrm>
+          <a:prstGeom prst="rect">
+            <a:avLst/>
+          </a:prstGeom>
+          <a:noFill/>
+          <a:ln/>
+        </p:spPr>
+        <p:txBody>
+          <a:bodyPr wrap="square" lIns="0" tIns="0" rIns="0" bIns="0" rtlCol="0" anchor="t"/>
+          <a:lstStyle/>
+          <a:p>
+            <a:pPr algn="l" indent="0" marL="0">
+              <a:buNone/>
+            </a:pPr>
+            <a:r>
+              <a:rPr lang="en-US" sz="2300" dirty="0">
+                <a:solidFill>
+                  <a:srgbClr val="14140E"/>
                 </a:solidFill>
                 <a:latin typeface="Times New Roman" pitchFamily="34" charset="0"/>
                 <a:ea typeface="Times New Roman" pitchFamily="34" charset="-122"/>
@@ -2056,38 +2056,61 @@
               </a:rPr>
               <a:t>Proving digital evidence has not been changed</a:t>
             </a:r>
-            <a:endParaRPr lang="en-US" sz="2000" dirty="0"/>
-          </a:p>
-        </p:txBody>
-      </p:sp>
-      <p:sp>
-        <p:nvSpPr>
-          <p:cNvPr id="6" name="Text 3"/>
-          <p:cNvSpPr txBox="1"/>
-          <p:nvPr/>
-        </p:nvSpPr>
-        <p:spPr>
-          <a:xfrm>
-            <a:off x="640080" y="3803904"/>
-            <a:ext cx="7863840" cy="274320"/>
-          </a:xfrm>
-          <a:prstGeom prst="rect">
-            <a:avLst/>
-          </a:prstGeom>
-          <a:noFill/>
-          <a:ln/>
-        </p:spPr>
-        <p:txBody>
-          <a:bodyPr wrap="square" lIns="0" tIns="0" rIns="0" bIns="0" rtlCol="0" anchor="ctr"/>
-          <a:lstStyle/>
-          <a:p>
-            <a:pPr indent="0" marL="0">
-              <a:buNone/>
-            </a:pPr>
-            <a:r>
-              <a:rPr lang="en-US" sz="1200" dirty="0">
-                <a:solidFill>
-                  <a:srgbClr val="6B6B60"/>
+            <a:endParaRPr lang="en-US" sz="2300" dirty="0"/>
+          </a:p>
+        </p:txBody>
+      </p:sp>
+      <p:sp>
+        <p:nvSpPr>
+          <p:cNvPr id="6" name="Shape 3"/>
+          <p:cNvSpPr/>
+          <p:nvPr/>
+        </p:nvSpPr>
+        <p:spPr>
+          <a:xfrm>
+            <a:off x="800100" y="3352800"/>
+            <a:ext cx="3238500" cy="0"/>
+          </a:xfrm>
+          <a:prstGeom prst="line">
+            <a:avLst/>
+          </a:prstGeom>
+          <a:noFill/>
+          <a:ln w="12700">
+            <a:solidFill>
+              <a:srgbClr val="D2D2C8"/>
+            </a:solidFill>
+            <a:prstDash val="solid"/>
+          </a:ln>
+        </p:spPr>
+      </p:sp>
+      <p:sp>
+        <p:nvSpPr>
+          <p:cNvPr id="7" name="Text 4"/>
+          <p:cNvSpPr txBox="1"/>
+          <p:nvPr/>
+        </p:nvSpPr>
+        <p:spPr>
+          <a:xfrm>
+            <a:off x="800100" y="3581400"/>
+            <a:ext cx="7543800" cy="231458"/>
+          </a:xfrm>
+          <a:prstGeom prst="rect">
+            <a:avLst/>
+          </a:prstGeom>
+          <a:noFill/>
+          <a:ln/>
+        </p:spPr>
+        <p:txBody>
+          <a:bodyPr wrap="square" lIns="0" tIns="0" rIns="0" bIns="0" rtlCol="0" anchor="t"/>
+          <a:lstStyle/>
+          <a:p>
+            <a:pPr algn="l" indent="0" marL="0">
+              <a:buNone/>
+            </a:pPr>
+            <a:r>
+              <a:rPr lang="en-US" sz="1300" dirty="0">
+                <a:solidFill>
+                  <a:srgbClr val="6E6E63"/>
                 </a:solidFill>
                 <a:latin typeface="Times New Roman" pitchFamily="34" charset="0"/>
                 <a:ea typeface="Times New Roman" pitchFamily="34" charset="-122"/>
@@ -2095,46 +2118,46 @@
               </a:rPr>
               <a:t>ICSC 2026 Universities Hackathon, Track H</a:t>
             </a:r>
-            <a:endParaRPr lang="en-US" sz="1200" dirty="0"/>
-          </a:p>
-        </p:txBody>
-      </p:sp>
-      <p:sp>
-        <p:nvSpPr>
-          <p:cNvPr id="7" name="Text 4"/>
-          <p:cNvSpPr txBox="1"/>
-          <p:nvPr/>
-        </p:nvSpPr>
-        <p:spPr>
-          <a:xfrm>
-            <a:off x="640080" y="4069080"/>
-            <a:ext cx="7863840" cy="274320"/>
-          </a:xfrm>
-          <a:prstGeom prst="rect">
-            <a:avLst/>
-          </a:prstGeom>
-          <a:noFill/>
-          <a:ln/>
-        </p:spPr>
-        <p:txBody>
-          <a:bodyPr wrap="square" lIns="0" tIns="0" rIns="0" bIns="0" rtlCol="0" anchor="ctr"/>
-          <a:lstStyle/>
-          <a:p>
-            <a:pPr indent="0" marL="0">
-              <a:buNone/>
-            </a:pPr>
-            <a:r>
-              <a:rPr lang="en-US" sz="1200" dirty="0">
-                <a:solidFill>
-                  <a:srgbClr val="6B6B60"/>
-                </a:solidFill>
-                <a:latin typeface="Times New Roman" pitchFamily="34" charset="0"/>
-                <a:ea typeface="Times New Roman" pitchFamily="34" charset="-122"/>
-                <a:cs typeface="Times New Roman" pitchFamily="34" charset="-120"/>
-              </a:rPr>
-              <a:t>[Team name], five members, University of Ibadan</a:t>
-            </a:r>
-            <a:endParaRPr lang="en-US" sz="1200" dirty="0"/>
+            <a:endParaRPr lang="en-US" sz="1300" dirty="0"/>
+          </a:p>
+        </p:txBody>
+      </p:sp>
+      <p:sp>
+        <p:nvSpPr>
+          <p:cNvPr id="8" name="Text 5"/>
+          <p:cNvSpPr txBox="1"/>
+          <p:nvPr/>
+        </p:nvSpPr>
+        <p:spPr>
+          <a:xfrm>
+            <a:off x="800100" y="3790950"/>
+            <a:ext cx="7543800" cy="231458"/>
+          </a:xfrm>
+          <a:prstGeom prst="rect">
+            <a:avLst/>
+          </a:prstGeom>
+          <a:noFill/>
+          <a:ln/>
+        </p:spPr>
+        <p:txBody>
+          <a:bodyPr wrap="square" lIns="0" tIns="0" rIns="0" bIns="0" rtlCol="0" anchor="t"/>
+          <a:lstStyle/>
+          <a:p>
+            <a:pPr algn="l" indent="0" marL="0">
+              <a:buNone/>
+            </a:pPr>
+            <a:r>
+              <a:rPr lang="en-US" sz="1300" dirty="0">
+                <a:solidFill>
+                  <a:srgbClr val="6E6E63"/>
+                </a:solidFill>
+                <a:latin typeface="Times New Roman" pitchFamily="34" charset="0"/>
+                <a:ea typeface="Times New Roman" pitchFamily="34" charset="-122"/>
+                <a:cs typeface="Times New Roman" pitchFamily="34" charset="-120"/>
+              </a:rPr>
+              <a:t>Team Captain, five members, University of Ibadan</a:t>
+            </a:r>
+            <a:endParaRPr lang="en-US" sz="1300" dirty="0"/>
           </a:p>
         </p:txBody>
       </p:sp>
@@ -2152,7 +2175,7 @@
     <p:bg>
       <p:bgPr>
         <a:solidFill>
-          <a:srgbClr val="FBFBF8"/>
+          <a:srgbClr val="FCFCF9"/>
         </a:solidFill>
       </p:bgPr>
     </p:bg>
@@ -2172,32 +2195,32 @@
       </p:grpSpPr>
       <p:sp>
         <p:nvSpPr>
-          <p:cNvPr id="2" name="Text 0"/>
-          <p:cNvSpPr txBox="1"/>
-          <p:nvPr/>
-        </p:nvSpPr>
-        <p:spPr>
-          <a:xfrm>
-            <a:off x="640080" y="310896"/>
-            <a:ext cx="7863840" cy="274320"/>
-          </a:xfrm>
-          <a:prstGeom prst="rect">
-            <a:avLst/>
-          </a:prstGeom>
-          <a:noFill/>
-          <a:ln/>
-        </p:spPr>
-        <p:txBody>
-          <a:bodyPr wrap="square" lIns="0" tIns="0" rIns="0" bIns="0" rtlCol="0" anchor="ctr"/>
-          <a:lstStyle/>
-          <a:p>
-            <a:pPr indent="0" marL="0">
-              <a:buNone/>
-            </a:pPr>
-            <a:r>
-              <a:rPr lang="en-US" sz="1200" spc="100" kern="0" dirty="0">
-                <a:solidFill>
-                  <a:srgbClr val="6B6B60"/>
+          <p:cNvPr id="3" name="Text 0"/>
+          <p:cNvSpPr txBox="1"/>
+          <p:nvPr/>
+        </p:nvSpPr>
+        <p:spPr>
+          <a:xfrm>
+            <a:off x="800100" y="571500"/>
+            <a:ext cx="7543800" cy="205740"/>
+          </a:xfrm>
+          <a:prstGeom prst="rect">
+            <a:avLst/>
+          </a:prstGeom>
+          <a:noFill/>
+          <a:ln/>
+        </p:spPr>
+        <p:txBody>
+          <a:bodyPr wrap="square" lIns="0" tIns="0" rIns="0" bIns="0" rtlCol="0" anchor="t"/>
+          <a:lstStyle/>
+          <a:p>
+            <a:pPr algn="l" indent="0" marL="0">
+              <a:buNone/>
+            </a:pPr>
+            <a:r>
+              <a:rPr lang="en-US" sz="1150" spc="110" kern="0" dirty="0">
+                <a:solidFill>
+                  <a:srgbClr val="6E6E63"/>
                 </a:solidFill>
                 <a:latin typeface="Times New Roman" pitchFamily="34" charset="0"/>
                 <a:ea typeface="Times New Roman" pitchFamily="34" charset="-122"/>
@@ -2205,333 +2228,514 @@
               </a:rPr>
               <a:t>The deliverable</a:t>
             </a:r>
+            <a:endParaRPr lang="en-US" sz="1150" dirty="0"/>
+          </a:p>
+        </p:txBody>
+      </p:sp>
+      <p:sp>
+        <p:nvSpPr>
+          <p:cNvPr id="4" name="Text 1"/>
+          <p:cNvSpPr txBox="1"/>
+          <p:nvPr/>
+        </p:nvSpPr>
+        <p:spPr>
+          <a:xfrm>
+            <a:off x="7962900" y="4648200"/>
+            <a:ext cx="381000" cy="171450"/>
+          </a:xfrm>
+          <a:prstGeom prst="rect">
+            <a:avLst/>
+          </a:prstGeom>
+          <a:noFill/>
+          <a:ln/>
+        </p:spPr>
+        <p:txBody>
+          <a:bodyPr wrap="square" lIns="0" tIns="0" rIns="0" bIns="0" rtlCol="0" anchor="t"/>
+          <a:lstStyle/>
+          <a:p>
+            <a:pPr algn="r" indent="0" marL="0">
+              <a:buNone/>
+            </a:pPr>
+            <a:r>
+              <a:rPr lang="en-US" sz="1050" dirty="0">
+                <a:solidFill>
+                  <a:srgbClr val="9A9A90"/>
+                </a:solidFill>
+                <a:latin typeface="Times New Roman" pitchFamily="34" charset="0"/>
+                <a:ea typeface="Times New Roman" pitchFamily="34" charset="-122"/>
+                <a:cs typeface="Times New Roman" pitchFamily="34" charset="-120"/>
+              </a:rPr>
+              <a:t>10</a:t>
+            </a:r>
+            <a:endParaRPr lang="en-US" sz="1050" dirty="0"/>
+          </a:p>
+        </p:txBody>
+      </p:sp>
+      <p:sp>
+        <p:nvSpPr>
+          <p:cNvPr id="5" name="Text 2"/>
+          <p:cNvSpPr txBox="1"/>
+          <p:nvPr/>
+        </p:nvSpPr>
+        <p:spPr>
+          <a:xfrm>
+            <a:off x="800100" y="1414463"/>
+            <a:ext cx="7543800" cy="578644"/>
+          </a:xfrm>
+          <a:prstGeom prst="rect">
+            <a:avLst/>
+          </a:prstGeom>
+          <a:noFill/>
+          <a:ln/>
+        </p:spPr>
+        <p:txBody>
+          <a:bodyPr wrap="square" lIns="0" tIns="0" rIns="0" bIns="0" rtlCol="0" anchor="t"/>
+          <a:lstStyle/>
+          <a:p>
+            <a:pPr algn="l" indent="0" marL="0">
+              <a:buNone/>
+            </a:pPr>
+            <a:r>
+              <a:rPr lang="en-US" sz="3600" b="1" dirty="0">
+                <a:solidFill>
+                  <a:srgbClr val="14140E"/>
+                </a:solidFill>
+                <a:latin typeface="Times New Roman" pitchFamily="34" charset="0"/>
+                <a:ea typeface="Times New Roman" pitchFamily="34" charset="-122"/>
+                <a:cs typeface="Times New Roman" pitchFamily="34" charset="-120"/>
+              </a:rPr>
+              <a:t>One page. No jargon. No hashes.</a:t>
+            </a:r>
+            <a:endParaRPr lang="en-US" sz="3600" dirty="0"/>
+          </a:p>
+        </p:txBody>
+      </p:sp>
+      <p:sp>
+        <p:nvSpPr>
+          <p:cNvPr id="6" name="Text 3"/>
+          <p:cNvSpPr txBox="1"/>
+          <p:nvPr/>
+        </p:nvSpPr>
+        <p:spPr>
+          <a:xfrm>
+            <a:off x="800100" y="2128838"/>
+            <a:ext cx="2286000" cy="372904"/>
+          </a:xfrm>
+          <a:prstGeom prst="rect">
+            <a:avLst/>
+          </a:prstGeom>
+          <a:noFill/>
+          <a:ln/>
+        </p:spPr>
+        <p:txBody>
+          <a:bodyPr wrap="square" lIns="0" tIns="0" rIns="0" bIns="0" rtlCol="0" anchor="t"/>
+          <a:lstStyle/>
+          <a:p>
+            <a:pPr algn="l" indent="0" marL="0">
+              <a:buNone/>
+            </a:pPr>
+            <a:r>
+              <a:rPr lang="en-US" sz="1700" b="1" dirty="0">
+                <a:solidFill>
+                  <a:srgbClr val="14140E"/>
+                </a:solidFill>
+                <a:latin typeface="Times New Roman" pitchFamily="34" charset="0"/>
+                <a:ea typeface="Times New Roman" pitchFamily="34" charset="-122"/>
+                <a:cs typeface="Times New Roman" pitchFamily="34" charset="-120"/>
+              </a:rPr>
+              <a:t>Is it unchanged?</a:t>
+            </a:r>
+            <a:endParaRPr lang="en-US" sz="1700" dirty="0"/>
+          </a:p>
+        </p:txBody>
+      </p:sp>
+      <p:sp>
+        <p:nvSpPr>
+          <p:cNvPr id="7" name="Text 4"/>
+          <p:cNvSpPr txBox="1"/>
+          <p:nvPr/>
+        </p:nvSpPr>
+        <p:spPr>
+          <a:xfrm>
+            <a:off x="3181350" y="2128838"/>
+            <a:ext cx="5162550" cy="372904"/>
+          </a:xfrm>
+          <a:prstGeom prst="rect">
+            <a:avLst/>
+          </a:prstGeom>
+          <a:noFill/>
+          <a:ln/>
+        </p:spPr>
+        <p:txBody>
+          <a:bodyPr wrap="square" lIns="0" tIns="0" rIns="0" bIns="0" rtlCol="0" anchor="t"/>
+          <a:lstStyle/>
+          <a:p>
+            <a:pPr algn="l" indent="0" marL="0">
+              <a:buNone/>
+            </a:pPr>
+            <a:r>
+              <a:rPr lang="en-US" sz="1600" dirty="0">
+                <a:solidFill>
+                  <a:srgbClr val="14140E"/>
+                </a:solidFill>
+                <a:latin typeface="Times New Roman" pitchFamily="34" charset="0"/>
+                <a:ea typeface="Times New Roman" pitchFamily="34" charset="-122"/>
+                <a:cs typeface="Times New Roman" pitchFamily="34" charset="-120"/>
+              </a:rPr>
+              <a:t>Yes.</a:t>
+            </a:r>
+            <a:endParaRPr lang="en-US" sz="1600" dirty="0"/>
+          </a:p>
+        </p:txBody>
+      </p:sp>
+      <p:sp>
+        <p:nvSpPr>
+          <p:cNvPr id="8" name="Text 5"/>
+          <p:cNvSpPr txBox="1"/>
+          <p:nvPr/>
+        </p:nvSpPr>
+        <p:spPr>
+          <a:xfrm>
+            <a:off x="800100" y="2433638"/>
+            <a:ext cx="2286000" cy="372904"/>
+          </a:xfrm>
+          <a:prstGeom prst="rect">
+            <a:avLst/>
+          </a:prstGeom>
+          <a:noFill/>
+          <a:ln/>
+        </p:spPr>
+        <p:txBody>
+          <a:bodyPr wrap="square" lIns="0" tIns="0" rIns="0" bIns="0" rtlCol="0" anchor="t"/>
+          <a:lstStyle/>
+          <a:p>
+            <a:pPr algn="l" indent="0" marL="0">
+              <a:buNone/>
+            </a:pPr>
+            <a:r>
+              <a:rPr lang="en-US" sz="1700" b="1" dirty="0">
+                <a:solidFill>
+                  <a:srgbClr val="14140E"/>
+                </a:solidFill>
+                <a:latin typeface="Times New Roman" pitchFamily="34" charset="0"/>
+                <a:ea typeface="Times New Roman" pitchFamily="34" charset="-122"/>
+                <a:cs typeface="Times New Roman" pitchFamily="34" charset="-120"/>
+              </a:rPr>
+              <a:t>How do we know?</a:t>
+            </a:r>
+            <a:endParaRPr lang="en-US" sz="1700" dirty="0"/>
+          </a:p>
+        </p:txBody>
+      </p:sp>
+      <p:sp>
+        <p:nvSpPr>
+          <p:cNvPr id="9" name="Text 6"/>
+          <p:cNvSpPr txBox="1"/>
+          <p:nvPr/>
+        </p:nvSpPr>
+        <p:spPr>
+          <a:xfrm>
+            <a:off x="3181350" y="2433638"/>
+            <a:ext cx="5162550" cy="372904"/>
+          </a:xfrm>
+          <a:prstGeom prst="rect">
+            <a:avLst/>
+          </a:prstGeom>
+          <a:noFill/>
+          <a:ln/>
+        </p:spPr>
+        <p:txBody>
+          <a:bodyPr wrap="square" lIns="0" tIns="0" rIns="0" bIns="0" rtlCol="0" anchor="t"/>
+          <a:lstStyle/>
+          <a:p>
+            <a:pPr algn="l" indent="0" marL="0">
+              <a:buNone/>
+            </a:pPr>
+            <a:r>
+              <a:rPr lang="en-US" sz="1600" dirty="0">
+                <a:solidFill>
+                  <a:srgbClr val="14140E"/>
+                </a:solidFill>
+                <a:latin typeface="Times New Roman" pitchFamily="34" charset="0"/>
+                <a:ea typeface="Times New Roman" pitchFamily="34" charset="-122"/>
+                <a:cs typeface="Times New Roman" pitchFamily="34" charset="-120"/>
+              </a:rPr>
+              <a:t>A fingerprint was taken at collection, and checked again.</a:t>
+            </a:r>
+            <a:endParaRPr lang="en-US" sz="1600" dirty="0"/>
+          </a:p>
+        </p:txBody>
+      </p:sp>
+      <p:sp>
+        <p:nvSpPr>
+          <p:cNvPr id="10" name="Text 7"/>
+          <p:cNvSpPr txBox="1"/>
+          <p:nvPr/>
+        </p:nvSpPr>
+        <p:spPr>
+          <a:xfrm>
+            <a:off x="800100" y="2738438"/>
+            <a:ext cx="2286000" cy="372904"/>
+          </a:xfrm>
+          <a:prstGeom prst="rect">
+            <a:avLst/>
+          </a:prstGeom>
+          <a:noFill/>
+          <a:ln/>
+        </p:spPr>
+        <p:txBody>
+          <a:bodyPr wrap="square" lIns="0" tIns="0" rIns="0" bIns="0" rtlCol="0" anchor="t"/>
+          <a:lstStyle/>
+          <a:p>
+            <a:pPr algn="l" indent="0" marL="0">
+              <a:buNone/>
+            </a:pPr>
+            <a:r>
+              <a:rPr lang="en-US" sz="1700" b="1" dirty="0">
+                <a:solidFill>
+                  <a:srgbClr val="14140E"/>
+                </a:solidFill>
+                <a:latin typeface="Times New Roman" pitchFamily="34" charset="0"/>
+                <a:ea typeface="Times New Roman" pitchFamily="34" charset="-122"/>
+                <a:cs typeface="Times New Roman" pitchFamily="34" charset="-120"/>
+              </a:rPr>
+              <a:t>Who has handled it?</a:t>
+            </a:r>
+            <a:endParaRPr lang="en-US" sz="1700" dirty="0"/>
+          </a:p>
+        </p:txBody>
+      </p:sp>
+      <p:sp>
+        <p:nvSpPr>
+          <p:cNvPr id="11" name="Text 8"/>
+          <p:cNvSpPr txBox="1"/>
+          <p:nvPr/>
+        </p:nvSpPr>
+        <p:spPr>
+          <a:xfrm>
+            <a:off x="3181350" y="2738438"/>
+            <a:ext cx="5162550" cy="372904"/>
+          </a:xfrm>
+          <a:prstGeom prst="rect">
+            <a:avLst/>
+          </a:prstGeom>
+          <a:noFill/>
+          <a:ln/>
+        </p:spPr>
+        <p:txBody>
+          <a:bodyPr wrap="square" lIns="0" tIns="0" rIns="0" bIns="0" rtlCol="0" anchor="t"/>
+          <a:lstStyle/>
+          <a:p>
+            <a:pPr algn="l" indent="0" marL="0">
+              <a:buNone/>
+            </a:pPr>
+            <a:r>
+              <a:rPr lang="en-US" sz="1600" dirty="0">
+                <a:solidFill>
+                  <a:srgbClr val="14140E"/>
+                </a:solidFill>
+                <a:latin typeface="Times New Roman" pitchFamily="34" charset="0"/>
+                <a:ea typeface="Times New Roman" pitchFamily="34" charset="-122"/>
+                <a:cs typeface="Times New Roman" pitchFamily="34" charset="-120"/>
+              </a:rPr>
+              <a:t>Four people, named, with dates.</a:t>
+            </a:r>
+            <a:endParaRPr lang="en-US" sz="1600" dirty="0"/>
+          </a:p>
+        </p:txBody>
+      </p:sp>
+      <p:sp>
+        <p:nvSpPr>
+          <p:cNvPr id="12" name="Text 9"/>
+          <p:cNvSpPr txBox="1"/>
+          <p:nvPr/>
+        </p:nvSpPr>
+        <p:spPr>
+          <a:xfrm>
+            <a:off x="800100" y="3043238"/>
+            <a:ext cx="2286000" cy="372904"/>
+          </a:xfrm>
+          <a:prstGeom prst="rect">
+            <a:avLst/>
+          </a:prstGeom>
+          <a:noFill/>
+          <a:ln/>
+        </p:spPr>
+        <p:txBody>
+          <a:bodyPr wrap="square" lIns="0" tIns="0" rIns="0" bIns="0" rtlCol="0" anchor="t"/>
+          <a:lstStyle/>
+          <a:p>
+            <a:pPr algn="l" indent="0" marL="0">
+              <a:buNone/>
+            </a:pPr>
+            <a:r>
+              <a:rPr lang="en-US" sz="1700" b="1" dirty="0">
+                <a:solidFill>
+                  <a:srgbClr val="14140E"/>
+                </a:solidFill>
+                <a:latin typeface="Times New Roman" pitchFamily="34" charset="0"/>
+                <a:ea typeface="Times New Roman" pitchFamily="34" charset="-122"/>
+                <a:cs typeface="Times New Roman" pitchFamily="34" charset="-120"/>
+              </a:rPr>
+              <a:t>Could the list be edited?</a:t>
+            </a:r>
+            <a:endParaRPr lang="en-US" sz="1700" dirty="0"/>
+          </a:p>
+        </p:txBody>
+      </p:sp>
+      <p:sp>
+        <p:nvSpPr>
+          <p:cNvPr id="13" name="Text 10"/>
+          <p:cNvSpPr txBox="1"/>
+          <p:nvPr/>
+        </p:nvSpPr>
+        <p:spPr>
+          <a:xfrm>
+            <a:off x="3181350" y="3043238"/>
+            <a:ext cx="5162550" cy="372904"/>
+          </a:xfrm>
+          <a:prstGeom prst="rect">
+            <a:avLst/>
+          </a:prstGeom>
+          <a:noFill/>
+          <a:ln/>
+        </p:spPr>
+        <p:txBody>
+          <a:bodyPr wrap="square" lIns="0" tIns="0" rIns="0" bIns="0" rtlCol="0" anchor="t"/>
+          <a:lstStyle/>
+          <a:p>
+            <a:pPr algn="l" indent="0" marL="0">
+              <a:buNone/>
+            </a:pPr>
+            <a:r>
+              <a:rPr lang="en-US" sz="1600" dirty="0">
+                <a:solidFill>
+                  <a:srgbClr val="14140E"/>
+                </a:solidFill>
+                <a:latin typeface="Times New Roman" pitchFamily="34" charset="0"/>
+                <a:ea typeface="Times New Roman" pitchFamily="34" charset="-122"/>
+                <a:cs typeface="Times New Roman" pitchFamily="34" charset="-120"/>
+              </a:rPr>
+              <a:t>No, and here is why.</a:t>
+            </a:r>
+            <a:endParaRPr lang="en-US" sz="1600" dirty="0"/>
+          </a:p>
+        </p:txBody>
+      </p:sp>
+      <p:sp>
+        <p:nvSpPr>
+          <p:cNvPr id="14" name="Text 11"/>
+          <p:cNvSpPr txBox="1"/>
+          <p:nvPr/>
+        </p:nvSpPr>
+        <p:spPr>
+          <a:xfrm>
+            <a:off x="800100" y="3614738"/>
+            <a:ext cx="7543800" cy="334328"/>
+          </a:xfrm>
+          <a:prstGeom prst="rect">
+            <a:avLst/>
+          </a:prstGeom>
+          <a:noFill/>
+          <a:ln/>
+        </p:spPr>
+        <p:txBody>
+          <a:bodyPr wrap="square" lIns="0" tIns="0" rIns="0" bIns="0" rtlCol="0" anchor="t"/>
+          <a:lstStyle/>
+          <a:p>
+            <a:pPr algn="l" indent="0" marL="0">
+              <a:buNone/>
+            </a:pPr>
+            <a:r>
+              <a:rPr lang="en-US" sz="1800" i="1" dirty="0">
+                <a:solidFill>
+                  <a:srgbClr val="14140E"/>
+                </a:solidFill>
+                <a:latin typeface="Times New Roman" pitchFamily="34" charset="0"/>
+                <a:ea typeface="Times New Roman" pitchFamily="34" charset="-122"/>
+                <a:cs typeface="Times New Roman" pitchFamily="34" charset="-120"/>
+              </a:rPr>
+              <a:t>A process that is technically perfect but cannot be</a:t>
+            </a:r>
+            <a:endParaRPr lang="en-US" sz="1800" dirty="0"/>
+          </a:p>
+        </p:txBody>
+      </p:sp>
+      <p:sp>
+        <p:nvSpPr>
+          <p:cNvPr id="15" name="Text 12"/>
+          <p:cNvSpPr txBox="1"/>
+          <p:nvPr/>
+        </p:nvSpPr>
+        <p:spPr>
+          <a:xfrm>
+            <a:off x="800100" y="3862387"/>
+            <a:ext cx="7543800" cy="334328"/>
+          </a:xfrm>
+          <a:prstGeom prst="rect">
+            <a:avLst/>
+          </a:prstGeom>
+          <a:noFill/>
+          <a:ln/>
+        </p:spPr>
+        <p:txBody>
+          <a:bodyPr wrap="square" lIns="0" tIns="0" rIns="0" bIns="0" rtlCol="0" anchor="t"/>
+          <a:lstStyle/>
+          <a:p>
+            <a:pPr algn="l" indent="0" marL="0">
+              <a:buNone/>
+            </a:pPr>
+            <a:r>
+              <a:rPr lang="en-US" sz="1800" i="1" dirty="0">
+                <a:solidFill>
+                  <a:srgbClr val="14140E"/>
+                </a:solidFill>
+                <a:latin typeface="Times New Roman" pitchFamily="34" charset="0"/>
+                <a:ea typeface="Times New Roman" pitchFamily="34" charset="-122"/>
+                <a:cs typeface="Times New Roman" pitchFamily="34" charset="-120"/>
+              </a:rPr>
+              <a:t>explained in a hearing has not solved the problem.</a:t>
+            </a:r>
+            <a:endParaRPr lang="en-US" sz="1800" dirty="0"/>
+          </a:p>
+        </p:txBody>
+      </p:sp>
+      <p:sp>
+        <p:nvSpPr>
+          <p:cNvPr id="16" name="Text 13"/>
+          <p:cNvSpPr txBox="1"/>
+          <p:nvPr/>
+        </p:nvSpPr>
+        <p:spPr>
+          <a:xfrm>
+            <a:off x="800100" y="4148137"/>
+            <a:ext cx="7543800" cy="231458"/>
+          </a:xfrm>
+          <a:prstGeom prst="rect">
+            <a:avLst/>
+          </a:prstGeom>
+          <a:noFill/>
+          <a:ln/>
+        </p:spPr>
+        <p:txBody>
+          <a:bodyPr wrap="square" lIns="0" tIns="0" rIns="0" bIns="0" rtlCol="0" anchor="t"/>
+          <a:lstStyle/>
+          <a:p>
+            <a:pPr algn="l" indent="0" marL="0">
+              <a:buNone/>
+            </a:pPr>
+            <a:r>
+              <a:rPr lang="en-US" sz="1200" dirty="0">
+                <a:solidFill>
+                  <a:srgbClr val="9A9A90"/>
+                </a:solidFill>
+                <a:latin typeface="Times New Roman" pitchFamily="34" charset="0"/>
+                <a:ea typeface="Times New Roman" pitchFamily="34" charset="-122"/>
+                <a:cs typeface="Times New Roman" pitchFamily="34" charset="-120"/>
+              </a:rPr>
+              <a:t>the brief</a:t>
+            </a:r>
             <a:endParaRPr lang="en-US" sz="1200" dirty="0"/>
-          </a:p>
-        </p:txBody>
-      </p:sp>
-      <p:sp>
-        <p:nvSpPr>
-          <p:cNvPr id="3" name="Text 1"/>
-          <p:cNvSpPr txBox="1"/>
-          <p:nvPr/>
-        </p:nvSpPr>
-        <p:spPr>
-          <a:xfrm>
-            <a:off x="8138160" y="4576572"/>
-            <a:ext cx="365760" cy="256032"/>
-          </a:xfrm>
-          <a:prstGeom prst="rect">
-            <a:avLst/>
-          </a:prstGeom>
-          <a:noFill/>
-          <a:ln/>
-        </p:spPr>
-        <p:txBody>
-          <a:bodyPr wrap="square" lIns="0" tIns="0" rIns="0" bIns="0" rtlCol="0" anchor="ctr"/>
-          <a:lstStyle/>
-          <a:p>
-            <a:pPr algn="r" indent="0" marL="0">
-              <a:buNone/>
-            </a:pPr>
-            <a:r>
-              <a:rPr lang="en-US" sz="1000" dirty="0">
-                <a:solidFill>
-                  <a:srgbClr val="C9C9BF"/>
-                </a:solidFill>
-                <a:latin typeface="Times New Roman" pitchFamily="34" charset="0"/>
-                <a:ea typeface="Times New Roman" pitchFamily="34" charset="-122"/>
-                <a:cs typeface="Times New Roman" pitchFamily="34" charset="-120"/>
-              </a:rPr>
-              <a:t>10</a:t>
-            </a:r>
-            <a:endParaRPr lang="en-US" sz="1000" dirty="0"/>
-          </a:p>
-        </p:txBody>
-      </p:sp>
-      <p:sp>
-        <p:nvSpPr>
-          <p:cNvPr id="5" name="Text 2"/>
-          <p:cNvSpPr txBox="1"/>
-          <p:nvPr/>
-        </p:nvSpPr>
-        <p:spPr>
-          <a:xfrm>
-            <a:off x="640080" y="868680"/>
-            <a:ext cx="7863840" cy="548640"/>
-          </a:xfrm>
-          <a:prstGeom prst="rect">
-            <a:avLst/>
-          </a:prstGeom>
-          <a:noFill/>
-          <a:ln/>
-        </p:spPr>
-        <p:txBody>
-          <a:bodyPr wrap="square" lIns="0" tIns="0" rIns="0" bIns="0" rtlCol="0" anchor="t"/>
-          <a:lstStyle/>
-          <a:p>
-            <a:pPr indent="0" marL="0">
-              <a:lnSpc>
-                <a:spcPct val="112000"/>
-              </a:lnSpc>
-              <a:buNone/>
-            </a:pPr>
-            <a:r>
-              <a:rPr lang="en-US" sz="2700" b="1" dirty="0">
-                <a:solidFill>
-                  <a:srgbClr val="16160F"/>
-                </a:solidFill>
-                <a:latin typeface="Times New Roman" pitchFamily="34" charset="0"/>
-                <a:ea typeface="Times New Roman" pitchFamily="34" charset="-122"/>
-                <a:cs typeface="Times New Roman" pitchFamily="34" charset="-120"/>
-              </a:rPr>
-              <a:t>One page. No jargon. No hashes.</a:t>
-            </a:r>
-            <a:endParaRPr lang="en-US" sz="2700" dirty="0"/>
-          </a:p>
-        </p:txBody>
-      </p:sp>
-      <p:sp>
-        <p:nvSpPr>
-          <p:cNvPr id="6" name="Text 3"/>
-          <p:cNvSpPr txBox="1"/>
-          <p:nvPr/>
-        </p:nvSpPr>
-        <p:spPr>
-          <a:xfrm>
-            <a:off x="640080" y="1600200"/>
-            <a:ext cx="7863840" cy="1371600"/>
-          </a:xfrm>
-          <a:prstGeom prst="rect">
-            <a:avLst/>
-          </a:prstGeom>
-          <a:noFill/>
-          <a:ln/>
-        </p:spPr>
-        <p:txBody>
-          <a:bodyPr wrap="square" lIns="0" tIns="0" rIns="0" bIns="0" rtlCol="0" anchor="t"/>
-          <a:lstStyle/>
-          <a:p>
-            <a:pPr indent="0" marL="0">
-              <a:lnSpc>
-                <a:spcPct val="125000"/>
-              </a:lnSpc>
-              <a:buNone/>
-            </a:pPr>
-            <a:r>
-              <a:rPr lang="en-US" sz="1450" dirty="0">
-                <a:solidFill>
-                  <a:srgbClr val="16160F"/>
-                </a:solidFill>
-                <a:latin typeface="Times New Roman" pitchFamily="34" charset="0"/>
-                <a:ea typeface="Times New Roman" pitchFamily="34" charset="-122"/>
-                <a:cs typeface="Times New Roman" pitchFamily="34" charset="-120"/>
-              </a:rPr>
-              <a:t>Is it unchanged?  Yes.</a:t>
-            </a:r>
-            <a:endParaRPr lang="en-US" sz="1450" dirty="0"/>
-          </a:p>
-          <a:p>
-            <a:pPr indent="0" marL="0">
-              <a:lnSpc>
-                <a:spcPct val="125000"/>
-              </a:lnSpc>
-              <a:buNone/>
-            </a:pPr>
-            <a:r>
-              <a:rPr lang="en-US" sz="1450" dirty="0">
-                <a:solidFill>
-                  <a:srgbClr val="16160F"/>
-                </a:solidFill>
-                <a:latin typeface="Times New Roman" pitchFamily="34" charset="0"/>
-                <a:ea typeface="Times New Roman" pitchFamily="34" charset="-122"/>
-                <a:cs typeface="Times New Roman" pitchFamily="34" charset="-120"/>
-              </a:rPr>
-              <a:t>How do we know?  A fingerprint was taken at collection and checked again.</a:t>
-            </a:r>
-            <a:endParaRPr lang="en-US" sz="1450" dirty="0"/>
-          </a:p>
-          <a:p>
-            <a:pPr indent="0" marL="0">
-              <a:lnSpc>
-                <a:spcPct val="125000"/>
-              </a:lnSpc>
-              <a:buNone/>
-            </a:pPr>
-            <a:r>
-              <a:rPr lang="en-US" sz="1450" dirty="0">
-                <a:solidFill>
-                  <a:srgbClr val="16160F"/>
-                </a:solidFill>
-                <a:latin typeface="Times New Roman" pitchFamily="34" charset="0"/>
-                <a:ea typeface="Times New Roman" pitchFamily="34" charset="-122"/>
-                <a:cs typeface="Times New Roman" pitchFamily="34" charset="-120"/>
-              </a:rPr>
-              <a:t>Who has handled it?  Four people, named, with dates.</a:t>
-            </a:r>
-            <a:endParaRPr lang="en-US" sz="1450" dirty="0"/>
-          </a:p>
-          <a:p>
-            <a:pPr indent="0" marL="0">
-              <a:lnSpc>
-                <a:spcPct val="125000"/>
-              </a:lnSpc>
-              <a:buNone/>
-            </a:pPr>
-            <a:r>
-              <a:rPr lang="en-US" sz="1450" dirty="0">
-                <a:solidFill>
-                  <a:srgbClr val="16160F"/>
-                </a:solidFill>
-                <a:latin typeface="Times New Roman" pitchFamily="34" charset="0"/>
-                <a:ea typeface="Times New Roman" pitchFamily="34" charset="-122"/>
-                <a:cs typeface="Times New Roman" pitchFamily="34" charset="-120"/>
-              </a:rPr>
-              <a:t>Can this list have been edited?  No, and here is why.</a:t>
-            </a:r>
-            <a:endParaRPr lang="en-US" sz="1450" dirty="0"/>
-          </a:p>
-        </p:txBody>
-      </p:sp>
-      <p:sp>
-        <p:nvSpPr>
-          <p:cNvPr id="7" name="Text 4"/>
-          <p:cNvSpPr txBox="1"/>
-          <p:nvPr/>
-        </p:nvSpPr>
-        <p:spPr>
-          <a:xfrm>
-            <a:off x="640080" y="3063240"/>
-            <a:ext cx="7863840" cy="640080"/>
-          </a:xfrm>
-          <a:prstGeom prst="rect">
-            <a:avLst/>
-          </a:prstGeom>
-          <a:noFill/>
-          <a:ln/>
-        </p:spPr>
-        <p:txBody>
-          <a:bodyPr wrap="square" lIns="0" tIns="0" rIns="0" bIns="0" rtlCol="0" anchor="ctr"/>
-          <a:lstStyle/>
-          <a:p>
-            <a:pPr indent="0" marL="0">
-              <a:lnSpc>
-                <a:spcPct val="125000"/>
-              </a:lnSpc>
-              <a:buNone/>
-            </a:pPr>
-            <a:r>
-              <a:rPr lang="en-US" sz="1450" i="1" dirty="0">
-                <a:solidFill>
-                  <a:srgbClr val="16160F"/>
-                </a:solidFill>
-                <a:latin typeface="Times New Roman" pitchFamily="34" charset="0"/>
-                <a:ea typeface="Times New Roman" pitchFamily="34" charset="-122"/>
-                <a:cs typeface="Times New Roman" pitchFamily="34" charset="-120"/>
-              </a:rPr>
-              <a:t>"A process that is technically perfect but cannot be explained in a hearing</a:t>
-            </a:r>
-            <a:endParaRPr lang="en-US" sz="1450" dirty="0"/>
-          </a:p>
-          <a:p>
-            <a:pPr indent="0" marL="0">
-              <a:lnSpc>
-                <a:spcPct val="125000"/>
-              </a:lnSpc>
-              <a:buNone/>
-            </a:pPr>
-            <a:r>
-              <a:rPr lang="en-US" sz="1450" i="1" dirty="0">
-                <a:solidFill>
-                  <a:srgbClr val="16160F"/>
-                </a:solidFill>
-                <a:latin typeface="Times New Roman" pitchFamily="34" charset="0"/>
-                <a:ea typeface="Times New Roman" pitchFamily="34" charset="-122"/>
-                <a:cs typeface="Times New Roman" pitchFamily="34" charset="-120"/>
-              </a:rPr>
-              <a:t>has not solved the problem."</a:t>
-            </a:r>
-            <a:endParaRPr lang="en-US" sz="1450" dirty="0"/>
-          </a:p>
-        </p:txBody>
-      </p:sp>
-      <p:sp>
-        <p:nvSpPr>
-          <p:cNvPr id="8" name="Text 5"/>
-          <p:cNvSpPr txBox="1"/>
-          <p:nvPr/>
-        </p:nvSpPr>
-        <p:spPr>
-          <a:xfrm>
-            <a:off x="640080" y="3675888"/>
-            <a:ext cx="7863840" cy="274320"/>
-          </a:xfrm>
-          <a:prstGeom prst="rect">
-            <a:avLst/>
-          </a:prstGeom>
-          <a:noFill/>
-          <a:ln/>
-        </p:spPr>
-        <p:txBody>
-          <a:bodyPr wrap="square" lIns="0" tIns="0" rIns="0" bIns="0" rtlCol="0" anchor="ctr"/>
-          <a:lstStyle/>
-          <a:p>
-            <a:pPr indent="0" marL="0">
-              <a:buNone/>
-            </a:pPr>
-            <a:r>
-              <a:rPr lang="en-US" sz="1100" dirty="0">
-                <a:solidFill>
-                  <a:srgbClr val="6B6B60"/>
-                </a:solidFill>
-                <a:latin typeface="Times New Roman" pitchFamily="34" charset="0"/>
-                <a:ea typeface="Times New Roman" pitchFamily="34" charset="-122"/>
-                <a:cs typeface="Times New Roman" pitchFamily="34" charset="-120"/>
-              </a:rPr>
-              <a:t>the brief</a:t>
-            </a:r>
-            <a:endParaRPr lang="en-US" sz="1100" dirty="0"/>
-          </a:p>
-        </p:txBody>
-      </p:sp>
-      <p:sp>
-        <p:nvSpPr>
-          <p:cNvPr id="9" name="Text 6"/>
-          <p:cNvSpPr txBox="1"/>
-          <p:nvPr/>
-        </p:nvSpPr>
-        <p:spPr>
-          <a:xfrm>
-            <a:off x="640080" y="4114800"/>
-            <a:ext cx="7863840" cy="731520"/>
-          </a:xfrm>
-          <a:prstGeom prst="rect">
-            <a:avLst/>
-          </a:prstGeom>
-          <a:noFill/>
-          <a:ln/>
-        </p:spPr>
-        <p:txBody>
-          <a:bodyPr wrap="square" lIns="0" tIns="0" rIns="0" bIns="0" rtlCol="0" anchor="t"/>
-          <a:lstStyle/>
-          <a:p>
-            <a:pPr indent="0" marL="0">
-              <a:lnSpc>
-                <a:spcPct val="125000"/>
-              </a:lnSpc>
-              <a:buNone/>
-            </a:pPr>
-            <a:r>
-              <a:rPr lang="en-US" sz="1100" i="1" dirty="0">
-                <a:solidFill>
-                  <a:srgbClr val="6B6B60"/>
-                </a:solidFill>
-                <a:latin typeface="Times New Roman" pitchFamily="34" charset="0"/>
-                <a:ea typeface="Times New Roman" pitchFamily="34" charset="-122"/>
-                <a:cs typeface="Times New Roman" pitchFamily="34" charset="-120"/>
-              </a:rPr>
-              <a:t>[Replace with a photograph of the printed report in someone's hands.]</a:t>
-            </a:r>
-            <a:endParaRPr lang="en-US" sz="1100" dirty="0"/>
           </a:p>
         </p:txBody>
       </p:sp>
@@ -2549,7 +2753,7 @@
     <p:bg>
       <p:bgPr>
         <a:solidFill>
-          <a:srgbClr val="FBFBF8"/>
+          <a:srgbClr val="FCFCF9"/>
         </a:solidFill>
       </p:bgPr>
     </p:bg>
@@ -2569,32 +2773,32 @@
       </p:grpSpPr>
       <p:sp>
         <p:nvSpPr>
-          <p:cNvPr id="2" name="Text 0"/>
-          <p:cNvSpPr txBox="1"/>
-          <p:nvPr/>
-        </p:nvSpPr>
-        <p:spPr>
-          <a:xfrm>
-            <a:off x="640080" y="310896"/>
-            <a:ext cx="7863840" cy="274320"/>
-          </a:xfrm>
-          <a:prstGeom prst="rect">
-            <a:avLst/>
-          </a:prstGeom>
-          <a:noFill/>
-          <a:ln/>
-        </p:spPr>
-        <p:txBody>
-          <a:bodyPr wrap="square" lIns="0" tIns="0" rIns="0" bIns="0" rtlCol="0" anchor="ctr"/>
-          <a:lstStyle/>
-          <a:p>
-            <a:pPr indent="0" marL="0">
-              <a:buNone/>
-            </a:pPr>
-            <a:r>
-              <a:rPr lang="en-US" sz="1200" spc="100" kern="0" dirty="0">
-                <a:solidFill>
-                  <a:srgbClr val="6B6B60"/>
+          <p:cNvPr id="3" name="Text 0"/>
+          <p:cNvSpPr txBox="1"/>
+          <p:nvPr/>
+        </p:nvSpPr>
+        <p:spPr>
+          <a:xfrm>
+            <a:off x="800100" y="571500"/>
+            <a:ext cx="7543800" cy="205740"/>
+          </a:xfrm>
+          <a:prstGeom prst="rect">
+            <a:avLst/>
+          </a:prstGeom>
+          <a:noFill/>
+          <a:ln/>
+        </p:spPr>
+        <p:txBody>
+          <a:bodyPr wrap="square" lIns="0" tIns="0" rIns="0" bIns="0" rtlCol="0" anchor="t"/>
+          <a:lstStyle/>
+          <a:p>
+            <a:pPr algn="l" indent="0" marL="0">
+              <a:buNone/>
+            </a:pPr>
+            <a:r>
+              <a:rPr lang="en-US" sz="1150" spc="110" kern="0" dirty="0">
+                <a:solidFill>
+                  <a:srgbClr val="6E6E63"/>
                 </a:solidFill>
                 <a:latin typeface="Times New Roman" pitchFamily="34" charset="0"/>
                 <a:ea typeface="Times New Roman" pitchFamily="34" charset="-122"/>
@@ -2602,38 +2806,38 @@
               </a:rPr>
               <a:t>We tested it on people</a:t>
             </a:r>
-            <a:endParaRPr lang="en-US" sz="1200" dirty="0"/>
-          </a:p>
-        </p:txBody>
-      </p:sp>
-      <p:sp>
-        <p:nvSpPr>
-          <p:cNvPr id="3" name="Text 1"/>
-          <p:cNvSpPr txBox="1"/>
-          <p:nvPr/>
-        </p:nvSpPr>
-        <p:spPr>
-          <a:xfrm>
-            <a:off x="8138160" y="4576572"/>
-            <a:ext cx="365760" cy="256032"/>
-          </a:xfrm>
-          <a:prstGeom prst="rect">
-            <a:avLst/>
-          </a:prstGeom>
-          <a:noFill/>
-          <a:ln/>
-        </p:spPr>
-        <p:txBody>
-          <a:bodyPr wrap="square" lIns="0" tIns="0" rIns="0" bIns="0" rtlCol="0" anchor="ctr"/>
+            <a:endParaRPr lang="en-US" sz="1150" dirty="0"/>
+          </a:p>
+        </p:txBody>
+      </p:sp>
+      <p:sp>
+        <p:nvSpPr>
+          <p:cNvPr id="4" name="Text 1"/>
+          <p:cNvSpPr txBox="1"/>
+          <p:nvPr/>
+        </p:nvSpPr>
+        <p:spPr>
+          <a:xfrm>
+            <a:off x="7962900" y="4648200"/>
+            <a:ext cx="381000" cy="171450"/>
+          </a:xfrm>
+          <a:prstGeom prst="rect">
+            <a:avLst/>
+          </a:prstGeom>
+          <a:noFill/>
+          <a:ln/>
+        </p:spPr>
+        <p:txBody>
+          <a:bodyPr wrap="square" lIns="0" tIns="0" rIns="0" bIns="0" rtlCol="0" anchor="t"/>
           <a:lstStyle/>
           <a:p>
             <a:pPr algn="r" indent="0" marL="0">
               <a:buNone/>
             </a:pPr>
             <a:r>
-              <a:rPr lang="en-US" sz="1000" dirty="0">
-                <a:solidFill>
-                  <a:srgbClr val="C9C9BF"/>
+              <a:rPr lang="en-US" sz="1050" dirty="0">
+                <a:solidFill>
+                  <a:srgbClr val="9A9A90"/>
                 </a:solidFill>
                 <a:latin typeface="Times New Roman" pitchFamily="34" charset="0"/>
                 <a:ea typeface="Times New Roman" pitchFamily="34" charset="-122"/>
@@ -2641,7 +2845,7 @@
               </a:rPr>
               <a:t>11</a:t>
             </a:r>
-            <a:endParaRPr lang="en-US" sz="1000" dirty="0"/>
+            <a:endParaRPr lang="en-US" sz="1050" dirty="0"/>
           </a:p>
         </p:txBody>
       </p:sp>
@@ -2653,29 +2857,26 @@
         </p:nvSpPr>
         <p:spPr>
           <a:xfrm>
-            <a:off x="640080" y="960120"/>
-            <a:ext cx="7863840" cy="1143000"/>
-          </a:xfrm>
-          <a:prstGeom prst="rect">
-            <a:avLst/>
-          </a:prstGeom>
-          <a:noFill/>
-          <a:ln/>
-        </p:spPr>
-        <p:txBody>
-          <a:bodyPr wrap="square" lIns="0" tIns="0" rIns="0" bIns="0" rtlCol="0" anchor="t"/>
-          <a:lstStyle/>
-          <a:p>
-            <a:pPr indent="0" marL="0">
-              <a:lnSpc>
-                <a:spcPct val="112000"/>
-              </a:lnSpc>
-              <a:buNone/>
-            </a:pPr>
-            <a:r>
-              <a:rPr lang="en-US" sz="2700" b="1" dirty="0">
-                <a:solidFill>
-                  <a:srgbClr val="16160F"/>
+            <a:off x="800100" y="1876425"/>
+            <a:ext cx="7543800" cy="578644"/>
+          </a:xfrm>
+          <a:prstGeom prst="rect">
+            <a:avLst/>
+          </a:prstGeom>
+          <a:noFill/>
+          <a:ln/>
+        </p:spPr>
+        <p:txBody>
+          <a:bodyPr wrap="square" lIns="0" tIns="0" rIns="0" bIns="0" rtlCol="0" anchor="t"/>
+          <a:lstStyle/>
+          <a:p>
+            <a:pPr algn="l" indent="0" marL="0">
+              <a:buNone/>
+            </a:pPr>
+            <a:r>
+              <a:rPr lang="en-US" sz="3600" b="1" dirty="0">
+                <a:solidFill>
+                  <a:srgbClr val="14140E"/>
                 </a:solidFill>
                 <a:latin typeface="Times New Roman" pitchFamily="34" charset="0"/>
                 <a:ea typeface="Times New Roman" pitchFamily="34" charset="-122"/>
@@ -2683,19 +2884,38 @@
               </a:rPr>
               <a:t>We gave the report to someone</a:t>
             </a:r>
-            <a:endParaRPr lang="en-US" sz="2700" dirty="0"/>
-          </a:p>
-          <a:p>
-            <a:pPr indent="0" marL="0">
-              <a:lnSpc>
-                <a:spcPct val="112000"/>
-              </a:lnSpc>
-              <a:buNone/>
-            </a:pPr>
-            <a:r>
-              <a:rPr lang="en-US" sz="2700" b="1" dirty="0">
-                <a:solidFill>
-                  <a:srgbClr val="16160F"/>
+            <a:endParaRPr lang="en-US" sz="3600" dirty="0"/>
+          </a:p>
+        </p:txBody>
+      </p:sp>
+      <p:sp>
+        <p:nvSpPr>
+          <p:cNvPr id="6" name="Text 3"/>
+          <p:cNvSpPr txBox="1"/>
+          <p:nvPr/>
+        </p:nvSpPr>
+        <p:spPr>
+          <a:xfrm>
+            <a:off x="800100" y="2305050"/>
+            <a:ext cx="7543800" cy="578644"/>
+          </a:xfrm>
+          <a:prstGeom prst="rect">
+            <a:avLst/>
+          </a:prstGeom>
+          <a:noFill/>
+          <a:ln/>
+        </p:spPr>
+        <p:txBody>
+          <a:bodyPr wrap="square" lIns="0" tIns="0" rIns="0" bIns="0" rtlCol="0" anchor="t"/>
+          <a:lstStyle/>
+          <a:p>
+            <a:pPr algn="l" indent="0" marL="0">
+              <a:buNone/>
+            </a:pPr>
+            <a:r>
+              <a:rPr lang="en-US" sz="3600" b="1" dirty="0">
+                <a:solidFill>
+                  <a:srgbClr val="14140E"/>
                 </a:solidFill>
                 <a:latin typeface="Times New Roman" pitchFamily="34" charset="0"/>
                 <a:ea typeface="Times New Roman" pitchFamily="34" charset="-122"/>
@@ -2703,49 +2923,7 @@
               </a:rPr>
               <a:t>outside computer science.</a:t>
             </a:r>
-            <a:endParaRPr lang="en-US" sz="2700" dirty="0"/>
-          </a:p>
-        </p:txBody>
-      </p:sp>
-      <p:sp>
-        <p:nvSpPr>
-          <p:cNvPr id="6" name="Text 3"/>
-          <p:cNvSpPr txBox="1"/>
-          <p:nvPr/>
-        </p:nvSpPr>
-        <p:spPr>
-          <a:xfrm>
-            <a:off x="640080" y="2331720"/>
-            <a:ext cx="7863840" cy="365760"/>
-          </a:xfrm>
-          <a:prstGeom prst="rect">
-            <a:avLst/>
-          </a:prstGeom>
-          <a:noFill/>
-          <a:ln/>
-        </p:spPr>
-        <p:txBody>
-          <a:bodyPr wrap="square" lIns="0" tIns="0" rIns="0" bIns="0" rtlCol="0" anchor="t"/>
-          <a:lstStyle/>
-          <a:p>
-            <a:pPr indent="0" marL="0">
-              <a:lnSpc>
-                <a:spcPct val="125000"/>
-              </a:lnSpc>
-              <a:buNone/>
-            </a:pPr>
-            <a:r>
-              <a:rPr lang="en-US" sz="1600" dirty="0">
-                <a:solidFill>
-                  <a:srgbClr val="6B6B60"/>
-                </a:solidFill>
-                <a:latin typeface="Times New Roman" pitchFamily="34" charset="0"/>
-                <a:ea typeface="Times New Roman" pitchFamily="34" charset="-122"/>
-                <a:cs typeface="Times New Roman" pitchFamily="34" charset="-120"/>
-              </a:rPr>
-              <a:t>[What confused them.]</a:t>
-            </a:r>
-            <a:endParaRPr lang="en-US" sz="1600" dirty="0"/>
+            <a:endParaRPr lang="en-US" sz="3600" dirty="0"/>
           </a:p>
         </p:txBody>
       </p:sp>
@@ -2757,37 +2935,34 @@
         </p:nvSpPr>
         <p:spPr>
           <a:xfrm>
-            <a:off x="640080" y="2743200"/>
-            <a:ext cx="7863840" cy="365760"/>
-          </a:xfrm>
-          <a:prstGeom prst="rect">
-            <a:avLst/>
-          </a:prstGeom>
-          <a:noFill/>
-          <a:ln/>
-        </p:spPr>
-        <p:txBody>
-          <a:bodyPr wrap="square" lIns="0" tIns="0" rIns="0" bIns="0" rtlCol="0" anchor="t"/>
-          <a:lstStyle/>
-          <a:p>
-            <a:pPr indent="0" marL="0">
-              <a:lnSpc>
-                <a:spcPct val="125000"/>
-              </a:lnSpc>
-              <a:buNone/>
-            </a:pPr>
-            <a:r>
-              <a:rPr lang="en-US" sz="1600" dirty="0">
-                <a:solidFill>
-                  <a:srgbClr val="6B6B60"/>
-                </a:solidFill>
-                <a:latin typeface="Times New Roman" pitchFamily="34" charset="0"/>
-                <a:ea typeface="Times New Roman" pitchFamily="34" charset="-122"/>
-                <a:cs typeface="Times New Roman" pitchFamily="34" charset="-120"/>
-              </a:rPr>
-              <a:t>[What we changed as a result.]</a:t>
-            </a:r>
-            <a:endParaRPr lang="en-US" sz="1600" dirty="0"/>
+            <a:off x="800100" y="3019425"/>
+            <a:ext cx="3086100" cy="372904"/>
+          </a:xfrm>
+          <a:prstGeom prst="rect">
+            <a:avLst/>
+          </a:prstGeom>
+          <a:noFill/>
+          <a:ln/>
+        </p:spPr>
+        <p:txBody>
+          <a:bodyPr wrap="square" lIns="0" tIns="0" rIns="0" bIns="0" rtlCol="0" anchor="t"/>
+          <a:lstStyle/>
+          <a:p>
+            <a:pPr algn="l" indent="0" marL="0">
+              <a:buNone/>
+            </a:pPr>
+            <a:r>
+              <a:rPr lang="en-US" sz="2000" b="1" dirty="0">
+                <a:solidFill>
+                  <a:srgbClr val="14140E"/>
+                </a:solidFill>
+                <a:latin typeface="Times New Roman" pitchFamily="34" charset="0"/>
+                <a:ea typeface="Times New Roman" pitchFamily="34" charset="-122"/>
+                <a:cs typeface="Times New Roman" pitchFamily="34" charset="-120"/>
+              </a:rPr>
+              <a:t>What confused them</a:t>
+            </a:r>
+            <a:endParaRPr lang="en-US" sz="2000" dirty="0"/>
           </a:p>
         </p:txBody>
       </p:sp>
@@ -2799,37 +2974,112 @@
         </p:nvSpPr>
         <p:spPr>
           <a:xfrm>
-            <a:off x="640080" y="3474720"/>
-            <a:ext cx="7863840" cy="731520"/>
-          </a:xfrm>
-          <a:prstGeom prst="rect">
-            <a:avLst/>
-          </a:prstGeom>
-          <a:noFill/>
-          <a:ln/>
-        </p:spPr>
-        <p:txBody>
-          <a:bodyPr wrap="square" lIns="0" tIns="0" rIns="0" bIns="0" rtlCol="0" anchor="t"/>
-          <a:lstStyle/>
-          <a:p>
-            <a:pPr indent="0" marL="0">
-              <a:lnSpc>
-                <a:spcPct val="125000"/>
-              </a:lnSpc>
-              <a:buNone/>
-            </a:pPr>
-            <a:r>
-              <a:rPr lang="en-US" sz="1200" i="1" dirty="0">
-                <a:solidFill>
-                  <a:srgbClr val="6B6B60"/>
-                </a:solidFill>
-                <a:latin typeface="Times New Roman" pitchFamily="34" charset="0"/>
-                <a:ea typeface="Times New Roman" pitchFamily="34" charset="-122"/>
-                <a:cs typeface="Times New Roman" pitchFamily="34" charset="-120"/>
-              </a:rPr>
-              <a:t>Complete this with the real result before presenting. An accurate account of what a reader did not understand is the only version worth reporting.</a:t>
-            </a:r>
-            <a:endParaRPr lang="en-US" sz="1200" dirty="0"/>
+            <a:off x="4038600" y="3038475"/>
+            <a:ext cx="4305300" cy="372904"/>
+          </a:xfrm>
+          <a:prstGeom prst="rect">
+            <a:avLst/>
+          </a:prstGeom>
+          <a:noFill/>
+          <a:ln/>
+        </p:spPr>
+        <p:txBody>
+          <a:bodyPr wrap="square" lIns="0" tIns="0" rIns="0" bIns="0" rtlCol="0" anchor="t"/>
+          <a:lstStyle/>
+          <a:p>
+            <a:pPr algn="l" indent="0" marL="0">
+              <a:buNone/>
+            </a:pPr>
+            <a:r>
+              <a:rPr lang="en-US" sz="1700" dirty="0">
+                <a:solidFill>
+                  <a:srgbClr val="6E6E63"/>
+                </a:solidFill>
+                <a:latin typeface="Times New Roman" pitchFamily="34" charset="0"/>
+                <a:ea typeface="Times New Roman" pitchFamily="34" charset="-122"/>
+                <a:cs typeface="Times New Roman" pitchFamily="34" charset="-120"/>
+              </a:rPr>
+              <a:t>[ to complete ]</a:t>
+            </a:r>
+            <a:endParaRPr lang="en-US" sz="1700" dirty="0"/>
+          </a:p>
+        </p:txBody>
+      </p:sp>
+      <p:sp>
+        <p:nvSpPr>
+          <p:cNvPr id="9" name="Text 6"/>
+          <p:cNvSpPr txBox="1"/>
+          <p:nvPr/>
+        </p:nvSpPr>
+        <p:spPr>
+          <a:xfrm>
+            <a:off x="800100" y="3419475"/>
+            <a:ext cx="3086100" cy="372904"/>
+          </a:xfrm>
+          <a:prstGeom prst="rect">
+            <a:avLst/>
+          </a:prstGeom>
+          <a:noFill/>
+          <a:ln/>
+        </p:spPr>
+        <p:txBody>
+          <a:bodyPr wrap="square" lIns="0" tIns="0" rIns="0" bIns="0" rtlCol="0" anchor="t"/>
+          <a:lstStyle/>
+          <a:p>
+            <a:pPr algn="l" indent="0" marL="0">
+              <a:buNone/>
+            </a:pPr>
+            <a:r>
+              <a:rPr lang="en-US" sz="2000" b="1" dirty="0">
+                <a:solidFill>
+                  <a:srgbClr val="14140E"/>
+                </a:solidFill>
+                <a:latin typeface="Times New Roman" pitchFamily="34" charset="0"/>
+                <a:ea typeface="Times New Roman" pitchFamily="34" charset="-122"/>
+                <a:cs typeface="Times New Roman" pitchFamily="34" charset="-120"/>
+              </a:rPr>
+              <a:t>What we changed</a:t>
+            </a:r>
+            <a:endParaRPr lang="en-US" sz="2000" dirty="0"/>
+          </a:p>
+        </p:txBody>
+      </p:sp>
+      <p:sp>
+        <p:nvSpPr>
+          <p:cNvPr id="10" name="Text 7"/>
+          <p:cNvSpPr txBox="1"/>
+          <p:nvPr/>
+        </p:nvSpPr>
+        <p:spPr>
+          <a:xfrm>
+            <a:off x="4038600" y="3438525"/>
+            <a:ext cx="4305300" cy="372904"/>
+          </a:xfrm>
+          <a:prstGeom prst="rect">
+            <a:avLst/>
+          </a:prstGeom>
+          <a:noFill/>
+          <a:ln/>
+        </p:spPr>
+        <p:txBody>
+          <a:bodyPr wrap="square" lIns="0" tIns="0" rIns="0" bIns="0" rtlCol="0" anchor="t"/>
+          <a:lstStyle/>
+          <a:p>
+            <a:pPr algn="l" indent="0" marL="0">
+              <a:buNone/>
+            </a:pPr>
+            <a:r>
+              <a:rPr lang="en-US" sz="1700" dirty="0">
+                <a:solidFill>
+                  <a:srgbClr val="6E6E63"/>
+                </a:solidFill>
+                <a:latin typeface="Times New Roman" pitchFamily="34" charset="0"/>
+                <a:ea typeface="Times New Roman" pitchFamily="34" charset="-122"/>
+                <a:cs typeface="Times New Roman" pitchFamily="34" charset="-120"/>
+              </a:rPr>
+              <a:t>[ to complete ]</a:t>
+            </a:r>
+            <a:endParaRPr lang="en-US" sz="1700" dirty="0"/>
           </a:p>
         </p:txBody>
       </p:sp>
@@ -2847,7 +3097,7 @@
     <p:bg>
       <p:bgPr>
         <a:solidFill>
-          <a:srgbClr val="FBFBF8"/>
+          <a:srgbClr val="FCFCF9"/>
         </a:solidFill>
       </p:bgPr>
     </p:bg>
@@ -2867,32 +3117,32 @@
       </p:grpSpPr>
       <p:sp>
         <p:nvSpPr>
-          <p:cNvPr id="2" name="Text 0"/>
-          <p:cNvSpPr txBox="1"/>
-          <p:nvPr/>
-        </p:nvSpPr>
-        <p:spPr>
-          <a:xfrm>
-            <a:off x="640080" y="310896"/>
-            <a:ext cx="7863840" cy="274320"/>
-          </a:xfrm>
-          <a:prstGeom prst="rect">
-            <a:avLst/>
-          </a:prstGeom>
-          <a:noFill/>
-          <a:ln/>
-        </p:spPr>
-        <p:txBody>
-          <a:bodyPr wrap="square" lIns="0" tIns="0" rIns="0" bIns="0" rtlCol="0" anchor="ctr"/>
-          <a:lstStyle/>
-          <a:p>
-            <a:pPr indent="0" marL="0">
-              <a:buNone/>
-            </a:pPr>
-            <a:r>
-              <a:rPr lang="en-US" sz="1200" spc="100" kern="0" dirty="0">
-                <a:solidFill>
-                  <a:srgbClr val="6B6B60"/>
+          <p:cNvPr id="3" name="Text 0"/>
+          <p:cNvSpPr txBox="1"/>
+          <p:nvPr/>
+        </p:nvSpPr>
+        <p:spPr>
+          <a:xfrm>
+            <a:off x="800100" y="571500"/>
+            <a:ext cx="7543800" cy="205740"/>
+          </a:xfrm>
+          <a:prstGeom prst="rect">
+            <a:avLst/>
+          </a:prstGeom>
+          <a:noFill/>
+          <a:ln/>
+        </p:spPr>
+        <p:txBody>
+          <a:bodyPr wrap="square" lIns="0" tIns="0" rIns="0" bIns="0" rtlCol="0" anchor="t"/>
+          <a:lstStyle/>
+          <a:p>
+            <a:pPr algn="l" indent="0" marL="0">
+              <a:buNone/>
+            </a:pPr>
+            <a:r>
+              <a:rPr lang="en-US" sz="1150" spc="110" kern="0" dirty="0">
+                <a:solidFill>
+                  <a:srgbClr val="6E6E63"/>
                 </a:solidFill>
                 <a:latin typeface="Times New Roman" pitchFamily="34" charset="0"/>
                 <a:ea typeface="Times New Roman" pitchFamily="34" charset="-122"/>
@@ -2900,38 +3150,38 @@
               </a:rPr>
               <a:t>What we did not solve</a:t>
             </a:r>
-            <a:endParaRPr lang="en-US" sz="1200" dirty="0"/>
-          </a:p>
-        </p:txBody>
-      </p:sp>
-      <p:sp>
-        <p:nvSpPr>
-          <p:cNvPr id="3" name="Text 1"/>
-          <p:cNvSpPr txBox="1"/>
-          <p:nvPr/>
-        </p:nvSpPr>
-        <p:spPr>
-          <a:xfrm>
-            <a:off x="8138160" y="4576572"/>
-            <a:ext cx="365760" cy="256032"/>
-          </a:xfrm>
-          <a:prstGeom prst="rect">
-            <a:avLst/>
-          </a:prstGeom>
-          <a:noFill/>
-          <a:ln/>
-        </p:spPr>
-        <p:txBody>
-          <a:bodyPr wrap="square" lIns="0" tIns="0" rIns="0" bIns="0" rtlCol="0" anchor="ctr"/>
+            <a:endParaRPr lang="en-US" sz="1150" dirty="0"/>
+          </a:p>
+        </p:txBody>
+      </p:sp>
+      <p:sp>
+        <p:nvSpPr>
+          <p:cNvPr id="4" name="Text 1"/>
+          <p:cNvSpPr txBox="1"/>
+          <p:nvPr/>
+        </p:nvSpPr>
+        <p:spPr>
+          <a:xfrm>
+            <a:off x="7962900" y="4648200"/>
+            <a:ext cx="381000" cy="171450"/>
+          </a:xfrm>
+          <a:prstGeom prst="rect">
+            <a:avLst/>
+          </a:prstGeom>
+          <a:noFill/>
+          <a:ln/>
+        </p:spPr>
+        <p:txBody>
+          <a:bodyPr wrap="square" lIns="0" tIns="0" rIns="0" bIns="0" rtlCol="0" anchor="t"/>
           <a:lstStyle/>
           <a:p>
             <a:pPr algn="r" indent="0" marL="0">
               <a:buNone/>
             </a:pPr>
             <a:r>
-              <a:rPr lang="en-US" sz="1000" dirty="0">
-                <a:solidFill>
-                  <a:srgbClr val="C9C9BF"/>
+              <a:rPr lang="en-US" sz="1050" dirty="0">
+                <a:solidFill>
+                  <a:srgbClr val="9A9A90"/>
                 </a:solidFill>
                 <a:latin typeface="Times New Roman" pitchFamily="34" charset="0"/>
                 <a:ea typeface="Times New Roman" pitchFamily="34" charset="-122"/>
@@ -2939,7 +3189,7 @@
               </a:rPr>
               <a:t>12</a:t>
             </a:r>
-            <a:endParaRPr lang="en-US" sz="1000" dirty="0"/>
+            <a:endParaRPr lang="en-US" sz="1050" dirty="0"/>
           </a:p>
         </p:txBody>
       </p:sp>
@@ -2951,29 +3201,26 @@
         </p:nvSpPr>
         <p:spPr>
           <a:xfrm>
-            <a:off x="640080" y="749808"/>
-            <a:ext cx="7863840" cy="502920"/>
-          </a:xfrm>
-          <a:prstGeom prst="rect">
-            <a:avLst/>
-          </a:prstGeom>
-          <a:noFill/>
-          <a:ln/>
-        </p:spPr>
-        <p:txBody>
-          <a:bodyPr wrap="square" lIns="0" tIns="0" rIns="0" bIns="0" rtlCol="0" anchor="t"/>
-          <a:lstStyle/>
-          <a:p>
-            <a:pPr indent="0" marL="0">
-              <a:lnSpc>
-                <a:spcPct val="112000"/>
-              </a:lnSpc>
-              <a:buNone/>
-            </a:pPr>
-            <a:r>
-              <a:rPr lang="en-US" sz="2800" b="1" dirty="0">
-                <a:solidFill>
-                  <a:srgbClr val="16160F"/>
+            <a:off x="800100" y="1519238"/>
+            <a:ext cx="7543800" cy="578644"/>
+          </a:xfrm>
+          <a:prstGeom prst="rect">
+            <a:avLst/>
+          </a:prstGeom>
+          <a:noFill/>
+          <a:ln/>
+        </p:spPr>
+        <p:txBody>
+          <a:bodyPr wrap="square" lIns="0" tIns="0" rIns="0" bIns="0" rtlCol="0" anchor="t"/>
+          <a:lstStyle/>
+          <a:p>
+            <a:pPr algn="l" indent="0" marL="0">
+              <a:buNone/>
+            </a:pPr>
+            <a:r>
+              <a:rPr lang="en-US" sz="3600" b="1" dirty="0">
+                <a:solidFill>
+                  <a:srgbClr val="14140E"/>
                 </a:solidFill>
                 <a:latin typeface="Times New Roman" pitchFamily="34" charset="0"/>
                 <a:ea typeface="Times New Roman" pitchFamily="34" charset="-122"/>
@@ -2981,7 +3228,7 @@
               </a:rPr>
               <a:t>Honest limits</a:t>
             </a:r>
-            <a:endParaRPr lang="en-US" sz="2800" dirty="0"/>
+            <a:endParaRPr lang="en-US" sz="3600" dirty="0"/>
           </a:p>
         </p:txBody>
       </p:sp>
@@ -2993,26 +3240,26 @@
         </p:nvSpPr>
         <p:spPr>
           <a:xfrm>
-            <a:off x="640080" y="1481328"/>
-            <a:ext cx="2286000" cy="320040"/>
-          </a:xfrm>
-          <a:prstGeom prst="rect">
-            <a:avLst/>
-          </a:prstGeom>
-          <a:noFill/>
-          <a:ln/>
-        </p:spPr>
-        <p:txBody>
-          <a:bodyPr wrap="square" lIns="0" tIns="0" rIns="0" bIns="0" rtlCol="0" anchor="ctr"/>
-          <a:lstStyle/>
-          <a:p>
-            <a:pPr indent="0" marL="0">
-              <a:buNone/>
-            </a:pPr>
-            <a:r>
-              <a:rPr lang="en-US" sz="1400" b="1" dirty="0">
-                <a:solidFill>
-                  <a:srgbClr val="16160F"/>
+            <a:off x="800100" y="2233613"/>
+            <a:ext cx="2705100" cy="372904"/>
+          </a:xfrm>
+          <a:prstGeom prst="rect">
+            <a:avLst/>
+          </a:prstGeom>
+          <a:noFill/>
+          <a:ln/>
+        </p:spPr>
+        <p:txBody>
+          <a:bodyPr wrap="square" lIns="0" tIns="0" rIns="0" bIns="0" rtlCol="0" anchor="t"/>
+          <a:lstStyle/>
+          <a:p>
+            <a:pPr algn="l" indent="0" marL="0">
+              <a:buNone/>
+            </a:pPr>
+            <a:r>
+              <a:rPr lang="en-US" sz="1700" b="1" dirty="0">
+                <a:solidFill>
+                  <a:srgbClr val="14140E"/>
                 </a:solidFill>
                 <a:latin typeface="Times New Roman" pitchFamily="34" charset="0"/>
                 <a:ea typeface="Times New Roman" pitchFamily="34" charset="-122"/>
@@ -3020,7 +3267,7 @@
               </a:rPr>
               <a:t>A corrupt collector</a:t>
             </a:r>
-            <a:endParaRPr lang="en-US" sz="1400" dirty="0"/>
+            <a:endParaRPr lang="en-US" sz="1700" dirty="0"/>
           </a:p>
         </p:txBody>
       </p:sp>
@@ -3032,34 +3279,34 @@
         </p:nvSpPr>
         <p:spPr>
           <a:xfrm>
-            <a:off x="3017520" y="1508760"/>
-            <a:ext cx="5486400" cy="320040"/>
-          </a:xfrm>
-          <a:prstGeom prst="rect">
-            <a:avLst/>
-          </a:prstGeom>
-          <a:noFill/>
-          <a:ln/>
-        </p:spPr>
-        <p:txBody>
-          <a:bodyPr wrap="square" lIns="0" tIns="0" rIns="0" bIns="0" rtlCol="0" anchor="ctr"/>
-          <a:lstStyle/>
-          <a:p>
-            <a:pPr indent="0" marL="0">
-              <a:buNone/>
-            </a:pPr>
-            <a:r>
-              <a:rPr lang="en-US" sz="1200" dirty="0">
-                <a:solidFill>
-                  <a:srgbClr val="6B6B60"/>
-                </a:solidFill>
-                <a:latin typeface="Times New Roman" pitchFamily="34" charset="0"/>
-                <a:ea typeface="Times New Roman" pitchFamily="34" charset="-122"/>
-                <a:cs typeface="Times New Roman" pitchFamily="34" charset="-120"/>
-              </a:rPr>
-              <a:t>the chain is protected from collection onward, not before it</a:t>
-            </a:r>
-            <a:endParaRPr lang="en-US" sz="1200" dirty="0"/>
+            <a:off x="3657600" y="2252663"/>
+            <a:ext cx="4686300" cy="372904"/>
+          </a:xfrm>
+          <a:prstGeom prst="rect">
+            <a:avLst/>
+          </a:prstGeom>
+          <a:noFill/>
+          <a:ln/>
+        </p:spPr>
+        <p:txBody>
+          <a:bodyPr wrap="square" lIns="0" tIns="0" rIns="0" bIns="0" rtlCol="0" anchor="t"/>
+          <a:lstStyle/>
+          <a:p>
+            <a:pPr algn="l" indent="0" marL="0">
+              <a:buNone/>
+            </a:pPr>
+            <a:r>
+              <a:rPr lang="en-US" sz="1700" dirty="0">
+                <a:solidFill>
+                  <a:srgbClr val="6E6E63"/>
+                </a:solidFill>
+                <a:latin typeface="Times New Roman" pitchFamily="34" charset="0"/>
+                <a:ea typeface="Times New Roman" pitchFamily="34" charset="-122"/>
+                <a:cs typeface="Times New Roman" pitchFamily="34" charset="-120"/>
+              </a:rPr>
+              <a:t>protected from collection onward, not before it</a:t>
+            </a:r>
+            <a:endParaRPr lang="en-US" sz="1700" dirty="0"/>
           </a:p>
         </p:txBody>
       </p:sp>
@@ -3071,26 +3318,26 @@
         </p:nvSpPr>
         <p:spPr>
           <a:xfrm>
-            <a:off x="640080" y="1965960"/>
-            <a:ext cx="2286000" cy="320040"/>
-          </a:xfrm>
-          <a:prstGeom prst="rect">
-            <a:avLst/>
-          </a:prstGeom>
-          <a:noFill/>
-          <a:ln/>
-        </p:spPr>
-        <p:txBody>
-          <a:bodyPr wrap="square" lIns="0" tIns="0" rIns="0" bIns="0" rtlCol="0" anchor="ctr"/>
-          <a:lstStyle/>
-          <a:p>
-            <a:pPr indent="0" marL="0">
-              <a:buNone/>
-            </a:pPr>
-            <a:r>
-              <a:rPr lang="en-US" sz="1400" b="1" dirty="0">
-                <a:solidFill>
-                  <a:srgbClr val="16160F"/>
+            <a:off x="800100" y="2557463"/>
+            <a:ext cx="2705100" cy="372904"/>
+          </a:xfrm>
+          <a:prstGeom prst="rect">
+            <a:avLst/>
+          </a:prstGeom>
+          <a:noFill/>
+          <a:ln/>
+        </p:spPr>
+        <p:txBody>
+          <a:bodyPr wrap="square" lIns="0" tIns="0" rIns="0" bIns="0" rtlCol="0" anchor="t"/>
+          <a:lstStyle/>
+          <a:p>
+            <a:pPr algn="l" indent="0" marL="0">
+              <a:buNone/>
+            </a:pPr>
+            <a:r>
+              <a:rPr lang="en-US" sz="1700" b="1" dirty="0">
+                <a:solidFill>
+                  <a:srgbClr val="14140E"/>
                 </a:solidFill>
                 <a:latin typeface="Times New Roman" pitchFamily="34" charset="0"/>
                 <a:ea typeface="Times New Roman" pitchFamily="34" charset="-122"/>
@@ -3098,7 +3345,7 @@
               </a:rPr>
               <a:t>The device clock</a:t>
             </a:r>
-            <a:endParaRPr lang="en-US" sz="1400" dirty="0"/>
+            <a:endParaRPr lang="en-US" sz="1700" dirty="0"/>
           </a:p>
         </p:txBody>
       </p:sp>
@@ -3110,34 +3357,34 @@
         </p:nvSpPr>
         <p:spPr>
           <a:xfrm>
-            <a:off x="3017520" y="1993392"/>
-            <a:ext cx="5486400" cy="320040"/>
-          </a:xfrm>
-          <a:prstGeom prst="rect">
-            <a:avLst/>
-          </a:prstGeom>
-          <a:noFill/>
-          <a:ln/>
-        </p:spPr>
-        <p:txBody>
-          <a:bodyPr wrap="square" lIns="0" tIns="0" rIns="0" bIns="0" rtlCol="0" anchor="ctr"/>
-          <a:lstStyle/>
-          <a:p>
-            <a:pPr indent="0" marL="0">
-              <a:buNone/>
-            </a:pPr>
-            <a:r>
-              <a:rPr lang="en-US" sz="1200" dirty="0">
-                <a:solidFill>
-                  <a:srgbClr val="6B6B60"/>
-                </a:solidFill>
-                <a:latin typeface="Times New Roman" pitchFamily="34" charset="0"/>
-                <a:ea typeface="Times New Roman" pitchFamily="34" charset="-122"/>
-                <a:cs typeface="Times New Roman" pitchFamily="34" charset="-120"/>
-              </a:rPr>
-              <a:t>both clocks are shown, the phone's is not vouched for</a:t>
-            </a:r>
-            <a:endParaRPr lang="en-US" sz="1200" dirty="0"/>
+            <a:off x="3657600" y="2576513"/>
+            <a:ext cx="4686300" cy="372904"/>
+          </a:xfrm>
+          <a:prstGeom prst="rect">
+            <a:avLst/>
+          </a:prstGeom>
+          <a:noFill/>
+          <a:ln/>
+        </p:spPr>
+        <p:txBody>
+          <a:bodyPr wrap="square" lIns="0" tIns="0" rIns="0" bIns="0" rtlCol="0" anchor="t"/>
+          <a:lstStyle/>
+          <a:p>
+            <a:pPr algn="l" indent="0" marL="0">
+              <a:buNone/>
+            </a:pPr>
+            <a:r>
+              <a:rPr lang="en-US" sz="1700" dirty="0">
+                <a:solidFill>
+                  <a:srgbClr val="6E6E63"/>
+                </a:solidFill>
+                <a:latin typeface="Times New Roman" pitchFamily="34" charset="0"/>
+                <a:ea typeface="Times New Roman" pitchFamily="34" charset="-122"/>
+                <a:cs typeface="Times New Roman" pitchFamily="34" charset="-120"/>
+              </a:rPr>
+              <a:t>both clocks shown, the phone's not vouched for</a:t>
+            </a:r>
+            <a:endParaRPr lang="en-US" sz="1700" dirty="0"/>
           </a:p>
         </p:txBody>
       </p:sp>
@@ -3149,26 +3396,26 @@
         </p:nvSpPr>
         <p:spPr>
           <a:xfrm>
-            <a:off x="640080" y="2450592"/>
-            <a:ext cx="2286000" cy="320040"/>
-          </a:xfrm>
-          <a:prstGeom prst="rect">
-            <a:avLst/>
-          </a:prstGeom>
-          <a:noFill/>
-          <a:ln/>
-        </p:spPr>
-        <p:txBody>
-          <a:bodyPr wrap="square" lIns="0" tIns="0" rIns="0" bIns="0" rtlCol="0" anchor="ctr"/>
-          <a:lstStyle/>
-          <a:p>
-            <a:pPr indent="0" marL="0">
-              <a:buNone/>
-            </a:pPr>
-            <a:r>
-              <a:rPr lang="en-US" sz="1400" b="1" dirty="0">
-                <a:solidFill>
-                  <a:srgbClr val="16160F"/>
+            <a:off x="800100" y="2881313"/>
+            <a:ext cx="2705100" cy="372904"/>
+          </a:xfrm>
+          <a:prstGeom prst="rect">
+            <a:avLst/>
+          </a:prstGeom>
+          <a:noFill/>
+          <a:ln/>
+        </p:spPr>
+        <p:txBody>
+          <a:bodyPr wrap="square" lIns="0" tIns="0" rIns="0" bIns="0" rtlCol="0" anchor="t"/>
+          <a:lstStyle/>
+          <a:p>
+            <a:pPr algn="l" indent="0" marL="0">
+              <a:buNone/>
+            </a:pPr>
+            <a:r>
+              <a:rPr lang="en-US" sz="1700" b="1" dirty="0">
+                <a:solidFill>
+                  <a:srgbClr val="14140E"/>
                 </a:solidFill>
                 <a:latin typeface="Times New Roman" pitchFamily="34" charset="0"/>
                 <a:ea typeface="Times New Roman" pitchFamily="34" charset="-122"/>
@@ -3176,7 +3423,7 @@
               </a:rPr>
               <a:t>Scale</a:t>
             </a:r>
-            <a:endParaRPr lang="en-US" sz="1400" dirty="0"/>
+            <a:endParaRPr lang="en-US" sz="1700" dirty="0"/>
           </a:p>
         </p:txBody>
       </p:sp>
@@ -3188,34 +3435,34 @@
         </p:nvSpPr>
         <p:spPr>
           <a:xfrm>
-            <a:off x="3017520" y="2478024"/>
-            <a:ext cx="5486400" cy="320040"/>
-          </a:xfrm>
-          <a:prstGeom prst="rect">
-            <a:avLst/>
-          </a:prstGeom>
-          <a:noFill/>
-          <a:ln/>
-        </p:spPr>
-        <p:txBody>
-          <a:bodyPr wrap="square" lIns="0" tIns="0" rIns="0" bIns="0" rtlCol="0" anchor="ctr"/>
-          <a:lstStyle/>
-          <a:p>
-            <a:pPr indent="0" marL="0">
-              <a:buNone/>
-            </a:pPr>
-            <a:r>
-              <a:rPr lang="en-US" sz="1200" dirty="0">
-                <a:solidFill>
-                  <a:srgbClr val="6B6B60"/>
-                </a:solidFill>
-                <a:latin typeface="Times New Roman" pitchFamily="34" charset="0"/>
-                <a:ea typeface="Times New Roman" pitchFamily="34" charset="-122"/>
-                <a:cs typeface="Times New Roman" pitchFamily="34" charset="-120"/>
-              </a:rPr>
-              <a:t>tested at 30MB, extrapolated, not a real 100GB extraction</a:t>
-            </a:r>
-            <a:endParaRPr lang="en-US" sz="1200" dirty="0"/>
+            <a:off x="3657600" y="2900363"/>
+            <a:ext cx="4686300" cy="372904"/>
+          </a:xfrm>
+          <a:prstGeom prst="rect">
+            <a:avLst/>
+          </a:prstGeom>
+          <a:noFill/>
+          <a:ln/>
+        </p:spPr>
+        <p:txBody>
+          <a:bodyPr wrap="square" lIns="0" tIns="0" rIns="0" bIns="0" rtlCol="0" anchor="t"/>
+          <a:lstStyle/>
+          <a:p>
+            <a:pPr algn="l" indent="0" marL="0">
+              <a:buNone/>
+            </a:pPr>
+            <a:r>
+              <a:rPr lang="en-US" sz="1700" dirty="0">
+                <a:solidFill>
+                  <a:srgbClr val="6E6E63"/>
+                </a:solidFill>
+                <a:latin typeface="Times New Roman" pitchFamily="34" charset="0"/>
+                <a:ea typeface="Times New Roman" pitchFamily="34" charset="-122"/>
+                <a:cs typeface="Times New Roman" pitchFamily="34" charset="-120"/>
+              </a:rPr>
+              <a:t>tested at 30MB, extrapolated, not a real extraction</a:t>
+            </a:r>
+            <a:endParaRPr lang="en-US" sz="1700" dirty="0"/>
           </a:p>
         </p:txBody>
       </p:sp>
@@ -3227,26 +3474,26 @@
         </p:nvSpPr>
         <p:spPr>
           <a:xfrm>
-            <a:off x="640080" y="2935224"/>
-            <a:ext cx="2286000" cy="320040"/>
-          </a:xfrm>
-          <a:prstGeom prst="rect">
-            <a:avLst/>
-          </a:prstGeom>
-          <a:noFill/>
-          <a:ln/>
-        </p:spPr>
-        <p:txBody>
-          <a:bodyPr wrap="square" lIns="0" tIns="0" rIns="0" bIns="0" rtlCol="0" anchor="ctr"/>
-          <a:lstStyle/>
-          <a:p>
-            <a:pPr indent="0" marL="0">
-              <a:buNone/>
-            </a:pPr>
-            <a:r>
-              <a:rPr lang="en-US" sz="1400" b="1" dirty="0">
-                <a:solidFill>
-                  <a:srgbClr val="16160F"/>
+            <a:off x="800100" y="3205163"/>
+            <a:ext cx="2705100" cy="372904"/>
+          </a:xfrm>
+          <a:prstGeom prst="rect">
+            <a:avLst/>
+          </a:prstGeom>
+          <a:noFill/>
+          <a:ln/>
+        </p:spPr>
+        <p:txBody>
+          <a:bodyPr wrap="square" lIns="0" tIns="0" rIns="0" bIns="0" rtlCol="0" anchor="t"/>
+          <a:lstStyle/>
+          <a:p>
+            <a:pPr algn="l" indent="0" marL="0">
+              <a:buNone/>
+            </a:pPr>
+            <a:r>
+              <a:rPr lang="en-US" sz="1700" b="1" dirty="0">
+                <a:solidFill>
+                  <a:srgbClr val="14140E"/>
                 </a:solidFill>
                 <a:latin typeface="Times New Roman" pitchFamily="34" charset="0"/>
                 <a:ea typeface="Times New Roman" pitchFamily="34" charset="-122"/>
@@ -3254,7 +3501,7 @@
               </a:rPr>
               <a:t>Per officer signing</a:t>
             </a:r>
-            <a:endParaRPr lang="en-US" sz="1400" dirty="0"/>
+            <a:endParaRPr lang="en-US" sz="1700" dirty="0"/>
           </a:p>
         </p:txBody>
       </p:sp>
@@ -3266,34 +3513,34 @@
         </p:nvSpPr>
         <p:spPr>
           <a:xfrm>
-            <a:off x="3017520" y="2962656"/>
-            <a:ext cx="5486400" cy="320040"/>
-          </a:xfrm>
-          <a:prstGeom prst="rect">
-            <a:avLst/>
-          </a:prstGeom>
-          <a:noFill/>
-          <a:ln/>
-        </p:spPr>
-        <p:txBody>
-          <a:bodyPr wrap="square" lIns="0" tIns="0" rIns="0" bIns="0" rtlCol="0" anchor="ctr"/>
-          <a:lstStyle/>
-          <a:p>
-            <a:pPr indent="0" marL="0">
-              <a:buNone/>
-            </a:pPr>
-            <a:r>
-              <a:rPr lang="en-US" sz="1200" dirty="0">
-                <a:solidFill>
-                  <a:srgbClr val="6B6B60"/>
-                </a:solidFill>
-                <a:latin typeface="Times New Roman" pitchFamily="34" charset="0"/>
-                <a:ea typeface="Times New Roman" pitchFamily="34" charset="-122"/>
-                <a:cs typeface="Times New Roman" pitchFamily="34" charset="-120"/>
-              </a:rPr>
-              <a:t>events are tied to a login, not to a person's key</a:t>
-            </a:r>
-            <a:endParaRPr lang="en-US" sz="1200" dirty="0"/>
+            <a:off x="3657600" y="3224213"/>
+            <a:ext cx="4686300" cy="372904"/>
+          </a:xfrm>
+          <a:prstGeom prst="rect">
+            <a:avLst/>
+          </a:prstGeom>
+          <a:noFill/>
+          <a:ln/>
+        </p:spPr>
+        <p:txBody>
+          <a:bodyPr wrap="square" lIns="0" tIns="0" rIns="0" bIns="0" rtlCol="0" anchor="t"/>
+          <a:lstStyle/>
+          <a:p>
+            <a:pPr algn="l" indent="0" marL="0">
+              <a:buNone/>
+            </a:pPr>
+            <a:r>
+              <a:rPr lang="en-US" sz="1700" dirty="0">
+                <a:solidFill>
+                  <a:srgbClr val="6E6E63"/>
+                </a:solidFill>
+                <a:latin typeface="Times New Roman" pitchFamily="34" charset="0"/>
+                <a:ea typeface="Times New Roman" pitchFamily="34" charset="-122"/>
+                <a:cs typeface="Times New Roman" pitchFamily="34" charset="-120"/>
+              </a:rPr>
+              <a:t>tied to a login, not to a person's key</a:t>
+            </a:r>
+            <a:endParaRPr lang="en-US" sz="1700" dirty="0"/>
           </a:p>
         </p:txBody>
       </p:sp>
@@ -3305,26 +3552,26 @@
         </p:nvSpPr>
         <p:spPr>
           <a:xfrm>
-            <a:off x="640080" y="3419856"/>
-            <a:ext cx="2286000" cy="320040"/>
-          </a:xfrm>
-          <a:prstGeom prst="rect">
-            <a:avLst/>
-          </a:prstGeom>
-          <a:noFill/>
-          <a:ln/>
-        </p:spPr>
-        <p:txBody>
-          <a:bodyPr wrap="square" lIns="0" tIns="0" rIns="0" bIns="0" rtlCol="0" anchor="ctr"/>
-          <a:lstStyle/>
-          <a:p>
-            <a:pPr indent="0" marL="0">
-              <a:buNone/>
-            </a:pPr>
-            <a:r>
-              <a:rPr lang="en-US" sz="1400" b="1" dirty="0">
-                <a:solidFill>
-                  <a:srgbClr val="16160F"/>
+            <a:off x="800100" y="3529013"/>
+            <a:ext cx="2705100" cy="372904"/>
+          </a:xfrm>
+          <a:prstGeom prst="rect">
+            <a:avLst/>
+          </a:prstGeom>
+          <a:noFill/>
+          <a:ln/>
+        </p:spPr>
+        <p:txBody>
+          <a:bodyPr wrap="square" lIns="0" tIns="0" rIns="0" bIns="0" rtlCol="0" anchor="t"/>
+          <a:lstStyle/>
+          <a:p>
+            <a:pPr algn="l" indent="0" marL="0">
+              <a:buNone/>
+            </a:pPr>
+            <a:r>
+              <a:rPr lang="en-US" sz="1700" b="1" dirty="0">
+                <a:solidFill>
+                  <a:srgbClr val="14140E"/>
                 </a:solidFill>
                 <a:latin typeface="Times New Roman" pitchFamily="34" charset="0"/>
                 <a:ea typeface="Times New Roman" pitchFamily="34" charset="-122"/>
@@ -3332,7 +3579,7 @@
               </a:rPr>
               <a:t>Storage</a:t>
             </a:r>
-            <a:endParaRPr lang="en-US" sz="1400" dirty="0"/>
+            <a:endParaRPr lang="en-US" sz="1700" dirty="0"/>
           </a:p>
         </p:txBody>
       </p:sp>
@@ -3344,26 +3591,26 @@
         </p:nvSpPr>
         <p:spPr>
           <a:xfrm>
-            <a:off x="3017520" y="3447288"/>
-            <a:ext cx="5486400" cy="320040"/>
-          </a:xfrm>
-          <a:prstGeom prst="rect">
-            <a:avLst/>
-          </a:prstGeom>
-          <a:noFill/>
-          <a:ln/>
-        </p:spPr>
-        <p:txBody>
-          <a:bodyPr wrap="square" lIns="0" tIns="0" rIns="0" bIns="0" rtlCol="0" anchor="ctr"/>
-          <a:lstStyle/>
-          <a:p>
-            <a:pPr indent="0" marL="0">
-              <a:buNone/>
-            </a:pPr>
-            <a:r>
-              <a:rPr lang="en-US" sz="1200" dirty="0">
-                <a:solidFill>
-                  <a:srgbClr val="6B6B60"/>
+            <a:off x="3657600" y="3548063"/>
+            <a:ext cx="4686300" cy="372904"/>
+          </a:xfrm>
+          <a:prstGeom prst="rect">
+            <a:avLst/>
+          </a:prstGeom>
+          <a:noFill/>
+          <a:ln/>
+        </p:spPr>
+        <p:txBody>
+          <a:bodyPr wrap="square" lIns="0" tIns="0" rIns="0" bIns="0" rtlCol="0" anchor="t"/>
+          <a:lstStyle/>
+          <a:p>
+            <a:pPr algn="l" indent="0" marL="0">
+              <a:buNone/>
+            </a:pPr>
+            <a:r>
+              <a:rPr lang="en-US" sz="1700" dirty="0">
+                <a:solidFill>
+                  <a:srgbClr val="6E6E63"/>
                 </a:solidFill>
                 <a:latin typeface="Times New Roman" pitchFamily="34" charset="0"/>
                 <a:ea typeface="Times New Roman" pitchFamily="34" charset="-122"/>
@@ -3371,7 +3618,7 @@
               </a:rPr>
               <a:t>change is proven, deletion is not prevented</a:t>
             </a:r>
-            <a:endParaRPr lang="en-US" sz="1200" dirty="0"/>
+            <a:endParaRPr lang="en-US" sz="1700" dirty="0"/>
           </a:p>
         </p:txBody>
       </p:sp>
@@ -3383,26 +3630,26 @@
         </p:nvSpPr>
         <p:spPr>
           <a:xfrm>
-            <a:off x="640080" y="3904488"/>
-            <a:ext cx="2286000" cy="320040"/>
-          </a:xfrm>
-          <a:prstGeom prst="rect">
-            <a:avLst/>
-          </a:prstGeom>
-          <a:noFill/>
-          <a:ln/>
-        </p:spPr>
-        <p:txBody>
-          <a:bodyPr wrap="square" lIns="0" tIns="0" rIns="0" bIns="0" rtlCol="0" anchor="ctr"/>
-          <a:lstStyle/>
-          <a:p>
-            <a:pPr indent="0" marL="0">
-              <a:buNone/>
-            </a:pPr>
-            <a:r>
-              <a:rPr lang="en-US" sz="1400" b="1" dirty="0">
-                <a:solidFill>
-                  <a:srgbClr val="16160F"/>
+            <a:off x="800100" y="3852863"/>
+            <a:ext cx="2705100" cy="372904"/>
+          </a:xfrm>
+          <a:prstGeom prst="rect">
+            <a:avLst/>
+          </a:prstGeom>
+          <a:noFill/>
+          <a:ln/>
+        </p:spPr>
+        <p:txBody>
+          <a:bodyPr wrap="square" lIns="0" tIns="0" rIns="0" bIns="0" rtlCol="0" anchor="t"/>
+          <a:lstStyle/>
+          <a:p>
+            <a:pPr algn="l" indent="0" marL="0">
+              <a:buNone/>
+            </a:pPr>
+            <a:r>
+              <a:rPr lang="en-US" sz="1700" b="1" dirty="0">
+                <a:solidFill>
+                  <a:srgbClr val="14140E"/>
                 </a:solidFill>
                 <a:latin typeface="Times New Roman" pitchFamily="34" charset="0"/>
                 <a:ea typeface="Times New Roman" pitchFamily="34" charset="-122"/>
@@ -3410,7 +3657,7 @@
               </a:rPr>
               <a:t>Bulk compromise</a:t>
             </a:r>
-            <a:endParaRPr lang="en-US" sz="1400" dirty="0"/>
+            <a:endParaRPr lang="en-US" sz="1700" dirty="0"/>
           </a:p>
         </p:txBody>
       </p:sp>
@@ -3422,34 +3669,34 @@
         </p:nvSpPr>
         <p:spPr>
           <a:xfrm>
-            <a:off x="3017520" y="3931920"/>
-            <a:ext cx="5486400" cy="320040"/>
-          </a:xfrm>
-          <a:prstGeom prst="rect">
-            <a:avLst/>
-          </a:prstGeom>
-          <a:noFill/>
-          <a:ln/>
-        </p:spPr>
-        <p:txBody>
-          <a:bodyPr wrap="square" lIns="0" tIns="0" rIns="0" bIns="0" rtlCol="0" anchor="ctr"/>
-          <a:lstStyle/>
-          <a:p>
-            <a:pPr indent="0" marL="0">
-              <a:buNone/>
-            </a:pPr>
-            <a:r>
-              <a:rPr lang="en-US" sz="1200" dirty="0">
-                <a:solidFill>
-                  <a:srgbClr val="6B6B60"/>
-                </a:solidFill>
-                <a:latin typeface="Times New Roman" pitchFamily="34" charset="0"/>
-                <a:ea typeface="Times New Roman" pitchFamily="34" charset="-122"/>
-                <a:cs typeface="Times New Roman" pitchFamily="34" charset="-120"/>
-              </a:rPr>
-              <a:t>full server access could rebuild the whole chain</a:t>
-            </a:r>
-            <a:endParaRPr lang="en-US" sz="1200" dirty="0"/>
+            <a:off x="3657600" y="3871913"/>
+            <a:ext cx="4686300" cy="372904"/>
+          </a:xfrm>
+          <a:prstGeom prst="rect">
+            <a:avLst/>
+          </a:prstGeom>
+          <a:noFill/>
+          <a:ln/>
+        </p:spPr>
+        <p:txBody>
+          <a:bodyPr wrap="square" lIns="0" tIns="0" rIns="0" bIns="0" rtlCol="0" anchor="t"/>
+          <a:lstStyle/>
+          <a:p>
+            <a:pPr algn="l" indent="0" marL="0">
+              <a:buNone/>
+            </a:pPr>
+            <a:r>
+              <a:rPr lang="en-US" sz="1700" dirty="0">
+                <a:solidFill>
+                  <a:srgbClr val="6E6E63"/>
+                </a:solidFill>
+                <a:latin typeface="Times New Roman" pitchFamily="34" charset="0"/>
+                <a:ea typeface="Times New Roman" pitchFamily="34" charset="-122"/>
+                <a:cs typeface="Times New Roman" pitchFamily="34" charset="-120"/>
+              </a:rPr>
+              <a:t>full server access could rebuild the chain</a:t>
+            </a:r>
+            <a:endParaRPr lang="en-US" sz="1700" dirty="0"/>
           </a:p>
         </p:txBody>
       </p:sp>
@@ -3467,7 +3714,7 @@
     <p:bg>
       <p:bgPr>
         <a:solidFill>
-          <a:srgbClr val="FBFBF8"/>
+          <a:srgbClr val="FCFCF9"/>
         </a:solidFill>
       </p:bgPr>
     </p:bg>
@@ -3487,32 +3734,32 @@
       </p:grpSpPr>
       <p:sp>
         <p:nvSpPr>
-          <p:cNvPr id="2" name="Text 0"/>
-          <p:cNvSpPr txBox="1"/>
-          <p:nvPr/>
-        </p:nvSpPr>
-        <p:spPr>
-          <a:xfrm>
-            <a:off x="640080" y="310896"/>
-            <a:ext cx="7863840" cy="274320"/>
-          </a:xfrm>
-          <a:prstGeom prst="rect">
-            <a:avLst/>
-          </a:prstGeom>
-          <a:noFill/>
-          <a:ln/>
-        </p:spPr>
-        <p:txBody>
-          <a:bodyPr wrap="square" lIns="0" tIns="0" rIns="0" bIns="0" rtlCol="0" anchor="ctr"/>
-          <a:lstStyle/>
-          <a:p>
-            <a:pPr indent="0" marL="0">
-              <a:buNone/>
-            </a:pPr>
-            <a:r>
-              <a:rPr lang="en-US" sz="1200" spc="100" kern="0" dirty="0">
-                <a:solidFill>
-                  <a:srgbClr val="6B6B60"/>
+          <p:cNvPr id="3" name="Text 0"/>
+          <p:cNvSpPr txBox="1"/>
+          <p:nvPr/>
+        </p:nvSpPr>
+        <p:spPr>
+          <a:xfrm>
+            <a:off x="800100" y="571500"/>
+            <a:ext cx="7543800" cy="205740"/>
+          </a:xfrm>
+          <a:prstGeom prst="rect">
+            <a:avLst/>
+          </a:prstGeom>
+          <a:noFill/>
+          <a:ln/>
+        </p:spPr>
+        <p:txBody>
+          <a:bodyPr wrap="square" lIns="0" tIns="0" rIns="0" bIns="0" rtlCol="0" anchor="t"/>
+          <a:lstStyle/>
+          <a:p>
+            <a:pPr algn="l" indent="0" marL="0">
+              <a:buNone/>
+            </a:pPr>
+            <a:r>
+              <a:rPr lang="en-US" sz="1150" spc="110" kern="0" dirty="0">
+                <a:solidFill>
+                  <a:srgbClr val="6E6E63"/>
                 </a:solidFill>
                 <a:latin typeface="Times New Roman" pitchFamily="34" charset="0"/>
                 <a:ea typeface="Times New Roman" pitchFamily="34" charset="-122"/>
@@ -3520,38 +3767,38 @@
               </a:rPr>
               <a:t>If asked</a:t>
             </a:r>
-            <a:endParaRPr lang="en-US" sz="1200" dirty="0"/>
-          </a:p>
-        </p:txBody>
-      </p:sp>
-      <p:sp>
-        <p:nvSpPr>
-          <p:cNvPr id="3" name="Text 1"/>
-          <p:cNvSpPr txBox="1"/>
-          <p:nvPr/>
-        </p:nvSpPr>
-        <p:spPr>
-          <a:xfrm>
-            <a:off x="8138160" y="4576572"/>
-            <a:ext cx="365760" cy="256032"/>
-          </a:xfrm>
-          <a:prstGeom prst="rect">
-            <a:avLst/>
-          </a:prstGeom>
-          <a:noFill/>
-          <a:ln/>
-        </p:spPr>
-        <p:txBody>
-          <a:bodyPr wrap="square" lIns="0" tIns="0" rIns="0" bIns="0" rtlCol="0" anchor="ctr"/>
+            <a:endParaRPr lang="en-US" sz="1150" dirty="0"/>
+          </a:p>
+        </p:txBody>
+      </p:sp>
+      <p:sp>
+        <p:nvSpPr>
+          <p:cNvPr id="4" name="Text 1"/>
+          <p:cNvSpPr txBox="1"/>
+          <p:nvPr/>
+        </p:nvSpPr>
+        <p:spPr>
+          <a:xfrm>
+            <a:off x="7962900" y="4648200"/>
+            <a:ext cx="381000" cy="171450"/>
+          </a:xfrm>
+          <a:prstGeom prst="rect">
+            <a:avLst/>
+          </a:prstGeom>
+          <a:noFill/>
+          <a:ln/>
+        </p:spPr>
+        <p:txBody>
+          <a:bodyPr wrap="square" lIns="0" tIns="0" rIns="0" bIns="0" rtlCol="0" anchor="t"/>
           <a:lstStyle/>
           <a:p>
             <a:pPr algn="r" indent="0" marL="0">
               <a:buNone/>
             </a:pPr>
             <a:r>
-              <a:rPr lang="en-US" sz="1000" dirty="0">
-                <a:solidFill>
-                  <a:srgbClr val="C9C9BF"/>
+              <a:rPr lang="en-US" sz="1050" dirty="0">
+                <a:solidFill>
+                  <a:srgbClr val="9A9A90"/>
                 </a:solidFill>
                 <a:latin typeface="Times New Roman" pitchFamily="34" charset="0"/>
                 <a:ea typeface="Times New Roman" pitchFamily="34" charset="-122"/>
@@ -3559,7 +3806,7 @@
               </a:rPr>
               <a:t>13</a:t>
             </a:r>
-            <a:endParaRPr lang="en-US" sz="1000" dirty="0"/>
+            <a:endParaRPr lang="en-US" sz="1050" dirty="0"/>
           </a:p>
         </p:txBody>
       </p:sp>
@@ -3571,29 +3818,26 @@
         </p:nvSpPr>
         <p:spPr>
           <a:xfrm>
-            <a:off x="640080" y="1051560"/>
-            <a:ext cx="7863840" cy="548640"/>
-          </a:xfrm>
-          <a:prstGeom prst="rect">
-            <a:avLst/>
-          </a:prstGeom>
-          <a:noFill/>
-          <a:ln/>
-        </p:spPr>
-        <p:txBody>
-          <a:bodyPr wrap="square" lIns="0" tIns="0" rIns="0" bIns="0" rtlCol="0" anchor="t"/>
-          <a:lstStyle/>
-          <a:p>
-            <a:pPr indent="0" marL="0">
-              <a:lnSpc>
-                <a:spcPct val="112000"/>
-              </a:lnSpc>
-              <a:buNone/>
-            </a:pPr>
-            <a:r>
-              <a:rPr lang="en-US" sz="2800" b="1" dirty="0">
-                <a:solidFill>
-                  <a:srgbClr val="16160F"/>
+            <a:off x="800100" y="1843088"/>
+            <a:ext cx="7543800" cy="578644"/>
+          </a:xfrm>
+          <a:prstGeom prst="rect">
+            <a:avLst/>
+          </a:prstGeom>
+          <a:noFill/>
+          <a:ln/>
+        </p:spPr>
+        <p:txBody>
+          <a:bodyPr wrap="square" lIns="0" tIns="0" rIns="0" bIns="0" rtlCol="0" anchor="t"/>
+          <a:lstStyle/>
+          <a:p>
+            <a:pPr algn="l" indent="0" marL="0">
+              <a:buNone/>
+            </a:pPr>
+            <a:r>
+              <a:rPr lang="en-US" sz="3600" b="1" dirty="0">
+                <a:solidFill>
+                  <a:srgbClr val="14140E"/>
                 </a:solidFill>
                 <a:latin typeface="Times New Roman" pitchFamily="34" charset="0"/>
                 <a:ea typeface="Times New Roman" pitchFamily="34" charset="-122"/>
@@ -3601,7 +3845,7 @@
               </a:rPr>
               <a:t>Why not a blockchain?</a:t>
             </a:r>
-            <a:endParaRPr lang="en-US" sz="2800" dirty="0"/>
+            <a:endParaRPr lang="en-US" sz="3600" dirty="0"/>
           </a:p>
         </p:txBody>
       </p:sp>
@@ -3613,57 +3857,34 @@
         </p:nvSpPr>
         <p:spPr>
           <a:xfrm>
-            <a:off x="640080" y="1965960"/>
-            <a:ext cx="7863840" cy="731520"/>
-          </a:xfrm>
-          <a:prstGeom prst="rect">
-            <a:avLst/>
-          </a:prstGeom>
-          <a:noFill/>
-          <a:ln/>
-        </p:spPr>
-        <p:txBody>
-          <a:bodyPr wrap="square" lIns="0" tIns="0" rIns="0" bIns="0" rtlCol="0" anchor="t"/>
-          <a:lstStyle/>
-          <a:p>
-            <a:pPr indent="0" marL="0">
-              <a:lnSpc>
-                <a:spcPct val="125000"/>
-              </a:lnSpc>
-              <a:buNone/>
-            </a:pPr>
-            <a:r>
-              <a:rPr lang="en-US" sz="1600" dirty="0">
-                <a:solidFill>
-                  <a:srgbClr val="16160F"/>
-                </a:solidFill>
-                <a:latin typeface="Times New Roman" pitchFamily="34" charset="0"/>
-                <a:ea typeface="Times New Roman" pitchFamily="34" charset="-122"/>
-                <a:cs typeface="Times New Roman" pitchFamily="34" charset="-120"/>
-              </a:rPr>
-              <a:t>A blockchain solves distrust between parties with no shared authority.</a:t>
-            </a:r>
-            <a:endParaRPr lang="en-US" sz="1600" dirty="0"/>
-          </a:p>
-          <a:p>
-            <a:pPr indent="0" marL="0">
-              <a:lnSpc>
-                <a:spcPct val="125000"/>
-              </a:lnSpc>
-              <a:buNone/>
-            </a:pPr>
-            <a:r>
-              <a:rPr lang="en-US" sz="1600" dirty="0">
-                <a:solidFill>
-                  <a:srgbClr val="16160F"/>
-                </a:solidFill>
-                <a:latin typeface="Times New Roman" pitchFamily="34" charset="0"/>
-                <a:ea typeface="Times New Roman" pitchFamily="34" charset="-122"/>
-                <a:cs typeface="Times New Roman" pitchFamily="34" charset="-120"/>
-              </a:rPr>
-              <a:t>A court has one.</a:t>
-            </a:r>
-            <a:endParaRPr lang="en-US" sz="1600" dirty="0"/>
+            <a:off x="800100" y="2557463"/>
+            <a:ext cx="7543800" cy="372904"/>
+          </a:xfrm>
+          <a:prstGeom prst="rect">
+            <a:avLst/>
+          </a:prstGeom>
+          <a:noFill/>
+          <a:ln/>
+        </p:spPr>
+        <p:txBody>
+          <a:bodyPr wrap="square" lIns="0" tIns="0" rIns="0" bIns="0" rtlCol="0" anchor="t"/>
+          <a:lstStyle/>
+          <a:p>
+            <a:pPr algn="l" indent="0" marL="0">
+              <a:buNone/>
+            </a:pPr>
+            <a:r>
+              <a:rPr lang="en-US" sz="2000" dirty="0">
+                <a:solidFill>
+                  <a:srgbClr val="14140E"/>
+                </a:solidFill>
+                <a:latin typeface="Times New Roman" pitchFamily="34" charset="0"/>
+                <a:ea typeface="Times New Roman" pitchFamily="34" charset="-122"/>
+                <a:cs typeface="Times New Roman" pitchFamily="34" charset="-120"/>
+              </a:rPr>
+              <a:t>A blockchain solves distrust between parties with no</a:t>
+            </a:r>
+            <a:endParaRPr lang="en-US" sz="2000" dirty="0"/>
           </a:p>
         </p:txBody>
       </p:sp>
@@ -3675,77 +3896,112 @@
         </p:nvSpPr>
         <p:spPr>
           <a:xfrm>
-            <a:off x="640080" y="2834640"/>
-            <a:ext cx="7863840" cy="1005840"/>
-          </a:xfrm>
-          <a:prstGeom prst="rect">
-            <a:avLst/>
-          </a:prstGeom>
-          <a:noFill/>
-          <a:ln/>
-        </p:spPr>
-        <p:txBody>
-          <a:bodyPr wrap="square" lIns="0" tIns="0" rIns="0" bIns="0" rtlCol="0" anchor="t"/>
-          <a:lstStyle/>
-          <a:p>
-            <a:pPr indent="0" marL="0">
-              <a:lnSpc>
-                <a:spcPct val="125000"/>
-              </a:lnSpc>
-              <a:buNone/>
-            </a:pPr>
-            <a:r>
-              <a:rPr lang="en-US" sz="1600" dirty="0">
-                <a:solidFill>
-                  <a:srgbClr val="16160F"/>
-                </a:solidFill>
-                <a:latin typeface="Times New Roman" pitchFamily="34" charset="0"/>
-                <a:ea typeface="Times New Roman" pitchFamily="34" charset="-122"/>
-                <a:cs typeface="Times New Roman" pitchFamily="34" charset="-120"/>
-              </a:rPr>
-              <a:t>A hash chain, append only storage, and periodically published root hashes</a:t>
-            </a:r>
-            <a:endParaRPr lang="en-US" sz="1600" dirty="0"/>
-          </a:p>
-          <a:p>
-            <a:pPr indent="0" marL="0">
-              <a:lnSpc>
-                <a:spcPct val="125000"/>
-              </a:lnSpc>
-              <a:buNone/>
-            </a:pPr>
-            <a:r>
-              <a:rPr lang="en-US" sz="1600" dirty="0">
-                <a:solidFill>
-                  <a:srgbClr val="16160F"/>
-                </a:solidFill>
-                <a:latin typeface="Times New Roman" pitchFamily="34" charset="0"/>
-                <a:ea typeface="Times New Roman" pitchFamily="34" charset="-122"/>
-                <a:cs typeface="Times New Roman" pitchFamily="34" charset="-120"/>
-              </a:rPr>
-              <a:t>give the same tamper evidence at a fraction of the complexity, and can be</a:t>
-            </a:r>
-            <a:endParaRPr lang="en-US" sz="1600" dirty="0"/>
-          </a:p>
-          <a:p>
-            <a:pPr indent="0" marL="0">
-              <a:lnSpc>
-                <a:spcPct val="125000"/>
-              </a:lnSpc>
-              <a:buNone/>
-            </a:pPr>
-            <a:r>
-              <a:rPr lang="en-US" sz="1600" dirty="0">
-                <a:solidFill>
-                  <a:srgbClr val="16160F"/>
-                </a:solidFill>
-                <a:latin typeface="Times New Roman" pitchFamily="34" charset="0"/>
-                <a:ea typeface="Times New Roman" pitchFamily="34" charset="-122"/>
-                <a:cs typeface="Times New Roman" pitchFamily="34" charset="-120"/>
-              </a:rPr>
-              <a:t>explained to a panel member in a single sentence.</a:t>
-            </a:r>
-            <a:endParaRPr lang="en-US" sz="1600" dirty="0"/>
+            <a:off x="800100" y="2833688"/>
+            <a:ext cx="7543800" cy="372904"/>
+          </a:xfrm>
+          <a:prstGeom prst="rect">
+            <a:avLst/>
+          </a:prstGeom>
+          <a:noFill/>
+          <a:ln/>
+        </p:spPr>
+        <p:txBody>
+          <a:bodyPr wrap="square" lIns="0" tIns="0" rIns="0" bIns="0" rtlCol="0" anchor="t"/>
+          <a:lstStyle/>
+          <a:p>
+            <a:pPr algn="l" indent="0" marL="0">
+              <a:buNone/>
+            </a:pPr>
+            <a:r>
+              <a:rPr lang="en-US" sz="2000" dirty="0">
+                <a:solidFill>
+                  <a:srgbClr val="14140E"/>
+                </a:solidFill>
+                <a:latin typeface="Times New Roman" pitchFamily="34" charset="0"/>
+                <a:ea typeface="Times New Roman" pitchFamily="34" charset="-122"/>
+                <a:cs typeface="Times New Roman" pitchFamily="34" charset="-120"/>
+              </a:rPr>
+              <a:t>shared authority. A court has one.</a:t>
+            </a:r>
+            <a:endParaRPr lang="en-US" sz="2000" dirty="0"/>
+          </a:p>
+        </p:txBody>
+      </p:sp>
+      <p:sp>
+        <p:nvSpPr>
+          <p:cNvPr id="8" name="Text 5"/>
+          <p:cNvSpPr txBox="1"/>
+          <p:nvPr/>
+        </p:nvSpPr>
+        <p:spPr>
+          <a:xfrm>
+            <a:off x="800100" y="3300413"/>
+            <a:ext cx="7543800" cy="372904"/>
+          </a:xfrm>
+          <a:prstGeom prst="rect">
+            <a:avLst/>
+          </a:prstGeom>
+          <a:noFill/>
+          <a:ln/>
+        </p:spPr>
+        <p:txBody>
+          <a:bodyPr wrap="square" lIns="0" tIns="0" rIns="0" bIns="0" rtlCol="0" anchor="t"/>
+          <a:lstStyle/>
+          <a:p>
+            <a:pPr algn="l" indent="0" marL="0">
+              <a:buNone/>
+            </a:pPr>
+            <a:r>
+              <a:rPr lang="en-US" sz="2000" dirty="0">
+                <a:solidFill>
+                  <a:srgbClr val="14140E"/>
+                </a:solidFill>
+                <a:latin typeface="Times New Roman" pitchFamily="34" charset="0"/>
+                <a:ea typeface="Times New Roman" pitchFamily="34" charset="-122"/>
+                <a:cs typeface="Times New Roman" pitchFamily="34" charset="-120"/>
+              </a:rPr>
+              <a:t>A hash chain and append only storage give the same tamper</a:t>
+            </a:r>
+            <a:endParaRPr lang="en-US" sz="2000" dirty="0"/>
+          </a:p>
+        </p:txBody>
+      </p:sp>
+      <p:sp>
+        <p:nvSpPr>
+          <p:cNvPr id="9" name="Text 6"/>
+          <p:cNvSpPr txBox="1"/>
+          <p:nvPr/>
+        </p:nvSpPr>
+        <p:spPr>
+          <a:xfrm>
+            <a:off x="800100" y="3576638"/>
+            <a:ext cx="7543800" cy="372904"/>
+          </a:xfrm>
+          <a:prstGeom prst="rect">
+            <a:avLst/>
+          </a:prstGeom>
+          <a:noFill/>
+          <a:ln/>
+        </p:spPr>
+        <p:txBody>
+          <a:bodyPr wrap="square" lIns="0" tIns="0" rIns="0" bIns="0" rtlCol="0" anchor="t"/>
+          <a:lstStyle/>
+          <a:p>
+            <a:pPr algn="l" indent="0" marL="0">
+              <a:buNone/>
+            </a:pPr>
+            <a:r>
+              <a:rPr lang="en-US" sz="2000" dirty="0">
+                <a:solidFill>
+                  <a:srgbClr val="14140E"/>
+                </a:solidFill>
+                <a:latin typeface="Times New Roman" pitchFamily="34" charset="0"/>
+                <a:ea typeface="Times New Roman" pitchFamily="34" charset="-122"/>
+                <a:cs typeface="Times New Roman" pitchFamily="34" charset="-120"/>
+              </a:rPr>
+              <a:t>evidence, and can be explained to a panel in one sentence.</a:t>
+            </a:r>
+            <a:endParaRPr lang="en-US" sz="2000" dirty="0"/>
           </a:p>
         </p:txBody>
       </p:sp>
@@ -3763,7 +4019,7 @@
     <p:bg>
       <p:bgPr>
         <a:solidFill>
-          <a:srgbClr val="FBFBF8"/>
+          <a:srgbClr val="FCFCF9"/>
         </a:solidFill>
       </p:bgPr>
     </p:bg>
@@ -3783,32 +4039,32 @@
       </p:grpSpPr>
       <p:sp>
         <p:nvSpPr>
-          <p:cNvPr id="2" name="Text 0"/>
-          <p:cNvSpPr txBox="1"/>
-          <p:nvPr/>
-        </p:nvSpPr>
-        <p:spPr>
-          <a:xfrm>
-            <a:off x="640080" y="310896"/>
-            <a:ext cx="7863840" cy="274320"/>
-          </a:xfrm>
-          <a:prstGeom prst="rect">
-            <a:avLst/>
-          </a:prstGeom>
-          <a:noFill/>
-          <a:ln/>
-        </p:spPr>
-        <p:txBody>
-          <a:bodyPr wrap="square" lIns="0" tIns="0" rIns="0" bIns="0" rtlCol="0" anchor="ctr"/>
-          <a:lstStyle/>
-          <a:p>
-            <a:pPr indent="0" marL="0">
-              <a:buNone/>
-            </a:pPr>
-            <a:r>
-              <a:rPr lang="en-US" sz="1200" spc="100" kern="0" dirty="0">
-                <a:solidFill>
-                  <a:srgbClr val="6B6B60"/>
+          <p:cNvPr id="3" name="Text 0"/>
+          <p:cNvSpPr txBox="1"/>
+          <p:nvPr/>
+        </p:nvSpPr>
+        <p:spPr>
+          <a:xfrm>
+            <a:off x="800100" y="571500"/>
+            <a:ext cx="7543800" cy="205740"/>
+          </a:xfrm>
+          <a:prstGeom prst="rect">
+            <a:avLst/>
+          </a:prstGeom>
+          <a:noFill/>
+          <a:ln/>
+        </p:spPr>
+        <p:txBody>
+          <a:bodyPr wrap="square" lIns="0" tIns="0" rIns="0" bIns="0" rtlCol="0" anchor="t"/>
+          <a:lstStyle/>
+          <a:p>
+            <a:pPr algn="l" indent="0" marL="0">
+              <a:buNone/>
+            </a:pPr>
+            <a:r>
+              <a:rPr lang="en-US" sz="1150" spc="110" kern="0" dirty="0">
+                <a:solidFill>
+                  <a:srgbClr val="6E6E63"/>
                 </a:solidFill>
                 <a:latin typeface="Times New Roman" pitchFamily="34" charset="0"/>
                 <a:ea typeface="Times New Roman" pitchFamily="34" charset="-122"/>
@@ -3816,38 +4072,38 @@
               </a:rPr>
               <a:t>The problem</a:t>
             </a:r>
-            <a:endParaRPr lang="en-US" sz="1200" dirty="0"/>
-          </a:p>
-        </p:txBody>
-      </p:sp>
-      <p:sp>
-        <p:nvSpPr>
-          <p:cNvPr id="3" name="Text 1"/>
-          <p:cNvSpPr txBox="1"/>
-          <p:nvPr/>
-        </p:nvSpPr>
-        <p:spPr>
-          <a:xfrm>
-            <a:off x="8138160" y="4576572"/>
-            <a:ext cx="365760" cy="256032"/>
-          </a:xfrm>
-          <a:prstGeom prst="rect">
-            <a:avLst/>
-          </a:prstGeom>
-          <a:noFill/>
-          <a:ln/>
-        </p:spPr>
-        <p:txBody>
-          <a:bodyPr wrap="square" lIns="0" tIns="0" rIns="0" bIns="0" rtlCol="0" anchor="ctr"/>
+            <a:endParaRPr lang="en-US" sz="1150" dirty="0"/>
+          </a:p>
+        </p:txBody>
+      </p:sp>
+      <p:sp>
+        <p:nvSpPr>
+          <p:cNvPr id="4" name="Text 1"/>
+          <p:cNvSpPr txBox="1"/>
+          <p:nvPr/>
+        </p:nvSpPr>
+        <p:spPr>
+          <a:xfrm>
+            <a:off x="7962900" y="4648200"/>
+            <a:ext cx="381000" cy="171450"/>
+          </a:xfrm>
+          <a:prstGeom prst="rect">
+            <a:avLst/>
+          </a:prstGeom>
+          <a:noFill/>
+          <a:ln/>
+        </p:spPr>
+        <p:txBody>
+          <a:bodyPr wrap="square" lIns="0" tIns="0" rIns="0" bIns="0" rtlCol="0" anchor="t"/>
           <a:lstStyle/>
           <a:p>
             <a:pPr algn="r" indent="0" marL="0">
               <a:buNone/>
             </a:pPr>
             <a:r>
-              <a:rPr lang="en-US" sz="1000" dirty="0">
-                <a:solidFill>
-                  <a:srgbClr val="C9C9BF"/>
+              <a:rPr lang="en-US" sz="1050" dirty="0">
+                <a:solidFill>
+                  <a:srgbClr val="9A9A90"/>
                 </a:solidFill>
                 <a:latin typeface="Times New Roman" pitchFamily="34" charset="0"/>
                 <a:ea typeface="Times New Roman" pitchFamily="34" charset="-122"/>
@@ -3855,7 +4111,7 @@
               </a:rPr>
               <a:t>2</a:t>
             </a:r>
-            <a:endParaRPr lang="en-US" sz="1000" dirty="0"/>
+            <a:endParaRPr lang="en-US" sz="1050" dirty="0"/>
           </a:p>
         </p:txBody>
       </p:sp>
@@ -3867,57 +4123,34 @@
         </p:nvSpPr>
         <p:spPr>
           <a:xfrm>
-            <a:off x="640080" y="1051560"/>
-            <a:ext cx="7863840" cy="1280160"/>
-          </a:xfrm>
-          <a:prstGeom prst="rect">
-            <a:avLst/>
-          </a:prstGeom>
-          <a:noFill/>
-          <a:ln/>
-        </p:spPr>
-        <p:txBody>
-          <a:bodyPr wrap="square" lIns="0" tIns="0" rIns="0" bIns="0" rtlCol="0" anchor="t"/>
-          <a:lstStyle/>
-          <a:p>
-            <a:pPr indent="0" marL="0">
-              <a:lnSpc>
-                <a:spcPct val="112000"/>
-              </a:lnSpc>
-              <a:buNone/>
-            </a:pPr>
-            <a:r>
-              <a:rPr lang="en-US" sz="2800" b="1" dirty="0">
-                <a:solidFill>
-                  <a:srgbClr val="16160F"/>
-                </a:solidFill>
-                <a:latin typeface="Times New Roman" pitchFamily="34" charset="0"/>
-                <a:ea typeface="Times New Roman" pitchFamily="34" charset="-122"/>
-                <a:cs typeface="Times New Roman" pitchFamily="34" charset="-120"/>
-              </a:rPr>
-              <a:t>Cases collapse because nobody can prove</a:t>
-            </a:r>
-            <a:endParaRPr lang="en-US" sz="2800" dirty="0"/>
-          </a:p>
-          <a:p>
-            <a:pPr indent="0" marL="0">
-              <a:lnSpc>
-                <a:spcPct val="112000"/>
-              </a:lnSpc>
-              <a:buNone/>
-            </a:pPr>
-            <a:r>
-              <a:rPr lang="en-US" sz="2800" b="1" dirty="0">
-                <a:solidFill>
-                  <a:srgbClr val="16160F"/>
-                </a:solidFill>
-                <a:latin typeface="Times New Roman" pitchFamily="34" charset="0"/>
-                <a:ea typeface="Times New Roman" pitchFamily="34" charset="-122"/>
-                <a:cs typeface="Times New Roman" pitchFamily="34" charset="-120"/>
-              </a:rPr>
-              <a:t>the evidence was not changed.</a:t>
-            </a:r>
-            <a:endParaRPr lang="en-US" sz="2800" dirty="0"/>
+            <a:off x="800100" y="1604963"/>
+            <a:ext cx="7543800" cy="372904"/>
+          </a:xfrm>
+          <a:prstGeom prst="rect">
+            <a:avLst/>
+          </a:prstGeom>
+          <a:noFill/>
+          <a:ln/>
+        </p:spPr>
+        <p:txBody>
+          <a:bodyPr wrap="square" lIns="0" tIns="0" rIns="0" bIns="0" rtlCol="0" anchor="t"/>
+          <a:lstStyle/>
+          <a:p>
+            <a:pPr algn="l" indent="0" marL="0">
+              <a:buNone/>
+            </a:pPr>
+            <a:r>
+              <a:rPr lang="en-US" sz="2000" dirty="0">
+                <a:solidFill>
+                  <a:srgbClr val="14140E"/>
+                </a:solidFill>
+                <a:latin typeface="Times New Roman" pitchFamily="34" charset="0"/>
+                <a:ea typeface="Times New Roman" pitchFamily="34" charset="-122"/>
+                <a:cs typeface="Times New Roman" pitchFamily="34" charset="-120"/>
+              </a:rPr>
+              <a:t>A flash drive. An email. A shared laptop.</a:t>
+            </a:r>
+            <a:endParaRPr lang="en-US" sz="2000" dirty="0"/>
           </a:p>
         </p:txBody>
       </p:sp>
@@ -3929,37 +4162,34 @@
         </p:nvSpPr>
         <p:spPr>
           <a:xfrm>
-            <a:off x="640080" y="2395728"/>
-            <a:ext cx="7863840" cy="822960"/>
-          </a:xfrm>
-          <a:prstGeom prst="rect">
-            <a:avLst/>
-          </a:prstGeom>
-          <a:noFill/>
-          <a:ln/>
-        </p:spPr>
-        <p:txBody>
-          <a:bodyPr wrap="square" lIns="0" tIns="0" rIns="0" bIns="0" rtlCol="0" anchor="t"/>
-          <a:lstStyle/>
-          <a:p>
-            <a:pPr indent="0" marL="0">
-              <a:lnSpc>
-                <a:spcPct val="125000"/>
-              </a:lnSpc>
-              <a:buNone/>
-            </a:pPr>
-            <a:r>
-              <a:rPr lang="en-US" sz="1900" dirty="0">
-                <a:solidFill>
-                  <a:srgbClr val="16160F"/>
-                </a:solidFill>
-                <a:latin typeface="Times New Roman" pitchFamily="34" charset="0"/>
-                <a:ea typeface="Times New Roman" pitchFamily="34" charset="-122"/>
-                <a:cs typeface="Times New Roman" pitchFamily="34" charset="-120"/>
-              </a:rPr>
-              <a:t>Not because anyone changed it.</a:t>
-            </a:r>
-            <a:endParaRPr lang="en-US" sz="1900" dirty="0"/>
+            <a:off x="800100" y="2071688"/>
+            <a:ext cx="7543800" cy="372904"/>
+          </a:xfrm>
+          <a:prstGeom prst="rect">
+            <a:avLst/>
+          </a:prstGeom>
+          <a:noFill/>
+          <a:ln/>
+        </p:spPr>
+        <p:txBody>
+          <a:bodyPr wrap="square" lIns="0" tIns="0" rIns="0" bIns="0" rtlCol="0" anchor="t"/>
+          <a:lstStyle/>
+          <a:p>
+            <a:pPr algn="l" indent="0" marL="0">
+              <a:buNone/>
+            </a:pPr>
+            <a:r>
+              <a:rPr lang="en-US" sz="2000" dirty="0">
+                <a:solidFill>
+                  <a:srgbClr val="14140E"/>
+                </a:solidFill>
+                <a:latin typeface="Times New Roman" pitchFamily="34" charset="0"/>
+                <a:ea typeface="Times New Roman" pitchFamily="34" charset="-122"/>
+                <a:cs typeface="Times New Roman" pitchFamily="34" charset="-120"/>
+              </a:rPr>
+              <a:t>A hearing, eleven months later.</a:t>
+            </a:r>
+            <a:endParaRPr lang="en-US" sz="2000" dirty="0"/>
           </a:p>
         </p:txBody>
       </p:sp>
@@ -3971,37 +4201,112 @@
         </p:nvSpPr>
         <p:spPr>
           <a:xfrm>
-            <a:off x="640080" y="3154680"/>
-            <a:ext cx="7863840" cy="1005840"/>
-          </a:xfrm>
-          <a:prstGeom prst="rect">
-            <a:avLst/>
-          </a:prstGeom>
-          <a:noFill/>
-          <a:ln/>
-        </p:spPr>
-        <p:txBody>
-          <a:bodyPr wrap="square" lIns="0" tIns="0" rIns="0" bIns="0" rtlCol="0" anchor="t"/>
-          <a:lstStyle/>
-          <a:p>
-            <a:pPr indent="0" marL="0">
-              <a:lnSpc>
-                <a:spcPct val="125000"/>
-              </a:lnSpc>
-              <a:buNone/>
-            </a:pPr>
-            <a:r>
-              <a:rPr lang="en-US" sz="1200" i="1" dirty="0">
-                <a:solidFill>
-                  <a:srgbClr val="6B6B60"/>
-                </a:solidFill>
-                <a:latin typeface="Times New Roman" pitchFamily="34" charset="0"/>
-                <a:ea typeface="Times New Roman" pitchFamily="34" charset="-122"/>
-                <a:cs typeface="Times New Roman" pitchFamily="34" charset="-120"/>
-              </a:rPr>
-              <a:t>Evidence goes onto a flash drive, gets emailed between officers, sits on a shared machine, and arrives at a hearing a year later. Maybe nobody touched it. Nobody can prove that either.</a:t>
-            </a:r>
-            <a:endParaRPr lang="en-US" sz="1200" dirty="0"/>
+            <a:off x="800100" y="2538413"/>
+            <a:ext cx="7543800" cy="694373"/>
+          </a:xfrm>
+          <a:prstGeom prst="rect">
+            <a:avLst/>
+          </a:prstGeom>
+          <a:noFill/>
+          <a:ln/>
+        </p:spPr>
+        <p:txBody>
+          <a:bodyPr wrap="square" lIns="0" tIns="0" rIns="0" bIns="0" rtlCol="0" anchor="t"/>
+          <a:lstStyle/>
+          <a:p>
+            <a:pPr algn="l" indent="0" marL="0">
+              <a:buNone/>
+            </a:pPr>
+            <a:r>
+              <a:rPr lang="en-US" sz="4400" b="1" dirty="0">
+                <a:solidFill>
+                  <a:srgbClr val="14140E"/>
+                </a:solidFill>
+                <a:latin typeface="Times New Roman" pitchFamily="34" charset="0"/>
+                <a:ea typeface="Times New Roman" pitchFamily="34" charset="-122"/>
+                <a:cs typeface="Times New Roman" pitchFamily="34" charset="-120"/>
+              </a:rPr>
+              <a:t>Nobody can prove the file is</a:t>
+            </a:r>
+            <a:endParaRPr lang="en-US" sz="4400" dirty="0"/>
+          </a:p>
+        </p:txBody>
+      </p:sp>
+      <p:sp>
+        <p:nvSpPr>
+          <p:cNvPr id="8" name="Text 5"/>
+          <p:cNvSpPr txBox="1"/>
+          <p:nvPr/>
+        </p:nvSpPr>
+        <p:spPr>
+          <a:xfrm>
+            <a:off x="800100" y="3052763"/>
+            <a:ext cx="7543800" cy="694373"/>
+          </a:xfrm>
+          <a:prstGeom prst="rect">
+            <a:avLst/>
+          </a:prstGeom>
+          <a:noFill/>
+          <a:ln/>
+        </p:spPr>
+        <p:txBody>
+          <a:bodyPr wrap="square" lIns="0" tIns="0" rIns="0" bIns="0" rtlCol="0" anchor="t"/>
+          <a:lstStyle/>
+          <a:p>
+            <a:pPr algn="l" indent="0" marL="0">
+              <a:buNone/>
+            </a:pPr>
+            <a:r>
+              <a:rPr lang="en-US" sz="4400" b="1" dirty="0">
+                <a:solidFill>
+                  <a:srgbClr val="14140E"/>
+                </a:solidFill>
+                <a:latin typeface="Times New Roman" pitchFamily="34" charset="0"/>
+                <a:ea typeface="Times New Roman" pitchFamily="34" charset="-122"/>
+                <a:cs typeface="Times New Roman" pitchFamily="34" charset="-120"/>
+              </a:rPr>
+              <a:t>the one that was collected.</a:t>
+            </a:r>
+            <a:endParaRPr lang="en-US" sz="4400" dirty="0"/>
+          </a:p>
+        </p:txBody>
+      </p:sp>
+      <p:sp>
+        <p:nvSpPr>
+          <p:cNvPr id="9" name="Text 6"/>
+          <p:cNvSpPr txBox="1"/>
+          <p:nvPr/>
+        </p:nvSpPr>
+        <p:spPr>
+          <a:xfrm>
+            <a:off x="800100" y="3814763"/>
+            <a:ext cx="7543800" cy="372904"/>
+          </a:xfrm>
+          <a:prstGeom prst="rect">
+            <a:avLst/>
+          </a:prstGeom>
+          <a:noFill/>
+          <a:ln/>
+        </p:spPr>
+        <p:txBody>
+          <a:bodyPr wrap="square" lIns="0" tIns="0" rIns="0" bIns="0" rtlCol="0" anchor="t"/>
+          <a:lstStyle/>
+          <a:p>
+            <a:pPr algn="l" indent="0" marL="0">
+              <a:buNone/>
+            </a:pPr>
+            <a:r>
+              <a:rPr lang="en-US" sz="2000" dirty="0">
+                <a:solidFill>
+                  <a:srgbClr val="14140E"/>
+                </a:solidFill>
+                <a:latin typeface="Times New Roman" pitchFamily="34" charset="0"/>
+                <a:ea typeface="Times New Roman" pitchFamily="34" charset="-122"/>
+                <a:cs typeface="Times New Roman" pitchFamily="34" charset="-120"/>
+              </a:rPr>
+              <a:t>Not because anyone changed it. Because nobody can show they did not.</a:t>
+            </a:r>
+            <a:endParaRPr lang="en-US" sz="2000" dirty="0"/>
           </a:p>
         </p:txBody>
       </p:sp>
@@ -4019,7 +4324,7 @@
     <p:bg>
       <p:bgPr>
         <a:solidFill>
-          <a:srgbClr val="FBFBF8"/>
+          <a:srgbClr val="FCFCF9"/>
         </a:solidFill>
       </p:bgPr>
     </p:bg>
@@ -4039,32 +4344,32 @@
       </p:grpSpPr>
       <p:sp>
         <p:nvSpPr>
-          <p:cNvPr id="2" name="Text 0"/>
-          <p:cNvSpPr txBox="1"/>
-          <p:nvPr/>
-        </p:nvSpPr>
-        <p:spPr>
-          <a:xfrm>
-            <a:off x="640080" y="310896"/>
-            <a:ext cx="7863840" cy="274320"/>
-          </a:xfrm>
-          <a:prstGeom prst="rect">
-            <a:avLst/>
-          </a:prstGeom>
-          <a:noFill/>
-          <a:ln/>
-        </p:spPr>
-        <p:txBody>
-          <a:bodyPr wrap="square" lIns="0" tIns="0" rIns="0" bIns="0" rtlCol="0" anchor="ctr"/>
-          <a:lstStyle/>
-          <a:p>
-            <a:pPr indent="0" marL="0">
-              <a:buNone/>
-            </a:pPr>
-            <a:r>
-              <a:rPr lang="en-US" sz="1200" spc="100" kern="0" dirty="0">
-                <a:solidFill>
-                  <a:srgbClr val="6B6B60"/>
+          <p:cNvPr id="3" name="Text 0"/>
+          <p:cNvSpPr txBox="1"/>
+          <p:nvPr/>
+        </p:nvSpPr>
+        <p:spPr>
+          <a:xfrm>
+            <a:off x="800100" y="571500"/>
+            <a:ext cx="7543800" cy="205740"/>
+          </a:xfrm>
+          <a:prstGeom prst="rect">
+            <a:avLst/>
+          </a:prstGeom>
+          <a:noFill/>
+          <a:ln/>
+        </p:spPr>
+        <p:txBody>
+          <a:bodyPr wrap="square" lIns="0" tIns="0" rIns="0" bIns="0" rtlCol="0" anchor="t"/>
+          <a:lstStyle/>
+          <a:p>
+            <a:pPr algn="l" indent="0" marL="0">
+              <a:buNone/>
+            </a:pPr>
+            <a:r>
+              <a:rPr lang="en-US" sz="1150" spc="110" kern="0" dirty="0">
+                <a:solidFill>
+                  <a:srgbClr val="6E6E63"/>
                 </a:solidFill>
                 <a:latin typeface="Times New Roman" pitchFamily="34" charset="0"/>
                 <a:ea typeface="Times New Roman" pitchFamily="34" charset="-122"/>
@@ -4072,38 +4377,38 @@
               </a:rPr>
               <a:t>Where this happens</a:t>
             </a:r>
-            <a:endParaRPr lang="en-US" sz="1200" dirty="0"/>
-          </a:p>
-        </p:txBody>
-      </p:sp>
-      <p:sp>
-        <p:nvSpPr>
-          <p:cNvPr id="3" name="Text 1"/>
-          <p:cNvSpPr txBox="1"/>
-          <p:nvPr/>
-        </p:nvSpPr>
-        <p:spPr>
-          <a:xfrm>
-            <a:off x="8138160" y="4576572"/>
-            <a:ext cx="365760" cy="256032"/>
-          </a:xfrm>
-          <a:prstGeom prst="rect">
-            <a:avLst/>
-          </a:prstGeom>
-          <a:noFill/>
-          <a:ln/>
-        </p:spPr>
-        <p:txBody>
-          <a:bodyPr wrap="square" lIns="0" tIns="0" rIns="0" bIns="0" rtlCol="0" anchor="ctr"/>
+            <a:endParaRPr lang="en-US" sz="1150" dirty="0"/>
+          </a:p>
+        </p:txBody>
+      </p:sp>
+      <p:sp>
+        <p:nvSpPr>
+          <p:cNvPr id="4" name="Text 1"/>
+          <p:cNvSpPr txBox="1"/>
+          <p:nvPr/>
+        </p:nvSpPr>
+        <p:spPr>
+          <a:xfrm>
+            <a:off x="7962900" y="4648200"/>
+            <a:ext cx="381000" cy="171450"/>
+          </a:xfrm>
+          <a:prstGeom prst="rect">
+            <a:avLst/>
+          </a:prstGeom>
+          <a:noFill/>
+          <a:ln/>
+        </p:spPr>
+        <p:txBody>
+          <a:bodyPr wrap="square" lIns="0" tIns="0" rIns="0" bIns="0" rtlCol="0" anchor="t"/>
           <a:lstStyle/>
           <a:p>
             <a:pPr algn="r" indent="0" marL="0">
               <a:buNone/>
             </a:pPr>
             <a:r>
-              <a:rPr lang="en-US" sz="1000" dirty="0">
-                <a:solidFill>
-                  <a:srgbClr val="C9C9BF"/>
+              <a:rPr lang="en-US" sz="1050" dirty="0">
+                <a:solidFill>
+                  <a:srgbClr val="9A9A90"/>
                 </a:solidFill>
                 <a:latin typeface="Times New Roman" pitchFamily="34" charset="0"/>
                 <a:ea typeface="Times New Roman" pitchFamily="34" charset="-122"/>
@@ -4111,7 +4416,7 @@
               </a:rPr>
               <a:t>3</a:t>
             </a:r>
-            <a:endParaRPr lang="en-US" sz="1000" dirty="0"/>
+            <a:endParaRPr lang="en-US" sz="1050" dirty="0"/>
           </a:p>
         </p:txBody>
       </p:sp>
@@ -4123,29 +4428,26 @@
         </p:nvSpPr>
         <p:spPr>
           <a:xfrm>
-            <a:off x="640080" y="868680"/>
-            <a:ext cx="7863840" cy="548640"/>
-          </a:xfrm>
-          <a:prstGeom prst="rect">
-            <a:avLst/>
-          </a:prstGeom>
-          <a:noFill/>
-          <a:ln/>
-        </p:spPr>
-        <p:txBody>
-          <a:bodyPr wrap="square" lIns="0" tIns="0" rIns="0" bIns="0" rtlCol="0" anchor="t"/>
-          <a:lstStyle/>
-          <a:p>
-            <a:pPr indent="0" marL="0">
-              <a:lnSpc>
-                <a:spcPct val="112000"/>
-              </a:lnSpc>
-              <a:buNone/>
-            </a:pPr>
-            <a:r>
-              <a:rPr lang="en-US" sz="2800" b="1" dirty="0">
-                <a:solidFill>
-                  <a:srgbClr val="16160F"/>
+            <a:off x="800100" y="1481138"/>
+            <a:ext cx="7543800" cy="578644"/>
+          </a:xfrm>
+          <a:prstGeom prst="rect">
+            <a:avLst/>
+          </a:prstGeom>
+          <a:noFill/>
+          <a:ln/>
+        </p:spPr>
+        <p:txBody>
+          <a:bodyPr wrap="square" lIns="0" tIns="0" rIns="0" bIns="0" rtlCol="0" anchor="t"/>
+          <a:lstStyle/>
+          <a:p>
+            <a:pPr algn="l" indent="0" marL="0">
+              <a:buNone/>
+            </a:pPr>
+            <a:r>
+              <a:rPr lang="en-US" sz="3600" b="1" dirty="0">
+                <a:solidFill>
+                  <a:srgbClr val="14140E"/>
                 </a:solidFill>
                 <a:latin typeface="Times New Roman" pitchFamily="34" charset="0"/>
                 <a:ea typeface="Times New Roman" pitchFamily="34" charset="-122"/>
@@ -4153,7 +4455,7 @@
               </a:rPr>
               <a:t>Three settings</a:t>
             </a:r>
-            <a:endParaRPr lang="en-US" sz="2800" dirty="0"/>
+            <a:endParaRPr lang="en-US" sz="3600" dirty="0"/>
           </a:p>
         </p:txBody>
       </p:sp>
@@ -4165,26 +4467,26 @@
         </p:nvSpPr>
         <p:spPr>
           <a:xfrm>
-            <a:off x="640080" y="1691640"/>
-            <a:ext cx="3108960" cy="365760"/>
-          </a:xfrm>
-          <a:prstGeom prst="rect">
-            <a:avLst/>
-          </a:prstGeom>
-          <a:noFill/>
-          <a:ln/>
-        </p:spPr>
-        <p:txBody>
-          <a:bodyPr wrap="square" lIns="0" tIns="0" rIns="0" bIns="0" rtlCol="0" anchor="ctr"/>
-          <a:lstStyle/>
-          <a:p>
-            <a:pPr indent="0" marL="0">
-              <a:buNone/>
-            </a:pPr>
-            <a:r>
-              <a:rPr lang="en-US" sz="1900" b="1" dirty="0">
-                <a:solidFill>
-                  <a:srgbClr val="16160F"/>
+            <a:off x="800100" y="2195513"/>
+            <a:ext cx="3086100" cy="372904"/>
+          </a:xfrm>
+          <a:prstGeom prst="rect">
+            <a:avLst/>
+          </a:prstGeom>
+          <a:noFill/>
+          <a:ln/>
+        </p:spPr>
+        <p:txBody>
+          <a:bodyPr wrap="square" lIns="0" tIns="0" rIns="0" bIns="0" rtlCol="0" anchor="t"/>
+          <a:lstStyle/>
+          <a:p>
+            <a:pPr algn="l" indent="0" marL="0">
+              <a:buNone/>
+            </a:pPr>
+            <a:r>
+              <a:rPr lang="en-US" sz="2000" b="1" dirty="0">
+                <a:solidFill>
+                  <a:srgbClr val="14140E"/>
                 </a:solidFill>
                 <a:latin typeface="Times New Roman" pitchFamily="34" charset="0"/>
                 <a:ea typeface="Times New Roman" pitchFamily="34" charset="-122"/>
@@ -4192,7 +4494,7 @@
               </a:rPr>
               <a:t>Cybercrime cases</a:t>
             </a:r>
-            <a:endParaRPr lang="en-US" sz="1900" dirty="0"/>
+            <a:endParaRPr lang="en-US" sz="2000" dirty="0"/>
           </a:p>
         </p:txBody>
       </p:sp>
@@ -4204,26 +4506,26 @@
         </p:nvSpPr>
         <p:spPr>
           <a:xfrm>
-            <a:off x="3840480" y="1746504"/>
-            <a:ext cx="4663440" cy="365760"/>
-          </a:xfrm>
-          <a:prstGeom prst="rect">
-            <a:avLst/>
-          </a:prstGeom>
-          <a:noFill/>
-          <a:ln/>
-        </p:spPr>
-        <p:txBody>
-          <a:bodyPr wrap="square" lIns="0" tIns="0" rIns="0" bIns="0" rtlCol="0" anchor="ctr"/>
-          <a:lstStyle/>
-          <a:p>
-            <a:pPr indent="0" marL="0">
-              <a:buNone/>
-            </a:pPr>
-            <a:r>
-              <a:rPr lang="en-US" sz="1300" dirty="0">
-                <a:solidFill>
-                  <a:srgbClr val="6B6B60"/>
+            <a:off x="4038600" y="2214563"/>
+            <a:ext cx="4305300" cy="372904"/>
+          </a:xfrm>
+          <a:prstGeom prst="rect">
+            <a:avLst/>
+          </a:prstGeom>
+          <a:noFill/>
+          <a:ln/>
+        </p:spPr>
+        <p:txBody>
+          <a:bodyPr wrap="square" lIns="0" tIns="0" rIns="0" bIns="0" rtlCol="0" anchor="t"/>
+          <a:lstStyle/>
+          <a:p>
+            <a:pPr algn="l" indent="0" marL="0">
+              <a:buNone/>
+            </a:pPr>
+            <a:r>
+              <a:rPr lang="en-US" sz="1700" dirty="0">
+                <a:solidFill>
+                  <a:srgbClr val="6E6E63"/>
                 </a:solidFill>
                 <a:latin typeface="Times New Roman" pitchFamily="34" charset="0"/>
                 <a:ea typeface="Times New Roman" pitchFamily="34" charset="-122"/>
@@ -4231,7 +4533,7 @@
               </a:rPr>
               <a:t>phone extractions, server logs</a:t>
             </a:r>
-            <a:endParaRPr lang="en-US" sz="1300" dirty="0"/>
+            <a:endParaRPr lang="en-US" sz="1700" dirty="0"/>
           </a:p>
         </p:txBody>
       </p:sp>
@@ -4243,26 +4545,26 @@
         </p:nvSpPr>
         <p:spPr>
           <a:xfrm>
-            <a:off x="640080" y="2258568"/>
-            <a:ext cx="3108960" cy="365760"/>
-          </a:xfrm>
-          <a:prstGeom prst="rect">
-            <a:avLst/>
-          </a:prstGeom>
-          <a:noFill/>
-          <a:ln/>
-        </p:spPr>
-        <p:txBody>
-          <a:bodyPr wrap="square" lIns="0" tIns="0" rIns="0" bIns="0" rtlCol="0" anchor="ctr"/>
-          <a:lstStyle/>
-          <a:p>
-            <a:pPr indent="0" marL="0">
-              <a:buNone/>
-            </a:pPr>
-            <a:r>
-              <a:rPr lang="en-US" sz="1900" b="1" dirty="0">
-                <a:solidFill>
-                  <a:srgbClr val="16160F"/>
+            <a:off x="800100" y="2595563"/>
+            <a:ext cx="3086100" cy="372904"/>
+          </a:xfrm>
+          <a:prstGeom prst="rect">
+            <a:avLst/>
+          </a:prstGeom>
+          <a:noFill/>
+          <a:ln/>
+        </p:spPr>
+        <p:txBody>
+          <a:bodyPr wrap="square" lIns="0" tIns="0" rIns="0" bIns="0" rtlCol="0" anchor="t"/>
+          <a:lstStyle/>
+          <a:p>
+            <a:pPr algn="l" indent="0" marL="0">
+              <a:buNone/>
+            </a:pPr>
+            <a:r>
+              <a:rPr lang="en-US" sz="2000" b="1" dirty="0">
+                <a:solidFill>
+                  <a:srgbClr val="14140E"/>
                 </a:solidFill>
                 <a:latin typeface="Times New Roman" pitchFamily="34" charset="0"/>
                 <a:ea typeface="Times New Roman" pitchFamily="34" charset="-122"/>
@@ -4270,7 +4572,7 @@
               </a:rPr>
               <a:t>Fraud investigations</a:t>
             </a:r>
-            <a:endParaRPr lang="en-US" sz="1900" dirty="0"/>
+            <a:endParaRPr lang="en-US" sz="2000" dirty="0"/>
           </a:p>
         </p:txBody>
       </p:sp>
@@ -4282,26 +4584,26 @@
         </p:nvSpPr>
         <p:spPr>
           <a:xfrm>
-            <a:off x="3840480" y="2313432"/>
-            <a:ext cx="4663440" cy="365760"/>
-          </a:xfrm>
-          <a:prstGeom prst="rect">
-            <a:avLst/>
-          </a:prstGeom>
-          <a:noFill/>
-          <a:ln/>
-        </p:spPr>
-        <p:txBody>
-          <a:bodyPr wrap="square" lIns="0" tIns="0" rIns="0" bIns="0" rtlCol="0" anchor="ctr"/>
-          <a:lstStyle/>
-          <a:p>
-            <a:pPr indent="0" marL="0">
-              <a:buNone/>
-            </a:pPr>
-            <a:r>
-              <a:rPr lang="en-US" sz="1300" dirty="0">
-                <a:solidFill>
-                  <a:srgbClr val="6B6B60"/>
+            <a:off x="4038600" y="2614613"/>
+            <a:ext cx="4305300" cy="372904"/>
+          </a:xfrm>
+          <a:prstGeom prst="rect">
+            <a:avLst/>
+          </a:prstGeom>
+          <a:noFill/>
+          <a:ln/>
+        </p:spPr>
+        <p:txBody>
+          <a:bodyPr wrap="square" lIns="0" tIns="0" rIns="0" bIns="0" rtlCol="0" anchor="t"/>
+          <a:lstStyle/>
+          <a:p>
+            <a:pPr algn="l" indent="0" marL="0">
+              <a:buNone/>
+            </a:pPr>
+            <a:r>
+              <a:rPr lang="en-US" sz="1700" dirty="0">
+                <a:solidFill>
+                  <a:srgbClr val="6E6E63"/>
                 </a:solidFill>
                 <a:latin typeface="Times New Roman" pitchFamily="34" charset="0"/>
                 <a:ea typeface="Times New Roman" pitchFamily="34" charset="-122"/>
@@ -4309,7 +4611,7 @@
               </a:rPr>
               <a:t>transaction records, audit logs</a:t>
             </a:r>
-            <a:endParaRPr lang="en-US" sz="1300" dirty="0"/>
+            <a:endParaRPr lang="en-US" sz="1700" dirty="0"/>
           </a:p>
         </p:txBody>
       </p:sp>
@@ -4321,26 +4623,26 @@
         </p:nvSpPr>
         <p:spPr>
           <a:xfrm>
-            <a:off x="640080" y="2825496"/>
-            <a:ext cx="3108960" cy="365760"/>
-          </a:xfrm>
-          <a:prstGeom prst="rect">
-            <a:avLst/>
-          </a:prstGeom>
-          <a:noFill/>
-          <a:ln/>
-        </p:spPr>
-        <p:txBody>
-          <a:bodyPr wrap="square" lIns="0" tIns="0" rIns="0" bIns="0" rtlCol="0" anchor="ctr"/>
-          <a:lstStyle/>
-          <a:p>
-            <a:pPr indent="0" marL="0">
-              <a:buNone/>
-            </a:pPr>
-            <a:r>
-              <a:rPr lang="en-US" sz="1900" b="1" dirty="0">
-                <a:solidFill>
-                  <a:srgbClr val="16160F"/>
+            <a:off x="800100" y="2995613"/>
+            <a:ext cx="3086100" cy="372904"/>
+          </a:xfrm>
+          <a:prstGeom prst="rect">
+            <a:avLst/>
+          </a:prstGeom>
+          <a:noFill/>
+          <a:ln/>
+        </p:spPr>
+        <p:txBody>
+          <a:bodyPr wrap="square" lIns="0" tIns="0" rIns="0" bIns="0" rtlCol="0" anchor="t"/>
+          <a:lstStyle/>
+          <a:p>
+            <a:pPr algn="l" indent="0" marL="0">
+              <a:buNone/>
+            </a:pPr>
+            <a:r>
+              <a:rPr lang="en-US" sz="2000" b="1" dirty="0">
+                <a:solidFill>
+                  <a:srgbClr val="14140E"/>
                 </a:solidFill>
                 <a:latin typeface="Times New Roman" pitchFamily="34" charset="0"/>
                 <a:ea typeface="Times New Roman" pitchFamily="34" charset="-122"/>
@@ -4348,7 +4650,7 @@
               </a:rPr>
               <a:t>Disciplinary panels</a:t>
             </a:r>
-            <a:endParaRPr lang="en-US" sz="1900" dirty="0"/>
+            <a:endParaRPr lang="en-US" sz="2000" dirty="0"/>
           </a:p>
         </p:txBody>
       </p:sp>
@@ -4360,26 +4662,26 @@
         </p:nvSpPr>
         <p:spPr>
           <a:xfrm>
-            <a:off x="3840480" y="2880360"/>
-            <a:ext cx="4663440" cy="365760"/>
-          </a:xfrm>
-          <a:prstGeom prst="rect">
-            <a:avLst/>
-          </a:prstGeom>
-          <a:noFill/>
-          <a:ln/>
-        </p:spPr>
-        <p:txBody>
-          <a:bodyPr wrap="square" lIns="0" tIns="0" rIns="0" bIns="0" rtlCol="0" anchor="ctr"/>
-          <a:lstStyle/>
-          <a:p>
-            <a:pPr indent="0" marL="0">
-              <a:buNone/>
-            </a:pPr>
-            <a:r>
-              <a:rPr lang="en-US" sz="1300" dirty="0">
-                <a:solidFill>
-                  <a:srgbClr val="6B6B60"/>
+            <a:off x="4038600" y="3014663"/>
+            <a:ext cx="4305300" cy="372904"/>
+          </a:xfrm>
+          <a:prstGeom prst="rect">
+            <a:avLst/>
+          </a:prstGeom>
+          <a:noFill/>
+          <a:ln/>
+        </p:spPr>
+        <p:txBody>
+          <a:bodyPr wrap="square" lIns="0" tIns="0" rIns="0" bIns="0" rtlCol="0" anchor="t"/>
+          <a:lstStyle/>
+          <a:p>
+            <a:pPr algn="l" indent="0" marL="0">
+              <a:buNone/>
+            </a:pPr>
+            <a:r>
+              <a:rPr lang="en-US" sz="1700" dirty="0">
+                <a:solidFill>
+                  <a:srgbClr val="6E6E63"/>
                 </a:solidFill>
                 <a:latin typeface="Times New Roman" pitchFamily="34" charset="0"/>
                 <a:ea typeface="Times New Roman" pitchFamily="34" charset="-122"/>
@@ -4387,7 +4689,7 @@
               </a:rPr>
               <a:t>message exports, access logs</a:t>
             </a:r>
-            <a:endParaRPr lang="en-US" sz="1300" dirty="0"/>
+            <a:endParaRPr lang="en-US" sz="1700" dirty="0"/>
           </a:p>
         </p:txBody>
       </p:sp>
@@ -4399,37 +4701,73 @@
         </p:nvSpPr>
         <p:spPr>
           <a:xfrm>
-            <a:off x="640080" y="3749040"/>
-            <a:ext cx="7863840" cy="822960"/>
-          </a:xfrm>
-          <a:prstGeom prst="rect">
-            <a:avLst/>
-          </a:prstGeom>
-          <a:noFill/>
-          <a:ln/>
-        </p:spPr>
-        <p:txBody>
-          <a:bodyPr wrap="square" lIns="0" tIns="0" rIns="0" bIns="0" rtlCol="0" anchor="t"/>
-          <a:lstStyle/>
-          <a:p>
-            <a:pPr indent="0" marL="0">
-              <a:lnSpc>
-                <a:spcPct val="125000"/>
-              </a:lnSpc>
-              <a:buNone/>
-            </a:pPr>
-            <a:r>
-              <a:rPr lang="en-US" sz="1500" dirty="0">
-                <a:solidFill>
-                  <a:srgbClr val="16160F"/>
-                </a:solidFill>
-                <a:latin typeface="Times New Roman" pitchFamily="34" charset="0"/>
-                <a:ea typeface="Times New Roman" pitchFamily="34" charset="-122"/>
-                <a:cs typeface="Times New Roman" pitchFamily="34" charset="-120"/>
-              </a:rPr>
-              <a:t>In each one, the handling record is on paper, if it exists at all.</a:t>
-            </a:r>
-            <a:endParaRPr lang="en-US" sz="1500" dirty="0"/>
+            <a:off x="800100" y="3662362"/>
+            <a:ext cx="7543800" cy="372904"/>
+          </a:xfrm>
+          <a:prstGeom prst="rect">
+            <a:avLst/>
+          </a:prstGeom>
+          <a:noFill/>
+          <a:ln/>
+        </p:spPr>
+        <p:txBody>
+          <a:bodyPr wrap="square" lIns="0" tIns="0" rIns="0" bIns="0" rtlCol="0" anchor="t"/>
+          <a:lstStyle/>
+          <a:p>
+            <a:pPr algn="l" indent="0" marL="0">
+              <a:buNone/>
+            </a:pPr>
+            <a:r>
+              <a:rPr lang="en-US" sz="2000" dirty="0">
+                <a:solidFill>
+                  <a:srgbClr val="14140E"/>
+                </a:solidFill>
+                <a:latin typeface="Times New Roman" pitchFamily="34" charset="0"/>
+                <a:ea typeface="Times New Roman" pitchFamily="34" charset="-122"/>
+                <a:cs typeface="Times New Roman" pitchFamily="34" charset="-120"/>
+              </a:rPr>
+              <a:t>In each one the handling record is on paper, if it exists at all,</a:t>
+            </a:r>
+            <a:endParaRPr lang="en-US" sz="2000" dirty="0"/>
+          </a:p>
+        </p:txBody>
+      </p:sp>
+      <p:sp>
+        <p:nvSpPr>
+          <p:cNvPr id="13" name="Text 10"/>
+          <p:cNvSpPr txBox="1"/>
+          <p:nvPr/>
+        </p:nvSpPr>
+        <p:spPr>
+          <a:xfrm>
+            <a:off x="800100" y="3938588"/>
+            <a:ext cx="7543800" cy="372904"/>
+          </a:xfrm>
+          <a:prstGeom prst="rect">
+            <a:avLst/>
+          </a:prstGeom>
+          <a:noFill/>
+          <a:ln/>
+        </p:spPr>
+        <p:txBody>
+          <a:bodyPr wrap="square" lIns="0" tIns="0" rIns="0" bIns="0" rtlCol="0" anchor="t"/>
+          <a:lstStyle/>
+          <a:p>
+            <a:pPr algn="l" indent="0" marL="0">
+              <a:buNone/>
+            </a:pPr>
+            <a:r>
+              <a:rPr lang="en-US" sz="2000" dirty="0">
+                <a:solidFill>
+                  <a:srgbClr val="14140E"/>
+                </a:solidFill>
+                <a:latin typeface="Times New Roman" pitchFamily="34" charset="0"/>
+                <a:ea typeface="Times New Roman" pitchFamily="34" charset="-122"/>
+                <a:cs typeface="Times New Roman" pitchFamily="34" charset="-120"/>
+              </a:rPr>
+              <a:t>and the evidence is a file that anyone could have opened.</a:t>
+            </a:r>
+            <a:endParaRPr lang="en-US" sz="2000" dirty="0"/>
           </a:p>
         </p:txBody>
       </p:sp>
@@ -4447,7 +4785,7 @@
     <p:bg>
       <p:bgPr>
         <a:solidFill>
-          <a:srgbClr val="FBFBF8"/>
+          <a:srgbClr val="FCFCF9"/>
         </a:solidFill>
       </p:bgPr>
     </p:bg>
@@ -4467,92 +4805,302 @@
       </p:grpSpPr>
       <p:sp>
         <p:nvSpPr>
-          <p:cNvPr id="2" name="Text 0"/>
-          <p:cNvSpPr txBox="1"/>
-          <p:nvPr/>
-        </p:nvSpPr>
-        <p:spPr>
-          <a:xfrm>
-            <a:off x="640080" y="310896"/>
-            <a:ext cx="7863840" cy="274320"/>
-          </a:xfrm>
-          <a:prstGeom prst="rect">
-            <a:avLst/>
-          </a:prstGeom>
-          <a:noFill/>
-          <a:ln/>
-        </p:spPr>
-        <p:txBody>
-          <a:bodyPr wrap="square" lIns="0" tIns="0" rIns="0" bIns="0" rtlCol="0" anchor="ctr"/>
+          <p:cNvPr id="3" name="Text 0"/>
+          <p:cNvSpPr txBox="1"/>
+          <p:nvPr/>
+        </p:nvSpPr>
+        <p:spPr>
+          <a:xfrm>
+            <a:off x="800100" y="571500"/>
+            <a:ext cx="7543800" cy="205740"/>
+          </a:xfrm>
+          <a:prstGeom prst="rect">
+            <a:avLst/>
+          </a:prstGeom>
+          <a:noFill/>
+          <a:ln/>
+        </p:spPr>
+        <p:txBody>
+          <a:bodyPr wrap="square" lIns="0" tIns="0" rIns="0" bIns="0" rtlCol="0" anchor="t"/>
+          <a:lstStyle/>
+          <a:p>
+            <a:pPr algn="l" indent="0" marL="0">
+              <a:buNone/>
+            </a:pPr>
+            <a:r>
+              <a:rPr lang="en-US" sz="1150" spc="110" kern="0" dirty="0">
+                <a:solidFill>
+                  <a:srgbClr val="6E6E63"/>
+                </a:solidFill>
+                <a:latin typeface="Times New Roman" pitchFamily="34" charset="0"/>
+                <a:ea typeface="Times New Roman" pitchFamily="34" charset="-122"/>
+                <a:cs typeface="Times New Roman" pitchFamily="34" charset="-120"/>
+              </a:rPr>
+              <a:t>The idea</a:t>
+            </a:r>
+            <a:endParaRPr lang="en-US" sz="1150" dirty="0"/>
+          </a:p>
+        </p:txBody>
+      </p:sp>
+      <p:sp>
+        <p:nvSpPr>
+          <p:cNvPr id="4" name="Text 1"/>
+          <p:cNvSpPr txBox="1"/>
+          <p:nvPr/>
+        </p:nvSpPr>
+        <p:spPr>
+          <a:xfrm>
+            <a:off x="7962900" y="4648200"/>
+            <a:ext cx="381000" cy="171450"/>
+          </a:xfrm>
+          <a:prstGeom prst="rect">
+            <a:avLst/>
+          </a:prstGeom>
+          <a:noFill/>
+          <a:ln/>
+        </p:spPr>
+        <p:txBody>
+          <a:bodyPr wrap="square" lIns="0" tIns="0" rIns="0" bIns="0" rtlCol="0" anchor="t"/>
+          <a:lstStyle/>
+          <a:p>
+            <a:pPr algn="r" indent="0" marL="0">
+              <a:buNone/>
+            </a:pPr>
+            <a:r>
+              <a:rPr lang="en-US" sz="1050" dirty="0">
+                <a:solidFill>
+                  <a:srgbClr val="9A9A90"/>
+                </a:solidFill>
+                <a:latin typeface="Times New Roman" pitchFamily="34" charset="0"/>
+                <a:ea typeface="Times New Roman" pitchFamily="34" charset="-122"/>
+                <a:cs typeface="Times New Roman" pitchFamily="34" charset="-120"/>
+              </a:rPr>
+              <a:t>4</a:t>
+            </a:r>
+            <a:endParaRPr lang="en-US" sz="1050" dirty="0"/>
+          </a:p>
+        </p:txBody>
+      </p:sp>
+      <p:sp>
+        <p:nvSpPr>
+          <p:cNvPr id="5" name="Text 2"/>
+          <p:cNvSpPr txBox="1"/>
+          <p:nvPr/>
+        </p:nvSpPr>
+        <p:spPr>
+          <a:xfrm>
+            <a:off x="800100" y="1443038"/>
+            <a:ext cx="7543800" cy="578644"/>
+          </a:xfrm>
+          <a:prstGeom prst="rect">
+            <a:avLst/>
+          </a:prstGeom>
+          <a:noFill/>
+          <a:ln/>
+        </p:spPr>
+        <p:txBody>
+          <a:bodyPr wrap="square" lIns="0" tIns="0" rIns="0" bIns="0" rtlCol="0" anchor="t"/>
+          <a:lstStyle/>
+          <a:p>
+            <a:pPr algn="l" indent="0" marL="0">
+              <a:buNone/>
+            </a:pPr>
+            <a:r>
+              <a:rPr lang="en-US" sz="3600" b="1" dirty="0">
+                <a:solidFill>
+                  <a:srgbClr val="14140E"/>
+                </a:solidFill>
+                <a:latin typeface="Times New Roman" pitchFamily="34" charset="0"/>
+                <a:ea typeface="Times New Roman" pitchFamily="34" charset="-122"/>
+                <a:cs typeface="Times New Roman" pitchFamily="34" charset="-120"/>
+              </a:rPr>
+              <a:t>Same file, same code. Every time.</a:t>
+            </a:r>
+            <a:endParaRPr lang="en-US" sz="3600" dirty="0"/>
+          </a:p>
+        </p:txBody>
+      </p:sp>
+      <p:sp>
+        <p:nvSpPr>
+          <p:cNvPr id="6" name="Shape 3"/>
+          <p:cNvSpPr/>
+          <p:nvPr/>
+        </p:nvSpPr>
+        <p:spPr>
+          <a:xfrm>
+            <a:off x="800100" y="2157413"/>
+            <a:ext cx="6667500" cy="514350"/>
+          </a:xfrm>
+          <a:prstGeom prst="roundRect">
+            <a:avLst>
+              <a:gd name="adj" fmla="val 9259"/>
+            </a:avLst>
+          </a:prstGeom>
+          <a:solidFill>
+            <a:srgbClr val="E9F5EC"/>
+          </a:solidFill>
+          <a:ln w="12700">
+            <a:solidFill>
+              <a:srgbClr val="C2E3CB"/>
+            </a:solidFill>
+            <a:prstDash val="solid"/>
+          </a:ln>
+        </p:spPr>
+      </p:sp>
+      <p:sp>
+        <p:nvSpPr>
+          <p:cNvPr id="7" name="Text 4"/>
+          <p:cNvSpPr txBox="1"/>
+          <p:nvPr/>
+        </p:nvSpPr>
+        <p:spPr>
+          <a:xfrm>
+            <a:off x="971550" y="2233613"/>
+            <a:ext cx="6324600" cy="231458"/>
+          </a:xfrm>
+          <a:prstGeom prst="rect">
+            <a:avLst/>
+          </a:prstGeom>
+          <a:noFill/>
+          <a:ln/>
+        </p:spPr>
+        <p:txBody>
+          <a:bodyPr wrap="square" lIns="0" tIns="0" rIns="0" bIns="0" rtlCol="0" anchor="t"/>
+          <a:lstStyle/>
+          <a:p>
+            <a:pPr algn="l" indent="0" marL="0">
+              <a:buNone/>
+            </a:pPr>
+            <a:r>
+              <a:rPr lang="en-US" sz="1250" dirty="0">
+                <a:solidFill>
+                  <a:srgbClr val="6E6E63"/>
+                </a:solidFill>
+                <a:latin typeface="Times New Roman" pitchFamily="34" charset="0"/>
+                <a:ea typeface="Times New Roman" pitchFamily="34" charset="-122"/>
+                <a:cs typeface="Times New Roman" pitchFamily="34" charset="-120"/>
+              </a:rPr>
+              <a:t>statement.pdf</a:t>
+            </a:r>
+            <a:endParaRPr lang="en-US" sz="1250" dirty="0"/>
+          </a:p>
+        </p:txBody>
+      </p:sp>
+      <p:sp>
+        <p:nvSpPr>
+          <p:cNvPr id="8" name="Text 5"/>
+          <p:cNvSpPr txBox="1"/>
+          <p:nvPr/>
+        </p:nvSpPr>
+        <p:spPr>
+          <a:xfrm>
+            <a:off x="971550" y="2405063"/>
+            <a:ext cx="6324600" cy="209550"/>
+          </a:xfrm>
+          <a:prstGeom prst="rect">
+            <a:avLst/>
+          </a:prstGeom>
+          <a:noFill/>
+          <a:ln/>
+        </p:spPr>
+        <p:txBody>
+          <a:bodyPr wrap="square" lIns="0" tIns="0" rIns="0" bIns="0" rtlCol="0" anchor="t"/>
           <a:lstStyle/>
           <a:p>
             <a:pPr indent="0" marL="0">
               <a:buNone/>
             </a:pPr>
             <a:r>
-              <a:rPr lang="en-US" sz="1200" spc="100" kern="0" dirty="0">
-                <a:solidFill>
-                  <a:srgbClr val="6B6B60"/>
-                </a:solidFill>
-                <a:latin typeface="Times New Roman" pitchFamily="34" charset="0"/>
-                <a:ea typeface="Times New Roman" pitchFamily="34" charset="-122"/>
-                <a:cs typeface="Times New Roman" pitchFamily="34" charset="-120"/>
-              </a:rPr>
-              <a:t>The idea</a:t>
-            </a:r>
-            <a:endParaRPr lang="en-US" sz="1200" dirty="0"/>
-          </a:p>
-        </p:txBody>
-      </p:sp>
-      <p:sp>
-        <p:nvSpPr>
-          <p:cNvPr id="3" name="Text 1"/>
-          <p:cNvSpPr txBox="1"/>
-          <p:nvPr/>
-        </p:nvSpPr>
-        <p:spPr>
-          <a:xfrm>
-            <a:off x="8138160" y="4576572"/>
-            <a:ext cx="365760" cy="256032"/>
-          </a:xfrm>
-          <a:prstGeom prst="rect">
-            <a:avLst/>
-          </a:prstGeom>
-          <a:noFill/>
-          <a:ln/>
-        </p:spPr>
-        <p:txBody>
-          <a:bodyPr wrap="square" lIns="0" tIns="0" rIns="0" bIns="0" rtlCol="0" anchor="ctr"/>
-          <a:lstStyle/>
-          <a:p>
-            <a:pPr algn="r" indent="0" marL="0">
-              <a:buNone/>
-            </a:pPr>
-            <a:r>
-              <a:rPr lang="en-US" sz="1000" dirty="0">
-                <a:solidFill>
-                  <a:srgbClr val="C9C9BF"/>
-                </a:solidFill>
-                <a:latin typeface="Times New Roman" pitchFamily="34" charset="0"/>
-                <a:ea typeface="Times New Roman" pitchFamily="34" charset="-122"/>
-                <a:cs typeface="Times New Roman" pitchFamily="34" charset="-120"/>
-              </a:rPr>
-              <a:t>4</a:t>
-            </a:r>
-            <a:endParaRPr lang="en-US" sz="1000" dirty="0"/>
-          </a:p>
-        </p:txBody>
-      </p:sp>
-      <p:sp>
-        <p:nvSpPr>
-          <p:cNvPr id="5" name="Text 2"/>
-          <p:cNvSpPr txBox="1"/>
-          <p:nvPr/>
-        </p:nvSpPr>
-        <p:spPr>
-          <a:xfrm>
-            <a:off x="640080" y="960120"/>
-            <a:ext cx="7863840" cy="1234440"/>
+              <a:rPr lang="en-US" sz="1500" b="1" spc="40" kern="0" dirty="0">
+                <a:solidFill>
+                  <a:srgbClr val="1A7F37"/>
+                </a:solidFill>
+                <a:latin typeface="Courier New" pitchFamily="34" charset="0"/>
+                <a:ea typeface="Courier New" pitchFamily="34" charset="-122"/>
+                <a:cs typeface="Courier New" pitchFamily="34" charset="-120"/>
+              </a:rPr>
+              <a:t>A3F1 9C22 7E04 6B8D 1C55 E210 44AF 9D31</a:t>
+            </a:r>
+            <a:endParaRPr lang="en-US" sz="1500" dirty="0"/>
+          </a:p>
+        </p:txBody>
+      </p:sp>
+      <p:sp>
+        <p:nvSpPr>
+          <p:cNvPr id="9" name="Shape 6"/>
+          <p:cNvSpPr/>
+          <p:nvPr/>
+        </p:nvSpPr>
+        <p:spPr>
+          <a:xfrm>
+            <a:off x="800100" y="2805113"/>
+            <a:ext cx="6667500" cy="514350"/>
+          </a:xfrm>
+          <a:prstGeom prst="roundRect">
+            <a:avLst>
+              <a:gd name="adj" fmla="val 9259"/>
+            </a:avLst>
+          </a:prstGeom>
+          <a:solidFill>
+            <a:srgbClr val="FDECEB"/>
+          </a:solidFill>
+          <a:ln w="12700">
+            <a:solidFill>
+              <a:srgbClr val="F0C8C4"/>
+            </a:solidFill>
+            <a:prstDash val="solid"/>
+          </a:ln>
+        </p:spPr>
+      </p:sp>
+      <p:sp>
+        <p:nvSpPr>
+          <p:cNvPr id="10" name="Text 7"/>
+          <p:cNvSpPr txBox="1"/>
+          <p:nvPr/>
+        </p:nvSpPr>
+        <p:spPr>
+          <a:xfrm>
+            <a:off x="971550" y="2881313"/>
+            <a:ext cx="6324600" cy="231458"/>
+          </a:xfrm>
+          <a:prstGeom prst="rect">
+            <a:avLst/>
+          </a:prstGeom>
+          <a:noFill/>
+          <a:ln/>
+        </p:spPr>
+        <p:txBody>
+          <a:bodyPr wrap="square" lIns="0" tIns="0" rIns="0" bIns="0" rtlCol="0" anchor="t"/>
+          <a:lstStyle/>
+          <a:p>
+            <a:pPr algn="l" indent="0" marL="0">
+              <a:buNone/>
+            </a:pPr>
+            <a:r>
+              <a:rPr lang="en-US" sz="1250" dirty="0">
+                <a:solidFill>
+                  <a:srgbClr val="6E6E63"/>
+                </a:solidFill>
+                <a:latin typeface="Times New Roman" pitchFamily="34" charset="0"/>
+                <a:ea typeface="Times New Roman" pitchFamily="34" charset="-122"/>
+                <a:cs typeface="Times New Roman" pitchFamily="34" charset="-120"/>
+              </a:rPr>
+              <a:t>statement.pdf  (one character changed)</a:t>
+            </a:r>
+            <a:endParaRPr lang="en-US" sz="1250" dirty="0"/>
+          </a:p>
+        </p:txBody>
+      </p:sp>
+      <p:sp>
+        <p:nvSpPr>
+          <p:cNvPr id="11" name="Text 8"/>
+          <p:cNvSpPr txBox="1"/>
+          <p:nvPr/>
+        </p:nvSpPr>
+        <p:spPr>
+          <a:xfrm>
+            <a:off x="971550" y="3052763"/>
+            <a:ext cx="6324600" cy="209550"/>
           </a:xfrm>
           <a:prstGeom prst="rect">
             <a:avLst/>
@@ -4565,189 +5113,98 @@
           <a:lstStyle/>
           <a:p>
             <a:pPr indent="0" marL="0">
-              <a:lnSpc>
-                <a:spcPct val="112000"/>
-              </a:lnSpc>
-              <a:buNone/>
-            </a:pPr>
-            <a:r>
-              <a:rPr lang="en-US" sz="2700" b="1" dirty="0">
-                <a:solidFill>
-                  <a:srgbClr val="16160F"/>
-                </a:solidFill>
-                <a:latin typeface="Times New Roman" pitchFamily="34" charset="0"/>
-                <a:ea typeface="Times New Roman" pitchFamily="34" charset="-122"/>
-                <a:cs typeface="Times New Roman" pitchFamily="34" charset="-120"/>
-              </a:rPr>
-              <a:t>A computer can read a file and produce</a:t>
-            </a:r>
-            <a:endParaRPr lang="en-US" sz="2700" dirty="0"/>
-          </a:p>
-          <a:p>
-            <a:pPr indent="0" marL="0">
-              <a:lnSpc>
-                <a:spcPct val="112000"/>
-              </a:lnSpc>
-              <a:buNone/>
-            </a:pPr>
-            <a:r>
-              <a:rPr lang="en-US" sz="2700" b="1" dirty="0">
-                <a:solidFill>
-                  <a:srgbClr val="16160F"/>
-                </a:solidFill>
-                <a:latin typeface="Times New Roman" pitchFamily="34" charset="0"/>
-                <a:ea typeface="Times New Roman" pitchFamily="34" charset="-122"/>
-                <a:cs typeface="Times New Roman" pitchFamily="34" charset="-120"/>
-              </a:rPr>
-              <a:t>a short code from its contents.</a:t>
-            </a:r>
-            <a:endParaRPr lang="en-US" sz="2700" dirty="0"/>
-          </a:p>
-        </p:txBody>
-      </p:sp>
-      <p:sp>
-        <p:nvSpPr>
-          <p:cNvPr id="6" name="Text 3"/>
-          <p:cNvSpPr txBox="1"/>
-          <p:nvPr/>
-        </p:nvSpPr>
-        <p:spPr>
-          <a:xfrm>
-            <a:off x="640080" y="2286000"/>
-            <a:ext cx="7863840" cy="822960"/>
-          </a:xfrm>
-          <a:prstGeom prst="rect">
-            <a:avLst/>
-          </a:prstGeom>
-          <a:noFill/>
-          <a:ln/>
-        </p:spPr>
-        <p:txBody>
-          <a:bodyPr wrap="square" lIns="0" tIns="0" rIns="0" bIns="0" rtlCol="0" anchor="t"/>
-          <a:lstStyle/>
-          <a:p>
-            <a:pPr indent="0" marL="0">
-              <a:lnSpc>
-                <a:spcPct val="125000"/>
-              </a:lnSpc>
-              <a:buNone/>
-            </a:pPr>
-            <a:r>
-              <a:rPr lang="en-US" sz="1900" dirty="0">
-                <a:solidFill>
-                  <a:srgbClr val="16160F"/>
-                </a:solidFill>
-                <a:latin typeface="Times New Roman" pitchFamily="34" charset="0"/>
-                <a:ea typeface="Times New Roman" pitchFamily="34" charset="-122"/>
-                <a:cs typeface="Times New Roman" pitchFamily="34" charset="-120"/>
-              </a:rPr>
-              <a:t>Same file, same code, every time.</a:t>
-            </a:r>
-            <a:endParaRPr lang="en-US" sz="1900" dirty="0"/>
-          </a:p>
-        </p:txBody>
-      </p:sp>
-      <p:sp>
-        <p:nvSpPr>
-          <p:cNvPr id="7" name="Text 4"/>
-          <p:cNvSpPr txBox="1"/>
-          <p:nvPr/>
-        </p:nvSpPr>
-        <p:spPr>
-          <a:xfrm>
-            <a:off x="640080" y="2743200"/>
-            <a:ext cx="7863840" cy="731520"/>
-          </a:xfrm>
-          <a:prstGeom prst="rect">
-            <a:avLst/>
-          </a:prstGeom>
-          <a:noFill/>
-          <a:ln/>
-        </p:spPr>
-        <p:txBody>
-          <a:bodyPr wrap="square" lIns="0" tIns="0" rIns="0" bIns="0" rtlCol="0" anchor="t"/>
-          <a:lstStyle/>
-          <a:p>
-            <a:pPr indent="0" marL="0">
-              <a:lnSpc>
-                <a:spcPct val="125000"/>
-              </a:lnSpc>
-              <a:buNone/>
-            </a:pPr>
-            <a:r>
-              <a:rPr lang="en-US" sz="1900" dirty="0">
-                <a:solidFill>
-                  <a:srgbClr val="16160F"/>
-                </a:solidFill>
-                <a:latin typeface="Times New Roman" pitchFamily="34" charset="0"/>
-                <a:ea typeface="Times New Roman" pitchFamily="34" charset="-122"/>
-                <a:cs typeface="Times New Roman" pitchFamily="34" charset="-120"/>
-              </a:rPr>
-              <a:t>Change one letter anywhere inside, and the code comes out</a:t>
-            </a:r>
-            <a:endParaRPr lang="en-US" sz="1900" dirty="0"/>
-          </a:p>
-          <a:p>
-            <a:pPr indent="0" marL="0">
-              <a:lnSpc>
-                <a:spcPct val="125000"/>
-              </a:lnSpc>
-              <a:buNone/>
-            </a:pPr>
-            <a:r>
-              <a:rPr lang="en-US" sz="1900" dirty="0">
-                <a:solidFill>
-                  <a:srgbClr val="16160F"/>
-                </a:solidFill>
-                <a:latin typeface="Times New Roman" pitchFamily="34" charset="0"/>
-                <a:ea typeface="Times New Roman" pitchFamily="34" charset="-122"/>
-                <a:cs typeface="Times New Roman" pitchFamily="34" charset="-120"/>
-              </a:rPr>
-              <a:t>completely different.</a:t>
-            </a:r>
-            <a:endParaRPr lang="en-US" sz="1900" dirty="0"/>
-          </a:p>
-        </p:txBody>
-      </p:sp>
-      <p:sp>
-        <p:nvSpPr>
-          <p:cNvPr id="8" name="Text 5"/>
-          <p:cNvSpPr txBox="1"/>
-          <p:nvPr/>
-        </p:nvSpPr>
-        <p:spPr>
-          <a:xfrm>
-            <a:off x="640080" y="3822192"/>
-            <a:ext cx="7863840" cy="822960"/>
-          </a:xfrm>
-          <a:prstGeom prst="rect">
-            <a:avLst/>
-          </a:prstGeom>
-          <a:noFill/>
-          <a:ln/>
-        </p:spPr>
-        <p:txBody>
-          <a:bodyPr wrap="square" lIns="0" tIns="0" rIns="0" bIns="0" rtlCol="0" anchor="t"/>
-          <a:lstStyle/>
-          <a:p>
-            <a:pPr indent="0" marL="0">
-              <a:lnSpc>
-                <a:spcPct val="125000"/>
-              </a:lnSpc>
-              <a:buNone/>
-            </a:pPr>
-            <a:r>
-              <a:rPr lang="en-US" sz="1200" i="1" dirty="0">
-                <a:solidFill>
-                  <a:srgbClr val="6B6B60"/>
-                </a:solidFill>
-                <a:latin typeface="Times New Roman" pitchFamily="34" charset="0"/>
-                <a:ea typeface="Times New Roman" pitchFamily="34" charset="-122"/>
-                <a:cs typeface="Times New Roman" pitchFamily="34" charset="-120"/>
-              </a:rPr>
-              <a:t>The code is taken at the scene, on the collecting officer's own phone, before the file goes anywhere else. It is taken again months later and compared. Match means untouched.</a:t>
-            </a:r>
-            <a:endParaRPr lang="en-US" sz="1200" dirty="0"/>
+              <a:buNone/>
+            </a:pPr>
+            <a:r>
+              <a:rPr lang="en-US" sz="1500" b="1" spc="40" kern="0" dirty="0">
+                <a:solidFill>
+                  <a:srgbClr val="B42318"/>
+                </a:solidFill>
+                <a:latin typeface="Courier New" pitchFamily="34" charset="0"/>
+                <a:ea typeface="Courier New" pitchFamily="34" charset="-122"/>
+                <a:cs typeface="Courier New" pitchFamily="34" charset="-120"/>
+              </a:rPr>
+              <a:t>8B02 41DE C5A7 F014 92E6 3B7C D885 07A2</a:t>
+            </a:r>
+            <a:endParaRPr lang="en-US" sz="1500" dirty="0"/>
+          </a:p>
+        </p:txBody>
+      </p:sp>
+      <p:sp>
+        <p:nvSpPr>
+          <p:cNvPr id="12" name="Text 9"/>
+          <p:cNvSpPr txBox="1"/>
+          <p:nvPr/>
+        </p:nvSpPr>
+        <p:spPr>
+          <a:xfrm>
+            <a:off x="800100" y="3700463"/>
+            <a:ext cx="7543800" cy="372904"/>
+          </a:xfrm>
+          <a:prstGeom prst="rect">
+            <a:avLst/>
+          </a:prstGeom>
+          <a:noFill/>
+          <a:ln/>
+        </p:spPr>
+        <p:txBody>
+          <a:bodyPr wrap="square" lIns="0" tIns="0" rIns="0" bIns="0" rtlCol="0" anchor="t"/>
+          <a:lstStyle/>
+          <a:p>
+            <a:pPr algn="l" indent="0" marL="0">
+              <a:buNone/>
+            </a:pPr>
+            <a:r>
+              <a:rPr lang="en-US" sz="2000" dirty="0">
+                <a:solidFill>
+                  <a:srgbClr val="14140E"/>
+                </a:solidFill>
+                <a:latin typeface="Times New Roman" pitchFamily="34" charset="0"/>
+                <a:ea typeface="Times New Roman" pitchFamily="34" charset="-122"/>
+                <a:cs typeface="Times New Roman" pitchFamily="34" charset="-120"/>
+              </a:rPr>
+              <a:t>One character changed in a 40 page statement.</a:t>
+            </a:r>
+            <a:endParaRPr lang="en-US" sz="2000" dirty="0"/>
+          </a:p>
+        </p:txBody>
+      </p:sp>
+      <p:sp>
+        <p:nvSpPr>
+          <p:cNvPr id="13" name="Text 10"/>
+          <p:cNvSpPr txBox="1"/>
+          <p:nvPr/>
+        </p:nvSpPr>
+        <p:spPr>
+          <a:xfrm>
+            <a:off x="800100" y="3976687"/>
+            <a:ext cx="7543800" cy="372904"/>
+          </a:xfrm>
+          <a:prstGeom prst="rect">
+            <a:avLst/>
+          </a:prstGeom>
+          <a:noFill/>
+          <a:ln/>
+        </p:spPr>
+        <p:txBody>
+          <a:bodyPr wrap="square" lIns="0" tIns="0" rIns="0" bIns="0" rtlCol="0" anchor="t"/>
+          <a:lstStyle/>
+          <a:p>
+            <a:pPr algn="l" indent="0" marL="0">
+              <a:buNone/>
+            </a:pPr>
+            <a:r>
+              <a:rPr lang="en-US" sz="2000" dirty="0">
+                <a:solidFill>
+                  <a:srgbClr val="14140E"/>
+                </a:solidFill>
+                <a:latin typeface="Times New Roman" pitchFamily="34" charset="0"/>
+                <a:ea typeface="Times New Roman" pitchFamily="34" charset="-122"/>
+                <a:cs typeface="Times New Roman" pitchFamily="34" charset="-120"/>
+              </a:rPr>
+              <a:t>Nothing else about the file is different.</a:t>
+            </a:r>
+            <a:endParaRPr lang="en-US" sz="2000" dirty="0"/>
           </a:p>
         </p:txBody>
       </p:sp>
@@ -4765,7 +5222,7 @@
     <p:bg>
       <p:bgPr>
         <a:solidFill>
-          <a:srgbClr val="FBFBF8"/>
+          <a:srgbClr val="FCFCF9"/>
         </a:solidFill>
       </p:bgPr>
     </p:bg>
@@ -4785,32 +5242,32 @@
       </p:grpSpPr>
       <p:sp>
         <p:nvSpPr>
-          <p:cNvPr id="2" name="Text 0"/>
-          <p:cNvSpPr txBox="1"/>
-          <p:nvPr/>
-        </p:nvSpPr>
-        <p:spPr>
-          <a:xfrm>
-            <a:off x="640080" y="310896"/>
-            <a:ext cx="7863840" cy="274320"/>
-          </a:xfrm>
-          <a:prstGeom prst="rect">
-            <a:avLst/>
-          </a:prstGeom>
-          <a:noFill/>
-          <a:ln/>
-        </p:spPr>
-        <p:txBody>
-          <a:bodyPr wrap="square" lIns="0" tIns="0" rIns="0" bIns="0" rtlCol="0" anchor="ctr"/>
-          <a:lstStyle/>
-          <a:p>
-            <a:pPr indent="0" marL="0">
-              <a:buNone/>
-            </a:pPr>
-            <a:r>
-              <a:rPr lang="en-US" sz="1200" spc="100" kern="0" dirty="0">
-                <a:solidFill>
-                  <a:srgbClr val="6B6B60"/>
+          <p:cNvPr id="3" name="Text 0"/>
+          <p:cNvSpPr txBox="1"/>
+          <p:nvPr/>
+        </p:nvSpPr>
+        <p:spPr>
+          <a:xfrm>
+            <a:off x="800100" y="571500"/>
+            <a:ext cx="7543800" cy="205740"/>
+          </a:xfrm>
+          <a:prstGeom prst="rect">
+            <a:avLst/>
+          </a:prstGeom>
+          <a:noFill/>
+          <a:ln/>
+        </p:spPr>
+        <p:txBody>
+          <a:bodyPr wrap="square" lIns="0" tIns="0" rIns="0" bIns="0" rtlCol="0" anchor="t"/>
+          <a:lstStyle/>
+          <a:p>
+            <a:pPr algn="l" indent="0" marL="0">
+              <a:buNone/>
+            </a:pPr>
+            <a:r>
+              <a:rPr lang="en-US" sz="1150" spc="110" kern="0" dirty="0">
+                <a:solidFill>
+                  <a:srgbClr val="6E6E63"/>
                 </a:solidFill>
                 <a:latin typeface="Times New Roman" pitchFamily="34" charset="0"/>
                 <a:ea typeface="Times New Roman" pitchFamily="34" charset="-122"/>
@@ -4818,38 +5275,38 @@
               </a:rPr>
               <a:t>The idea, part two</a:t>
             </a:r>
-            <a:endParaRPr lang="en-US" sz="1200" dirty="0"/>
-          </a:p>
-        </p:txBody>
-      </p:sp>
-      <p:sp>
-        <p:nvSpPr>
-          <p:cNvPr id="3" name="Text 1"/>
-          <p:cNvSpPr txBox="1"/>
-          <p:nvPr/>
-        </p:nvSpPr>
-        <p:spPr>
-          <a:xfrm>
-            <a:off x="8138160" y="4576572"/>
-            <a:ext cx="365760" cy="256032"/>
-          </a:xfrm>
-          <a:prstGeom prst="rect">
-            <a:avLst/>
-          </a:prstGeom>
-          <a:noFill/>
-          <a:ln/>
-        </p:spPr>
-        <p:txBody>
-          <a:bodyPr wrap="square" lIns="0" tIns="0" rIns="0" bIns="0" rtlCol="0" anchor="ctr"/>
+            <a:endParaRPr lang="en-US" sz="1150" dirty="0"/>
+          </a:p>
+        </p:txBody>
+      </p:sp>
+      <p:sp>
+        <p:nvSpPr>
+          <p:cNvPr id="4" name="Text 1"/>
+          <p:cNvSpPr txBox="1"/>
+          <p:nvPr/>
+        </p:nvSpPr>
+        <p:spPr>
+          <a:xfrm>
+            <a:off x="7962900" y="4648200"/>
+            <a:ext cx="381000" cy="171450"/>
+          </a:xfrm>
+          <a:prstGeom prst="rect">
+            <a:avLst/>
+          </a:prstGeom>
+          <a:noFill/>
+          <a:ln/>
+        </p:spPr>
+        <p:txBody>
+          <a:bodyPr wrap="square" lIns="0" tIns="0" rIns="0" bIns="0" rtlCol="0" anchor="t"/>
           <a:lstStyle/>
           <a:p>
             <a:pPr algn="r" indent="0" marL="0">
               <a:buNone/>
             </a:pPr>
             <a:r>
-              <a:rPr lang="en-US" sz="1000" dirty="0">
-                <a:solidFill>
-                  <a:srgbClr val="C9C9BF"/>
+              <a:rPr lang="en-US" sz="1050" dirty="0">
+                <a:solidFill>
+                  <a:srgbClr val="9A9A90"/>
                 </a:solidFill>
                 <a:latin typeface="Times New Roman" pitchFamily="34" charset="0"/>
                 <a:ea typeface="Times New Roman" pitchFamily="34" charset="-122"/>
@@ -4857,7 +5314,7 @@
               </a:rPr>
               <a:t>5</a:t>
             </a:r>
-            <a:endParaRPr lang="en-US" sz="1000" dirty="0"/>
+            <a:endParaRPr lang="en-US" sz="1050" dirty="0"/>
           </a:p>
         </p:txBody>
       </p:sp>
@@ -4869,78 +5326,94 @@
         </p:nvSpPr>
         <p:spPr>
           <a:xfrm>
-            <a:off x="640080" y="914400"/>
-            <a:ext cx="7863840" cy="1188720"/>
-          </a:xfrm>
-          <a:prstGeom prst="rect">
-            <a:avLst/>
-          </a:prstGeom>
-          <a:noFill/>
-          <a:ln/>
-        </p:spPr>
-        <p:txBody>
-          <a:bodyPr wrap="square" lIns="0" tIns="0" rIns="0" bIns="0" rtlCol="0" anchor="t"/>
-          <a:lstStyle/>
-          <a:p>
-            <a:pPr indent="0" marL="0">
-              <a:lnSpc>
-                <a:spcPct val="112000"/>
-              </a:lnSpc>
-              <a:buNone/>
-            </a:pPr>
-            <a:r>
-              <a:rPr lang="en-US" sz="2700" b="1" dirty="0">
-                <a:solidFill>
-                  <a:srgbClr val="16160F"/>
-                </a:solidFill>
-                <a:latin typeface="Times New Roman" pitchFamily="34" charset="0"/>
-                <a:ea typeface="Times New Roman" pitchFamily="34" charset="-122"/>
-                <a:cs typeface="Times New Roman" pitchFamily="34" charset="-120"/>
-              </a:rPr>
-              <a:t>Every entry is knotted to the one before it,</a:t>
-            </a:r>
-            <a:endParaRPr lang="en-US" sz="2700" dirty="0"/>
-          </a:p>
-          <a:p>
-            <a:pPr indent="0" marL="0">
-              <a:lnSpc>
-                <a:spcPct val="112000"/>
-              </a:lnSpc>
-              <a:buNone/>
-            </a:pPr>
-            <a:r>
-              <a:rPr lang="en-US" sz="2700" b="1" dirty="0">
-                <a:solidFill>
-                  <a:srgbClr val="16160F"/>
-                </a:solidFill>
-                <a:latin typeface="Times New Roman" pitchFamily="34" charset="0"/>
-                <a:ea typeface="Times New Roman" pitchFamily="34" charset="-122"/>
-                <a:cs typeface="Times New Roman" pitchFamily="34" charset="-120"/>
-              </a:rPr>
-              <a:t>like beads on a string.</a:t>
-            </a:r>
-            <a:endParaRPr lang="en-US" sz="2700" dirty="0"/>
-          </a:p>
-        </p:txBody>
-      </p:sp>
-      <p:sp>
-        <p:nvSpPr>
-          <p:cNvPr id="6" name="Shape 3"/>
+            <a:off x="800100" y="1433513"/>
+            <a:ext cx="7543800" cy="578644"/>
+          </a:xfrm>
+          <a:prstGeom prst="rect">
+            <a:avLst/>
+          </a:prstGeom>
+          <a:noFill/>
+          <a:ln/>
+        </p:spPr>
+        <p:txBody>
+          <a:bodyPr wrap="square" lIns="0" tIns="0" rIns="0" bIns="0" rtlCol="0" anchor="t"/>
+          <a:lstStyle/>
+          <a:p>
+            <a:pPr algn="l" indent="0" marL="0">
+              <a:buNone/>
+            </a:pPr>
+            <a:r>
+              <a:rPr lang="en-US" sz="3600" b="1" dirty="0">
+                <a:solidFill>
+                  <a:srgbClr val="14140E"/>
+                </a:solidFill>
+                <a:latin typeface="Times New Roman" pitchFamily="34" charset="0"/>
+                <a:ea typeface="Times New Roman" pitchFamily="34" charset="-122"/>
+                <a:cs typeface="Times New Roman" pitchFamily="34" charset="-120"/>
+              </a:rPr>
+              <a:t>Every entry is knotted to the one</a:t>
+            </a:r>
+            <a:endParaRPr lang="en-US" sz="3600" dirty="0"/>
+          </a:p>
+        </p:txBody>
+      </p:sp>
+      <p:sp>
+        <p:nvSpPr>
+          <p:cNvPr id="6" name="Text 3"/>
+          <p:cNvSpPr txBox="1"/>
+          <p:nvPr/>
+        </p:nvSpPr>
+        <p:spPr>
+          <a:xfrm>
+            <a:off x="800100" y="1862138"/>
+            <a:ext cx="7543800" cy="578644"/>
+          </a:xfrm>
+          <a:prstGeom prst="rect">
+            <a:avLst/>
+          </a:prstGeom>
+          <a:noFill/>
+          <a:ln/>
+        </p:spPr>
+        <p:txBody>
+          <a:bodyPr wrap="square" lIns="0" tIns="0" rIns="0" bIns="0" rtlCol="0" anchor="t"/>
+          <a:lstStyle/>
+          <a:p>
+            <a:pPr algn="l" indent="0" marL="0">
+              <a:buNone/>
+            </a:pPr>
+            <a:r>
+              <a:rPr lang="en-US" sz="3600" b="1" dirty="0">
+                <a:solidFill>
+                  <a:srgbClr val="14140E"/>
+                </a:solidFill>
+                <a:latin typeface="Times New Roman" pitchFamily="34" charset="0"/>
+                <a:ea typeface="Times New Roman" pitchFamily="34" charset="-122"/>
+                <a:cs typeface="Times New Roman" pitchFamily="34" charset="-120"/>
+              </a:rPr>
+              <a:t>before it, like beads on a string.</a:t>
+            </a:r>
+            <a:endParaRPr lang="en-US" sz="3600" dirty="0"/>
+          </a:p>
+        </p:txBody>
+      </p:sp>
+      <p:sp>
+        <p:nvSpPr>
+          <p:cNvPr id="7" name="Shape 4"/>
           <p:cNvSpPr/>
           <p:nvPr/>
         </p:nvSpPr>
         <p:spPr>
           <a:xfrm>
-            <a:off x="1088136" y="2962656"/>
-            <a:ext cx="822960" cy="0"/>
+            <a:off x="1123950" y="2957513"/>
+            <a:ext cx="1071563" cy="0"/>
           </a:xfrm>
           <a:prstGeom prst="line">
             <a:avLst/>
           </a:prstGeom>
           <a:noFill/>
-          <a:ln w="28575">
+          <a:ln w="30480">
             <a:solidFill>
-              <a:srgbClr val="16160F"/>
+              <a:srgbClr val="14140E"/>
             </a:solidFill>
             <a:prstDash val="solid"/>
           </a:ln>
@@ -4948,24 +5421,24 @@
       </p:sp>
       <p:sp>
         <p:nvSpPr>
-          <p:cNvPr id="7" name="Shape 4"/>
+          <p:cNvPr id="8" name="Shape 5"/>
           <p:cNvSpPr/>
           <p:nvPr/>
         </p:nvSpPr>
         <p:spPr>
           <a:xfrm>
-            <a:off x="914400" y="2788920"/>
-            <a:ext cx="347472" cy="347472"/>
+            <a:off x="800100" y="2795588"/>
+            <a:ext cx="323850" cy="323850"/>
           </a:xfrm>
           <a:prstGeom prst="ellipse">
             <a:avLst/>
           </a:prstGeom>
           <a:solidFill>
-            <a:srgbClr val="FBFBF8"/>
+            <a:srgbClr val="FCFCF9"/>
           </a:solidFill>
-          <a:ln w="28575">
+          <a:ln w="30480">
             <a:solidFill>
-              <a:srgbClr val="16160F"/>
+              <a:srgbClr val="14140E"/>
             </a:solidFill>
             <a:prstDash val="solid"/>
           </a:ln>
@@ -4973,22 +5446,22 @@
       </p:sp>
       <p:sp>
         <p:nvSpPr>
-          <p:cNvPr id="8" name="Shape 5"/>
+          <p:cNvPr id="9" name="Shape 6"/>
           <p:cNvSpPr/>
           <p:nvPr/>
         </p:nvSpPr>
         <p:spPr>
           <a:xfrm>
-            <a:off x="2258568" y="2962656"/>
-            <a:ext cx="822960" cy="0"/>
+            <a:off x="2519363" y="2957513"/>
+            <a:ext cx="1071563" cy="0"/>
           </a:xfrm>
           <a:prstGeom prst="line">
             <a:avLst/>
           </a:prstGeom>
           <a:noFill/>
-          <a:ln w="28575">
+          <a:ln w="30480">
             <a:solidFill>
-              <a:srgbClr val="16160F"/>
+              <a:srgbClr val="14140E"/>
             </a:solidFill>
             <a:prstDash val="solid"/>
           </a:ln>
@@ -4996,24 +5469,24 @@
       </p:sp>
       <p:sp>
         <p:nvSpPr>
-          <p:cNvPr id="9" name="Shape 6"/>
+          <p:cNvPr id="10" name="Shape 7"/>
           <p:cNvSpPr/>
           <p:nvPr/>
         </p:nvSpPr>
         <p:spPr>
           <a:xfrm>
-            <a:off x="2084832" y="2788920"/>
-            <a:ext cx="347472" cy="347472"/>
+            <a:off x="2195513" y="2795588"/>
+            <a:ext cx="323850" cy="323850"/>
           </a:xfrm>
           <a:prstGeom prst="ellipse">
             <a:avLst/>
           </a:prstGeom>
           <a:solidFill>
-            <a:srgbClr val="FBFBF8"/>
+            <a:srgbClr val="FCFCF9"/>
           </a:solidFill>
-          <a:ln w="28575">
+          <a:ln w="30480">
             <a:solidFill>
-              <a:srgbClr val="16160F"/>
+              <a:srgbClr val="14140E"/>
             </a:solidFill>
             <a:prstDash val="solid"/>
           </a:ln>
@@ -5021,14 +5494,14 @@
       </p:sp>
       <p:sp>
         <p:nvSpPr>
-          <p:cNvPr id="10" name="Shape 7"/>
+          <p:cNvPr id="11" name="Shape 8"/>
           <p:cNvSpPr/>
           <p:nvPr/>
         </p:nvSpPr>
         <p:spPr>
           <a:xfrm>
-            <a:off x="3429000" y="2962656"/>
-            <a:ext cx="822960" cy="0"/>
+            <a:off x="3914775" y="2957513"/>
+            <a:ext cx="1071563" cy="0"/>
           </a:xfrm>
           <a:prstGeom prst="line">
             <a:avLst/>
@@ -5044,24 +5517,24 @@
       </p:sp>
       <p:sp>
         <p:nvSpPr>
-          <p:cNvPr id="11" name="Shape 8"/>
+          <p:cNvPr id="12" name="Shape 9"/>
           <p:cNvSpPr/>
           <p:nvPr/>
         </p:nvSpPr>
         <p:spPr>
           <a:xfrm>
-            <a:off x="3255264" y="2788920"/>
-            <a:ext cx="347472" cy="347472"/>
+            <a:off x="3590925" y="2795588"/>
+            <a:ext cx="323850" cy="323850"/>
           </a:xfrm>
           <a:prstGeom prst="ellipse">
             <a:avLst/>
           </a:prstGeom>
           <a:solidFill>
-            <a:srgbClr val="FBFBF8"/>
+            <a:srgbClr val="FCFCF9"/>
           </a:solidFill>
-          <a:ln w="28575">
+          <a:ln w="30480">
             <a:solidFill>
-              <a:srgbClr val="16160F"/>
+              <a:srgbClr val="14140E"/>
             </a:solidFill>
             <a:prstDash val="solid"/>
           </a:ln>
@@ -5069,22 +5542,22 @@
       </p:sp>
       <p:sp>
         <p:nvSpPr>
-          <p:cNvPr id="12" name="Shape 9"/>
+          <p:cNvPr id="13" name="Shape 10"/>
           <p:cNvSpPr/>
           <p:nvPr/>
         </p:nvSpPr>
         <p:spPr>
           <a:xfrm>
-            <a:off x="4599432" y="2962656"/>
-            <a:ext cx="822960" cy="0"/>
+            <a:off x="5310188" y="2957513"/>
+            <a:ext cx="1071563" cy="0"/>
           </a:xfrm>
           <a:prstGeom prst="line">
             <a:avLst/>
           </a:prstGeom>
           <a:noFill/>
-          <a:ln w="28575">
+          <a:ln w="30480">
             <a:solidFill>
-              <a:srgbClr val="16160F"/>
+              <a:srgbClr val="14140E"/>
             </a:solidFill>
             <a:prstDash val="solid"/>
           </a:ln>
@@ -5092,22 +5565,22 @@
       </p:sp>
       <p:sp>
         <p:nvSpPr>
-          <p:cNvPr id="13" name="Shape 10"/>
+          <p:cNvPr id="14" name="Shape 11"/>
           <p:cNvSpPr/>
           <p:nvPr/>
         </p:nvSpPr>
         <p:spPr>
           <a:xfrm>
-            <a:off x="4425696" y="2788920"/>
-            <a:ext cx="347472" cy="347472"/>
+            <a:off x="4986338" y="2795588"/>
+            <a:ext cx="323850" cy="323850"/>
           </a:xfrm>
           <a:prstGeom prst="ellipse">
             <a:avLst/>
           </a:prstGeom>
           <a:solidFill>
-            <a:srgbClr val="FBFBF8"/>
+            <a:srgbClr val="FCFCF9"/>
           </a:solidFill>
-          <a:ln w="28575">
+          <a:ln w="30480">
             <a:solidFill>
               <a:srgbClr val="B42318"/>
             </a:solidFill>
@@ -5117,24 +5590,24 @@
       </p:sp>
       <p:sp>
         <p:nvSpPr>
-          <p:cNvPr id="14" name="Shape 11"/>
+          <p:cNvPr id="15" name="Shape 12"/>
           <p:cNvSpPr/>
           <p:nvPr/>
         </p:nvSpPr>
         <p:spPr>
           <a:xfrm>
-            <a:off x="5596128" y="2788920"/>
-            <a:ext cx="347472" cy="347472"/>
+            <a:off x="6381750" y="2795588"/>
+            <a:ext cx="323850" cy="323850"/>
           </a:xfrm>
           <a:prstGeom prst="ellipse">
             <a:avLst/>
           </a:prstGeom>
           <a:solidFill>
-            <a:srgbClr val="FBFBF8"/>
+            <a:srgbClr val="FCFCF9"/>
           </a:solidFill>
-          <a:ln w="28575">
+          <a:ln w="30480">
             <a:solidFill>
-              <a:srgbClr val="16160F"/>
+              <a:srgbClr val="14140E"/>
             </a:solidFill>
             <a:prstDash val="solid"/>
           </a:ln>
@@ -5142,30 +5615,30 @@
       </p:sp>
       <p:sp>
         <p:nvSpPr>
-          <p:cNvPr id="15" name="Text 12"/>
-          <p:cNvSpPr txBox="1"/>
-          <p:nvPr/>
-        </p:nvSpPr>
-        <p:spPr>
-          <a:xfrm>
-            <a:off x="2728570" y="3264408"/>
-            <a:ext cx="3291840" cy="320040"/>
-          </a:xfrm>
-          <a:prstGeom prst="rect">
-            <a:avLst/>
-          </a:prstGeom>
-          <a:noFill/>
-          <a:ln/>
-        </p:spPr>
-        <p:txBody>
-          <a:bodyPr wrap="square" lIns="0" tIns="0" rIns="0" bIns="0" rtlCol="0" anchor="ctr"/>
-          <a:lstStyle/>
-          <a:p>
-            <a:pPr indent="0" marL="0">
-              <a:buNone/>
-            </a:pPr>
-            <a:r>
-              <a:rPr lang="en-US" sz="1300" i="1" dirty="0">
+          <p:cNvPr id="16" name="Text 13"/>
+          <p:cNvSpPr txBox="1"/>
+          <p:nvPr/>
+        </p:nvSpPr>
+        <p:spPr>
+          <a:xfrm>
+            <a:off x="3524250" y="3243263"/>
+            <a:ext cx="2476500" cy="231458"/>
+          </a:xfrm>
+          <a:prstGeom prst="rect">
+            <a:avLst/>
+          </a:prstGeom>
+          <a:noFill/>
+          <a:ln/>
+        </p:spPr>
+        <p:txBody>
+          <a:bodyPr wrap="square" lIns="0" tIns="0" rIns="0" bIns="0" rtlCol="0" anchor="t"/>
+          <a:lstStyle/>
+          <a:p>
+            <a:pPr algn="l" indent="0" marL="0">
+              <a:buNone/>
+            </a:pPr>
+            <a:r>
+              <a:rPr lang="en-US" sz="1200" dirty="0">
                 <a:solidFill>
                   <a:srgbClr val="B42318"/>
                 </a:solidFill>
@@ -5173,43 +5646,40 @@
                 <a:ea typeface="Times New Roman" pitchFamily="34" charset="-122"/>
                 <a:cs typeface="Times New Roman" pitchFamily="34" charset="-120"/>
               </a:rPr>
-              <a:t>pull one out, and the string breaks here</a:t>
-            </a:r>
-            <a:endParaRPr lang="en-US" sz="1300" dirty="0"/>
-          </a:p>
-        </p:txBody>
-      </p:sp>
-      <p:sp>
-        <p:nvSpPr>
-          <p:cNvPr id="16" name="Text 13"/>
-          <p:cNvSpPr txBox="1"/>
-          <p:nvPr/>
-        </p:nvSpPr>
-        <p:spPr>
-          <a:xfrm>
-            <a:off x="640080" y="4041648"/>
-            <a:ext cx="7863840" cy="822960"/>
-          </a:xfrm>
-          <a:prstGeom prst="rect">
-            <a:avLst/>
-          </a:prstGeom>
-          <a:noFill/>
-          <a:ln/>
-        </p:spPr>
-        <p:txBody>
-          <a:bodyPr wrap="square" lIns="0" tIns="0" rIns="0" bIns="0" rtlCol="0" anchor="t"/>
-          <a:lstStyle/>
-          <a:p>
-            <a:pPr indent="0" marL="0">
-              <a:lnSpc>
-                <a:spcPct val="125000"/>
-              </a:lnSpc>
-              <a:buNone/>
-            </a:pPr>
-            <a:r>
-              <a:rPr lang="en-US" sz="1700" dirty="0">
-                <a:solidFill>
-                  <a:srgbClr val="16160F"/>
+              <a:t>the string breaks here</a:t>
+            </a:r>
+            <a:endParaRPr lang="en-US" sz="1200" dirty="0"/>
+          </a:p>
+        </p:txBody>
+      </p:sp>
+      <p:sp>
+        <p:nvSpPr>
+          <p:cNvPr id="17" name="Text 14"/>
+          <p:cNvSpPr txBox="1"/>
+          <p:nvPr/>
+        </p:nvSpPr>
+        <p:spPr>
+          <a:xfrm>
+            <a:off x="800100" y="3986213"/>
+            <a:ext cx="7543800" cy="372904"/>
+          </a:xfrm>
+          <a:prstGeom prst="rect">
+            <a:avLst/>
+          </a:prstGeom>
+          <a:noFill/>
+          <a:ln/>
+        </p:spPr>
+        <p:txBody>
+          <a:bodyPr wrap="square" lIns="0" tIns="0" rIns="0" bIns="0" rtlCol="0" anchor="t"/>
+          <a:lstStyle/>
+          <a:p>
+            <a:pPr algn="l" indent="0" marL="0">
+              <a:buNone/>
+            </a:pPr>
+            <a:r>
+              <a:rPr lang="en-US" sz="2000" dirty="0">
+                <a:solidFill>
+                  <a:srgbClr val="14140E"/>
                 </a:solidFill>
                 <a:latin typeface="Times New Roman" pitchFamily="34" charset="0"/>
                 <a:ea typeface="Times New Roman" pitchFamily="34" charset="-122"/>
@@ -5217,7 +5687,7 @@
               </a:rPr>
               <a:t>You cannot quietly remove a bead from the middle.</a:t>
             </a:r>
-            <a:endParaRPr lang="en-US" sz="1700" dirty="0"/>
+            <a:endParaRPr lang="en-US" sz="2000" dirty="0"/>
           </a:p>
         </p:txBody>
       </p:sp>
@@ -5235,7 +5705,7 @@
     <p:bg>
       <p:bgPr>
         <a:solidFill>
-          <a:srgbClr val="FBFBF8"/>
+          <a:srgbClr val="FCFCF9"/>
         </a:solidFill>
       </p:bgPr>
     </p:bg>
@@ -5255,32 +5725,32 @@
       </p:grpSpPr>
       <p:sp>
         <p:nvSpPr>
-          <p:cNvPr id="2" name="Text 0"/>
-          <p:cNvSpPr txBox="1"/>
-          <p:nvPr/>
-        </p:nvSpPr>
-        <p:spPr>
-          <a:xfrm>
-            <a:off x="640080" y="310896"/>
-            <a:ext cx="7863840" cy="274320"/>
-          </a:xfrm>
-          <a:prstGeom prst="rect">
-            <a:avLst/>
-          </a:prstGeom>
-          <a:noFill/>
-          <a:ln/>
-        </p:spPr>
-        <p:txBody>
-          <a:bodyPr wrap="square" lIns="0" tIns="0" rIns="0" bIns="0" rtlCol="0" anchor="ctr"/>
-          <a:lstStyle/>
-          <a:p>
-            <a:pPr indent="0" marL="0">
-              <a:buNone/>
-            </a:pPr>
-            <a:r>
-              <a:rPr lang="en-US" sz="1200" spc="100" kern="0" dirty="0">
-                <a:solidFill>
-                  <a:srgbClr val="6B6B60"/>
+          <p:cNvPr id="3" name="Text 0"/>
+          <p:cNvSpPr txBox="1"/>
+          <p:nvPr/>
+        </p:nvSpPr>
+        <p:spPr>
+          <a:xfrm>
+            <a:off x="800100" y="571500"/>
+            <a:ext cx="7543800" cy="205740"/>
+          </a:xfrm>
+          <a:prstGeom prst="rect">
+            <a:avLst/>
+          </a:prstGeom>
+          <a:noFill/>
+          <a:ln/>
+        </p:spPr>
+        <p:txBody>
+          <a:bodyPr wrap="square" lIns="0" tIns="0" rIns="0" bIns="0" rtlCol="0" anchor="t"/>
+          <a:lstStyle/>
+          <a:p>
+            <a:pPr algn="l" indent="0" marL="0">
+              <a:buNone/>
+            </a:pPr>
+            <a:r>
+              <a:rPr lang="en-US" sz="1150" spc="110" kern="0" dirty="0">
+                <a:solidFill>
+                  <a:srgbClr val="6E6E63"/>
                 </a:solidFill>
                 <a:latin typeface="Times New Roman" pitchFamily="34" charset="0"/>
                 <a:ea typeface="Times New Roman" pitchFamily="34" charset="-122"/>
@@ -5288,38 +5758,38 @@
               </a:rPr>
               <a:t>How it fits together</a:t>
             </a:r>
-            <a:endParaRPr lang="en-US" sz="1200" dirty="0"/>
-          </a:p>
-        </p:txBody>
-      </p:sp>
-      <p:sp>
-        <p:nvSpPr>
-          <p:cNvPr id="3" name="Text 1"/>
-          <p:cNvSpPr txBox="1"/>
-          <p:nvPr/>
-        </p:nvSpPr>
-        <p:spPr>
-          <a:xfrm>
-            <a:off x="8138160" y="4576572"/>
-            <a:ext cx="365760" cy="256032"/>
-          </a:xfrm>
-          <a:prstGeom prst="rect">
-            <a:avLst/>
-          </a:prstGeom>
-          <a:noFill/>
-          <a:ln/>
-        </p:spPr>
-        <p:txBody>
-          <a:bodyPr wrap="square" lIns="0" tIns="0" rIns="0" bIns="0" rtlCol="0" anchor="ctr"/>
+            <a:endParaRPr lang="en-US" sz="1150" dirty="0"/>
+          </a:p>
+        </p:txBody>
+      </p:sp>
+      <p:sp>
+        <p:nvSpPr>
+          <p:cNvPr id="4" name="Text 1"/>
+          <p:cNvSpPr txBox="1"/>
+          <p:nvPr/>
+        </p:nvSpPr>
+        <p:spPr>
+          <a:xfrm>
+            <a:off x="7962900" y="4648200"/>
+            <a:ext cx="381000" cy="171450"/>
+          </a:xfrm>
+          <a:prstGeom prst="rect">
+            <a:avLst/>
+          </a:prstGeom>
+          <a:noFill/>
+          <a:ln/>
+        </p:spPr>
+        <p:txBody>
+          <a:bodyPr wrap="square" lIns="0" tIns="0" rIns="0" bIns="0" rtlCol="0" anchor="t"/>
           <a:lstStyle/>
           <a:p>
             <a:pPr algn="r" indent="0" marL="0">
               <a:buNone/>
             </a:pPr>
             <a:r>
-              <a:rPr lang="en-US" sz="1000" dirty="0">
-                <a:solidFill>
-                  <a:srgbClr val="C9C9BF"/>
+              <a:rPr lang="en-US" sz="1050" dirty="0">
+                <a:solidFill>
+                  <a:srgbClr val="9A9A90"/>
                 </a:solidFill>
                 <a:latin typeface="Times New Roman" pitchFamily="34" charset="0"/>
                 <a:ea typeface="Times New Roman" pitchFamily="34" charset="-122"/>
@@ -5327,7 +5797,7 @@
               </a:rPr>
               <a:t>6</a:t>
             </a:r>
-            <a:endParaRPr lang="en-US" sz="1000" dirty="0"/>
+            <a:endParaRPr lang="en-US" sz="1050" dirty="0"/>
           </a:p>
         </p:txBody>
       </p:sp>
@@ -5339,29 +5809,26 @@
         </p:nvSpPr>
         <p:spPr>
           <a:xfrm>
-            <a:off x="640080" y="777240"/>
-            <a:ext cx="7863840" cy="548640"/>
-          </a:xfrm>
-          <a:prstGeom prst="rect">
-            <a:avLst/>
-          </a:prstGeom>
-          <a:noFill/>
-          <a:ln/>
-        </p:spPr>
-        <p:txBody>
-          <a:bodyPr wrap="square" lIns="0" tIns="0" rIns="0" bIns="0" rtlCol="0" anchor="t"/>
-          <a:lstStyle/>
-          <a:p>
-            <a:pPr indent="0" marL="0">
-              <a:lnSpc>
-                <a:spcPct val="112000"/>
-              </a:lnSpc>
-              <a:buNone/>
-            </a:pPr>
-            <a:r>
-              <a:rPr lang="en-US" sz="2800" b="1" dirty="0">
-                <a:solidFill>
-                  <a:srgbClr val="16160F"/>
+            <a:off x="800100" y="1143000"/>
+            <a:ext cx="7543800" cy="578644"/>
+          </a:xfrm>
+          <a:prstGeom prst="rect">
+            <a:avLst/>
+          </a:prstGeom>
+          <a:noFill/>
+          <a:ln/>
+        </p:spPr>
+        <p:txBody>
+          <a:bodyPr wrap="square" lIns="0" tIns="0" rIns="0" bIns="0" rtlCol="0" anchor="t"/>
+          <a:lstStyle/>
+          <a:p>
+            <a:pPr algn="l" indent="0" marL="0">
+              <a:buNone/>
+            </a:pPr>
+            <a:r>
+              <a:rPr lang="en-US" sz="3600" b="1" dirty="0">
+                <a:solidFill>
+                  <a:srgbClr val="14140E"/>
                 </a:solidFill>
                 <a:latin typeface="Times New Roman" pitchFamily="34" charset="0"/>
                 <a:ea typeface="Times New Roman" pitchFamily="34" charset="-122"/>
@@ -5369,7 +5836,7 @@
               </a:rPr>
               <a:t>Architecture</a:t>
             </a:r>
-            <a:endParaRPr lang="en-US" sz="2800" dirty="0"/>
+            <a:endParaRPr lang="en-US" sz="3600" dirty="0"/>
           </a:p>
         </p:txBody>
       </p:sp>
@@ -5381,20 +5848,20 @@
         </p:nvSpPr>
         <p:spPr>
           <a:xfrm>
-            <a:off x="640080" y="1463040"/>
-            <a:ext cx="2286000" cy="1143000"/>
+            <a:off x="800100" y="1857375"/>
+            <a:ext cx="2324100" cy="1028700"/>
           </a:xfrm>
           <a:prstGeom prst="roundRect">
             <a:avLst>
-              <a:gd name="adj" fmla="val 4000"/>
+              <a:gd name="adj" fmla="val 4630"/>
             </a:avLst>
           </a:prstGeom>
           <a:solidFill>
-            <a:srgbClr val="FBFBF8"/>
+            <a:srgbClr val="FCFCF9"/>
           </a:solidFill>
           <a:ln w="12700">
             <a:solidFill>
-              <a:srgbClr val="C9C9BF"/>
+              <a:srgbClr val="D2D2C8"/>
             </a:solidFill>
             <a:prstDash val="solid"/>
           </a:ln>
@@ -5408,26 +5875,26 @@
         </p:nvSpPr>
         <p:spPr>
           <a:xfrm>
-            <a:off x="786384" y="1572768"/>
-            <a:ext cx="1993392" cy="274320"/>
-          </a:xfrm>
-          <a:prstGeom prst="rect">
-            <a:avLst/>
-          </a:prstGeom>
-          <a:noFill/>
-          <a:ln/>
-        </p:spPr>
-        <p:txBody>
-          <a:bodyPr wrap="square" lIns="0" tIns="0" rIns="0" bIns="0" rtlCol="0" anchor="ctr"/>
-          <a:lstStyle/>
-          <a:p>
-            <a:pPr indent="0" marL="0">
-              <a:buNone/>
-            </a:pPr>
-            <a:r>
-              <a:rPr lang="en-US" sz="1400" b="1" dirty="0">
-                <a:solidFill>
-                  <a:srgbClr val="16160F"/>
+            <a:off x="952500" y="1971675"/>
+            <a:ext cx="2019300" cy="372904"/>
+          </a:xfrm>
+          <a:prstGeom prst="rect">
+            <a:avLst/>
+          </a:prstGeom>
+          <a:noFill/>
+          <a:ln/>
+        </p:spPr>
+        <p:txBody>
+          <a:bodyPr wrap="square" lIns="0" tIns="0" rIns="0" bIns="0" rtlCol="0" anchor="t"/>
+          <a:lstStyle/>
+          <a:p>
+            <a:pPr algn="l" indent="0" marL="0">
+              <a:buNone/>
+            </a:pPr>
+            <a:r>
+              <a:rPr lang="en-US" sz="1600" b="1" dirty="0">
+                <a:solidFill>
+                  <a:srgbClr val="14140E"/>
                 </a:solidFill>
                 <a:latin typeface="Times New Roman" pitchFamily="34" charset="0"/>
                 <a:ea typeface="Times New Roman" pitchFamily="34" charset="-122"/>
@@ -5435,7 +5902,7 @@
               </a:rPr>
               <a:t>Field app</a:t>
             </a:r>
-            <a:endParaRPr lang="en-US" sz="1400" dirty="0"/>
+            <a:endParaRPr lang="en-US" sz="1600" dirty="0"/>
           </a:p>
         </p:txBody>
       </p:sp>
@@ -5447,29 +5914,29 @@
         </p:nvSpPr>
         <p:spPr>
           <a:xfrm>
-            <a:off x="786384" y="1874520"/>
-            <a:ext cx="1993392" cy="640080"/>
-          </a:xfrm>
-          <a:prstGeom prst="rect">
-            <a:avLst/>
-          </a:prstGeom>
-          <a:noFill/>
-          <a:ln/>
-        </p:spPr>
-        <p:txBody>
-          <a:bodyPr wrap="square" lIns="0" tIns="0" rIns="0" bIns="0" rtlCol="0" anchor="ctr"/>
+            <a:off x="952500" y="2200275"/>
+            <a:ext cx="2019300" cy="590550"/>
+          </a:xfrm>
+          <a:prstGeom prst="rect">
+            <a:avLst/>
+          </a:prstGeom>
+          <a:noFill/>
+          <a:ln/>
+        </p:spPr>
+        <p:txBody>
+          <a:bodyPr wrap="square" lIns="0" tIns="0" rIns="0" bIns="0" rtlCol="0" anchor="t"/>
           <a:lstStyle/>
           <a:p>
             <a:pPr indent="0" marL="0">
               <a:lnSpc>
-                <a:spcPct val="120000"/>
+                <a:spcPct val="122000"/>
               </a:lnSpc>
               <a:buNone/>
             </a:pPr>
             <a:r>
-              <a:rPr lang="en-US" sz="1050" dirty="0">
-                <a:solidFill>
-                  <a:srgbClr val="6B6B60"/>
+              <a:rPr lang="en-US" sz="1250" dirty="0">
+                <a:solidFill>
+                  <a:srgbClr val="6E6E63"/>
                 </a:solidFill>
                 <a:latin typeface="Times New Roman" pitchFamily="34" charset="0"/>
                 <a:ea typeface="Times New Roman" pitchFamily="34" charset="-122"/>
@@ -5477,19 +5944,19 @@
               </a:rPr>
               <a:t>offline capture</a:t>
             </a:r>
-            <a:endParaRPr lang="en-US" sz="1050" dirty="0"/>
+            <a:endParaRPr lang="en-US" sz="1250" dirty="0"/>
           </a:p>
           <a:p>
             <a:pPr indent="0" marL="0">
               <a:lnSpc>
-                <a:spcPct val="120000"/>
+                <a:spcPct val="122000"/>
               </a:lnSpc>
               <a:buNone/>
             </a:pPr>
             <a:r>
-              <a:rPr lang="en-US" sz="1050" dirty="0">
-                <a:solidFill>
-                  <a:srgbClr val="6B6B60"/>
+              <a:rPr lang="en-US" sz="1250" dirty="0">
+                <a:solidFill>
+                  <a:srgbClr val="6E6E63"/>
                 </a:solidFill>
                 <a:latin typeface="Times New Roman" pitchFamily="34" charset="0"/>
                 <a:ea typeface="Times New Roman" pitchFamily="34" charset="-122"/>
@@ -5497,47 +5964,27 @@
               </a:rPr>
               <a:t>hashing on the device</a:t>
             </a:r>
-            <a:endParaRPr lang="en-US" sz="1050" dirty="0"/>
+            <a:endParaRPr lang="en-US" sz="1250" dirty="0"/>
           </a:p>
           <a:p>
             <a:pPr indent="0" marL="0">
               <a:lnSpc>
-                <a:spcPct val="120000"/>
+                <a:spcPct val="122000"/>
               </a:lnSpc>
               <a:buNone/>
             </a:pPr>
             <a:r>
-              <a:rPr lang="en-US" sz="1050" dirty="0">
-                <a:solidFill>
-                  <a:srgbClr val="6B6B60"/>
-                </a:solidFill>
-                <a:latin typeface="Times New Roman" pitchFamily="34" charset="0"/>
-                <a:ea typeface="Times New Roman" pitchFamily="34" charset="-122"/>
-                <a:cs typeface="Times New Roman" pitchFamily="34" charset="-120"/>
-              </a:rPr>
-              <a:t>local queue</a:t>
-            </a:r>
-            <a:endParaRPr lang="en-US" sz="1050" dirty="0"/>
-          </a:p>
-          <a:p>
-            <a:pPr indent="0" marL="0">
-              <a:lnSpc>
-                <a:spcPct val="120000"/>
-              </a:lnSpc>
-              <a:buNone/>
-            </a:pPr>
-            <a:r>
-              <a:rPr lang="en-US" sz="1050" dirty="0">
-                <a:solidFill>
-                  <a:srgbClr val="6B6B60"/>
-                </a:solidFill>
-                <a:latin typeface="Times New Roman" pitchFamily="34" charset="0"/>
-                <a:ea typeface="Times New Roman" pitchFamily="34" charset="-122"/>
-                <a:cs typeface="Times New Roman" pitchFamily="34" charset="-120"/>
-              </a:rPr>
-              <a:t>deferred sync</a:t>
-            </a:r>
-            <a:endParaRPr lang="en-US" sz="1050" dirty="0"/>
+              <a:rPr lang="en-US" sz="1250" dirty="0">
+                <a:solidFill>
+                  <a:srgbClr val="6E6E63"/>
+                </a:solidFill>
+                <a:latin typeface="Times New Roman" pitchFamily="34" charset="0"/>
+                <a:ea typeface="Times New Roman" pitchFamily="34" charset="-122"/>
+                <a:cs typeface="Times New Roman" pitchFamily="34" charset="-120"/>
+              </a:rPr>
+              <a:t>queue and deferred sync</a:t>
+            </a:r>
+            <a:endParaRPr lang="en-US" sz="1250" dirty="0"/>
           </a:p>
         </p:txBody>
       </p:sp>
@@ -5549,20 +5996,20 @@
         </p:nvSpPr>
         <p:spPr>
           <a:xfrm>
-            <a:off x="6217920" y="1463040"/>
-            <a:ext cx="2286000" cy="1143000"/>
+            <a:off x="6019800" y="1857375"/>
+            <a:ext cx="2324100" cy="1028700"/>
           </a:xfrm>
           <a:prstGeom prst="roundRect">
             <a:avLst>
-              <a:gd name="adj" fmla="val 4000"/>
+              <a:gd name="adj" fmla="val 4630"/>
             </a:avLst>
           </a:prstGeom>
           <a:solidFill>
-            <a:srgbClr val="FBFBF8"/>
+            <a:srgbClr val="FCFCF9"/>
           </a:solidFill>
           <a:ln w="12700">
             <a:solidFill>
-              <a:srgbClr val="C9C9BF"/>
+              <a:srgbClr val="D2D2C8"/>
             </a:solidFill>
             <a:prstDash val="solid"/>
           </a:ln>
@@ -5576,26 +6023,26 @@
         </p:nvSpPr>
         <p:spPr>
           <a:xfrm>
-            <a:off x="6364224" y="1572768"/>
-            <a:ext cx="1993392" cy="274320"/>
-          </a:xfrm>
-          <a:prstGeom prst="rect">
-            <a:avLst/>
-          </a:prstGeom>
-          <a:noFill/>
-          <a:ln/>
-        </p:spPr>
-        <p:txBody>
-          <a:bodyPr wrap="square" lIns="0" tIns="0" rIns="0" bIns="0" rtlCol="0" anchor="ctr"/>
-          <a:lstStyle/>
-          <a:p>
-            <a:pPr indent="0" marL="0">
-              <a:buNone/>
-            </a:pPr>
-            <a:r>
-              <a:rPr lang="en-US" sz="1400" b="1" dirty="0">
-                <a:solidFill>
-                  <a:srgbClr val="16160F"/>
+            <a:off x="6172200" y="1971675"/>
+            <a:ext cx="2019300" cy="372904"/>
+          </a:xfrm>
+          <a:prstGeom prst="rect">
+            <a:avLst/>
+          </a:prstGeom>
+          <a:noFill/>
+          <a:ln/>
+        </p:spPr>
+        <p:txBody>
+          <a:bodyPr wrap="square" lIns="0" tIns="0" rIns="0" bIns="0" rtlCol="0" anchor="t"/>
+          <a:lstStyle/>
+          <a:p>
+            <a:pPr algn="l" indent="0" marL="0">
+              <a:buNone/>
+            </a:pPr>
+            <a:r>
+              <a:rPr lang="en-US" sz="1600" b="1" dirty="0">
+                <a:solidFill>
+                  <a:srgbClr val="14140E"/>
                 </a:solidFill>
                 <a:latin typeface="Times New Roman" pitchFamily="34" charset="0"/>
                 <a:ea typeface="Times New Roman" pitchFamily="34" charset="-122"/>
@@ -5603,7 +6050,7 @@
               </a:rPr>
               <a:t>Dashboard</a:t>
             </a:r>
-            <a:endParaRPr lang="en-US" sz="1400" dirty="0"/>
+            <a:endParaRPr lang="en-US" sz="1600" dirty="0"/>
           </a:p>
         </p:txBody>
       </p:sp>
@@ -5615,29 +6062,29 @@
         </p:nvSpPr>
         <p:spPr>
           <a:xfrm>
-            <a:off x="6364224" y="1874520"/>
-            <a:ext cx="1993392" cy="640080"/>
-          </a:xfrm>
-          <a:prstGeom prst="rect">
-            <a:avLst/>
-          </a:prstGeom>
-          <a:noFill/>
-          <a:ln/>
-        </p:spPr>
-        <p:txBody>
-          <a:bodyPr wrap="square" lIns="0" tIns="0" rIns="0" bIns="0" rtlCol="0" anchor="ctr"/>
+            <a:off x="6172200" y="2200275"/>
+            <a:ext cx="2019300" cy="590550"/>
+          </a:xfrm>
+          <a:prstGeom prst="rect">
+            <a:avLst/>
+          </a:prstGeom>
+          <a:noFill/>
+          <a:ln/>
+        </p:spPr>
+        <p:txBody>
+          <a:bodyPr wrap="square" lIns="0" tIns="0" rIns="0" bIns="0" rtlCol="0" anchor="t"/>
           <a:lstStyle/>
           <a:p>
             <a:pPr indent="0" marL="0">
               <a:lnSpc>
-                <a:spcPct val="120000"/>
+                <a:spcPct val="122000"/>
               </a:lnSpc>
               <a:buNone/>
             </a:pPr>
             <a:r>
-              <a:rPr lang="en-US" sz="1050" dirty="0">
-                <a:solidFill>
-                  <a:srgbClr val="6B6B60"/>
+              <a:rPr lang="en-US" sz="1250" dirty="0">
+                <a:solidFill>
+                  <a:srgbClr val="6E6E63"/>
                 </a:solidFill>
                 <a:latin typeface="Times New Roman" pitchFamily="34" charset="0"/>
                 <a:ea typeface="Times New Roman" pitchFamily="34" charset="-122"/>
@@ -5645,19 +6092,19 @@
               </a:rPr>
               <a:t>case and item views</a:t>
             </a:r>
-            <a:endParaRPr lang="en-US" sz="1050" dirty="0"/>
+            <a:endParaRPr lang="en-US" sz="1250" dirty="0"/>
           </a:p>
           <a:p>
             <a:pPr indent="0" marL="0">
               <a:lnSpc>
-                <a:spcPct val="120000"/>
+                <a:spcPct val="122000"/>
               </a:lnSpc>
               <a:buNone/>
             </a:pPr>
             <a:r>
-              <a:rPr lang="en-US" sz="1050" dirty="0">
-                <a:solidFill>
-                  <a:srgbClr val="6B6B60"/>
+              <a:rPr lang="en-US" sz="1250" dirty="0">
+                <a:solidFill>
+                  <a:srgbClr val="6E6E63"/>
                 </a:solidFill>
                 <a:latin typeface="Times New Roman" pitchFamily="34" charset="0"/>
                 <a:ea typeface="Times New Roman" pitchFamily="34" charset="-122"/>
@@ -5665,47 +6112,27 @@
               </a:rPr>
               <a:t>custody timeline</a:t>
             </a:r>
-            <a:endParaRPr lang="en-US" sz="1050" dirty="0"/>
+            <a:endParaRPr lang="en-US" sz="1250" dirty="0"/>
           </a:p>
           <a:p>
             <a:pPr indent="0" marL="0">
               <a:lnSpc>
-                <a:spcPct val="120000"/>
+                <a:spcPct val="122000"/>
               </a:lnSpc>
               <a:buNone/>
             </a:pPr>
             <a:r>
-              <a:rPr lang="en-US" sz="1050" dirty="0">
-                <a:solidFill>
-                  <a:srgbClr val="6B6B60"/>
-                </a:solidFill>
-                <a:latin typeface="Times New Roman" pitchFamily="34" charset="0"/>
-                <a:ea typeface="Times New Roman" pitchFamily="34" charset="-122"/>
-                <a:cs typeface="Times New Roman" pitchFamily="34" charset="-120"/>
-              </a:rPr>
-              <a:t>chunk map</a:t>
-            </a:r>
-            <a:endParaRPr lang="en-US" sz="1050" dirty="0"/>
-          </a:p>
-          <a:p>
-            <a:pPr indent="0" marL="0">
-              <a:lnSpc>
-                <a:spcPct val="120000"/>
-              </a:lnSpc>
-              <a:buNone/>
-            </a:pPr>
-            <a:r>
-              <a:rPr lang="en-US" sz="1050" dirty="0">
-                <a:solidFill>
-                  <a:srgbClr val="6B6B60"/>
-                </a:solidFill>
-                <a:latin typeface="Times New Roman" pitchFamily="34" charset="0"/>
-                <a:ea typeface="Times New Roman" pitchFamily="34" charset="-122"/>
-                <a:cs typeface="Times New Roman" pitchFamily="34" charset="-120"/>
-              </a:rPr>
-              <a:t>verify</a:t>
-            </a:r>
-            <a:endParaRPr lang="en-US" sz="1050" dirty="0"/>
+              <a:rPr lang="en-US" sz="1250" dirty="0">
+                <a:solidFill>
+                  <a:srgbClr val="6E6E63"/>
+                </a:solidFill>
+                <a:latin typeface="Times New Roman" pitchFamily="34" charset="0"/>
+                <a:ea typeface="Times New Roman" pitchFamily="34" charset="-122"/>
+                <a:cs typeface="Times New Roman" pitchFamily="34" charset="-120"/>
+              </a:rPr>
+              <a:t>chunk map and verify</a:t>
+            </a:r>
+            <a:endParaRPr lang="en-US" sz="1250" dirty="0"/>
           </a:p>
         </p:txBody>
       </p:sp>
@@ -5717,20 +6144,20 @@
         </p:nvSpPr>
         <p:spPr>
           <a:xfrm>
-            <a:off x="3108960" y="3127248"/>
-            <a:ext cx="2926080" cy="960120"/>
+            <a:off x="3143250" y="3114675"/>
+            <a:ext cx="2857500" cy="876300"/>
           </a:xfrm>
           <a:prstGeom prst="roundRect">
             <a:avLst>
-              <a:gd name="adj" fmla="val 4762"/>
+              <a:gd name="adj" fmla="val 5435"/>
             </a:avLst>
           </a:prstGeom>
           <a:solidFill>
-            <a:srgbClr val="FBFBF8"/>
+            <a:srgbClr val="FCFCF9"/>
           </a:solidFill>
           <a:ln w="12700">
             <a:solidFill>
-              <a:srgbClr val="C9C9BF"/>
+              <a:srgbClr val="D2D2C8"/>
             </a:solidFill>
             <a:prstDash val="solid"/>
           </a:ln>
@@ -5744,26 +6171,26 @@
         </p:nvSpPr>
         <p:spPr>
           <a:xfrm>
-            <a:off x="3255264" y="3236976"/>
-            <a:ext cx="2633472" cy="274320"/>
-          </a:xfrm>
-          <a:prstGeom prst="rect">
-            <a:avLst/>
-          </a:prstGeom>
-          <a:noFill/>
-          <a:ln/>
-        </p:spPr>
-        <p:txBody>
-          <a:bodyPr wrap="square" lIns="0" tIns="0" rIns="0" bIns="0" rtlCol="0" anchor="ctr"/>
-          <a:lstStyle/>
-          <a:p>
-            <a:pPr indent="0" marL="0">
-              <a:buNone/>
-            </a:pPr>
-            <a:r>
-              <a:rPr lang="en-US" sz="1400" b="1" dirty="0">
-                <a:solidFill>
-                  <a:srgbClr val="16160F"/>
+            <a:off x="3295650" y="3228975"/>
+            <a:ext cx="2552700" cy="372904"/>
+          </a:xfrm>
+          <a:prstGeom prst="rect">
+            <a:avLst/>
+          </a:prstGeom>
+          <a:noFill/>
+          <a:ln/>
+        </p:spPr>
+        <p:txBody>
+          <a:bodyPr wrap="square" lIns="0" tIns="0" rIns="0" bIns="0" rtlCol="0" anchor="t"/>
+          <a:lstStyle/>
+          <a:p>
+            <a:pPr algn="l" indent="0" marL="0">
+              <a:buNone/>
+            </a:pPr>
+            <a:r>
+              <a:rPr lang="en-US" sz="1600" b="1" dirty="0">
+                <a:solidFill>
+                  <a:srgbClr val="14140E"/>
                 </a:solidFill>
                 <a:latin typeface="Times New Roman" pitchFamily="34" charset="0"/>
                 <a:ea typeface="Times New Roman" pitchFamily="34" charset="-122"/>
@@ -5771,7 +6198,7 @@
               </a:rPr>
               <a:t>API and database</a:t>
             </a:r>
-            <a:endParaRPr lang="en-US" sz="1400" dirty="0"/>
+            <a:endParaRPr lang="en-US" sz="1600" dirty="0"/>
           </a:p>
         </p:txBody>
       </p:sp>
@@ -5783,29 +6210,29 @@
         </p:nvSpPr>
         <p:spPr>
           <a:xfrm>
-            <a:off x="3255264" y="3538728"/>
-            <a:ext cx="2633472" cy="457200"/>
-          </a:xfrm>
-          <a:prstGeom prst="rect">
-            <a:avLst/>
-          </a:prstGeom>
-          <a:noFill/>
-          <a:ln/>
-        </p:spPr>
-        <p:txBody>
-          <a:bodyPr wrap="square" lIns="0" tIns="0" rIns="0" bIns="0" rtlCol="0" anchor="ctr"/>
+            <a:off x="3295650" y="3457575"/>
+            <a:ext cx="2552700" cy="438150"/>
+          </a:xfrm>
+          <a:prstGeom prst="rect">
+            <a:avLst/>
+          </a:prstGeom>
+          <a:noFill/>
+          <a:ln/>
+        </p:spPr>
+        <p:txBody>
+          <a:bodyPr wrap="square" lIns="0" tIns="0" rIns="0" bIns="0" rtlCol="0" anchor="t"/>
           <a:lstStyle/>
           <a:p>
             <a:pPr indent="0" marL="0">
               <a:lnSpc>
-                <a:spcPct val="120000"/>
+                <a:spcPct val="122000"/>
               </a:lnSpc>
               <a:buNone/>
             </a:pPr>
             <a:r>
-              <a:rPr lang="en-US" sz="1050" dirty="0">
-                <a:solidFill>
-                  <a:srgbClr val="6B6B60"/>
+              <a:rPr lang="en-US" sz="1250" dirty="0">
+                <a:solidFill>
+                  <a:srgbClr val="6E6E63"/>
                 </a:solidFill>
                 <a:latin typeface="Times New Roman" pitchFamily="34" charset="0"/>
                 <a:ea typeface="Times New Roman" pitchFamily="34" charset="-122"/>
@@ -5813,47 +6240,27 @@
               </a:rPr>
               <a:t>append only custody events</a:t>
             </a:r>
-            <a:endParaRPr lang="en-US" sz="1050" dirty="0"/>
+            <a:endParaRPr lang="en-US" sz="1250" dirty="0"/>
           </a:p>
           <a:p>
             <a:pPr indent="0" marL="0">
               <a:lnSpc>
-                <a:spcPct val="120000"/>
+                <a:spcPct val="122000"/>
               </a:lnSpc>
               <a:buNone/>
             </a:pPr>
             <a:r>
-              <a:rPr lang="en-US" sz="1050" dirty="0">
-                <a:solidFill>
-                  <a:srgbClr val="6B6B60"/>
-                </a:solidFill>
-                <a:latin typeface="Times New Roman" pitchFamily="34" charset="0"/>
-                <a:ea typeface="Times New Roman" pitchFamily="34" charset="-122"/>
-                <a:cs typeface="Times New Roman" pitchFamily="34" charset="-120"/>
-              </a:rPr>
-              <a:t>verification</a:t>
-            </a:r>
-            <a:endParaRPr lang="en-US" sz="1050" dirty="0"/>
-          </a:p>
-          <a:p>
-            <a:pPr indent="0" marL="0">
-              <a:lnSpc>
-                <a:spcPct val="120000"/>
-              </a:lnSpc>
-              <a:buNone/>
-            </a:pPr>
-            <a:r>
-              <a:rPr lang="en-US" sz="1050" dirty="0">
-                <a:solidFill>
-                  <a:srgbClr val="6B6B60"/>
-                </a:solidFill>
-                <a:latin typeface="Times New Roman" pitchFamily="34" charset="0"/>
-                <a:ea typeface="Times New Roman" pitchFamily="34" charset="-122"/>
-                <a:cs typeface="Times New Roman" pitchFamily="34" charset="-120"/>
-              </a:rPr>
-              <a:t>one page report</a:t>
-            </a:r>
-            <a:endParaRPr lang="en-US" sz="1050" dirty="0"/>
+              <a:rPr lang="en-US" sz="1250" dirty="0">
+                <a:solidFill>
+                  <a:srgbClr val="6E6E63"/>
+                </a:solidFill>
+                <a:latin typeface="Times New Roman" pitchFamily="34" charset="0"/>
+                <a:ea typeface="Times New Roman" pitchFamily="34" charset="-122"/>
+                <a:cs typeface="Times New Roman" pitchFamily="34" charset="-120"/>
+              </a:rPr>
+              <a:t>verification, one page report</a:t>
+            </a:r>
+            <a:endParaRPr lang="en-US" sz="1250" dirty="0"/>
           </a:p>
         </p:txBody>
       </p:sp>
@@ -5865,8 +6272,8 @@
         </p:nvSpPr>
         <p:spPr>
           <a:xfrm>
-            <a:off x="1783080" y="2624328"/>
-            <a:ext cx="2103120" cy="475488"/>
+            <a:off x="1962150" y="2924175"/>
+            <a:ext cx="2076450" cy="152400"/>
           </a:xfrm>
           <a:prstGeom prst="line">
             <a:avLst/>
@@ -5874,9 +6281,10 @@
           <a:noFill/>
           <a:ln w="13970">
             <a:solidFill>
-              <a:srgbClr val="6B6B60"/>
+              <a:srgbClr val="9A9A90"/>
             </a:solidFill>
             <a:prstDash val="solid"/>
+            <a:headEnd type="none"/>
             <a:tailEnd type="triangle"/>
           </a:ln>
         </p:spPr>
@@ -5888,9 +6296,9 @@
           <p:nvPr/>
         </p:nvSpPr>
         <p:spPr>
-          <a:xfrm>
-            <a:off x="6035040" y="3099816"/>
-            <a:ext cx="1325880" cy="-475488"/>
+          <a:xfrm flipH="1">
+            <a:off x="5105400" y="2924175"/>
+            <a:ext cx="2076450" cy="152400"/>
           </a:xfrm>
           <a:prstGeom prst="line">
             <a:avLst/>
@@ -5898,10 +6306,11 @@
           <a:noFill/>
           <a:ln w="13970">
             <a:solidFill>
-              <a:srgbClr val="6B6B60"/>
+              <a:srgbClr val="9A9A90"/>
             </a:solidFill>
             <a:prstDash val="solid"/>
-            <a:headEnd type="triangle"/>
+            <a:headEnd type="none"/>
+            <a:tailEnd type="triangle"/>
           </a:ln>
         </p:spPr>
       </p:sp>
@@ -5913,34 +6322,34 @@
         </p:nvSpPr>
         <p:spPr>
           <a:xfrm>
-            <a:off x="640080" y="4315968"/>
-            <a:ext cx="7863840" cy="320040"/>
-          </a:xfrm>
-          <a:prstGeom prst="rect">
-            <a:avLst/>
-          </a:prstGeom>
-          <a:noFill/>
-          <a:ln/>
-        </p:spPr>
-        <p:txBody>
-          <a:bodyPr wrap="square" lIns="0" tIns="0" rIns="0" bIns="0" rtlCol="0" anchor="ctr"/>
-          <a:lstStyle/>
-          <a:p>
-            <a:pPr algn="ctr" indent="0" marL="0">
-              <a:buNone/>
-            </a:pPr>
-            <a:r>
-              <a:rPr lang="en-US" sz="1250" dirty="0">
-                <a:solidFill>
-                  <a:srgbClr val="6B6B60"/>
-                </a:solidFill>
-                <a:latin typeface="Times New Roman" pitchFamily="34" charset="0"/>
-                <a:ea typeface="Times New Roman" pitchFamily="34" charset="-122"/>
-                <a:cs typeface="Times New Roman" pitchFamily="34" charset="-120"/>
-              </a:rPr>
-              <a:t>Everything runs on one laptop. No cloud. Nothing paid for.</a:t>
-            </a:r>
-            <a:endParaRPr lang="en-US" sz="1250" dirty="0"/>
+            <a:off x="800100" y="4276725"/>
+            <a:ext cx="7543800" cy="372904"/>
+          </a:xfrm>
+          <a:prstGeom prst="rect">
+            <a:avLst/>
+          </a:prstGeom>
+          <a:noFill/>
+          <a:ln/>
+        </p:spPr>
+        <p:txBody>
+          <a:bodyPr wrap="square" lIns="0" tIns="0" rIns="0" bIns="0" rtlCol="0" anchor="t"/>
+          <a:lstStyle/>
+          <a:p>
+            <a:pPr algn="l" indent="0" marL="0">
+              <a:buNone/>
+            </a:pPr>
+            <a:r>
+              <a:rPr lang="en-US" sz="2000" dirty="0">
+                <a:solidFill>
+                  <a:srgbClr val="14140E"/>
+                </a:solidFill>
+                <a:latin typeface="Times New Roman" pitchFamily="34" charset="0"/>
+                <a:ea typeface="Times New Roman" pitchFamily="34" charset="-122"/>
+                <a:cs typeface="Times New Roman" pitchFamily="34" charset="-120"/>
+              </a:rPr>
+              <a:t>One laptop. No cloud. Nothing paid for. Works with the network down.</a:t>
+            </a:r>
+            <a:endParaRPr lang="en-US" sz="2000" dirty="0"/>
           </a:p>
         </p:txBody>
       </p:sp>
@@ -5958,7 +6367,7 @@
     <p:bg>
       <p:bgPr>
         <a:solidFill>
-          <a:srgbClr val="FBFBF8"/>
+          <a:srgbClr val="FCFCF9"/>
         </a:solidFill>
       </p:bgPr>
     </p:bg>
@@ -5978,32 +6387,32 @@
       </p:grpSpPr>
       <p:sp>
         <p:nvSpPr>
-          <p:cNvPr id="2" name="Text 0"/>
-          <p:cNvSpPr txBox="1"/>
-          <p:nvPr/>
-        </p:nvSpPr>
-        <p:spPr>
-          <a:xfrm>
-            <a:off x="640080" y="310896"/>
-            <a:ext cx="7863840" cy="274320"/>
-          </a:xfrm>
-          <a:prstGeom prst="rect">
-            <a:avLst/>
-          </a:prstGeom>
-          <a:noFill/>
-          <a:ln/>
-        </p:spPr>
-        <p:txBody>
-          <a:bodyPr wrap="square" lIns="0" tIns="0" rIns="0" bIns="0" rtlCol="0" anchor="ctr"/>
-          <a:lstStyle/>
-          <a:p>
-            <a:pPr indent="0" marL="0">
-              <a:buNone/>
-            </a:pPr>
-            <a:r>
-              <a:rPr lang="en-US" sz="1200" spc="100" kern="0" dirty="0">
-                <a:solidFill>
-                  <a:srgbClr val="6B6B60"/>
+          <p:cNvPr id="3" name="Text 0"/>
+          <p:cNvSpPr txBox="1"/>
+          <p:nvPr/>
+        </p:nvSpPr>
+        <p:spPr>
+          <a:xfrm>
+            <a:off x="800100" y="571500"/>
+            <a:ext cx="7543800" cy="205740"/>
+          </a:xfrm>
+          <a:prstGeom prst="rect">
+            <a:avLst/>
+          </a:prstGeom>
+          <a:noFill/>
+          <a:ln/>
+        </p:spPr>
+        <p:txBody>
+          <a:bodyPr wrap="square" lIns="0" tIns="0" rIns="0" bIns="0" rtlCol="0" anchor="t"/>
+          <a:lstStyle/>
+          <a:p>
+            <a:pPr algn="l" indent="0" marL="0">
+              <a:buNone/>
+            </a:pPr>
+            <a:r>
+              <a:rPr lang="en-US" sz="1150" spc="110" kern="0" dirty="0">
+                <a:solidFill>
+                  <a:srgbClr val="6E6E63"/>
                 </a:solidFill>
                 <a:latin typeface="Times New Roman" pitchFamily="34" charset="0"/>
                 <a:ea typeface="Times New Roman" pitchFamily="34" charset="-122"/>
@@ -6011,38 +6420,38 @@
               </a:rPr>
               <a:t>Power cuts and dead networks</a:t>
             </a:r>
-            <a:endParaRPr lang="en-US" sz="1200" dirty="0"/>
-          </a:p>
-        </p:txBody>
-      </p:sp>
-      <p:sp>
-        <p:nvSpPr>
-          <p:cNvPr id="3" name="Text 1"/>
-          <p:cNvSpPr txBox="1"/>
-          <p:nvPr/>
-        </p:nvSpPr>
-        <p:spPr>
-          <a:xfrm>
-            <a:off x="8138160" y="4576572"/>
-            <a:ext cx="365760" cy="256032"/>
-          </a:xfrm>
-          <a:prstGeom prst="rect">
-            <a:avLst/>
-          </a:prstGeom>
-          <a:noFill/>
-          <a:ln/>
-        </p:spPr>
-        <p:txBody>
-          <a:bodyPr wrap="square" lIns="0" tIns="0" rIns="0" bIns="0" rtlCol="0" anchor="ctr"/>
+            <a:endParaRPr lang="en-US" sz="1150" dirty="0"/>
+          </a:p>
+        </p:txBody>
+      </p:sp>
+      <p:sp>
+        <p:nvSpPr>
+          <p:cNvPr id="4" name="Text 1"/>
+          <p:cNvSpPr txBox="1"/>
+          <p:nvPr/>
+        </p:nvSpPr>
+        <p:spPr>
+          <a:xfrm>
+            <a:off x="7962900" y="4648200"/>
+            <a:ext cx="381000" cy="171450"/>
+          </a:xfrm>
+          <a:prstGeom prst="rect">
+            <a:avLst/>
+          </a:prstGeom>
+          <a:noFill/>
+          <a:ln/>
+        </p:spPr>
+        <p:txBody>
+          <a:bodyPr wrap="square" lIns="0" tIns="0" rIns="0" bIns="0" rtlCol="0" anchor="t"/>
           <a:lstStyle/>
           <a:p>
             <a:pPr algn="r" indent="0" marL="0">
               <a:buNone/>
             </a:pPr>
             <a:r>
-              <a:rPr lang="en-US" sz="1000" dirty="0">
-                <a:solidFill>
-                  <a:srgbClr val="C9C9BF"/>
+              <a:rPr lang="en-US" sz="1050" dirty="0">
+                <a:solidFill>
+                  <a:srgbClr val="9A9A90"/>
                 </a:solidFill>
                 <a:latin typeface="Times New Roman" pitchFamily="34" charset="0"/>
                 <a:ea typeface="Times New Roman" pitchFamily="34" charset="-122"/>
@@ -6050,7 +6459,7 @@
               </a:rPr>
               <a:t>7</a:t>
             </a:r>
-            <a:endParaRPr lang="en-US" sz="1000" dirty="0"/>
+            <a:endParaRPr lang="en-US" sz="1050" dirty="0"/>
           </a:p>
         </p:txBody>
       </p:sp>
@@ -6062,69 +6471,143 @@
         </p:nvSpPr>
         <p:spPr>
           <a:xfrm>
-            <a:off x="640080" y="914400"/>
-            <a:ext cx="5440680" cy="1600200"/>
-          </a:xfrm>
-          <a:prstGeom prst="rect">
-            <a:avLst/>
-          </a:prstGeom>
-          <a:noFill/>
-          <a:ln/>
-        </p:spPr>
-        <p:txBody>
-          <a:bodyPr wrap="square" lIns="0" tIns="0" rIns="0" bIns="0" rtlCol="0" anchor="t"/>
-          <a:lstStyle/>
-          <a:p>
-            <a:pPr indent="0" marL="0">
-              <a:lnSpc>
-                <a:spcPct val="112000"/>
-              </a:lnSpc>
-              <a:buNone/>
-            </a:pPr>
-            <a:r>
-              <a:rPr lang="en-US" sz="2100" b="1" dirty="0">
-                <a:solidFill>
-                  <a:srgbClr val="16160F"/>
-                </a:solidFill>
-                <a:latin typeface="Times New Roman" pitchFamily="34" charset="0"/>
-                <a:ea typeface="Times New Roman" pitchFamily="34" charset="-122"/>
-                <a:cs typeface="Times New Roman" pitchFamily="34" charset="-120"/>
-              </a:rPr>
-              <a:t>The fingerprint is taken at the scene,</a:t>
-            </a:r>
-            <a:endParaRPr lang="en-US" sz="2100" dirty="0"/>
-          </a:p>
-          <a:p>
-            <a:pPr indent="0" marL="0">
-              <a:lnSpc>
-                <a:spcPct val="112000"/>
-              </a:lnSpc>
-              <a:buNone/>
-            </a:pPr>
-            <a:r>
-              <a:rPr lang="en-US" sz="2100" b="1" dirty="0">
-                <a:solidFill>
-                  <a:srgbClr val="16160F"/>
-                </a:solidFill>
-                <a:latin typeface="Times New Roman" pitchFamily="34" charset="0"/>
-                <a:ea typeface="Times New Roman" pitchFamily="34" charset="-122"/>
-                <a:cs typeface="Times New Roman" pitchFamily="34" charset="-120"/>
-              </a:rPr>
-              <a:t>on the officer's device, before the file</a:t>
-            </a:r>
-            <a:endParaRPr lang="en-US" sz="2100" dirty="0"/>
-          </a:p>
-          <a:p>
-            <a:pPr indent="0" marL="0">
-              <a:lnSpc>
-                <a:spcPct val="112000"/>
-              </a:lnSpc>
-              <a:buNone/>
-            </a:pPr>
-            <a:r>
-              <a:rPr lang="en-US" sz="2100" b="1" dirty="0">
-                <a:solidFill>
-                  <a:srgbClr val="16160F"/>
+            <a:off x="800100" y="1571625"/>
+            <a:ext cx="4953000" cy="578644"/>
+          </a:xfrm>
+          <a:prstGeom prst="rect">
+            <a:avLst/>
+          </a:prstGeom>
+          <a:noFill/>
+          <a:ln/>
+        </p:spPr>
+        <p:txBody>
+          <a:bodyPr wrap="square" lIns="0" tIns="0" rIns="0" bIns="0" rtlCol="0" anchor="t"/>
+          <a:lstStyle/>
+          <a:p>
+            <a:pPr algn="l" indent="0" marL="0">
+              <a:buNone/>
+            </a:pPr>
+            <a:r>
+              <a:rPr lang="en-US" sz="3600" b="1" dirty="0">
+                <a:solidFill>
+                  <a:srgbClr val="14140E"/>
+                </a:solidFill>
+                <a:latin typeface="Times New Roman" pitchFamily="34" charset="0"/>
+                <a:ea typeface="Times New Roman" pitchFamily="34" charset="-122"/>
+                <a:cs typeface="Times New Roman" pitchFamily="34" charset="-120"/>
+              </a:rPr>
+              <a:t>The fingerprint is taken at</a:t>
+            </a:r>
+            <a:endParaRPr lang="en-US" sz="3600" dirty="0"/>
+          </a:p>
+        </p:txBody>
+      </p:sp>
+      <p:sp>
+        <p:nvSpPr>
+          <p:cNvPr id="6" name="Text 3"/>
+          <p:cNvSpPr txBox="1"/>
+          <p:nvPr/>
+        </p:nvSpPr>
+        <p:spPr>
+          <a:xfrm>
+            <a:off x="800100" y="2000250"/>
+            <a:ext cx="4953000" cy="578644"/>
+          </a:xfrm>
+          <a:prstGeom prst="rect">
+            <a:avLst/>
+          </a:prstGeom>
+          <a:noFill/>
+          <a:ln/>
+        </p:spPr>
+        <p:txBody>
+          <a:bodyPr wrap="square" lIns="0" tIns="0" rIns="0" bIns="0" rtlCol="0" anchor="t"/>
+          <a:lstStyle/>
+          <a:p>
+            <a:pPr algn="l" indent="0" marL="0">
+              <a:buNone/>
+            </a:pPr>
+            <a:r>
+              <a:rPr lang="en-US" sz="3600" b="1" dirty="0">
+                <a:solidFill>
+                  <a:srgbClr val="14140E"/>
+                </a:solidFill>
+                <a:latin typeface="Times New Roman" pitchFamily="34" charset="0"/>
+                <a:ea typeface="Times New Roman" pitchFamily="34" charset="-122"/>
+                <a:cs typeface="Times New Roman" pitchFamily="34" charset="-120"/>
+              </a:rPr>
+              <a:t>the scene, on the officer's</a:t>
+            </a:r>
+            <a:endParaRPr lang="en-US" sz="3600" dirty="0"/>
+          </a:p>
+        </p:txBody>
+      </p:sp>
+      <p:sp>
+        <p:nvSpPr>
+          <p:cNvPr id="7" name="Text 4"/>
+          <p:cNvSpPr txBox="1"/>
+          <p:nvPr/>
+        </p:nvSpPr>
+        <p:spPr>
+          <a:xfrm>
+            <a:off x="800100" y="2428875"/>
+            <a:ext cx="4953000" cy="578644"/>
+          </a:xfrm>
+          <a:prstGeom prst="rect">
+            <a:avLst/>
+          </a:prstGeom>
+          <a:noFill/>
+          <a:ln/>
+        </p:spPr>
+        <p:txBody>
+          <a:bodyPr wrap="square" lIns="0" tIns="0" rIns="0" bIns="0" rtlCol="0" anchor="t"/>
+          <a:lstStyle/>
+          <a:p>
+            <a:pPr algn="l" indent="0" marL="0">
+              <a:buNone/>
+            </a:pPr>
+            <a:r>
+              <a:rPr lang="en-US" sz="3600" b="1" dirty="0">
+                <a:solidFill>
+                  <a:srgbClr val="14140E"/>
+                </a:solidFill>
+                <a:latin typeface="Times New Roman" pitchFamily="34" charset="0"/>
+                <a:ea typeface="Times New Roman" pitchFamily="34" charset="-122"/>
+                <a:cs typeface="Times New Roman" pitchFamily="34" charset="-120"/>
+              </a:rPr>
+              <a:t>own device, before the file</a:t>
+            </a:r>
+            <a:endParaRPr lang="en-US" sz="3600" dirty="0"/>
+          </a:p>
+        </p:txBody>
+      </p:sp>
+      <p:sp>
+        <p:nvSpPr>
+          <p:cNvPr id="8" name="Text 5"/>
+          <p:cNvSpPr txBox="1"/>
+          <p:nvPr/>
+        </p:nvSpPr>
+        <p:spPr>
+          <a:xfrm>
+            <a:off x="800100" y="2857500"/>
+            <a:ext cx="4953000" cy="578644"/>
+          </a:xfrm>
+          <a:prstGeom prst="rect">
+            <a:avLst/>
+          </a:prstGeom>
+          <a:noFill/>
+          <a:ln/>
+        </p:spPr>
+        <p:txBody>
+          <a:bodyPr wrap="square" lIns="0" tIns="0" rIns="0" bIns="0" rtlCol="0" anchor="t"/>
+          <a:lstStyle/>
+          <a:p>
+            <a:pPr algn="l" indent="0" marL="0">
+              <a:buNone/>
+            </a:pPr>
+            <a:r>
+              <a:rPr lang="en-US" sz="3600" b="1" dirty="0">
+                <a:solidFill>
+                  <a:srgbClr val="14140E"/>
                 </a:solidFill>
                 <a:latin typeface="Times New Roman" pitchFamily="34" charset="0"/>
                 <a:ea typeface="Times New Roman" pitchFamily="34" charset="-122"/>
@@ -6132,32 +6615,110 @@
               </a:rPr>
               <a:t>goes anywhere.</a:t>
             </a:r>
-            <a:endParaRPr lang="en-US" sz="2100" dirty="0"/>
-          </a:p>
-        </p:txBody>
-      </p:sp>
-      <p:sp>
-        <p:nvSpPr>
-          <p:cNvPr id="6" name="Shape 3"/>
+            <a:endParaRPr lang="en-US" sz="3600" dirty="0"/>
+          </a:p>
+        </p:txBody>
+      </p:sp>
+      <p:sp>
+        <p:nvSpPr>
+          <p:cNvPr id="9" name="Text 6"/>
+          <p:cNvSpPr txBox="1"/>
+          <p:nvPr/>
+        </p:nvSpPr>
+        <p:spPr>
+          <a:xfrm>
+            <a:off x="800100" y="3571875"/>
+            <a:ext cx="4953000" cy="372904"/>
+          </a:xfrm>
+          <a:prstGeom prst="rect">
+            <a:avLst/>
+          </a:prstGeom>
+          <a:noFill/>
+          <a:ln/>
+        </p:spPr>
+        <p:txBody>
+          <a:bodyPr wrap="square" lIns="0" tIns="0" rIns="0" bIns="0" rtlCol="0" anchor="t"/>
+          <a:lstStyle/>
+          <a:p>
+            <a:pPr algn="l" indent="0" marL="0">
+              <a:buNone/>
+            </a:pPr>
+            <a:r>
+              <a:rPr lang="en-US" sz="2000" dirty="0">
+                <a:solidFill>
+                  <a:srgbClr val="14140E"/>
+                </a:solidFill>
+                <a:latin typeface="Times New Roman" pitchFamily="34" charset="0"/>
+                <a:ea typeface="Times New Roman" pitchFamily="34" charset="-122"/>
+                <a:cs typeface="Times New Roman" pitchFamily="34" charset="-120"/>
+              </a:rPr>
+              <a:t>Nothing between the scene and</a:t>
+            </a:r>
+            <a:endParaRPr lang="en-US" sz="2000" dirty="0"/>
+          </a:p>
+        </p:txBody>
+      </p:sp>
+      <p:sp>
+        <p:nvSpPr>
+          <p:cNvPr id="10" name="Text 7"/>
+          <p:cNvSpPr txBox="1"/>
+          <p:nvPr/>
+        </p:nvSpPr>
+        <p:spPr>
+          <a:xfrm>
+            <a:off x="800100" y="3848100"/>
+            <a:ext cx="4953000" cy="372904"/>
+          </a:xfrm>
+          <a:prstGeom prst="rect">
+            <a:avLst/>
+          </a:prstGeom>
+          <a:noFill/>
+          <a:ln/>
+        </p:spPr>
+        <p:txBody>
+          <a:bodyPr wrap="square" lIns="0" tIns="0" rIns="0" bIns="0" rtlCol="0" anchor="t"/>
+          <a:lstStyle/>
+          <a:p>
+            <a:pPr algn="l" indent="0" marL="0">
+              <a:buNone/>
+            </a:pPr>
+            <a:r>
+              <a:rPr lang="en-US" sz="2000" dirty="0">
+                <a:solidFill>
+                  <a:srgbClr val="14140E"/>
+                </a:solidFill>
+                <a:latin typeface="Times New Roman" pitchFamily="34" charset="0"/>
+                <a:ea typeface="Times New Roman" pitchFamily="34" charset="-122"/>
+                <a:cs typeface="Times New Roman" pitchFamily="34" charset="-120"/>
+              </a:rPr>
+              <a:t>the server can alter it undetected.</a:t>
+            </a:r>
+            <a:endParaRPr lang="en-US" sz="2000" dirty="0"/>
+          </a:p>
+        </p:txBody>
+      </p:sp>
+      <p:sp>
+        <p:nvSpPr>
+          <p:cNvPr id="11" name="Shape 8"/>
           <p:cNvSpPr/>
           <p:nvPr/>
         </p:nvSpPr>
         <p:spPr>
           <a:xfrm>
-            <a:off x="6355080" y="868680"/>
-            <a:ext cx="1965960" cy="3017520"/>
+            <a:off x="6305550" y="1571625"/>
+            <a:ext cx="2038350" cy="2552700"/>
           </a:xfrm>
           <a:prstGeom prst="roundRect">
             <a:avLst>
-              <a:gd name="adj" fmla="val 7442"/>
+              <a:gd name="adj" fmla="val 10280"/>
             </a:avLst>
           </a:prstGeom>
           <a:solidFill>
-            <a:srgbClr val="FBFBF8"/>
+            <a:srgbClr val="FCFCF9"/>
           </a:solidFill>
-          <a:ln w="15240">
+          <a:ln w="17780">
             <a:solidFill>
-              <a:srgbClr val="C9C9BF"/>
+              <a:srgbClr val="D2D2C8"/>
             </a:solidFill>
             <a:prstDash val="solid"/>
           </a:ln>
@@ -6165,32 +6726,32 @@
       </p:sp>
       <p:sp>
         <p:nvSpPr>
-          <p:cNvPr id="7" name="Text 4"/>
-          <p:cNvSpPr txBox="1"/>
-          <p:nvPr/>
-        </p:nvSpPr>
-        <p:spPr>
-          <a:xfrm>
-            <a:off x="6519672" y="1069848"/>
-            <a:ext cx="914400" cy="228600"/>
-          </a:xfrm>
-          <a:prstGeom prst="rect">
-            <a:avLst/>
-          </a:prstGeom>
-          <a:noFill/>
-          <a:ln/>
-        </p:spPr>
-        <p:txBody>
-          <a:bodyPr wrap="square" lIns="0" tIns="0" rIns="0" bIns="0" rtlCol="0" anchor="ctr"/>
-          <a:lstStyle/>
-          <a:p>
-            <a:pPr indent="0" marL="0">
-              <a:buNone/>
-            </a:pPr>
-            <a:r>
-              <a:rPr lang="en-US" sz="1100" b="1" dirty="0">
-                <a:solidFill>
-                  <a:srgbClr val="16160F"/>
+          <p:cNvPr id="12" name="Text 9"/>
+          <p:cNvSpPr txBox="1"/>
+          <p:nvPr/>
+        </p:nvSpPr>
+        <p:spPr>
+          <a:xfrm>
+            <a:off x="6496050" y="1781175"/>
+            <a:ext cx="952500" cy="372904"/>
+          </a:xfrm>
+          <a:prstGeom prst="rect">
+            <a:avLst/>
+          </a:prstGeom>
+          <a:noFill/>
+          <a:ln/>
+        </p:spPr>
+        <p:txBody>
+          <a:bodyPr wrap="square" lIns="0" tIns="0" rIns="0" bIns="0" rtlCol="0" anchor="t"/>
+          <a:lstStyle/>
+          <a:p>
+            <a:pPr algn="l" indent="0" marL="0">
+              <a:buNone/>
+            </a:pPr>
+            <a:r>
+              <a:rPr lang="en-US" sz="1300" b="1" dirty="0">
+                <a:solidFill>
+                  <a:srgbClr val="14140E"/>
                 </a:solidFill>
                 <a:latin typeface="Times New Roman" pitchFamily="34" charset="0"/>
                 <a:ea typeface="Times New Roman" pitchFamily="34" charset="-122"/>
@@ -6198,20 +6759,20 @@
               </a:rPr>
               <a:t>Custody</a:t>
             </a:r>
-            <a:endParaRPr lang="en-US" sz="1100" dirty="0"/>
-          </a:p>
-        </p:txBody>
-      </p:sp>
-      <p:sp>
-        <p:nvSpPr>
-          <p:cNvPr id="8" name="Shape 5"/>
+            <a:endParaRPr lang="en-US" sz="1300" dirty="0"/>
+          </a:p>
+        </p:txBody>
+      </p:sp>
+      <p:sp>
+        <p:nvSpPr>
+          <p:cNvPr id="13" name="Shape 10"/>
           <p:cNvSpPr/>
           <p:nvPr/>
         </p:nvSpPr>
         <p:spPr>
           <a:xfrm>
-            <a:off x="7488936" y="1051560"/>
-            <a:ext cx="658368" cy="201168"/>
+            <a:off x="7467600" y="1762125"/>
+            <a:ext cx="685800" cy="190500"/>
           </a:xfrm>
           <a:prstGeom prst="roundRect">
             <a:avLst>
@@ -6219,11 +6780,11 @@
             </a:avLst>
           </a:prstGeom>
           <a:solidFill>
-            <a:srgbClr val="F2E3B8"/>
+            <a:srgbClr val="F3E5BD"/>
           </a:solidFill>
           <a:ln w="6350">
             <a:solidFill>
-              <a:srgbClr val="F2E3B8"/>
+              <a:srgbClr val="F3E5BD"/>
             </a:solidFill>
             <a:prstDash val="solid"/>
           </a:ln>
@@ -6231,30 +6792,30 @@
       </p:sp>
       <p:sp>
         <p:nvSpPr>
-          <p:cNvPr id="9" name="Text 6"/>
-          <p:cNvSpPr txBox="1"/>
-          <p:nvPr/>
-        </p:nvSpPr>
-        <p:spPr>
-          <a:xfrm>
-            <a:off x="7488936" y="1065276"/>
-            <a:ext cx="658368" cy="182880"/>
-          </a:xfrm>
-          <a:prstGeom prst="rect">
-            <a:avLst/>
-          </a:prstGeom>
-          <a:noFill/>
-          <a:ln/>
-        </p:spPr>
-        <p:txBody>
-          <a:bodyPr wrap="square" lIns="0" tIns="0" rIns="0" bIns="0" rtlCol="0" anchor="ctr"/>
+          <p:cNvPr id="14" name="Text 11"/>
+          <p:cNvSpPr txBox="1"/>
+          <p:nvPr/>
+        </p:nvSpPr>
+        <p:spPr>
+          <a:xfrm>
+            <a:off x="7467600" y="1800225"/>
+            <a:ext cx="685800" cy="152400"/>
+          </a:xfrm>
+          <a:prstGeom prst="rect">
+            <a:avLst/>
+          </a:prstGeom>
+          <a:noFill/>
+          <a:ln/>
+        </p:spPr>
+        <p:txBody>
+          <a:bodyPr wrap="square" lIns="0" tIns="0" rIns="0" bIns="0" rtlCol="0" anchor="t"/>
           <a:lstStyle/>
           <a:p>
             <a:pPr algn="ctr" indent="0" marL="0">
               <a:buNone/>
             </a:pPr>
             <a:r>
-              <a:rPr lang="en-US" sz="800" b="1" dirty="0">
+              <a:rPr lang="en-US" sz="1000" b="1" dirty="0">
                 <a:solidFill>
                   <a:srgbClr val="7A5C00"/>
                 </a:solidFill>
@@ -6264,32 +6825,32 @@
               </a:rPr>
               <a:t>1 pending</a:t>
             </a:r>
-            <a:endParaRPr lang="en-US" sz="800" dirty="0"/>
-          </a:p>
-        </p:txBody>
-      </p:sp>
-      <p:sp>
-        <p:nvSpPr>
-          <p:cNvPr id="10" name="Shape 7"/>
+            <a:endParaRPr lang="en-US" sz="1000" dirty="0"/>
+          </a:p>
+        </p:txBody>
+      </p:sp>
+      <p:sp>
+        <p:nvSpPr>
+          <p:cNvPr id="15" name="Shape 12"/>
           <p:cNvSpPr/>
           <p:nvPr/>
         </p:nvSpPr>
         <p:spPr>
           <a:xfrm>
-            <a:off x="6501384" y="1435608"/>
-            <a:ext cx="1673352" cy="1051560"/>
+            <a:off x="6477000" y="2143125"/>
+            <a:ext cx="1695450" cy="1028700"/>
           </a:xfrm>
           <a:prstGeom prst="roundRect">
             <a:avLst>
-              <a:gd name="adj" fmla="val 4348"/>
+              <a:gd name="adj" fmla="val 5556"/>
             </a:avLst>
           </a:prstGeom>
           <a:solidFill>
-            <a:srgbClr val="FBFBF8"/>
+            <a:srgbClr val="FCFCF9"/>
           </a:solidFill>
-          <a:ln w="10160">
+          <a:ln w="12700">
             <a:solidFill>
-              <a:srgbClr val="C9C9BF"/>
+              <a:srgbClr val="D2D2C8"/>
             </a:solidFill>
             <a:prstDash val="solid"/>
           </a:ln>
@@ -6297,32 +6858,32 @@
       </p:sp>
       <p:sp>
         <p:nvSpPr>
-          <p:cNvPr id="11" name="Text 8"/>
-          <p:cNvSpPr txBox="1"/>
-          <p:nvPr/>
-        </p:nvSpPr>
-        <p:spPr>
-          <a:xfrm>
-            <a:off x="6629400" y="1545336"/>
-            <a:ext cx="1463040" cy="182880"/>
-          </a:xfrm>
-          <a:prstGeom prst="rect">
-            <a:avLst/>
-          </a:prstGeom>
-          <a:noFill/>
-          <a:ln/>
-        </p:spPr>
-        <p:txBody>
-          <a:bodyPr wrap="square" lIns="0" tIns="0" rIns="0" bIns="0" rtlCol="0" anchor="ctr"/>
-          <a:lstStyle/>
-          <a:p>
-            <a:pPr indent="0" marL="0">
-              <a:buNone/>
-            </a:pPr>
-            <a:r>
-              <a:rPr lang="en-US" sz="1000" b="1" dirty="0">
-                <a:solidFill>
-                  <a:srgbClr val="16160F"/>
+          <p:cNvPr id="16" name="Text 13"/>
+          <p:cNvSpPr txBox="1"/>
+          <p:nvPr/>
+        </p:nvSpPr>
+        <p:spPr>
+          <a:xfrm>
+            <a:off x="6610350" y="2257425"/>
+            <a:ext cx="1428750" cy="372904"/>
+          </a:xfrm>
+          <a:prstGeom prst="rect">
+            <a:avLst/>
+          </a:prstGeom>
+          <a:noFill/>
+          <a:ln/>
+        </p:spPr>
+        <p:txBody>
+          <a:bodyPr wrap="square" lIns="0" tIns="0" rIns="0" bIns="0" rtlCol="0" anchor="t"/>
+          <a:lstStyle/>
+          <a:p>
+            <a:pPr algn="l" indent="0" marL="0">
+              <a:buNone/>
+            </a:pPr>
+            <a:r>
+              <a:rPr lang="en-US" sz="1200" b="1" dirty="0">
+                <a:solidFill>
+                  <a:srgbClr val="14140E"/>
                 </a:solidFill>
                 <a:latin typeface="Times New Roman" pitchFamily="34" charset="0"/>
                 <a:ea typeface="Times New Roman" pitchFamily="34" charset="-122"/>
@@ -6330,38 +6891,38 @@
               </a:rPr>
               <a:t>EX-FIELD-004821</a:t>
             </a:r>
-            <a:endParaRPr lang="en-US" sz="1000" dirty="0"/>
-          </a:p>
-        </p:txBody>
-      </p:sp>
-      <p:sp>
-        <p:nvSpPr>
-          <p:cNvPr id="12" name="Text 9"/>
-          <p:cNvSpPr txBox="1"/>
-          <p:nvPr/>
-        </p:nvSpPr>
-        <p:spPr>
-          <a:xfrm>
-            <a:off x="6629400" y="1728216"/>
-            <a:ext cx="1463040" cy="182880"/>
-          </a:xfrm>
-          <a:prstGeom prst="rect">
-            <a:avLst/>
-          </a:prstGeom>
-          <a:noFill/>
-          <a:ln/>
-        </p:spPr>
-        <p:txBody>
-          <a:bodyPr wrap="square" lIns="0" tIns="0" rIns="0" bIns="0" rtlCol="0" anchor="ctr"/>
-          <a:lstStyle/>
-          <a:p>
-            <a:pPr indent="0" marL="0">
-              <a:buNone/>
-            </a:pPr>
-            <a:r>
-              <a:rPr lang="en-US" sz="850" dirty="0">
-                <a:solidFill>
-                  <a:srgbClr val="6B6B60"/>
+            <a:endParaRPr lang="en-US" sz="1200" dirty="0"/>
+          </a:p>
+        </p:txBody>
+      </p:sp>
+      <p:sp>
+        <p:nvSpPr>
+          <p:cNvPr id="17" name="Text 14"/>
+          <p:cNvSpPr txBox="1"/>
+          <p:nvPr/>
+        </p:nvSpPr>
+        <p:spPr>
+          <a:xfrm>
+            <a:off x="6610350" y="2428875"/>
+            <a:ext cx="1428750" cy="231458"/>
+          </a:xfrm>
+          <a:prstGeom prst="rect">
+            <a:avLst/>
+          </a:prstGeom>
+          <a:noFill/>
+          <a:ln/>
+        </p:spPr>
+        <p:txBody>
+          <a:bodyPr wrap="square" lIns="0" tIns="0" rIns="0" bIns="0" rtlCol="0" anchor="t"/>
+          <a:lstStyle/>
+          <a:p>
+            <a:pPr algn="l" indent="0" marL="0">
+              <a:buNone/>
+            </a:pPr>
+            <a:r>
+              <a:rPr lang="en-US" sz="1050" dirty="0">
+                <a:solidFill>
+                  <a:srgbClr val="6E6E63"/>
                 </a:solidFill>
                 <a:latin typeface="Times New Roman" pitchFamily="34" charset="0"/>
                 <a:ea typeface="Times New Roman" pitchFamily="34" charset="-122"/>
@@ -6369,36 +6930,36 @@
               </a:rPr>
               <a:t>handset extraction</a:t>
             </a:r>
-            <a:endParaRPr lang="en-US" sz="850" dirty="0"/>
-          </a:p>
-        </p:txBody>
-      </p:sp>
-      <p:sp>
-        <p:nvSpPr>
-          <p:cNvPr id="13" name="Text 10"/>
-          <p:cNvSpPr txBox="1"/>
-          <p:nvPr/>
-        </p:nvSpPr>
-        <p:spPr>
-          <a:xfrm>
-            <a:off x="6629400" y="1911096"/>
-            <a:ext cx="1463040" cy="182880"/>
-          </a:xfrm>
-          <a:prstGeom prst="rect">
-            <a:avLst/>
-          </a:prstGeom>
-          <a:noFill/>
-          <a:ln/>
-        </p:spPr>
-        <p:txBody>
-          <a:bodyPr wrap="square" lIns="0" tIns="0" rIns="0" bIns="0" rtlCol="0" anchor="ctr"/>
-          <a:lstStyle/>
-          <a:p>
-            <a:pPr indent="0" marL="0">
-              <a:buNone/>
-            </a:pPr>
-            <a:r>
-              <a:rPr lang="en-US" sz="950" b="1" dirty="0">
+            <a:endParaRPr lang="en-US" sz="1050" dirty="0"/>
+          </a:p>
+        </p:txBody>
+      </p:sp>
+      <p:sp>
+        <p:nvSpPr>
+          <p:cNvPr id="18" name="Text 15"/>
+          <p:cNvSpPr txBox="1"/>
+          <p:nvPr/>
+        </p:nvSpPr>
+        <p:spPr>
+          <a:xfrm>
+            <a:off x="6610350" y="2619375"/>
+            <a:ext cx="1428750" cy="372904"/>
+          </a:xfrm>
+          <a:prstGeom prst="rect">
+            <a:avLst/>
+          </a:prstGeom>
+          <a:noFill/>
+          <a:ln/>
+        </p:spPr>
+        <p:txBody>
+          <a:bodyPr wrap="square" lIns="0" tIns="0" rIns="0" bIns="0" rtlCol="0" anchor="t"/>
+          <a:lstStyle/>
+          <a:p>
+            <a:pPr algn="l" indent="0" marL="0">
+              <a:buNone/>
+            </a:pPr>
+            <a:r>
+              <a:rPr lang="en-US" sz="1200" b="1" dirty="0">
                 <a:solidFill>
                   <a:srgbClr val="1A7F37"/>
                 </a:solidFill>
@@ -6408,20 +6969,20 @@
               </a:rPr>
               <a:t>A3F1 9C22 7E04</a:t>
             </a:r>
-            <a:endParaRPr lang="en-US" sz="950" dirty="0"/>
-          </a:p>
-        </p:txBody>
-      </p:sp>
-      <p:sp>
-        <p:nvSpPr>
-          <p:cNvPr id="14" name="Shape 11"/>
+            <a:endParaRPr lang="en-US" sz="1200" dirty="0"/>
+          </a:p>
+        </p:txBody>
+      </p:sp>
+      <p:sp>
+        <p:nvSpPr>
+          <p:cNvPr id="19" name="Shape 16"/>
           <p:cNvSpPr/>
           <p:nvPr/>
         </p:nvSpPr>
         <p:spPr>
           <a:xfrm>
-            <a:off x="6629400" y="2148840"/>
-            <a:ext cx="1170432" cy="201168"/>
+            <a:off x="6610350" y="2847975"/>
+            <a:ext cx="1162050" cy="190500"/>
           </a:xfrm>
           <a:prstGeom prst="roundRect">
             <a:avLst>
@@ -6429,11 +6990,11 @@
             </a:avLst>
           </a:prstGeom>
           <a:solidFill>
-            <a:srgbClr val="F2E3B8"/>
+            <a:srgbClr val="F3E5BD"/>
           </a:solidFill>
           <a:ln w="6350">
             <a:solidFill>
-              <a:srgbClr val="F2E3B8"/>
+              <a:srgbClr val="F3E5BD"/>
             </a:solidFill>
             <a:prstDash val="solid"/>
           </a:ln>
@@ -6441,30 +7002,30 @@
       </p:sp>
       <p:sp>
         <p:nvSpPr>
-          <p:cNvPr id="15" name="Text 12"/>
-          <p:cNvSpPr txBox="1"/>
-          <p:nvPr/>
-        </p:nvSpPr>
-        <p:spPr>
-          <a:xfrm>
-            <a:off x="6629400" y="2162556"/>
-            <a:ext cx="1170432" cy="182880"/>
-          </a:xfrm>
-          <a:prstGeom prst="rect">
-            <a:avLst/>
-          </a:prstGeom>
-          <a:noFill/>
-          <a:ln/>
-        </p:spPr>
-        <p:txBody>
-          <a:bodyPr wrap="square" lIns="0" tIns="0" rIns="0" bIns="0" rtlCol="0" anchor="ctr"/>
+          <p:cNvPr id="20" name="Text 17"/>
+          <p:cNvSpPr txBox="1"/>
+          <p:nvPr/>
+        </p:nvSpPr>
+        <p:spPr>
+          <a:xfrm>
+            <a:off x="6610350" y="2886075"/>
+            <a:ext cx="1162050" cy="152400"/>
+          </a:xfrm>
+          <a:prstGeom prst="rect">
+            <a:avLst/>
+          </a:prstGeom>
+          <a:noFill/>
+          <a:ln/>
+        </p:spPr>
+        <p:txBody>
+          <a:bodyPr wrap="square" lIns="0" tIns="0" rIns="0" bIns="0" rtlCol="0" anchor="t"/>
           <a:lstStyle/>
           <a:p>
             <a:pPr algn="ctr" indent="0" marL="0">
               <a:buNone/>
             </a:pPr>
             <a:r>
-              <a:rPr lang="en-US" sz="800" b="1" dirty="0">
+              <a:rPr lang="en-US" sz="950" b="1" dirty="0">
                 <a:solidFill>
                   <a:srgbClr val="7A5C00"/>
                 </a:solidFill>
@@ -6474,150 +7035,69 @@
               </a:rPr>
               <a:t>Sealed, not synced</a:t>
             </a:r>
-            <a:endParaRPr lang="en-US" sz="800" dirty="0"/>
-          </a:p>
-        </p:txBody>
-      </p:sp>
-      <p:sp>
-        <p:nvSpPr>
-          <p:cNvPr id="16" name="Text 13"/>
-          <p:cNvSpPr txBox="1"/>
-          <p:nvPr/>
-        </p:nvSpPr>
-        <p:spPr>
-          <a:xfrm>
-            <a:off x="6501384" y="2697480"/>
-            <a:ext cx="1673352" cy="457200"/>
-          </a:xfrm>
-          <a:prstGeom prst="rect">
-            <a:avLst/>
-          </a:prstGeom>
-          <a:noFill/>
-          <a:ln/>
-        </p:spPr>
-        <p:txBody>
-          <a:bodyPr wrap="square" lIns="0" tIns="0" rIns="0" bIns="0" rtlCol="0" anchor="ctr"/>
+            <a:endParaRPr lang="en-US" sz="950" dirty="0"/>
+          </a:p>
+        </p:txBody>
+      </p:sp>
+      <p:sp>
+        <p:nvSpPr>
+          <p:cNvPr id="21" name="Text 18"/>
+          <p:cNvSpPr txBox="1"/>
+          <p:nvPr/>
+        </p:nvSpPr>
+        <p:spPr>
+          <a:xfrm>
+            <a:off x="6477000" y="3381375"/>
+            <a:ext cx="1695450" cy="457200"/>
+          </a:xfrm>
+          <a:prstGeom prst="rect">
+            <a:avLst/>
+          </a:prstGeom>
+          <a:noFill/>
+          <a:ln/>
+        </p:spPr>
+        <p:txBody>
+          <a:bodyPr wrap="square" lIns="0" tIns="0" rIns="0" bIns="0" rtlCol="0" anchor="t"/>
           <a:lstStyle/>
           <a:p>
             <a:pPr algn="ctr" indent="0" marL="0">
-              <a:buNone/>
-            </a:pPr>
-            <a:r>
-              <a:rPr lang="en-US" sz="900" dirty="0">
-                <a:solidFill>
-                  <a:srgbClr val="6B6B60"/>
-                </a:solidFill>
-                <a:latin typeface="Times New Roman" pitchFamily="34" charset="0"/>
-                <a:ea typeface="Times New Roman" pitchFamily="34" charset="-122"/>
-                <a:cs typeface="Times New Roman" pitchFamily="34" charset="-120"/>
-              </a:rPr>
-              <a:t>Airplane mode. No network at the scene.</a:t>
-            </a:r>
-            <a:endParaRPr lang="en-US" sz="900" dirty="0"/>
-          </a:p>
-        </p:txBody>
-      </p:sp>
-      <p:sp>
-        <p:nvSpPr>
-          <p:cNvPr id="17" name="Text 14"/>
-          <p:cNvSpPr txBox="1"/>
-          <p:nvPr/>
-        </p:nvSpPr>
-        <p:spPr>
-          <a:xfrm>
-            <a:off x="640080" y="2880360"/>
-            <a:ext cx="5440680" cy="731520"/>
-          </a:xfrm>
-          <a:prstGeom prst="rect">
-            <a:avLst/>
-          </a:prstGeom>
-          <a:noFill/>
-          <a:ln/>
-        </p:spPr>
-        <p:txBody>
-          <a:bodyPr wrap="square" lIns="0" tIns="0" rIns="0" bIns="0" rtlCol="0" anchor="t"/>
-          <a:lstStyle/>
-          <a:p>
-            <a:pPr indent="0" marL="0">
               <a:lnSpc>
                 <a:spcPct val="125000"/>
               </a:lnSpc>
               <a:buNone/>
             </a:pPr>
             <a:r>
-              <a:rPr lang="en-US" sz="1500" dirty="0">
-                <a:solidFill>
-                  <a:srgbClr val="16160F"/>
-                </a:solidFill>
-                <a:latin typeface="Times New Roman" pitchFamily="34" charset="0"/>
-                <a:ea typeface="Times New Roman" pitchFamily="34" charset="-122"/>
-                <a:cs typeface="Times New Roman" pitchFamily="34" charset="-120"/>
-              </a:rPr>
-              <a:t>Nothing between the scene and the server can alter the file</a:t>
-            </a:r>
-            <a:endParaRPr lang="en-US" sz="1500" dirty="0"/>
-          </a:p>
-          <a:p>
-            <a:pPr indent="0" marL="0">
+              <a:rPr lang="en-US" sz="1100" dirty="0">
+                <a:solidFill>
+                  <a:srgbClr val="6E6E63"/>
+                </a:solidFill>
+                <a:latin typeface="Times New Roman" pitchFamily="34" charset="0"/>
+                <a:ea typeface="Times New Roman" pitchFamily="34" charset="-122"/>
+                <a:cs typeface="Times New Roman" pitchFamily="34" charset="-120"/>
+              </a:rPr>
+              <a:t>Airplane mode.</a:t>
+            </a:r>
+            <a:endParaRPr lang="en-US" sz="1100" dirty="0"/>
+          </a:p>
+          <a:p>
+            <a:pPr algn="ctr" indent="0" marL="0">
               <a:lnSpc>
                 <a:spcPct val="125000"/>
               </a:lnSpc>
               <a:buNone/>
             </a:pPr>
             <a:r>
-              <a:rPr lang="en-US" sz="1500" dirty="0">
-                <a:solidFill>
-                  <a:srgbClr val="16160F"/>
-                </a:solidFill>
-                <a:latin typeface="Times New Roman" pitchFamily="34" charset="0"/>
-                <a:ea typeface="Times New Roman" pitchFamily="34" charset="-122"/>
-                <a:cs typeface="Times New Roman" pitchFamily="34" charset="-120"/>
-              </a:rPr>
-              <a:t>without it being detectable.</a:t>
-            </a:r>
-            <a:endParaRPr lang="en-US" sz="1500" dirty="0"/>
-          </a:p>
-        </p:txBody>
-      </p:sp>
-      <p:sp>
-        <p:nvSpPr>
-          <p:cNvPr id="18" name="Text 15"/>
-          <p:cNvSpPr txBox="1"/>
-          <p:nvPr/>
-        </p:nvSpPr>
-        <p:spPr>
-          <a:xfrm>
-            <a:off x="640080" y="3886200"/>
-            <a:ext cx="5440680" cy="640080"/>
-          </a:xfrm>
-          <a:prstGeom prst="rect">
-            <a:avLst/>
-          </a:prstGeom>
-          <a:noFill/>
-          <a:ln/>
-        </p:spPr>
-        <p:txBody>
-          <a:bodyPr wrap="square" lIns="0" tIns="0" rIns="0" bIns="0" rtlCol="0" anchor="t"/>
-          <a:lstStyle/>
-          <a:p>
-            <a:pPr indent="0" marL="0">
-              <a:lnSpc>
-                <a:spcPct val="125000"/>
-              </a:lnSpc>
-              <a:buNone/>
-            </a:pPr>
-            <a:r>
-              <a:rPr lang="en-US" sz="1200" i="1" dirty="0">
-                <a:solidFill>
-                  <a:srgbClr val="6B6B60"/>
-                </a:solidFill>
-                <a:latin typeface="Times New Roman" pitchFamily="34" charset="0"/>
-                <a:ea typeface="Times New Roman" pitchFamily="34" charset="-122"/>
-                <a:cs typeface="Times New Roman" pitchFamily="34" charset="-120"/>
-              </a:rPr>
-              <a:t>A question about power cuts and dead networks, answered by architecture rather than by a paragraph.</a:t>
-            </a:r>
-            <a:endParaRPr lang="en-US" sz="1200" dirty="0"/>
+              <a:rPr lang="en-US" sz="1100" dirty="0">
+                <a:solidFill>
+                  <a:srgbClr val="6E6E63"/>
+                </a:solidFill>
+                <a:latin typeface="Times New Roman" pitchFamily="34" charset="0"/>
+                <a:ea typeface="Times New Roman" pitchFamily="34" charset="-122"/>
+                <a:cs typeface="Times New Roman" pitchFamily="34" charset="-120"/>
+              </a:rPr>
+              <a:t>No network at the scene.</a:t>
+            </a:r>
+            <a:endParaRPr lang="en-US" sz="1100" dirty="0"/>
           </a:p>
         </p:txBody>
       </p:sp>
@@ -6635,7 +7115,7 @@
     <p:bg>
       <p:bgPr>
         <a:solidFill>
-          <a:srgbClr val="FBFBF8"/>
+          <a:srgbClr val="FCFCF9"/>
         </a:solidFill>
       </p:bgPr>
     </p:bg>
@@ -6655,32 +7135,32 @@
       </p:grpSpPr>
       <p:sp>
         <p:nvSpPr>
-          <p:cNvPr id="2" name="Text 0"/>
-          <p:cNvSpPr txBox="1"/>
-          <p:nvPr/>
-        </p:nvSpPr>
-        <p:spPr>
-          <a:xfrm>
-            <a:off x="640080" y="310896"/>
-            <a:ext cx="7863840" cy="274320"/>
-          </a:xfrm>
-          <a:prstGeom prst="rect">
-            <a:avLst/>
-          </a:prstGeom>
-          <a:noFill/>
-          <a:ln/>
-        </p:spPr>
-        <p:txBody>
-          <a:bodyPr wrap="square" lIns="0" tIns="0" rIns="0" bIns="0" rtlCol="0" anchor="ctr"/>
-          <a:lstStyle/>
-          <a:p>
-            <a:pPr indent="0" marL="0">
-              <a:buNone/>
-            </a:pPr>
-            <a:r>
-              <a:rPr lang="en-US" sz="1200" spc="100" kern="0" dirty="0">
-                <a:solidFill>
-                  <a:srgbClr val="6B6B60"/>
+          <p:cNvPr id="3" name="Text 0"/>
+          <p:cNvSpPr txBox="1"/>
+          <p:nvPr/>
+        </p:nvSpPr>
+        <p:spPr>
+          <a:xfrm>
+            <a:off x="800100" y="571500"/>
+            <a:ext cx="7543800" cy="205740"/>
+          </a:xfrm>
+          <a:prstGeom prst="rect">
+            <a:avLst/>
+          </a:prstGeom>
+          <a:noFill/>
+          <a:ln/>
+        </p:spPr>
+        <p:txBody>
+          <a:bodyPr wrap="square" lIns="0" tIns="0" rIns="0" bIns="0" rtlCol="0" anchor="t"/>
+          <a:lstStyle/>
+          <a:p>
+            <a:pPr algn="l" indent="0" marL="0">
+              <a:buNone/>
+            </a:pPr>
+            <a:r>
+              <a:rPr lang="en-US" sz="1150" spc="110" kern="0" dirty="0">
+                <a:solidFill>
+                  <a:srgbClr val="6E6E63"/>
                 </a:solidFill>
                 <a:latin typeface="Times New Roman" pitchFamily="34" charset="0"/>
                 <a:ea typeface="Times New Roman" pitchFamily="34" charset="-122"/>
@@ -6688,38 +7168,38 @@
               </a:rPr>
               <a:t>One extraction can exceed 100GB</a:t>
             </a:r>
-            <a:endParaRPr lang="en-US" sz="1200" dirty="0"/>
-          </a:p>
-        </p:txBody>
-      </p:sp>
-      <p:sp>
-        <p:nvSpPr>
-          <p:cNvPr id="3" name="Text 1"/>
-          <p:cNvSpPr txBox="1"/>
-          <p:nvPr/>
-        </p:nvSpPr>
-        <p:spPr>
-          <a:xfrm>
-            <a:off x="8138160" y="4576572"/>
-            <a:ext cx="365760" cy="256032"/>
-          </a:xfrm>
-          <a:prstGeom prst="rect">
-            <a:avLst/>
-          </a:prstGeom>
-          <a:noFill/>
-          <a:ln/>
-        </p:spPr>
-        <p:txBody>
-          <a:bodyPr wrap="square" lIns="0" tIns="0" rIns="0" bIns="0" rtlCol="0" anchor="ctr"/>
+            <a:endParaRPr lang="en-US" sz="1150" dirty="0"/>
+          </a:p>
+        </p:txBody>
+      </p:sp>
+      <p:sp>
+        <p:nvSpPr>
+          <p:cNvPr id="4" name="Text 1"/>
+          <p:cNvSpPr txBox="1"/>
+          <p:nvPr/>
+        </p:nvSpPr>
+        <p:spPr>
+          <a:xfrm>
+            <a:off x="7962900" y="4648200"/>
+            <a:ext cx="381000" cy="171450"/>
+          </a:xfrm>
+          <a:prstGeom prst="rect">
+            <a:avLst/>
+          </a:prstGeom>
+          <a:noFill/>
+          <a:ln/>
+        </p:spPr>
+        <p:txBody>
+          <a:bodyPr wrap="square" lIns="0" tIns="0" rIns="0" bIns="0" rtlCol="0" anchor="t"/>
           <a:lstStyle/>
           <a:p>
             <a:pPr algn="r" indent="0" marL="0">
               <a:buNone/>
             </a:pPr>
             <a:r>
-              <a:rPr lang="en-US" sz="1000" dirty="0">
-                <a:solidFill>
-                  <a:srgbClr val="C9C9BF"/>
+              <a:rPr lang="en-US" sz="1050" dirty="0">
+                <a:solidFill>
+                  <a:srgbClr val="9A9A90"/>
                 </a:solidFill>
                 <a:latin typeface="Times New Roman" pitchFamily="34" charset="0"/>
                 <a:ea typeface="Times New Roman" pitchFamily="34" charset="-122"/>
@@ -6727,7 +7207,7 @@
               </a:rPr>
               <a:t>8</a:t>
             </a:r>
-            <a:endParaRPr lang="en-US" sz="1000" dirty="0"/>
+            <a:endParaRPr lang="en-US" sz="1050" dirty="0"/>
           </a:p>
         </p:txBody>
       </p:sp>
@@ -6739,29 +7219,26 @@
         </p:nvSpPr>
         <p:spPr>
           <a:xfrm>
-            <a:off x="640080" y="868680"/>
-            <a:ext cx="7863840" cy="1143000"/>
-          </a:xfrm>
-          <a:prstGeom prst="rect">
-            <a:avLst/>
-          </a:prstGeom>
-          <a:noFill/>
-          <a:ln/>
-        </p:spPr>
-        <p:txBody>
-          <a:bodyPr wrap="square" lIns="0" tIns="0" rIns="0" bIns="0" rtlCol="0" anchor="t"/>
-          <a:lstStyle/>
-          <a:p>
-            <a:pPr indent="0" marL="0">
-              <a:lnSpc>
-                <a:spcPct val="112000"/>
-              </a:lnSpc>
-              <a:buNone/>
-            </a:pPr>
-            <a:r>
-              <a:rPr lang="en-US" sz="2700" b="1" dirty="0">
-                <a:solidFill>
-                  <a:srgbClr val="16160F"/>
+            <a:off x="800100" y="1362075"/>
+            <a:ext cx="7543800" cy="578644"/>
+          </a:xfrm>
+          <a:prstGeom prst="rect">
+            <a:avLst/>
+          </a:prstGeom>
+          <a:noFill/>
+          <a:ln/>
+        </p:spPr>
+        <p:txBody>
+          <a:bodyPr wrap="square" lIns="0" tIns="0" rIns="0" bIns="0" rtlCol="0" anchor="t"/>
+          <a:lstStyle/>
+          <a:p>
+            <a:pPr algn="l" indent="0" marL="0">
+              <a:buNone/>
+            </a:pPr>
+            <a:r>
+              <a:rPr lang="en-US" sz="3600" b="1" dirty="0">
+                <a:solidFill>
+                  <a:srgbClr val="14140E"/>
                 </a:solidFill>
                 <a:latin typeface="Times New Roman" pitchFamily="34" charset="0"/>
                 <a:ea typeface="Times New Roman" pitchFamily="34" charset="-122"/>
@@ -6769,19 +7246,38 @@
               </a:rPr>
               <a:t>We say which part changed,</a:t>
             </a:r>
-            <a:endParaRPr lang="en-US" sz="2700" dirty="0"/>
-          </a:p>
-          <a:p>
-            <a:pPr indent="0" marL="0">
-              <a:lnSpc>
-                <a:spcPct val="112000"/>
-              </a:lnSpc>
-              <a:buNone/>
-            </a:pPr>
-            <a:r>
-              <a:rPr lang="en-US" sz="2700" b="1" dirty="0">
-                <a:solidFill>
-                  <a:srgbClr val="16160F"/>
+            <a:endParaRPr lang="en-US" sz="3600" dirty="0"/>
+          </a:p>
+        </p:txBody>
+      </p:sp>
+      <p:sp>
+        <p:nvSpPr>
+          <p:cNvPr id="6" name="Text 3"/>
+          <p:cNvSpPr txBox="1"/>
+          <p:nvPr/>
+        </p:nvSpPr>
+        <p:spPr>
+          <a:xfrm>
+            <a:off x="800100" y="1790700"/>
+            <a:ext cx="7543800" cy="578644"/>
+          </a:xfrm>
+          <a:prstGeom prst="rect">
+            <a:avLst/>
+          </a:prstGeom>
+          <a:noFill/>
+          <a:ln/>
+        </p:spPr>
+        <p:txBody>
+          <a:bodyPr wrap="square" lIns="0" tIns="0" rIns="0" bIns="0" rtlCol="0" anchor="t"/>
+          <a:lstStyle/>
+          <a:p>
+            <a:pPr algn="l" indent="0" marL="0">
+              <a:buNone/>
+            </a:pPr>
+            <a:r>
+              <a:rPr lang="en-US" sz="3600" b="1" dirty="0">
+                <a:solidFill>
+                  <a:srgbClr val="14140E"/>
                 </a:solidFill>
                 <a:latin typeface="Times New Roman" pitchFamily="34" charset="0"/>
                 <a:ea typeface="Times New Roman" pitchFamily="34" charset="-122"/>
@@ -6789,32 +7285,32 @@
               </a:rPr>
               <a:t>not just that something did.</a:t>
             </a:r>
-            <a:endParaRPr lang="en-US" sz="2700" dirty="0"/>
-          </a:p>
-        </p:txBody>
-      </p:sp>
-      <p:sp>
-        <p:nvSpPr>
-          <p:cNvPr id="6" name="Shape 3"/>
+            <a:endParaRPr lang="en-US" sz="3600" dirty="0"/>
+          </a:p>
+        </p:txBody>
+      </p:sp>
+      <p:sp>
+        <p:nvSpPr>
+          <p:cNvPr id="7" name="Shape 4"/>
           <p:cNvSpPr/>
           <p:nvPr/>
         </p:nvSpPr>
         <p:spPr>
           <a:xfrm>
-            <a:off x="640080" y="2331720"/>
-            <a:ext cx="841248" cy="566928"/>
+            <a:off x="800100" y="2505075"/>
+            <a:ext cx="838200" cy="571500"/>
           </a:xfrm>
           <a:prstGeom prst="roundRect">
             <a:avLst>
-              <a:gd name="adj" fmla="val 6452"/>
+              <a:gd name="adj" fmla="val 6667"/>
             </a:avLst>
           </a:prstGeom>
           <a:solidFill>
-            <a:srgbClr val="E8F5EC"/>
+            <a:srgbClr val="E9F5EC"/>
           </a:solidFill>
           <a:ln w="12700">
             <a:solidFill>
-              <a:srgbClr val="BFE3CA"/>
+              <a:srgbClr val="C2E3CB"/>
             </a:solidFill>
             <a:prstDash val="solid"/>
           </a:ln>
@@ -6822,30 +7318,30 @@
       </p:sp>
       <p:sp>
         <p:nvSpPr>
-          <p:cNvPr id="7" name="Text 4"/>
-          <p:cNvSpPr txBox="1"/>
-          <p:nvPr/>
-        </p:nvSpPr>
-        <p:spPr>
-          <a:xfrm>
-            <a:off x="640080" y="2478024"/>
-            <a:ext cx="841248" cy="274320"/>
-          </a:xfrm>
-          <a:prstGeom prst="rect">
-            <a:avLst/>
-          </a:prstGeom>
-          <a:noFill/>
-          <a:ln/>
-        </p:spPr>
-        <p:txBody>
-          <a:bodyPr wrap="square" lIns="0" tIns="0" rIns="0" bIns="0" rtlCol="0" anchor="ctr"/>
+          <p:cNvPr id="8" name="Text 5"/>
+          <p:cNvSpPr txBox="1"/>
+          <p:nvPr/>
+        </p:nvSpPr>
+        <p:spPr>
+          <a:xfrm>
+            <a:off x="800100" y="2667000"/>
+            <a:ext cx="838200" cy="247650"/>
+          </a:xfrm>
+          <a:prstGeom prst="rect">
+            <a:avLst/>
+          </a:prstGeom>
+          <a:noFill/>
+          <a:ln/>
+        </p:spPr>
+        <p:txBody>
+          <a:bodyPr wrap="square" lIns="0" tIns="0" rIns="0" bIns="0" rtlCol="0" anchor="t"/>
           <a:lstStyle/>
           <a:p>
             <a:pPr algn="ctr" indent="0" marL="0">
               <a:buNone/>
             </a:pPr>
             <a:r>
-              <a:rPr lang="en-US" sz="1400" b="1" dirty="0">
+              <a:rPr lang="en-US" sz="1700" b="1" dirty="0">
                 <a:solidFill>
                   <a:srgbClr val="1A7F37"/>
                 </a:solidFill>
@@ -6855,32 +7351,32 @@
               </a:rPr>
               <a:t>1</a:t>
             </a:r>
-            <a:endParaRPr lang="en-US" sz="1400" dirty="0"/>
-          </a:p>
-        </p:txBody>
-      </p:sp>
-      <p:sp>
-        <p:nvSpPr>
-          <p:cNvPr id="8" name="Shape 5"/>
+            <a:endParaRPr lang="en-US" sz="1700" dirty="0"/>
+          </a:p>
+        </p:txBody>
+      </p:sp>
+      <p:sp>
+        <p:nvSpPr>
+          <p:cNvPr id="9" name="Shape 6"/>
           <p:cNvSpPr/>
           <p:nvPr/>
         </p:nvSpPr>
         <p:spPr>
           <a:xfrm>
-            <a:off x="1572768" y="2331720"/>
-            <a:ext cx="841248" cy="566928"/>
+            <a:off x="1724025" y="2505075"/>
+            <a:ext cx="838200" cy="571500"/>
           </a:xfrm>
           <a:prstGeom prst="roundRect">
             <a:avLst>
-              <a:gd name="adj" fmla="val 6452"/>
+              <a:gd name="adj" fmla="val 6667"/>
             </a:avLst>
           </a:prstGeom>
           <a:solidFill>
-            <a:srgbClr val="E8F5EC"/>
+            <a:srgbClr val="E9F5EC"/>
           </a:solidFill>
           <a:ln w="12700">
             <a:solidFill>
-              <a:srgbClr val="BFE3CA"/>
+              <a:srgbClr val="C2E3CB"/>
             </a:solidFill>
             <a:prstDash val="solid"/>
           </a:ln>
@@ -6888,30 +7384,30 @@
       </p:sp>
       <p:sp>
         <p:nvSpPr>
-          <p:cNvPr id="9" name="Text 6"/>
-          <p:cNvSpPr txBox="1"/>
-          <p:nvPr/>
-        </p:nvSpPr>
-        <p:spPr>
-          <a:xfrm>
-            <a:off x="1572768" y="2478024"/>
-            <a:ext cx="841248" cy="274320"/>
-          </a:xfrm>
-          <a:prstGeom prst="rect">
-            <a:avLst/>
-          </a:prstGeom>
-          <a:noFill/>
-          <a:ln/>
-        </p:spPr>
-        <p:txBody>
-          <a:bodyPr wrap="square" lIns="0" tIns="0" rIns="0" bIns="0" rtlCol="0" anchor="ctr"/>
+          <p:cNvPr id="10" name="Text 7"/>
+          <p:cNvSpPr txBox="1"/>
+          <p:nvPr/>
+        </p:nvSpPr>
+        <p:spPr>
+          <a:xfrm>
+            <a:off x="1724025" y="2667000"/>
+            <a:ext cx="838200" cy="247650"/>
+          </a:xfrm>
+          <a:prstGeom prst="rect">
+            <a:avLst/>
+          </a:prstGeom>
+          <a:noFill/>
+          <a:ln/>
+        </p:spPr>
+        <p:txBody>
+          <a:bodyPr wrap="square" lIns="0" tIns="0" rIns="0" bIns="0" rtlCol="0" anchor="t"/>
           <a:lstStyle/>
           <a:p>
             <a:pPr algn="ctr" indent="0" marL="0">
               <a:buNone/>
             </a:pPr>
             <a:r>
-              <a:rPr lang="en-US" sz="1400" b="1" dirty="0">
+              <a:rPr lang="en-US" sz="1700" b="1" dirty="0">
                 <a:solidFill>
                   <a:srgbClr val="1A7F37"/>
                 </a:solidFill>
@@ -6921,32 +7417,32 @@
               </a:rPr>
               <a:t>2</a:t>
             </a:r>
-            <a:endParaRPr lang="en-US" sz="1400" dirty="0"/>
-          </a:p>
-        </p:txBody>
-      </p:sp>
-      <p:sp>
-        <p:nvSpPr>
-          <p:cNvPr id="10" name="Shape 7"/>
+            <a:endParaRPr lang="en-US" sz="1700" dirty="0"/>
+          </a:p>
+        </p:txBody>
+      </p:sp>
+      <p:sp>
+        <p:nvSpPr>
+          <p:cNvPr id="11" name="Shape 8"/>
           <p:cNvSpPr/>
           <p:nvPr/>
         </p:nvSpPr>
         <p:spPr>
           <a:xfrm>
-            <a:off x="2505456" y="2331720"/>
-            <a:ext cx="841248" cy="566928"/>
+            <a:off x="2647950" y="2505075"/>
+            <a:ext cx="838200" cy="571500"/>
           </a:xfrm>
           <a:prstGeom prst="roundRect">
             <a:avLst>
-              <a:gd name="adj" fmla="val 6452"/>
+              <a:gd name="adj" fmla="val 6667"/>
             </a:avLst>
           </a:prstGeom>
           <a:solidFill>
-            <a:srgbClr val="E8F5EC"/>
+            <a:srgbClr val="E9F5EC"/>
           </a:solidFill>
           <a:ln w="12700">
             <a:solidFill>
-              <a:srgbClr val="BFE3CA"/>
+              <a:srgbClr val="C2E3CB"/>
             </a:solidFill>
             <a:prstDash val="solid"/>
           </a:ln>
@@ -6954,30 +7450,30 @@
       </p:sp>
       <p:sp>
         <p:nvSpPr>
-          <p:cNvPr id="11" name="Text 8"/>
-          <p:cNvSpPr txBox="1"/>
-          <p:nvPr/>
-        </p:nvSpPr>
-        <p:spPr>
-          <a:xfrm>
-            <a:off x="2505456" y="2478024"/>
-            <a:ext cx="841248" cy="274320"/>
-          </a:xfrm>
-          <a:prstGeom prst="rect">
-            <a:avLst/>
-          </a:prstGeom>
-          <a:noFill/>
-          <a:ln/>
-        </p:spPr>
-        <p:txBody>
-          <a:bodyPr wrap="square" lIns="0" tIns="0" rIns="0" bIns="0" rtlCol="0" anchor="ctr"/>
+          <p:cNvPr id="12" name="Text 9"/>
+          <p:cNvSpPr txBox="1"/>
+          <p:nvPr/>
+        </p:nvSpPr>
+        <p:spPr>
+          <a:xfrm>
+            <a:off x="2647950" y="2667000"/>
+            <a:ext cx="838200" cy="247650"/>
+          </a:xfrm>
+          <a:prstGeom prst="rect">
+            <a:avLst/>
+          </a:prstGeom>
+          <a:noFill/>
+          <a:ln/>
+        </p:spPr>
+        <p:txBody>
+          <a:bodyPr wrap="square" lIns="0" tIns="0" rIns="0" bIns="0" rtlCol="0" anchor="t"/>
           <a:lstStyle/>
           <a:p>
             <a:pPr algn="ctr" indent="0" marL="0">
               <a:buNone/>
             </a:pPr>
             <a:r>
-              <a:rPr lang="en-US" sz="1400" b="1" dirty="0">
+              <a:rPr lang="en-US" sz="1700" b="1" dirty="0">
                 <a:solidFill>
                   <a:srgbClr val="1A7F37"/>
                 </a:solidFill>
@@ -6987,32 +7483,32 @@
               </a:rPr>
               <a:t>3</a:t>
             </a:r>
-            <a:endParaRPr lang="en-US" sz="1400" dirty="0"/>
-          </a:p>
-        </p:txBody>
-      </p:sp>
-      <p:sp>
-        <p:nvSpPr>
-          <p:cNvPr id="12" name="Shape 9"/>
+            <a:endParaRPr lang="en-US" sz="1700" dirty="0"/>
+          </a:p>
+        </p:txBody>
+      </p:sp>
+      <p:sp>
+        <p:nvSpPr>
+          <p:cNvPr id="13" name="Shape 10"/>
           <p:cNvSpPr/>
           <p:nvPr/>
         </p:nvSpPr>
         <p:spPr>
           <a:xfrm>
-            <a:off x="3438144" y="2331720"/>
-            <a:ext cx="841248" cy="566928"/>
+            <a:off x="3571875" y="2505075"/>
+            <a:ext cx="838200" cy="571500"/>
           </a:xfrm>
           <a:prstGeom prst="roundRect">
             <a:avLst>
-              <a:gd name="adj" fmla="val 6452"/>
+              <a:gd name="adj" fmla="val 6667"/>
             </a:avLst>
           </a:prstGeom>
           <a:solidFill>
-            <a:srgbClr val="E8F5EC"/>
+            <a:srgbClr val="E9F5EC"/>
           </a:solidFill>
           <a:ln w="12700">
             <a:solidFill>
-              <a:srgbClr val="BFE3CA"/>
+              <a:srgbClr val="C2E3CB"/>
             </a:solidFill>
             <a:prstDash val="solid"/>
           </a:ln>
@@ -7020,30 +7516,30 @@
       </p:sp>
       <p:sp>
         <p:nvSpPr>
-          <p:cNvPr id="13" name="Text 10"/>
-          <p:cNvSpPr txBox="1"/>
-          <p:nvPr/>
-        </p:nvSpPr>
-        <p:spPr>
-          <a:xfrm>
-            <a:off x="3438144" y="2478024"/>
-            <a:ext cx="841248" cy="274320"/>
-          </a:xfrm>
-          <a:prstGeom prst="rect">
-            <a:avLst/>
-          </a:prstGeom>
-          <a:noFill/>
-          <a:ln/>
-        </p:spPr>
-        <p:txBody>
-          <a:bodyPr wrap="square" lIns="0" tIns="0" rIns="0" bIns="0" rtlCol="0" anchor="ctr"/>
+          <p:cNvPr id="14" name="Text 11"/>
+          <p:cNvSpPr txBox="1"/>
+          <p:nvPr/>
+        </p:nvSpPr>
+        <p:spPr>
+          <a:xfrm>
+            <a:off x="3571875" y="2667000"/>
+            <a:ext cx="838200" cy="247650"/>
+          </a:xfrm>
+          <a:prstGeom prst="rect">
+            <a:avLst/>
+          </a:prstGeom>
+          <a:noFill/>
+          <a:ln/>
+        </p:spPr>
+        <p:txBody>
+          <a:bodyPr wrap="square" lIns="0" tIns="0" rIns="0" bIns="0" rtlCol="0" anchor="t"/>
           <a:lstStyle/>
           <a:p>
             <a:pPr algn="ctr" indent="0" marL="0">
               <a:buNone/>
             </a:pPr>
             <a:r>
-              <a:rPr lang="en-US" sz="1400" b="1" dirty="0">
+              <a:rPr lang="en-US" sz="1700" b="1" dirty="0">
                 <a:solidFill>
                   <a:srgbClr val="1A7F37"/>
                 </a:solidFill>
@@ -7053,32 +7549,32 @@
               </a:rPr>
               <a:t>4</a:t>
             </a:r>
-            <a:endParaRPr lang="en-US" sz="1400" dirty="0"/>
-          </a:p>
-        </p:txBody>
-      </p:sp>
-      <p:sp>
-        <p:nvSpPr>
-          <p:cNvPr id="14" name="Shape 11"/>
+            <a:endParaRPr lang="en-US" sz="1700" dirty="0"/>
+          </a:p>
+        </p:txBody>
+      </p:sp>
+      <p:sp>
+        <p:nvSpPr>
+          <p:cNvPr id="15" name="Shape 12"/>
           <p:cNvSpPr/>
           <p:nvPr/>
         </p:nvSpPr>
         <p:spPr>
           <a:xfrm>
-            <a:off x="4370832" y="2331720"/>
-            <a:ext cx="841248" cy="566928"/>
+            <a:off x="4495800" y="2505075"/>
+            <a:ext cx="838200" cy="571500"/>
           </a:xfrm>
           <a:prstGeom prst="roundRect">
             <a:avLst>
-              <a:gd name="adj" fmla="val 6452"/>
+              <a:gd name="adj" fmla="val 6667"/>
             </a:avLst>
           </a:prstGeom>
           <a:solidFill>
-            <a:srgbClr val="E8F5EC"/>
+            <a:srgbClr val="E9F5EC"/>
           </a:solidFill>
           <a:ln w="12700">
             <a:solidFill>
-              <a:srgbClr val="BFE3CA"/>
+              <a:srgbClr val="C2E3CB"/>
             </a:solidFill>
             <a:prstDash val="solid"/>
           </a:ln>
@@ -7086,30 +7582,30 @@
       </p:sp>
       <p:sp>
         <p:nvSpPr>
-          <p:cNvPr id="15" name="Text 12"/>
-          <p:cNvSpPr txBox="1"/>
-          <p:nvPr/>
-        </p:nvSpPr>
-        <p:spPr>
-          <a:xfrm>
-            <a:off x="4370832" y="2478024"/>
-            <a:ext cx="841248" cy="274320"/>
-          </a:xfrm>
-          <a:prstGeom prst="rect">
-            <a:avLst/>
-          </a:prstGeom>
-          <a:noFill/>
-          <a:ln/>
-        </p:spPr>
-        <p:txBody>
-          <a:bodyPr wrap="square" lIns="0" tIns="0" rIns="0" bIns="0" rtlCol="0" anchor="ctr"/>
+          <p:cNvPr id="16" name="Text 13"/>
+          <p:cNvSpPr txBox="1"/>
+          <p:nvPr/>
+        </p:nvSpPr>
+        <p:spPr>
+          <a:xfrm>
+            <a:off x="4495800" y="2667000"/>
+            <a:ext cx="838200" cy="247650"/>
+          </a:xfrm>
+          <a:prstGeom prst="rect">
+            <a:avLst/>
+          </a:prstGeom>
+          <a:noFill/>
+          <a:ln/>
+        </p:spPr>
+        <p:txBody>
+          <a:bodyPr wrap="square" lIns="0" tIns="0" rIns="0" bIns="0" rtlCol="0" anchor="t"/>
           <a:lstStyle/>
           <a:p>
             <a:pPr algn="ctr" indent="0" marL="0">
               <a:buNone/>
             </a:pPr>
             <a:r>
-              <a:rPr lang="en-US" sz="1400" b="1" dirty="0">
+              <a:rPr lang="en-US" sz="1700" b="1" dirty="0">
                 <a:solidFill>
                   <a:srgbClr val="1A7F37"/>
                 </a:solidFill>
@@ -7119,24 +7615,24 @@
               </a:rPr>
               <a:t>5</a:t>
             </a:r>
-            <a:endParaRPr lang="en-US" sz="1400" dirty="0"/>
-          </a:p>
-        </p:txBody>
-      </p:sp>
-      <p:sp>
-        <p:nvSpPr>
-          <p:cNvPr id="16" name="Shape 13"/>
+            <a:endParaRPr lang="en-US" sz="1700" dirty="0"/>
+          </a:p>
+        </p:txBody>
+      </p:sp>
+      <p:sp>
+        <p:nvSpPr>
+          <p:cNvPr id="17" name="Shape 14"/>
           <p:cNvSpPr/>
           <p:nvPr/>
         </p:nvSpPr>
         <p:spPr>
           <a:xfrm>
-            <a:off x="5303520" y="2331720"/>
-            <a:ext cx="841248" cy="566928"/>
+            <a:off x="5419725" y="2505075"/>
+            <a:ext cx="838200" cy="571500"/>
           </a:xfrm>
           <a:prstGeom prst="roundRect">
             <a:avLst>
-              <a:gd name="adj" fmla="val 6452"/>
+              <a:gd name="adj" fmla="val 6667"/>
             </a:avLst>
           </a:prstGeom>
           <a:solidFill>
@@ -7152,30 +7648,30 @@
       </p:sp>
       <p:sp>
         <p:nvSpPr>
-          <p:cNvPr id="17" name="Text 14"/>
-          <p:cNvSpPr txBox="1"/>
-          <p:nvPr/>
-        </p:nvSpPr>
-        <p:spPr>
-          <a:xfrm>
-            <a:off x="5303520" y="2478024"/>
-            <a:ext cx="841248" cy="274320"/>
-          </a:xfrm>
-          <a:prstGeom prst="rect">
-            <a:avLst/>
-          </a:prstGeom>
-          <a:noFill/>
-          <a:ln/>
-        </p:spPr>
-        <p:txBody>
-          <a:bodyPr wrap="square" lIns="0" tIns="0" rIns="0" bIns="0" rtlCol="0" anchor="ctr"/>
+          <p:cNvPr id="18" name="Text 15"/>
+          <p:cNvSpPr txBox="1"/>
+          <p:nvPr/>
+        </p:nvSpPr>
+        <p:spPr>
+          <a:xfrm>
+            <a:off x="5419725" y="2667000"/>
+            <a:ext cx="838200" cy="247650"/>
+          </a:xfrm>
+          <a:prstGeom prst="rect">
+            <a:avLst/>
+          </a:prstGeom>
+          <a:noFill/>
+          <a:ln/>
+        </p:spPr>
+        <p:txBody>
+          <a:bodyPr wrap="square" lIns="0" tIns="0" rIns="0" bIns="0" rtlCol="0" anchor="t"/>
           <a:lstStyle/>
           <a:p>
             <a:pPr algn="ctr" indent="0" marL="0">
               <a:buNone/>
             </a:pPr>
             <a:r>
-              <a:rPr lang="en-US" sz="1400" b="1" dirty="0">
+              <a:rPr lang="en-US" sz="1700" b="1" dirty="0">
                 <a:solidFill>
                   <a:srgbClr val="FFFFFF"/>
                 </a:solidFill>
@@ -7185,32 +7681,32 @@
               </a:rPr>
               <a:t>6</a:t>
             </a:r>
-            <a:endParaRPr lang="en-US" sz="1400" dirty="0"/>
-          </a:p>
-        </p:txBody>
-      </p:sp>
-      <p:sp>
-        <p:nvSpPr>
-          <p:cNvPr id="18" name="Shape 15"/>
+            <a:endParaRPr lang="en-US" sz="1700" dirty="0"/>
+          </a:p>
+        </p:txBody>
+      </p:sp>
+      <p:sp>
+        <p:nvSpPr>
+          <p:cNvPr id="19" name="Shape 16"/>
           <p:cNvSpPr/>
           <p:nvPr/>
         </p:nvSpPr>
         <p:spPr>
           <a:xfrm>
-            <a:off x="6236208" y="2331720"/>
-            <a:ext cx="841248" cy="566928"/>
+            <a:off x="6343650" y="2505075"/>
+            <a:ext cx="838200" cy="571500"/>
           </a:xfrm>
           <a:prstGeom prst="roundRect">
             <a:avLst>
-              <a:gd name="adj" fmla="val 6452"/>
+              <a:gd name="adj" fmla="val 6667"/>
             </a:avLst>
           </a:prstGeom>
           <a:solidFill>
-            <a:srgbClr val="E8F5EC"/>
+            <a:srgbClr val="E9F5EC"/>
           </a:solidFill>
           <a:ln w="12700">
             <a:solidFill>
-              <a:srgbClr val="BFE3CA"/>
+              <a:srgbClr val="C2E3CB"/>
             </a:solidFill>
             <a:prstDash val="solid"/>
           </a:ln>
@@ -7218,30 +7714,30 @@
       </p:sp>
       <p:sp>
         <p:nvSpPr>
-          <p:cNvPr id="19" name="Text 16"/>
-          <p:cNvSpPr txBox="1"/>
-          <p:nvPr/>
-        </p:nvSpPr>
-        <p:spPr>
-          <a:xfrm>
-            <a:off x="6236208" y="2478024"/>
-            <a:ext cx="841248" cy="274320"/>
-          </a:xfrm>
-          <a:prstGeom prst="rect">
-            <a:avLst/>
-          </a:prstGeom>
-          <a:noFill/>
-          <a:ln/>
-        </p:spPr>
-        <p:txBody>
-          <a:bodyPr wrap="square" lIns="0" tIns="0" rIns="0" bIns="0" rtlCol="0" anchor="ctr"/>
+          <p:cNvPr id="20" name="Text 17"/>
+          <p:cNvSpPr txBox="1"/>
+          <p:nvPr/>
+        </p:nvSpPr>
+        <p:spPr>
+          <a:xfrm>
+            <a:off x="6343650" y="2667000"/>
+            <a:ext cx="838200" cy="247650"/>
+          </a:xfrm>
+          <a:prstGeom prst="rect">
+            <a:avLst/>
+          </a:prstGeom>
+          <a:noFill/>
+          <a:ln/>
+        </p:spPr>
+        <p:txBody>
+          <a:bodyPr wrap="square" lIns="0" tIns="0" rIns="0" bIns="0" rtlCol="0" anchor="t"/>
           <a:lstStyle/>
           <a:p>
             <a:pPr algn="ctr" indent="0" marL="0">
               <a:buNone/>
             </a:pPr>
             <a:r>
-              <a:rPr lang="en-US" sz="1400" b="1" dirty="0">
+              <a:rPr lang="en-US" sz="1700" b="1" dirty="0">
                 <a:solidFill>
                   <a:srgbClr val="1A7F37"/>
                 </a:solidFill>
@@ -7251,32 +7747,32 @@
               </a:rPr>
               <a:t>7</a:t>
             </a:r>
-            <a:endParaRPr lang="en-US" sz="1400" dirty="0"/>
-          </a:p>
-        </p:txBody>
-      </p:sp>
-      <p:sp>
-        <p:nvSpPr>
-          <p:cNvPr id="20" name="Shape 17"/>
+            <a:endParaRPr lang="en-US" sz="1700" dirty="0"/>
+          </a:p>
+        </p:txBody>
+      </p:sp>
+      <p:sp>
+        <p:nvSpPr>
+          <p:cNvPr id="21" name="Shape 18"/>
           <p:cNvSpPr/>
           <p:nvPr/>
         </p:nvSpPr>
         <p:spPr>
           <a:xfrm>
-            <a:off x="7168896" y="2331720"/>
-            <a:ext cx="841248" cy="566928"/>
+            <a:off x="7267575" y="2505075"/>
+            <a:ext cx="838200" cy="571500"/>
           </a:xfrm>
           <a:prstGeom prst="roundRect">
             <a:avLst>
-              <a:gd name="adj" fmla="val 6452"/>
+              <a:gd name="adj" fmla="val 6667"/>
             </a:avLst>
           </a:prstGeom>
           <a:solidFill>
-            <a:srgbClr val="E8F5EC"/>
+            <a:srgbClr val="E9F5EC"/>
           </a:solidFill>
           <a:ln w="12700">
             <a:solidFill>
-              <a:srgbClr val="BFE3CA"/>
+              <a:srgbClr val="C2E3CB"/>
             </a:solidFill>
             <a:prstDash val="solid"/>
           </a:ln>
@@ -7284,30 +7780,30 @@
       </p:sp>
       <p:sp>
         <p:nvSpPr>
-          <p:cNvPr id="21" name="Text 18"/>
-          <p:cNvSpPr txBox="1"/>
-          <p:nvPr/>
-        </p:nvSpPr>
-        <p:spPr>
-          <a:xfrm>
-            <a:off x="7168896" y="2478024"/>
-            <a:ext cx="841248" cy="274320"/>
-          </a:xfrm>
-          <a:prstGeom prst="rect">
-            <a:avLst/>
-          </a:prstGeom>
-          <a:noFill/>
-          <a:ln/>
-        </p:spPr>
-        <p:txBody>
-          <a:bodyPr wrap="square" lIns="0" tIns="0" rIns="0" bIns="0" rtlCol="0" anchor="ctr"/>
+          <p:cNvPr id="22" name="Text 19"/>
+          <p:cNvSpPr txBox="1"/>
+          <p:nvPr/>
+        </p:nvSpPr>
+        <p:spPr>
+          <a:xfrm>
+            <a:off x="7267575" y="2667000"/>
+            <a:ext cx="838200" cy="247650"/>
+          </a:xfrm>
+          <a:prstGeom prst="rect">
+            <a:avLst/>
+          </a:prstGeom>
+          <a:noFill/>
+          <a:ln/>
+        </p:spPr>
+        <p:txBody>
+          <a:bodyPr wrap="square" lIns="0" tIns="0" rIns="0" bIns="0" rtlCol="0" anchor="t"/>
           <a:lstStyle/>
           <a:p>
             <a:pPr algn="ctr" indent="0" marL="0">
               <a:buNone/>
             </a:pPr>
             <a:r>
-              <a:rPr lang="en-US" sz="1400" b="1" dirty="0">
+              <a:rPr lang="en-US" sz="1700" b="1" dirty="0">
                 <a:solidFill>
                   <a:srgbClr val="1A7F37"/>
                 </a:solidFill>
@@ -7317,69 +7813,7 @@
               </a:rPr>
               <a:t>8</a:t>
             </a:r>
-            <a:endParaRPr lang="en-US" sz="1400" dirty="0"/>
-          </a:p>
-        </p:txBody>
-      </p:sp>
-      <p:sp>
-        <p:nvSpPr>
-          <p:cNvPr id="22" name="Text 19"/>
-          <p:cNvSpPr txBox="1"/>
-          <p:nvPr/>
-        </p:nvSpPr>
-        <p:spPr>
-          <a:xfrm>
-            <a:off x="640080" y="3108960"/>
-            <a:ext cx="7863840" cy="685800"/>
-          </a:xfrm>
-          <a:prstGeom prst="rect">
-            <a:avLst/>
-          </a:prstGeom>
-          <a:noFill/>
-          <a:ln/>
-        </p:spPr>
-        <p:txBody>
-          <a:bodyPr wrap="square" lIns="0" tIns="0" rIns="0" bIns="0" rtlCol="0" anchor="t"/>
-          <a:lstStyle/>
-          <a:p>
-            <a:pPr indent="0" marL="0">
-              <a:lnSpc>
-                <a:spcPct val="125000"/>
-              </a:lnSpc>
-              <a:buNone/>
-            </a:pPr>
-            <a:r>
-              <a:rPr lang="en-US" sz="1400" dirty="0">
-                <a:solidFill>
-                  <a:srgbClr val="16160F"/>
-                </a:solidFill>
-                <a:latin typeface="Times New Roman" pitchFamily="34" charset="0"/>
-                <a:ea typeface="Times New Roman" pitchFamily="34" charset="-122"/>
-                <a:cs typeface="Times New Roman" pitchFamily="34" charset="-120"/>
-              </a:rPr>
-              <a:t>The file is hashed in 4MB pieces. Part 6 of 8 differs, so the change lies</a:t>
-            </a:r>
-            <a:endParaRPr lang="en-US" sz="1400" dirty="0"/>
-          </a:p>
-          <a:p>
-            <a:pPr indent="0" marL="0">
-              <a:lnSpc>
-                <a:spcPct val="125000"/>
-              </a:lnSpc>
-              <a:buNone/>
-            </a:pPr>
-            <a:r>
-              <a:rPr lang="en-US" sz="1400" dirty="0">
-                <a:solidFill>
-                  <a:srgbClr val="16160F"/>
-                </a:solidFill>
-                <a:latin typeface="Times New Roman" pitchFamily="34" charset="0"/>
-                <a:ea typeface="Times New Roman" pitchFamily="34" charset="-122"/>
-                <a:cs typeface="Times New Roman" pitchFamily="34" charset="-120"/>
-              </a:rPr>
-              <a:t>between byte 20,971,520 and byte 25,165,823.</a:t>
-            </a:r>
-            <a:endParaRPr lang="en-US" sz="1400" dirty="0"/>
+            <a:endParaRPr lang="en-US" sz="1700" dirty="0"/>
           </a:p>
         </p:txBody>
       </p:sp>
@@ -7391,37 +7825,73 @@
         </p:nvSpPr>
         <p:spPr>
           <a:xfrm>
-            <a:off x="640080" y="3886200"/>
-            <a:ext cx="7863840" cy="777240"/>
-          </a:xfrm>
-          <a:prstGeom prst="rect">
-            <a:avLst/>
-          </a:prstGeom>
-          <a:noFill/>
-          <a:ln/>
-        </p:spPr>
-        <p:txBody>
-          <a:bodyPr wrap="square" lIns="0" tIns="0" rIns="0" bIns="0" rtlCol="0" anchor="t"/>
-          <a:lstStyle/>
-          <a:p>
-            <a:pPr indent="0" marL="0">
-              <a:lnSpc>
-                <a:spcPct val="125000"/>
-              </a:lnSpc>
-              <a:buNone/>
-            </a:pPr>
-            <a:r>
-              <a:rPr lang="en-US" sz="1150" i="1" dirty="0">
-                <a:solidFill>
-                  <a:srgbClr val="6B6B60"/>
-                </a:solidFill>
-                <a:latin typeface="Times New Roman" pitchFamily="34" charset="0"/>
-                <a:ea typeface="Times New Roman" pitchFamily="34" charset="-122"/>
-                <a:cs typeface="Times New Roman" pitchFamily="34" charset="-120"/>
-              </a:rPr>
-              <a:t>Tested at 30MB and extrapolated. Memory use stays flat as the file grows, because the whole file is never held at once. That is what makes the claim reasonable, not the size of the test file.</a:t>
-            </a:r>
-            <a:endParaRPr lang="en-US" sz="1150" dirty="0"/>
+            <a:off x="800100" y="3781425"/>
+            <a:ext cx="7543800" cy="372904"/>
+          </a:xfrm>
+          <a:prstGeom prst="rect">
+            <a:avLst/>
+          </a:prstGeom>
+          <a:noFill/>
+          <a:ln/>
+        </p:spPr>
+        <p:txBody>
+          <a:bodyPr wrap="square" lIns="0" tIns="0" rIns="0" bIns="0" rtlCol="0" anchor="t"/>
+          <a:lstStyle/>
+          <a:p>
+            <a:pPr algn="l" indent="0" marL="0">
+              <a:buNone/>
+            </a:pPr>
+            <a:r>
+              <a:rPr lang="en-US" sz="2000" dirty="0">
+                <a:solidFill>
+                  <a:srgbClr val="14140E"/>
+                </a:solidFill>
+                <a:latin typeface="Times New Roman" pitchFamily="34" charset="0"/>
+                <a:ea typeface="Times New Roman" pitchFamily="34" charset="-122"/>
+                <a:cs typeface="Times New Roman" pitchFamily="34" charset="-120"/>
+              </a:rPr>
+              <a:t>One byte altered in thirty million. Part 6 of 8 differs, so the</a:t>
+            </a:r>
+            <a:endParaRPr lang="en-US" sz="2000" dirty="0"/>
+          </a:p>
+        </p:txBody>
+      </p:sp>
+      <p:sp>
+        <p:nvSpPr>
+          <p:cNvPr id="24" name="Text 21"/>
+          <p:cNvSpPr txBox="1"/>
+          <p:nvPr/>
+        </p:nvSpPr>
+        <p:spPr>
+          <a:xfrm>
+            <a:off x="800100" y="4057650"/>
+            <a:ext cx="7543800" cy="372904"/>
+          </a:xfrm>
+          <a:prstGeom prst="rect">
+            <a:avLst/>
+          </a:prstGeom>
+          <a:noFill/>
+          <a:ln/>
+        </p:spPr>
+        <p:txBody>
+          <a:bodyPr wrap="square" lIns="0" tIns="0" rIns="0" bIns="0" rtlCol="0" anchor="t"/>
+          <a:lstStyle/>
+          <a:p>
+            <a:pPr algn="l" indent="0" marL="0">
+              <a:buNone/>
+            </a:pPr>
+            <a:r>
+              <a:rPr lang="en-US" sz="2000" dirty="0">
+                <a:solidFill>
+                  <a:srgbClr val="14140E"/>
+                </a:solidFill>
+                <a:latin typeface="Times New Roman" pitchFamily="34" charset="0"/>
+                <a:ea typeface="Times New Roman" pitchFamily="34" charset="-122"/>
+                <a:cs typeface="Times New Roman" pitchFamily="34" charset="-120"/>
+              </a:rPr>
+              <a:t>change lies between byte 20,971,520 and byte 25,165,823.</a:t>
+            </a:r>
+            <a:endParaRPr lang="en-US" sz="2000" dirty="0"/>
           </a:p>
         </p:txBody>
       </p:sp>
@@ -7439,7 +7909,7 @@
     <p:bg>
       <p:bgPr>
         <a:solidFill>
-          <a:srgbClr val="FBFBF8"/>
+          <a:srgbClr val="FCFCF9"/>
         </a:solidFill>
       </p:bgPr>
     </p:bg>
@@ -7459,32 +7929,32 @@
       </p:grpSpPr>
       <p:sp>
         <p:nvSpPr>
-          <p:cNvPr id="2" name="Text 0"/>
-          <p:cNvSpPr txBox="1"/>
-          <p:nvPr/>
-        </p:nvSpPr>
-        <p:spPr>
-          <a:xfrm>
-            <a:off x="8138160" y="4576572"/>
-            <a:ext cx="365760" cy="256032"/>
-          </a:xfrm>
-          <a:prstGeom prst="rect">
-            <a:avLst/>
-          </a:prstGeom>
-          <a:noFill/>
-          <a:ln/>
-        </p:spPr>
-        <p:txBody>
-          <a:bodyPr wrap="square" lIns="0" tIns="0" rIns="0" bIns="0" rtlCol="0" anchor="ctr"/>
+          <p:cNvPr id="3" name="Text 0"/>
+          <p:cNvSpPr txBox="1"/>
+          <p:nvPr/>
+        </p:nvSpPr>
+        <p:spPr>
+          <a:xfrm>
+            <a:off x="7962900" y="4648200"/>
+            <a:ext cx="381000" cy="171450"/>
+          </a:xfrm>
+          <a:prstGeom prst="rect">
+            <a:avLst/>
+          </a:prstGeom>
+          <a:noFill/>
+          <a:ln/>
+        </p:spPr>
+        <p:txBody>
+          <a:bodyPr wrap="square" lIns="0" tIns="0" rIns="0" bIns="0" rtlCol="0" anchor="t"/>
           <a:lstStyle/>
           <a:p>
             <a:pPr algn="r" indent="0" marL="0">
               <a:buNone/>
             </a:pPr>
             <a:r>
-              <a:rPr lang="en-US" sz="1000" dirty="0">
-                <a:solidFill>
-                  <a:srgbClr val="C9C9BF"/>
+              <a:rPr lang="en-US" sz="1050" dirty="0">
+                <a:solidFill>
+                  <a:srgbClr val="9A9A90"/>
                 </a:solidFill>
                 <a:latin typeface="Times New Roman" pitchFamily="34" charset="0"/>
                 <a:ea typeface="Times New Roman" pitchFamily="34" charset="-122"/>
@@ -7492,7 +7962,7 @@
               </a:rPr>
               <a:t>9</a:t>
             </a:r>
-            <a:endParaRPr lang="en-US" sz="1000" dirty="0"/>
+            <a:endParaRPr lang="en-US" sz="1050" dirty="0"/>
           </a:p>
         </p:txBody>
       </p:sp>
@@ -7504,26 +7974,26 @@
         </p:nvSpPr>
         <p:spPr>
           <a:xfrm>
-            <a:off x="0" y="1885950"/>
-            <a:ext cx="9144000" cy="1371600"/>
-          </a:xfrm>
-          <a:prstGeom prst="rect">
-            <a:avLst/>
-          </a:prstGeom>
-          <a:noFill/>
-          <a:ln/>
-        </p:spPr>
-        <p:txBody>
-          <a:bodyPr wrap="square" lIns="0" tIns="0" rIns="0" bIns="0" rtlCol="0" anchor="ctr"/>
+            <a:off x="0" y="2076450"/>
+            <a:ext cx="9144000" cy="914400"/>
+          </a:xfrm>
+          <a:prstGeom prst="rect">
+            <a:avLst/>
+          </a:prstGeom>
+          <a:noFill/>
+          <a:ln/>
+        </p:spPr>
+        <p:txBody>
+          <a:bodyPr wrap="square" lIns="0" tIns="0" rIns="0" bIns="0" rtlCol="0" anchor="t"/>
           <a:lstStyle/>
           <a:p>
             <a:pPr algn="ctr" indent="0" marL="0">
               <a:buNone/>
             </a:pPr>
             <a:r>
-              <a:rPr lang="en-US" sz="6000" b="1" dirty="0">
-                <a:solidFill>
-                  <a:srgbClr val="16160F"/>
+              <a:rPr lang="en-US" sz="7600" b="1" dirty="0">
+                <a:solidFill>
+                  <a:srgbClr val="14140E"/>
                 </a:solidFill>
                 <a:latin typeface="Times New Roman" pitchFamily="34" charset="0"/>
                 <a:ea typeface="Times New Roman" pitchFamily="34" charset="-122"/>
@@ -7531,7 +8001,7 @@
               </a:rPr>
               <a:t>Demo</a:t>
             </a:r>
-            <a:endParaRPr lang="en-US" sz="6000" dirty="0"/>
+            <a:endParaRPr lang="en-US" sz="7600" dirty="0"/>
           </a:p>
         </p:txBody>
       </p:sp>

--- a/deck/custody-deck.pptx
+++ b/deck/custody-deck.pptx
@@ -778,7 +778,7 @@
           <a:p>
             <a:r>
               <a:rPr lang="en-US" dirty="0"/>
-              <a:t>Deliver this confidently, not apologetically.</a:t>
+              <a:t>Deliver this confidently, not apologetically. If pressed on the last row: the events table is append only and witnesses the fingerprint, so editing one record is reported. Defeating it means dropping the trigger and rewriting every table.</a:t>
             </a:r>
             <a:endParaRPr lang="en-US" dirty="0"/>
           </a:p>
@@ -1306,7 +1306,7 @@
           <a:p>
             <a:r>
               <a:rPr lang="en-US" dirty="0"/>
-              <a:t>Twenty seconds. Do not walk through every box.</a:t>
+              <a:t>Twenty seconds. Do not walk through every box. The same code runs on a laptop or hosted; the dashboard on show is the hosted one.</a:t>
             </a:r>
             <a:endParaRPr lang="en-US" dirty="0"/>
           </a:p>
@@ -3694,7 +3694,7 @@
                 <a:ea typeface="Times New Roman" pitchFamily="34" charset="-122"/>
                 <a:cs typeface="Times New Roman" pitchFamily="34" charset="-120"/>
               </a:rPr>
-              <a:t>full server access could rebuild the chain</a:t>
+              <a:t>single edits are caught, a full rewrite is not</a:t>
             </a:r>
             <a:endParaRPr lang="en-US" sz="1700" dirty="0"/>
           </a:p>
@@ -6347,7 +6347,7 @@
                 <a:ea typeface="Times New Roman" pitchFamily="34" charset="-122"/>
                 <a:cs typeface="Times New Roman" pitchFamily="34" charset="-120"/>
               </a:rPr>
-              <a:t>One laptop. No cloud. Nothing paid for. Works with the network down.</a:t>
+              <a:t>One laptop, or hosted. Nothing paid for. Works with the network down.</a:t>
             </a:r>
             <a:endParaRPr lang="en-US" sz="2000" dirty="0"/>
           </a:p>

--- a/deck/custody-deck.pptx
+++ b/deck/custody-deck.pptx
@@ -17,10 +17,9 @@
     <p:sldId id="265" r:id="rId11"/>
     <p:sldId id="266" r:id="rId12"/>
     <p:sldId id="267" r:id="rId13"/>
-    <p:sldId id="268" r:id="rId14"/>
   </p:sldIdLst>
   <p:notesMasterIdLst>
-    <p:notesMasterId r:id="rId15"/>
+    <p:notesMasterId r:id="rId14"/>
   </p:notesMasterIdLst>
   <p:sldSz cx="9144000" cy="5143500"/>
   <p:notesSz cx="5143500" cy="9144000"/>
@@ -690,7 +689,7 @@
           <a:p>
             <a:r>
               <a:rPr lang="en-US" dirty="0"/>
-              <a:t>Complete this with the real result before presenting. An accurate account of what a reader did not understand is the only version worth reporting.</a:t>
+              <a:t>Deliver this confidently, not apologetically. If pressed on the last row: the events table is append only and witnesses the fingerprint, so editing one record is reported. Defeating it means dropping the trigger and rewriting every table.</a:t>
             </a:r>
             <a:endParaRPr lang="en-US" dirty="0"/>
           </a:p>
@@ -778,7 +777,7 @@
           <a:p>
             <a:r>
               <a:rPr lang="en-US" dirty="0"/>
-              <a:t>Deliver this confidently, not apologetically. If pressed on the last row: the events table is append only and witnesses the fingerprint, so editing one record is reported. Defeating it means dropping the trigger and rewriting every table.</a:t>
+              <a:t>One sentence, then stop.</a:t>
             </a:r>
             <a:endParaRPr lang="en-US" dirty="0"/>
           </a:p>
@@ -802,94 +801,6 @@
             <a:fld id="{F7021451-1387-4CA6-816F-3879F97B5CBC}" type="slidenum">
               <a:rPr lang="en-US"/>
               <a:t>12</a:t>
-            </a:fld>
-            <a:endParaRPr lang="en-US"/>
-          </a:p>
-        </p:txBody>
-      </p:sp>
-    </p:spTree>
-    <p:extLst>
-      <p:ext uri="{BB962C8B-B14F-4D97-AF65-F5344CB8AC3E}">
-        <p14:creationId xmlns:p14="http://schemas.microsoft.com/office/powerpoint/2010/main" val="1024086991"/>
-      </p:ext>
-    </p:extLst>
-  </p:cSld>
-  <p:clrMapOvr>
-    <a:masterClrMapping/>
-  </p:clrMapOvr>
-</p:notes>
-</file>
-
-<file path=ppt/notesSlides/notesSlide13.xml><?xml version="1.0" encoding="utf-8"?>
-<p:notes xmlns:a="http://schemas.openxmlformats.org/drawingml/2006/main" xmlns:r="http://schemas.openxmlformats.org/officeDocument/2006/relationships" xmlns:p="http://schemas.openxmlformats.org/presentationml/2006/main">
-  <p:cSld>
-    <p:spTree>
-      <p:nvGrpSpPr>
-        <p:cNvPr id="1" name=""/>
-        <p:cNvGrpSpPr/>
-        <p:nvPr/>
-      </p:nvGrpSpPr>
-      <p:grpSpPr>
-        <a:xfrm>
-          <a:off x="0" y="0"/>
-          <a:ext cx="0" cy="0"/>
-          <a:chOff x="0" y="0"/>
-          <a:chExt cx="0" cy="0"/>
-        </a:xfrm>
-      </p:grpSpPr>
-      <p:sp>
-        <p:nvSpPr>
-          <p:cNvPr id="2" name="Slide Image Placeholder 1"/>
-          <p:cNvSpPr>
-            <a:spLocks noGrp="1" noRot="1" noChangeAspect="1"/>
-          </p:cNvSpPr>
-          <p:nvPr>
-            <p:ph type="sldImg"/>
-          </p:nvPr>
-        </p:nvSpPr>
-        <p:spPr/>
-      </p:sp>
-      <p:sp>
-        <p:nvSpPr>
-          <p:cNvPr id="3" name="Notes Placeholder 2"/>
-          <p:cNvSpPr>
-            <a:spLocks noGrp="1"/>
-          </p:cNvSpPr>
-          <p:nvPr>
-            <p:ph type="body" idx="1"/>
-          </p:nvPr>
-        </p:nvSpPr>
-        <p:spPr/>
-        <p:txBody>
-          <a:bodyPr/>
-          <a:lstStyle/>
-          <a:p>
-            <a:r>
-              <a:rPr lang="en-US" dirty="0"/>
-              <a:t>One sentence, then stop.</a:t>
-            </a:r>
-            <a:endParaRPr lang="en-US" dirty="0"/>
-          </a:p>
-        </p:txBody>
-      </p:sp>
-      <p:sp>
-        <p:nvSpPr>
-          <p:cNvPr id="4" name="Slide Number Placeholder 3"/>
-          <p:cNvSpPr>
-            <a:spLocks noGrp="1"/>
-          </p:cNvSpPr>
-          <p:nvPr>
-            <p:ph type="sldNum" sz="quarter" idx="10"/>
-          </p:nvPr>
-        </p:nvSpPr>
-        <p:spPr/>
-        <p:txBody>
-          <a:bodyPr/>
-          <a:lstStyle/>
-          <a:p>
-            <a:fld id="{F7021451-1387-4CA6-816F-3879F97B5CBC}" type="slidenum">
-              <a:rPr lang="en-US"/>
-              <a:t>13</a:t>
             </a:fld>
             <a:endParaRPr lang="en-US"/>
           </a:p>
@@ -2804,7 +2715,7 @@
                 <a:ea typeface="Times New Roman" pitchFamily="34" charset="-122"/>
                 <a:cs typeface="Times New Roman" pitchFamily="34" charset="-120"/>
               </a:rPr>
-              <a:t>We tested it on people</a:t>
+              <a:t>What we did not solve</a:t>
             </a:r>
             <a:endParaRPr lang="en-US" sz="1150" dirty="0"/>
           </a:p>
@@ -2857,7 +2768,7 @@
         </p:nvSpPr>
         <p:spPr>
           <a:xfrm>
-            <a:off x="800100" y="1876425"/>
+            <a:off x="800100" y="1519238"/>
             <a:ext cx="7543800" cy="578644"/>
           </a:xfrm>
           <a:prstGeom prst="rect">
@@ -2882,7 +2793,7 @@
                 <a:ea typeface="Times New Roman" pitchFamily="34" charset="-122"/>
                 <a:cs typeface="Times New Roman" pitchFamily="34" charset="-120"/>
               </a:rPr>
-              <a:t>We gave the report to someone</a:t>
+              <a:t>Honest limits</a:t>
             </a:r>
             <a:endParaRPr lang="en-US" sz="3600" dirty="0"/>
           </a:p>
@@ -2896,24 +2807,24 @@
         </p:nvSpPr>
         <p:spPr>
           <a:xfrm>
-            <a:off x="800100" y="2305050"/>
-            <a:ext cx="7543800" cy="578644"/>
-          </a:xfrm>
-          <a:prstGeom prst="rect">
-            <a:avLst/>
-          </a:prstGeom>
-          <a:noFill/>
-          <a:ln/>
-        </p:spPr>
-        <p:txBody>
-          <a:bodyPr wrap="square" lIns="0" tIns="0" rIns="0" bIns="0" rtlCol="0" anchor="t"/>
-          <a:lstStyle/>
-          <a:p>
-            <a:pPr algn="l" indent="0" marL="0">
-              <a:buNone/>
-            </a:pPr>
-            <a:r>
-              <a:rPr lang="en-US" sz="3600" b="1" dirty="0">
+            <a:off x="800100" y="2233613"/>
+            <a:ext cx="2705100" cy="372904"/>
+          </a:xfrm>
+          <a:prstGeom prst="rect">
+            <a:avLst/>
+          </a:prstGeom>
+          <a:noFill/>
+          <a:ln/>
+        </p:spPr>
+        <p:txBody>
+          <a:bodyPr wrap="square" lIns="0" tIns="0" rIns="0" bIns="0" rtlCol="0" anchor="t"/>
+          <a:lstStyle/>
+          <a:p>
+            <a:pPr algn="l" indent="0" marL="0">
+              <a:buNone/>
+            </a:pPr>
+            <a:r>
+              <a:rPr lang="en-US" sz="1700" b="1" dirty="0">
                 <a:solidFill>
                   <a:srgbClr val="14140E"/>
                 </a:solidFill>
@@ -2921,9 +2832,9 @@
                 <a:ea typeface="Times New Roman" pitchFamily="34" charset="-122"/>
                 <a:cs typeface="Times New Roman" pitchFamily="34" charset="-120"/>
               </a:rPr>
-              <a:t>outside computer science.</a:t>
-            </a:r>
-            <a:endParaRPr lang="en-US" sz="3600" dirty="0"/>
+              <a:t>A corrupt collector</a:t>
+            </a:r>
+            <a:endParaRPr lang="en-US" sz="1700" dirty="0"/>
           </a:p>
         </p:txBody>
       </p:sp>
@@ -2935,24 +2846,63 @@
         </p:nvSpPr>
         <p:spPr>
           <a:xfrm>
-            <a:off x="800100" y="3019425"/>
-            <a:ext cx="3086100" cy="372904"/>
-          </a:xfrm>
-          <a:prstGeom prst="rect">
-            <a:avLst/>
-          </a:prstGeom>
-          <a:noFill/>
-          <a:ln/>
-        </p:spPr>
-        <p:txBody>
-          <a:bodyPr wrap="square" lIns="0" tIns="0" rIns="0" bIns="0" rtlCol="0" anchor="t"/>
-          <a:lstStyle/>
-          <a:p>
-            <a:pPr algn="l" indent="0" marL="0">
-              <a:buNone/>
-            </a:pPr>
-            <a:r>
-              <a:rPr lang="en-US" sz="2000" b="1" dirty="0">
+            <a:off x="3657600" y="2252663"/>
+            <a:ext cx="4686300" cy="372904"/>
+          </a:xfrm>
+          <a:prstGeom prst="rect">
+            <a:avLst/>
+          </a:prstGeom>
+          <a:noFill/>
+          <a:ln/>
+        </p:spPr>
+        <p:txBody>
+          <a:bodyPr wrap="square" lIns="0" tIns="0" rIns="0" bIns="0" rtlCol="0" anchor="t"/>
+          <a:lstStyle/>
+          <a:p>
+            <a:pPr algn="l" indent="0" marL="0">
+              <a:buNone/>
+            </a:pPr>
+            <a:r>
+              <a:rPr lang="en-US" sz="1700" dirty="0">
+                <a:solidFill>
+                  <a:srgbClr val="6E6E63"/>
+                </a:solidFill>
+                <a:latin typeface="Times New Roman" pitchFamily="34" charset="0"/>
+                <a:ea typeface="Times New Roman" pitchFamily="34" charset="-122"/>
+                <a:cs typeface="Times New Roman" pitchFamily="34" charset="-120"/>
+              </a:rPr>
+              <a:t>protected from collection onward, not before it</a:t>
+            </a:r>
+            <a:endParaRPr lang="en-US" sz="1700" dirty="0"/>
+          </a:p>
+        </p:txBody>
+      </p:sp>
+      <p:sp>
+        <p:nvSpPr>
+          <p:cNvPr id="8" name="Text 5"/>
+          <p:cNvSpPr txBox="1"/>
+          <p:nvPr/>
+        </p:nvSpPr>
+        <p:spPr>
+          <a:xfrm>
+            <a:off x="800100" y="2557463"/>
+            <a:ext cx="2705100" cy="372904"/>
+          </a:xfrm>
+          <a:prstGeom prst="rect">
+            <a:avLst/>
+          </a:prstGeom>
+          <a:noFill/>
+          <a:ln/>
+        </p:spPr>
+        <p:txBody>
+          <a:bodyPr wrap="square" lIns="0" tIns="0" rIns="0" bIns="0" rtlCol="0" anchor="t"/>
+          <a:lstStyle/>
+          <a:p>
+            <a:pPr algn="l" indent="0" marL="0">
+              <a:buNone/>
+            </a:pPr>
+            <a:r>
+              <a:rPr lang="en-US" sz="1700" b="1" dirty="0">
                 <a:solidFill>
                   <a:srgbClr val="14140E"/>
                 </a:solidFill>
@@ -2960,22 +2910,22 @@
                 <a:ea typeface="Times New Roman" pitchFamily="34" charset="-122"/>
                 <a:cs typeface="Times New Roman" pitchFamily="34" charset="-120"/>
               </a:rPr>
-              <a:t>What confused them</a:t>
-            </a:r>
-            <a:endParaRPr lang="en-US" sz="2000" dirty="0"/>
-          </a:p>
-        </p:txBody>
-      </p:sp>
-      <p:sp>
-        <p:nvSpPr>
-          <p:cNvPr id="8" name="Text 5"/>
-          <p:cNvSpPr txBox="1"/>
-          <p:nvPr/>
-        </p:nvSpPr>
-        <p:spPr>
-          <a:xfrm>
-            <a:off x="4038600" y="3038475"/>
-            <a:ext cx="4305300" cy="372904"/>
+              <a:t>The device clock</a:t>
+            </a:r>
+            <a:endParaRPr lang="en-US" sz="1700" dirty="0"/>
+          </a:p>
+        </p:txBody>
+      </p:sp>
+      <p:sp>
+        <p:nvSpPr>
+          <p:cNvPr id="9" name="Text 6"/>
+          <p:cNvSpPr txBox="1"/>
+          <p:nvPr/>
+        </p:nvSpPr>
+        <p:spPr>
+          <a:xfrm>
+            <a:off x="3657600" y="2576513"/>
+            <a:ext cx="4686300" cy="372904"/>
           </a:xfrm>
           <a:prstGeom prst="rect">
             <a:avLst/>
@@ -2999,7 +2949,7 @@
                 <a:ea typeface="Times New Roman" pitchFamily="34" charset="-122"/>
                 <a:cs typeface="Times New Roman" pitchFamily="34" charset="-120"/>
               </a:rPr>
-              <a:t>[ to complete ]</a:t>
+              <a:t>both clocks shown, the phone's not vouched for</a:t>
             </a:r>
             <a:endParaRPr lang="en-US" sz="1700" dirty="0"/>
           </a:p>
@@ -3007,30 +2957,30 @@
       </p:sp>
       <p:sp>
         <p:nvSpPr>
-          <p:cNvPr id="9" name="Text 6"/>
-          <p:cNvSpPr txBox="1"/>
-          <p:nvPr/>
-        </p:nvSpPr>
-        <p:spPr>
-          <a:xfrm>
-            <a:off x="800100" y="3419475"/>
-            <a:ext cx="3086100" cy="372904"/>
-          </a:xfrm>
-          <a:prstGeom prst="rect">
-            <a:avLst/>
-          </a:prstGeom>
-          <a:noFill/>
-          <a:ln/>
-        </p:spPr>
-        <p:txBody>
-          <a:bodyPr wrap="square" lIns="0" tIns="0" rIns="0" bIns="0" rtlCol="0" anchor="t"/>
-          <a:lstStyle/>
-          <a:p>
-            <a:pPr algn="l" indent="0" marL="0">
-              <a:buNone/>
-            </a:pPr>
-            <a:r>
-              <a:rPr lang="en-US" sz="2000" b="1" dirty="0">
+          <p:cNvPr id="10" name="Text 7"/>
+          <p:cNvSpPr txBox="1"/>
+          <p:nvPr/>
+        </p:nvSpPr>
+        <p:spPr>
+          <a:xfrm>
+            <a:off x="800100" y="2881313"/>
+            <a:ext cx="2705100" cy="372904"/>
+          </a:xfrm>
+          <a:prstGeom prst="rect">
+            <a:avLst/>
+          </a:prstGeom>
+          <a:noFill/>
+          <a:ln/>
+        </p:spPr>
+        <p:txBody>
+          <a:bodyPr wrap="square" lIns="0" tIns="0" rIns="0" bIns="0" rtlCol="0" anchor="t"/>
+          <a:lstStyle/>
+          <a:p>
+            <a:pPr algn="l" indent="0" marL="0">
+              <a:buNone/>
+            </a:pPr>
+            <a:r>
+              <a:rPr lang="en-US" sz="1700" b="1" dirty="0">
                 <a:solidFill>
                   <a:srgbClr val="14140E"/>
                 </a:solidFill>
@@ -3038,22 +2988,22 @@
                 <a:ea typeface="Times New Roman" pitchFamily="34" charset="-122"/>
                 <a:cs typeface="Times New Roman" pitchFamily="34" charset="-120"/>
               </a:rPr>
-              <a:t>What we changed</a:t>
-            </a:r>
-            <a:endParaRPr lang="en-US" sz="2000" dirty="0"/>
-          </a:p>
-        </p:txBody>
-      </p:sp>
-      <p:sp>
-        <p:nvSpPr>
-          <p:cNvPr id="10" name="Text 7"/>
-          <p:cNvSpPr txBox="1"/>
-          <p:nvPr/>
-        </p:nvSpPr>
-        <p:spPr>
-          <a:xfrm>
-            <a:off x="4038600" y="3438525"/>
-            <a:ext cx="4305300" cy="372904"/>
+              <a:t>Scale</a:t>
+            </a:r>
+            <a:endParaRPr lang="en-US" sz="1700" dirty="0"/>
+          </a:p>
+        </p:txBody>
+      </p:sp>
+      <p:sp>
+        <p:nvSpPr>
+          <p:cNvPr id="11" name="Text 8"/>
+          <p:cNvSpPr txBox="1"/>
+          <p:nvPr/>
+        </p:nvSpPr>
+        <p:spPr>
+          <a:xfrm>
+            <a:off x="3657600" y="2900363"/>
+            <a:ext cx="4686300" cy="372904"/>
           </a:xfrm>
           <a:prstGeom prst="rect">
             <a:avLst/>
@@ -3077,7 +3027,241 @@
                 <a:ea typeface="Times New Roman" pitchFamily="34" charset="-122"/>
                 <a:cs typeface="Times New Roman" pitchFamily="34" charset="-120"/>
               </a:rPr>
-              <a:t>[ to complete ]</a:t>
+              <a:t>tested at 30MB, extrapolated, not a real extraction</a:t>
+            </a:r>
+            <a:endParaRPr lang="en-US" sz="1700" dirty="0"/>
+          </a:p>
+        </p:txBody>
+      </p:sp>
+      <p:sp>
+        <p:nvSpPr>
+          <p:cNvPr id="12" name="Text 9"/>
+          <p:cNvSpPr txBox="1"/>
+          <p:nvPr/>
+        </p:nvSpPr>
+        <p:spPr>
+          <a:xfrm>
+            <a:off x="800100" y="3205163"/>
+            <a:ext cx="2705100" cy="372904"/>
+          </a:xfrm>
+          <a:prstGeom prst="rect">
+            <a:avLst/>
+          </a:prstGeom>
+          <a:noFill/>
+          <a:ln/>
+        </p:spPr>
+        <p:txBody>
+          <a:bodyPr wrap="square" lIns="0" tIns="0" rIns="0" bIns="0" rtlCol="0" anchor="t"/>
+          <a:lstStyle/>
+          <a:p>
+            <a:pPr algn="l" indent="0" marL="0">
+              <a:buNone/>
+            </a:pPr>
+            <a:r>
+              <a:rPr lang="en-US" sz="1700" b="1" dirty="0">
+                <a:solidFill>
+                  <a:srgbClr val="14140E"/>
+                </a:solidFill>
+                <a:latin typeface="Times New Roman" pitchFamily="34" charset="0"/>
+                <a:ea typeface="Times New Roman" pitchFamily="34" charset="-122"/>
+                <a:cs typeface="Times New Roman" pitchFamily="34" charset="-120"/>
+              </a:rPr>
+              <a:t>Per officer signing</a:t>
+            </a:r>
+            <a:endParaRPr lang="en-US" sz="1700" dirty="0"/>
+          </a:p>
+        </p:txBody>
+      </p:sp>
+      <p:sp>
+        <p:nvSpPr>
+          <p:cNvPr id="13" name="Text 10"/>
+          <p:cNvSpPr txBox="1"/>
+          <p:nvPr/>
+        </p:nvSpPr>
+        <p:spPr>
+          <a:xfrm>
+            <a:off x="3657600" y="3224213"/>
+            <a:ext cx="4686300" cy="372904"/>
+          </a:xfrm>
+          <a:prstGeom prst="rect">
+            <a:avLst/>
+          </a:prstGeom>
+          <a:noFill/>
+          <a:ln/>
+        </p:spPr>
+        <p:txBody>
+          <a:bodyPr wrap="square" lIns="0" tIns="0" rIns="0" bIns="0" rtlCol="0" anchor="t"/>
+          <a:lstStyle/>
+          <a:p>
+            <a:pPr algn="l" indent="0" marL="0">
+              <a:buNone/>
+            </a:pPr>
+            <a:r>
+              <a:rPr lang="en-US" sz="1700" dirty="0">
+                <a:solidFill>
+                  <a:srgbClr val="6E6E63"/>
+                </a:solidFill>
+                <a:latin typeface="Times New Roman" pitchFamily="34" charset="0"/>
+                <a:ea typeface="Times New Roman" pitchFamily="34" charset="-122"/>
+                <a:cs typeface="Times New Roman" pitchFamily="34" charset="-120"/>
+              </a:rPr>
+              <a:t>tied to a login, not to a person's key</a:t>
+            </a:r>
+            <a:endParaRPr lang="en-US" sz="1700" dirty="0"/>
+          </a:p>
+        </p:txBody>
+      </p:sp>
+      <p:sp>
+        <p:nvSpPr>
+          <p:cNvPr id="14" name="Text 11"/>
+          <p:cNvSpPr txBox="1"/>
+          <p:nvPr/>
+        </p:nvSpPr>
+        <p:spPr>
+          <a:xfrm>
+            <a:off x="800100" y="3529013"/>
+            <a:ext cx="2705100" cy="372904"/>
+          </a:xfrm>
+          <a:prstGeom prst="rect">
+            <a:avLst/>
+          </a:prstGeom>
+          <a:noFill/>
+          <a:ln/>
+        </p:spPr>
+        <p:txBody>
+          <a:bodyPr wrap="square" lIns="0" tIns="0" rIns="0" bIns="0" rtlCol="0" anchor="t"/>
+          <a:lstStyle/>
+          <a:p>
+            <a:pPr algn="l" indent="0" marL="0">
+              <a:buNone/>
+            </a:pPr>
+            <a:r>
+              <a:rPr lang="en-US" sz="1700" b="1" dirty="0">
+                <a:solidFill>
+                  <a:srgbClr val="14140E"/>
+                </a:solidFill>
+                <a:latin typeface="Times New Roman" pitchFamily="34" charset="0"/>
+                <a:ea typeface="Times New Roman" pitchFamily="34" charset="-122"/>
+                <a:cs typeface="Times New Roman" pitchFamily="34" charset="-120"/>
+              </a:rPr>
+              <a:t>Storage</a:t>
+            </a:r>
+            <a:endParaRPr lang="en-US" sz="1700" dirty="0"/>
+          </a:p>
+        </p:txBody>
+      </p:sp>
+      <p:sp>
+        <p:nvSpPr>
+          <p:cNvPr id="15" name="Text 12"/>
+          <p:cNvSpPr txBox="1"/>
+          <p:nvPr/>
+        </p:nvSpPr>
+        <p:spPr>
+          <a:xfrm>
+            <a:off x="3657600" y="3548063"/>
+            <a:ext cx="4686300" cy="372904"/>
+          </a:xfrm>
+          <a:prstGeom prst="rect">
+            <a:avLst/>
+          </a:prstGeom>
+          <a:noFill/>
+          <a:ln/>
+        </p:spPr>
+        <p:txBody>
+          <a:bodyPr wrap="square" lIns="0" tIns="0" rIns="0" bIns="0" rtlCol="0" anchor="t"/>
+          <a:lstStyle/>
+          <a:p>
+            <a:pPr algn="l" indent="0" marL="0">
+              <a:buNone/>
+            </a:pPr>
+            <a:r>
+              <a:rPr lang="en-US" sz="1700" dirty="0">
+                <a:solidFill>
+                  <a:srgbClr val="6E6E63"/>
+                </a:solidFill>
+                <a:latin typeface="Times New Roman" pitchFamily="34" charset="0"/>
+                <a:ea typeface="Times New Roman" pitchFamily="34" charset="-122"/>
+                <a:cs typeface="Times New Roman" pitchFamily="34" charset="-120"/>
+              </a:rPr>
+              <a:t>change is proven, deletion is not prevented</a:t>
+            </a:r>
+            <a:endParaRPr lang="en-US" sz="1700" dirty="0"/>
+          </a:p>
+        </p:txBody>
+      </p:sp>
+      <p:sp>
+        <p:nvSpPr>
+          <p:cNvPr id="16" name="Text 13"/>
+          <p:cNvSpPr txBox="1"/>
+          <p:nvPr/>
+        </p:nvSpPr>
+        <p:spPr>
+          <a:xfrm>
+            <a:off x="800100" y="3852863"/>
+            <a:ext cx="2705100" cy="372904"/>
+          </a:xfrm>
+          <a:prstGeom prst="rect">
+            <a:avLst/>
+          </a:prstGeom>
+          <a:noFill/>
+          <a:ln/>
+        </p:spPr>
+        <p:txBody>
+          <a:bodyPr wrap="square" lIns="0" tIns="0" rIns="0" bIns="0" rtlCol="0" anchor="t"/>
+          <a:lstStyle/>
+          <a:p>
+            <a:pPr algn="l" indent="0" marL="0">
+              <a:buNone/>
+            </a:pPr>
+            <a:r>
+              <a:rPr lang="en-US" sz="1700" b="1" dirty="0">
+                <a:solidFill>
+                  <a:srgbClr val="14140E"/>
+                </a:solidFill>
+                <a:latin typeface="Times New Roman" pitchFamily="34" charset="0"/>
+                <a:ea typeface="Times New Roman" pitchFamily="34" charset="-122"/>
+                <a:cs typeface="Times New Roman" pitchFamily="34" charset="-120"/>
+              </a:rPr>
+              <a:t>Bulk compromise</a:t>
+            </a:r>
+            <a:endParaRPr lang="en-US" sz="1700" dirty="0"/>
+          </a:p>
+        </p:txBody>
+      </p:sp>
+      <p:sp>
+        <p:nvSpPr>
+          <p:cNvPr id="17" name="Text 14"/>
+          <p:cNvSpPr txBox="1"/>
+          <p:nvPr/>
+        </p:nvSpPr>
+        <p:spPr>
+          <a:xfrm>
+            <a:off x="3657600" y="3871913"/>
+            <a:ext cx="4686300" cy="372904"/>
+          </a:xfrm>
+          <a:prstGeom prst="rect">
+            <a:avLst/>
+          </a:prstGeom>
+          <a:noFill/>
+          <a:ln/>
+        </p:spPr>
+        <p:txBody>
+          <a:bodyPr wrap="square" lIns="0" tIns="0" rIns="0" bIns="0" rtlCol="0" anchor="t"/>
+          <a:lstStyle/>
+          <a:p>
+            <a:pPr algn="l" indent="0" marL="0">
+              <a:buNone/>
+            </a:pPr>
+            <a:r>
+              <a:rPr lang="en-US" sz="1700" dirty="0">
+                <a:solidFill>
+                  <a:srgbClr val="6E6E63"/>
+                </a:solidFill>
+                <a:latin typeface="Times New Roman" pitchFamily="34" charset="0"/>
+                <a:ea typeface="Times New Roman" pitchFamily="34" charset="-122"/>
+                <a:cs typeface="Times New Roman" pitchFamily="34" charset="-120"/>
+              </a:rPr>
+              <a:t>single edits are caught, a full rewrite is not</a:t>
             </a:r>
             <a:endParaRPr lang="en-US" sz="1700" dirty="0"/>
           </a:p>
@@ -3148,7 +3332,7 @@
                 <a:ea typeface="Times New Roman" pitchFamily="34" charset="-122"/>
                 <a:cs typeface="Times New Roman" pitchFamily="34" charset="-120"/>
               </a:rPr>
-              <a:t>What we did not solve</a:t>
+              <a:t>If asked</a:t>
             </a:r>
             <a:endParaRPr lang="en-US" sz="1150" dirty="0"/>
           </a:p>
@@ -3188,623 +3372,6 @@
                 <a:cs typeface="Times New Roman" pitchFamily="34" charset="-120"/>
               </a:rPr>
               <a:t>12</a:t>
-            </a:r>
-            <a:endParaRPr lang="en-US" sz="1050" dirty="0"/>
-          </a:p>
-        </p:txBody>
-      </p:sp>
-      <p:sp>
-        <p:nvSpPr>
-          <p:cNvPr id="5" name="Text 2"/>
-          <p:cNvSpPr txBox="1"/>
-          <p:nvPr/>
-        </p:nvSpPr>
-        <p:spPr>
-          <a:xfrm>
-            <a:off x="800100" y="1519238"/>
-            <a:ext cx="7543800" cy="578644"/>
-          </a:xfrm>
-          <a:prstGeom prst="rect">
-            <a:avLst/>
-          </a:prstGeom>
-          <a:noFill/>
-          <a:ln/>
-        </p:spPr>
-        <p:txBody>
-          <a:bodyPr wrap="square" lIns="0" tIns="0" rIns="0" bIns="0" rtlCol="0" anchor="t"/>
-          <a:lstStyle/>
-          <a:p>
-            <a:pPr algn="l" indent="0" marL="0">
-              <a:buNone/>
-            </a:pPr>
-            <a:r>
-              <a:rPr lang="en-US" sz="3600" b="1" dirty="0">
-                <a:solidFill>
-                  <a:srgbClr val="14140E"/>
-                </a:solidFill>
-                <a:latin typeface="Times New Roman" pitchFamily="34" charset="0"/>
-                <a:ea typeface="Times New Roman" pitchFamily="34" charset="-122"/>
-                <a:cs typeface="Times New Roman" pitchFamily="34" charset="-120"/>
-              </a:rPr>
-              <a:t>Honest limits</a:t>
-            </a:r>
-            <a:endParaRPr lang="en-US" sz="3600" dirty="0"/>
-          </a:p>
-        </p:txBody>
-      </p:sp>
-      <p:sp>
-        <p:nvSpPr>
-          <p:cNvPr id="6" name="Text 3"/>
-          <p:cNvSpPr txBox="1"/>
-          <p:nvPr/>
-        </p:nvSpPr>
-        <p:spPr>
-          <a:xfrm>
-            <a:off x="800100" y="2233613"/>
-            <a:ext cx="2705100" cy="372904"/>
-          </a:xfrm>
-          <a:prstGeom prst="rect">
-            <a:avLst/>
-          </a:prstGeom>
-          <a:noFill/>
-          <a:ln/>
-        </p:spPr>
-        <p:txBody>
-          <a:bodyPr wrap="square" lIns="0" tIns="0" rIns="0" bIns="0" rtlCol="0" anchor="t"/>
-          <a:lstStyle/>
-          <a:p>
-            <a:pPr algn="l" indent="0" marL="0">
-              <a:buNone/>
-            </a:pPr>
-            <a:r>
-              <a:rPr lang="en-US" sz="1700" b="1" dirty="0">
-                <a:solidFill>
-                  <a:srgbClr val="14140E"/>
-                </a:solidFill>
-                <a:latin typeface="Times New Roman" pitchFamily="34" charset="0"/>
-                <a:ea typeface="Times New Roman" pitchFamily="34" charset="-122"/>
-                <a:cs typeface="Times New Roman" pitchFamily="34" charset="-120"/>
-              </a:rPr>
-              <a:t>A corrupt collector</a:t>
-            </a:r>
-            <a:endParaRPr lang="en-US" sz="1700" dirty="0"/>
-          </a:p>
-        </p:txBody>
-      </p:sp>
-      <p:sp>
-        <p:nvSpPr>
-          <p:cNvPr id="7" name="Text 4"/>
-          <p:cNvSpPr txBox="1"/>
-          <p:nvPr/>
-        </p:nvSpPr>
-        <p:spPr>
-          <a:xfrm>
-            <a:off x="3657600" y="2252663"/>
-            <a:ext cx="4686300" cy="372904"/>
-          </a:xfrm>
-          <a:prstGeom prst="rect">
-            <a:avLst/>
-          </a:prstGeom>
-          <a:noFill/>
-          <a:ln/>
-        </p:spPr>
-        <p:txBody>
-          <a:bodyPr wrap="square" lIns="0" tIns="0" rIns="0" bIns="0" rtlCol="0" anchor="t"/>
-          <a:lstStyle/>
-          <a:p>
-            <a:pPr algn="l" indent="0" marL="0">
-              <a:buNone/>
-            </a:pPr>
-            <a:r>
-              <a:rPr lang="en-US" sz="1700" dirty="0">
-                <a:solidFill>
-                  <a:srgbClr val="6E6E63"/>
-                </a:solidFill>
-                <a:latin typeface="Times New Roman" pitchFamily="34" charset="0"/>
-                <a:ea typeface="Times New Roman" pitchFamily="34" charset="-122"/>
-                <a:cs typeface="Times New Roman" pitchFamily="34" charset="-120"/>
-              </a:rPr>
-              <a:t>protected from collection onward, not before it</a:t>
-            </a:r>
-            <a:endParaRPr lang="en-US" sz="1700" dirty="0"/>
-          </a:p>
-        </p:txBody>
-      </p:sp>
-      <p:sp>
-        <p:nvSpPr>
-          <p:cNvPr id="8" name="Text 5"/>
-          <p:cNvSpPr txBox="1"/>
-          <p:nvPr/>
-        </p:nvSpPr>
-        <p:spPr>
-          <a:xfrm>
-            <a:off x="800100" y="2557463"/>
-            <a:ext cx="2705100" cy="372904"/>
-          </a:xfrm>
-          <a:prstGeom prst="rect">
-            <a:avLst/>
-          </a:prstGeom>
-          <a:noFill/>
-          <a:ln/>
-        </p:spPr>
-        <p:txBody>
-          <a:bodyPr wrap="square" lIns="0" tIns="0" rIns="0" bIns="0" rtlCol="0" anchor="t"/>
-          <a:lstStyle/>
-          <a:p>
-            <a:pPr algn="l" indent="0" marL="0">
-              <a:buNone/>
-            </a:pPr>
-            <a:r>
-              <a:rPr lang="en-US" sz="1700" b="1" dirty="0">
-                <a:solidFill>
-                  <a:srgbClr val="14140E"/>
-                </a:solidFill>
-                <a:latin typeface="Times New Roman" pitchFamily="34" charset="0"/>
-                <a:ea typeface="Times New Roman" pitchFamily="34" charset="-122"/>
-                <a:cs typeface="Times New Roman" pitchFamily="34" charset="-120"/>
-              </a:rPr>
-              <a:t>The device clock</a:t>
-            </a:r>
-            <a:endParaRPr lang="en-US" sz="1700" dirty="0"/>
-          </a:p>
-        </p:txBody>
-      </p:sp>
-      <p:sp>
-        <p:nvSpPr>
-          <p:cNvPr id="9" name="Text 6"/>
-          <p:cNvSpPr txBox="1"/>
-          <p:nvPr/>
-        </p:nvSpPr>
-        <p:spPr>
-          <a:xfrm>
-            <a:off x="3657600" y="2576513"/>
-            <a:ext cx="4686300" cy="372904"/>
-          </a:xfrm>
-          <a:prstGeom prst="rect">
-            <a:avLst/>
-          </a:prstGeom>
-          <a:noFill/>
-          <a:ln/>
-        </p:spPr>
-        <p:txBody>
-          <a:bodyPr wrap="square" lIns="0" tIns="0" rIns="0" bIns="0" rtlCol="0" anchor="t"/>
-          <a:lstStyle/>
-          <a:p>
-            <a:pPr algn="l" indent="0" marL="0">
-              <a:buNone/>
-            </a:pPr>
-            <a:r>
-              <a:rPr lang="en-US" sz="1700" dirty="0">
-                <a:solidFill>
-                  <a:srgbClr val="6E6E63"/>
-                </a:solidFill>
-                <a:latin typeface="Times New Roman" pitchFamily="34" charset="0"/>
-                <a:ea typeface="Times New Roman" pitchFamily="34" charset="-122"/>
-                <a:cs typeface="Times New Roman" pitchFamily="34" charset="-120"/>
-              </a:rPr>
-              <a:t>both clocks shown, the phone's not vouched for</a:t>
-            </a:r>
-            <a:endParaRPr lang="en-US" sz="1700" dirty="0"/>
-          </a:p>
-        </p:txBody>
-      </p:sp>
-      <p:sp>
-        <p:nvSpPr>
-          <p:cNvPr id="10" name="Text 7"/>
-          <p:cNvSpPr txBox="1"/>
-          <p:nvPr/>
-        </p:nvSpPr>
-        <p:spPr>
-          <a:xfrm>
-            <a:off x="800100" y="2881313"/>
-            <a:ext cx="2705100" cy="372904"/>
-          </a:xfrm>
-          <a:prstGeom prst="rect">
-            <a:avLst/>
-          </a:prstGeom>
-          <a:noFill/>
-          <a:ln/>
-        </p:spPr>
-        <p:txBody>
-          <a:bodyPr wrap="square" lIns="0" tIns="0" rIns="0" bIns="0" rtlCol="0" anchor="t"/>
-          <a:lstStyle/>
-          <a:p>
-            <a:pPr algn="l" indent="0" marL="0">
-              <a:buNone/>
-            </a:pPr>
-            <a:r>
-              <a:rPr lang="en-US" sz="1700" b="1" dirty="0">
-                <a:solidFill>
-                  <a:srgbClr val="14140E"/>
-                </a:solidFill>
-                <a:latin typeface="Times New Roman" pitchFamily="34" charset="0"/>
-                <a:ea typeface="Times New Roman" pitchFamily="34" charset="-122"/>
-                <a:cs typeface="Times New Roman" pitchFamily="34" charset="-120"/>
-              </a:rPr>
-              <a:t>Scale</a:t>
-            </a:r>
-            <a:endParaRPr lang="en-US" sz="1700" dirty="0"/>
-          </a:p>
-        </p:txBody>
-      </p:sp>
-      <p:sp>
-        <p:nvSpPr>
-          <p:cNvPr id="11" name="Text 8"/>
-          <p:cNvSpPr txBox="1"/>
-          <p:nvPr/>
-        </p:nvSpPr>
-        <p:spPr>
-          <a:xfrm>
-            <a:off x="3657600" y="2900363"/>
-            <a:ext cx="4686300" cy="372904"/>
-          </a:xfrm>
-          <a:prstGeom prst="rect">
-            <a:avLst/>
-          </a:prstGeom>
-          <a:noFill/>
-          <a:ln/>
-        </p:spPr>
-        <p:txBody>
-          <a:bodyPr wrap="square" lIns="0" tIns="0" rIns="0" bIns="0" rtlCol="0" anchor="t"/>
-          <a:lstStyle/>
-          <a:p>
-            <a:pPr algn="l" indent="0" marL="0">
-              <a:buNone/>
-            </a:pPr>
-            <a:r>
-              <a:rPr lang="en-US" sz="1700" dirty="0">
-                <a:solidFill>
-                  <a:srgbClr val="6E6E63"/>
-                </a:solidFill>
-                <a:latin typeface="Times New Roman" pitchFamily="34" charset="0"/>
-                <a:ea typeface="Times New Roman" pitchFamily="34" charset="-122"/>
-                <a:cs typeface="Times New Roman" pitchFamily="34" charset="-120"/>
-              </a:rPr>
-              <a:t>tested at 30MB, extrapolated, not a real extraction</a:t>
-            </a:r>
-            <a:endParaRPr lang="en-US" sz="1700" dirty="0"/>
-          </a:p>
-        </p:txBody>
-      </p:sp>
-      <p:sp>
-        <p:nvSpPr>
-          <p:cNvPr id="12" name="Text 9"/>
-          <p:cNvSpPr txBox="1"/>
-          <p:nvPr/>
-        </p:nvSpPr>
-        <p:spPr>
-          <a:xfrm>
-            <a:off x="800100" y="3205163"/>
-            <a:ext cx="2705100" cy="372904"/>
-          </a:xfrm>
-          <a:prstGeom prst="rect">
-            <a:avLst/>
-          </a:prstGeom>
-          <a:noFill/>
-          <a:ln/>
-        </p:spPr>
-        <p:txBody>
-          <a:bodyPr wrap="square" lIns="0" tIns="0" rIns="0" bIns="0" rtlCol="0" anchor="t"/>
-          <a:lstStyle/>
-          <a:p>
-            <a:pPr algn="l" indent="0" marL="0">
-              <a:buNone/>
-            </a:pPr>
-            <a:r>
-              <a:rPr lang="en-US" sz="1700" b="1" dirty="0">
-                <a:solidFill>
-                  <a:srgbClr val="14140E"/>
-                </a:solidFill>
-                <a:latin typeface="Times New Roman" pitchFamily="34" charset="0"/>
-                <a:ea typeface="Times New Roman" pitchFamily="34" charset="-122"/>
-                <a:cs typeface="Times New Roman" pitchFamily="34" charset="-120"/>
-              </a:rPr>
-              <a:t>Per officer signing</a:t>
-            </a:r>
-            <a:endParaRPr lang="en-US" sz="1700" dirty="0"/>
-          </a:p>
-        </p:txBody>
-      </p:sp>
-      <p:sp>
-        <p:nvSpPr>
-          <p:cNvPr id="13" name="Text 10"/>
-          <p:cNvSpPr txBox="1"/>
-          <p:nvPr/>
-        </p:nvSpPr>
-        <p:spPr>
-          <a:xfrm>
-            <a:off x="3657600" y="3224213"/>
-            <a:ext cx="4686300" cy="372904"/>
-          </a:xfrm>
-          <a:prstGeom prst="rect">
-            <a:avLst/>
-          </a:prstGeom>
-          <a:noFill/>
-          <a:ln/>
-        </p:spPr>
-        <p:txBody>
-          <a:bodyPr wrap="square" lIns="0" tIns="0" rIns="0" bIns="0" rtlCol="0" anchor="t"/>
-          <a:lstStyle/>
-          <a:p>
-            <a:pPr algn="l" indent="0" marL="0">
-              <a:buNone/>
-            </a:pPr>
-            <a:r>
-              <a:rPr lang="en-US" sz="1700" dirty="0">
-                <a:solidFill>
-                  <a:srgbClr val="6E6E63"/>
-                </a:solidFill>
-                <a:latin typeface="Times New Roman" pitchFamily="34" charset="0"/>
-                <a:ea typeface="Times New Roman" pitchFamily="34" charset="-122"/>
-                <a:cs typeface="Times New Roman" pitchFamily="34" charset="-120"/>
-              </a:rPr>
-              <a:t>tied to a login, not to a person's key</a:t>
-            </a:r>
-            <a:endParaRPr lang="en-US" sz="1700" dirty="0"/>
-          </a:p>
-        </p:txBody>
-      </p:sp>
-      <p:sp>
-        <p:nvSpPr>
-          <p:cNvPr id="14" name="Text 11"/>
-          <p:cNvSpPr txBox="1"/>
-          <p:nvPr/>
-        </p:nvSpPr>
-        <p:spPr>
-          <a:xfrm>
-            <a:off x="800100" y="3529013"/>
-            <a:ext cx="2705100" cy="372904"/>
-          </a:xfrm>
-          <a:prstGeom prst="rect">
-            <a:avLst/>
-          </a:prstGeom>
-          <a:noFill/>
-          <a:ln/>
-        </p:spPr>
-        <p:txBody>
-          <a:bodyPr wrap="square" lIns="0" tIns="0" rIns="0" bIns="0" rtlCol="0" anchor="t"/>
-          <a:lstStyle/>
-          <a:p>
-            <a:pPr algn="l" indent="0" marL="0">
-              <a:buNone/>
-            </a:pPr>
-            <a:r>
-              <a:rPr lang="en-US" sz="1700" b="1" dirty="0">
-                <a:solidFill>
-                  <a:srgbClr val="14140E"/>
-                </a:solidFill>
-                <a:latin typeface="Times New Roman" pitchFamily="34" charset="0"/>
-                <a:ea typeface="Times New Roman" pitchFamily="34" charset="-122"/>
-                <a:cs typeface="Times New Roman" pitchFamily="34" charset="-120"/>
-              </a:rPr>
-              <a:t>Storage</a:t>
-            </a:r>
-            <a:endParaRPr lang="en-US" sz="1700" dirty="0"/>
-          </a:p>
-        </p:txBody>
-      </p:sp>
-      <p:sp>
-        <p:nvSpPr>
-          <p:cNvPr id="15" name="Text 12"/>
-          <p:cNvSpPr txBox="1"/>
-          <p:nvPr/>
-        </p:nvSpPr>
-        <p:spPr>
-          <a:xfrm>
-            <a:off x="3657600" y="3548063"/>
-            <a:ext cx="4686300" cy="372904"/>
-          </a:xfrm>
-          <a:prstGeom prst="rect">
-            <a:avLst/>
-          </a:prstGeom>
-          <a:noFill/>
-          <a:ln/>
-        </p:spPr>
-        <p:txBody>
-          <a:bodyPr wrap="square" lIns="0" tIns="0" rIns="0" bIns="0" rtlCol="0" anchor="t"/>
-          <a:lstStyle/>
-          <a:p>
-            <a:pPr algn="l" indent="0" marL="0">
-              <a:buNone/>
-            </a:pPr>
-            <a:r>
-              <a:rPr lang="en-US" sz="1700" dirty="0">
-                <a:solidFill>
-                  <a:srgbClr val="6E6E63"/>
-                </a:solidFill>
-                <a:latin typeface="Times New Roman" pitchFamily="34" charset="0"/>
-                <a:ea typeface="Times New Roman" pitchFamily="34" charset="-122"/>
-                <a:cs typeface="Times New Roman" pitchFamily="34" charset="-120"/>
-              </a:rPr>
-              <a:t>change is proven, deletion is not prevented</a:t>
-            </a:r>
-            <a:endParaRPr lang="en-US" sz="1700" dirty="0"/>
-          </a:p>
-        </p:txBody>
-      </p:sp>
-      <p:sp>
-        <p:nvSpPr>
-          <p:cNvPr id="16" name="Text 13"/>
-          <p:cNvSpPr txBox="1"/>
-          <p:nvPr/>
-        </p:nvSpPr>
-        <p:spPr>
-          <a:xfrm>
-            <a:off x="800100" y="3852863"/>
-            <a:ext cx="2705100" cy="372904"/>
-          </a:xfrm>
-          <a:prstGeom prst="rect">
-            <a:avLst/>
-          </a:prstGeom>
-          <a:noFill/>
-          <a:ln/>
-        </p:spPr>
-        <p:txBody>
-          <a:bodyPr wrap="square" lIns="0" tIns="0" rIns="0" bIns="0" rtlCol="0" anchor="t"/>
-          <a:lstStyle/>
-          <a:p>
-            <a:pPr algn="l" indent="0" marL="0">
-              <a:buNone/>
-            </a:pPr>
-            <a:r>
-              <a:rPr lang="en-US" sz="1700" b="1" dirty="0">
-                <a:solidFill>
-                  <a:srgbClr val="14140E"/>
-                </a:solidFill>
-                <a:latin typeface="Times New Roman" pitchFamily="34" charset="0"/>
-                <a:ea typeface="Times New Roman" pitchFamily="34" charset="-122"/>
-                <a:cs typeface="Times New Roman" pitchFamily="34" charset="-120"/>
-              </a:rPr>
-              <a:t>Bulk compromise</a:t>
-            </a:r>
-            <a:endParaRPr lang="en-US" sz="1700" dirty="0"/>
-          </a:p>
-        </p:txBody>
-      </p:sp>
-      <p:sp>
-        <p:nvSpPr>
-          <p:cNvPr id="17" name="Text 14"/>
-          <p:cNvSpPr txBox="1"/>
-          <p:nvPr/>
-        </p:nvSpPr>
-        <p:spPr>
-          <a:xfrm>
-            <a:off x="3657600" y="3871913"/>
-            <a:ext cx="4686300" cy="372904"/>
-          </a:xfrm>
-          <a:prstGeom prst="rect">
-            <a:avLst/>
-          </a:prstGeom>
-          <a:noFill/>
-          <a:ln/>
-        </p:spPr>
-        <p:txBody>
-          <a:bodyPr wrap="square" lIns="0" tIns="0" rIns="0" bIns="0" rtlCol="0" anchor="t"/>
-          <a:lstStyle/>
-          <a:p>
-            <a:pPr algn="l" indent="0" marL="0">
-              <a:buNone/>
-            </a:pPr>
-            <a:r>
-              <a:rPr lang="en-US" sz="1700" dirty="0">
-                <a:solidFill>
-                  <a:srgbClr val="6E6E63"/>
-                </a:solidFill>
-                <a:latin typeface="Times New Roman" pitchFamily="34" charset="0"/>
-                <a:ea typeface="Times New Roman" pitchFamily="34" charset="-122"/>
-                <a:cs typeface="Times New Roman" pitchFamily="34" charset="-120"/>
-              </a:rPr>
-              <a:t>single edits are caught, a full rewrite is not</a:t>
-            </a:r>
-            <a:endParaRPr lang="en-US" sz="1700" dirty="0"/>
-          </a:p>
-        </p:txBody>
-      </p:sp>
-    </p:spTree>
-  </p:cSld>
-  <p:clrMapOvr>
-    <a:masterClrMapping/>
-  </p:clrMapOvr>
-</p:sld>
-</file>
-
-<file path=ppt/slides/slide13.xml><?xml version="1.0" encoding="utf-8"?>
-<p:sld xmlns:a="http://schemas.openxmlformats.org/drawingml/2006/main" xmlns:r="http://schemas.openxmlformats.org/officeDocument/2006/relationships" xmlns:p="http://schemas.openxmlformats.org/presentationml/2006/main">
-  <p:cSld name="Slide 13">
-    <p:bg>
-      <p:bgPr>
-        <a:solidFill>
-          <a:srgbClr val="FCFCF9"/>
-        </a:solidFill>
-      </p:bgPr>
-    </p:bg>
-    <p:spTree>
-      <p:nvGrpSpPr>
-        <p:cNvPr id="1" name=""/>
-        <p:cNvGrpSpPr/>
-        <p:nvPr/>
-      </p:nvGrpSpPr>
-      <p:grpSpPr>
-        <a:xfrm>
-          <a:off x="0" y="0"/>
-          <a:ext cx="0" cy="0"/>
-          <a:chOff x="0" y="0"/>
-          <a:chExt cx="0" cy="0"/>
-        </a:xfrm>
-      </p:grpSpPr>
-      <p:sp>
-        <p:nvSpPr>
-          <p:cNvPr id="3" name="Text 0"/>
-          <p:cNvSpPr txBox="1"/>
-          <p:nvPr/>
-        </p:nvSpPr>
-        <p:spPr>
-          <a:xfrm>
-            <a:off x="800100" y="571500"/>
-            <a:ext cx="7543800" cy="205740"/>
-          </a:xfrm>
-          <a:prstGeom prst="rect">
-            <a:avLst/>
-          </a:prstGeom>
-          <a:noFill/>
-          <a:ln/>
-        </p:spPr>
-        <p:txBody>
-          <a:bodyPr wrap="square" lIns="0" tIns="0" rIns="0" bIns="0" rtlCol="0" anchor="t"/>
-          <a:lstStyle/>
-          <a:p>
-            <a:pPr algn="l" indent="0" marL="0">
-              <a:buNone/>
-            </a:pPr>
-            <a:r>
-              <a:rPr lang="en-US" sz="1150" spc="110" kern="0" dirty="0">
-                <a:solidFill>
-                  <a:srgbClr val="6E6E63"/>
-                </a:solidFill>
-                <a:latin typeface="Times New Roman" pitchFamily="34" charset="0"/>
-                <a:ea typeface="Times New Roman" pitchFamily="34" charset="-122"/>
-                <a:cs typeface="Times New Roman" pitchFamily="34" charset="-120"/>
-              </a:rPr>
-              <a:t>If asked</a:t>
-            </a:r>
-            <a:endParaRPr lang="en-US" sz="1150" dirty="0"/>
-          </a:p>
-        </p:txBody>
-      </p:sp>
-      <p:sp>
-        <p:nvSpPr>
-          <p:cNvPr id="4" name="Text 1"/>
-          <p:cNvSpPr txBox="1"/>
-          <p:nvPr/>
-        </p:nvSpPr>
-        <p:spPr>
-          <a:xfrm>
-            <a:off x="7962900" y="4648200"/>
-            <a:ext cx="381000" cy="171450"/>
-          </a:xfrm>
-          <a:prstGeom prst="rect">
-            <a:avLst/>
-          </a:prstGeom>
-          <a:noFill/>
-          <a:ln/>
-        </p:spPr>
-        <p:txBody>
-          <a:bodyPr wrap="square" lIns="0" tIns="0" rIns="0" bIns="0" rtlCol="0" anchor="t"/>
-          <a:lstStyle/>
-          <a:p>
-            <a:pPr algn="r" indent="0" marL="0">
-              <a:buNone/>
-            </a:pPr>
-            <a:r>
-              <a:rPr lang="en-US" sz="1050" dirty="0">
-                <a:solidFill>
-                  <a:srgbClr val="9A9A90"/>
-                </a:solidFill>
-                <a:latin typeface="Times New Roman" pitchFamily="34" charset="0"/>
-                <a:ea typeface="Times New Roman" pitchFamily="34" charset="-122"/>
-                <a:cs typeface="Times New Roman" pitchFamily="34" charset="-120"/>
-              </a:rPr>
-              <a:t>13</a:t>
             </a:r>
             <a:endParaRPr lang="en-US" sz="1050" dirty="0"/>
           </a:p>
